--- a/Lectures/Lecture3-Data.pptx
+++ b/Lectures/Lecture3-Data.pptx
@@ -5,38 +5,40 @@
     <p:sldMasterId id="2147483648" r:id="rId1"/>
   </p:sldMasterIdLst>
   <p:notesMasterIdLst>
-    <p:notesMasterId r:id="rId28"/>
+    <p:notesMasterId r:id="rId27"/>
   </p:notesMasterIdLst>
   <p:sldIdLst>
     <p:sldId id="256" r:id="rId2"/>
     <p:sldId id="281" r:id="rId3"/>
-    <p:sldId id="297" r:id="rId4"/>
-    <p:sldId id="270" r:id="rId5"/>
-    <p:sldId id="304" r:id="rId6"/>
-    <p:sldId id="299" r:id="rId7"/>
-    <p:sldId id="300" r:id="rId8"/>
-    <p:sldId id="301" r:id="rId9"/>
-    <p:sldId id="295" r:id="rId10"/>
-    <p:sldId id="282" r:id="rId11"/>
-    <p:sldId id="285" r:id="rId12"/>
-    <p:sldId id="283" r:id="rId13"/>
-    <p:sldId id="260" r:id="rId14"/>
-    <p:sldId id="303" r:id="rId15"/>
-    <p:sldId id="261" r:id="rId16"/>
-    <p:sldId id="287" r:id="rId17"/>
-    <p:sldId id="262" r:id="rId18"/>
-    <p:sldId id="288" r:id="rId19"/>
-    <p:sldId id="289" r:id="rId20"/>
-    <p:sldId id="290" r:id="rId21"/>
-    <p:sldId id="280" r:id="rId22"/>
-    <p:sldId id="291" r:id="rId23"/>
-    <p:sldId id="293" r:id="rId24"/>
-    <p:sldId id="296" r:id="rId25"/>
-    <p:sldId id="302" r:id="rId26"/>
-    <p:sldId id="298" r:id="rId27"/>
+    <p:sldId id="270" r:id="rId4"/>
+    <p:sldId id="299" r:id="rId5"/>
+    <p:sldId id="301" r:id="rId6"/>
+    <p:sldId id="295" r:id="rId7"/>
+    <p:sldId id="282" r:id="rId8"/>
+    <p:sldId id="285" r:id="rId9"/>
+    <p:sldId id="283" r:id="rId10"/>
+    <p:sldId id="260" r:id="rId11"/>
+    <p:sldId id="304" r:id="rId12"/>
+    <p:sldId id="303" r:id="rId13"/>
+    <p:sldId id="261" r:id="rId14"/>
+    <p:sldId id="306" r:id="rId15"/>
+    <p:sldId id="287" r:id="rId16"/>
+    <p:sldId id="262" r:id="rId17"/>
+    <p:sldId id="288" r:id="rId18"/>
+    <p:sldId id="289" r:id="rId19"/>
+    <p:sldId id="290" r:id="rId20"/>
+    <p:sldId id="280" r:id="rId21"/>
+    <p:sldId id="291" r:id="rId22"/>
+    <p:sldId id="293" r:id="rId23"/>
+    <p:sldId id="296" r:id="rId24"/>
+    <p:sldId id="302" r:id="rId25"/>
+    <p:sldId id="305" r:id="rId26"/>
   </p:sldIdLst>
   <p:sldSz cx="12192000" cy="6858000"/>
   <p:notesSz cx="6858000" cy="9144000"/>
+  <p:custDataLst>
+    <p:tags r:id="rId28"/>
+  </p:custDataLst>
   <p:defaultTextStyle>
     <a:defPPr marR="0" lvl="0" algn="l" rtl="0">
       <a:lnSpc>
@@ -271,7 +273,7 @@
       <p15:sldGuideLst xmlns:p15="http://schemas.microsoft.com/office/powerpoint/2012/main"/>
     </p:ext>
     <p:ext uri="http://customooxmlschemas.google.com/">
-      <go:slidesCustomData xmlns="" xmlns:mc="http://schemas.openxmlformats.org/markup-compatibility/2006" xmlns:mv="urn:schemas-microsoft-com:mac:vml" xmlns:c="http://schemas.openxmlformats.org/drawingml/2006/chart" xmlns:dgm="http://schemas.openxmlformats.org/drawingml/2006/diagram" xmlns:o="urn:schemas-microsoft-com:office:office" xmlns:v="urn:schemas-microsoft-com:vml" xmlns:pvml="urn:schemas-microsoft-com:office:powerpoint" xmlns:com="http://schemas.openxmlformats.org/drawingml/2006/compatibility" xmlns:p14="http://schemas.microsoft.com/office/powerpoint/2010/main" xmlns:p15="http://schemas.microsoft.com/office/powerpoint/2012/main" xmlns:go="http://customooxmlschemas.google.com/" r:id="rId33" roundtripDataSignature="AMtx7mjFyVUGRZWio+dc9dxzYsimUxNJbg=="/>
+      <go:slidesCustomData xmlns:go="http://customooxmlschemas.google.com/" xmlns:p15="http://schemas.microsoft.com/office/powerpoint/2012/main" xmlns:p14="http://schemas.microsoft.com/office/powerpoint/2010/main" xmlns:com="http://schemas.openxmlformats.org/drawingml/2006/compatibility" xmlns:pvml="urn:schemas-microsoft-com:office:powerpoint" xmlns:v="urn:schemas-microsoft-com:vml" xmlns:o="urn:schemas-microsoft-com:office:office" xmlns:dgm="http://schemas.openxmlformats.org/drawingml/2006/diagram" xmlns:c="http://schemas.openxmlformats.org/drawingml/2006/chart" xmlns:mv="urn:schemas-microsoft-com:mac:vml" xmlns:mc="http://schemas.openxmlformats.org/markup-compatibility/2006" xmlns="" r:id="rId33" roundtripDataSignature="AMtx7mjFyVUGRZWio+dc9dxzYsimUxNJbg=="/>
     </p:ext>
   </p:extLst>
 </p:presentation>
@@ -1196,2173 +1198,7 @@
 </dgm:colorsDef>
 </file>
 
-<file path=ppt/diagrams/colors2.xml><?xml version="1.0" encoding="utf-8"?>
-<dgm:colorsDef xmlns:dgm="http://schemas.openxmlformats.org/drawingml/2006/diagram" xmlns:a="http://schemas.openxmlformats.org/drawingml/2006/main" uniqueId="urn:microsoft.com/office/officeart/2005/8/colors/colorful1">
-  <dgm:title val=""/>
-  <dgm:desc val=""/>
-  <dgm:catLst>
-    <dgm:cat type="colorful" pri="10100"/>
-  </dgm:catLst>
-  <dgm:styleLbl name="node0">
-    <dgm:fillClrLst meth="repeat">
-      <a:schemeClr val="accent1"/>
-    </dgm:fillClrLst>
-    <dgm:linClrLst meth="repeat">
-      <a:schemeClr val="lt1"/>
-    </dgm:linClrLst>
-    <dgm:effectClrLst/>
-    <dgm:txLinClrLst/>
-    <dgm:txFillClrLst/>
-    <dgm:txEffectClrLst/>
-  </dgm:styleLbl>
-  <dgm:styleLbl name="node1">
-    <dgm:fillClrLst meth="repeat">
-      <a:schemeClr val="accent2"/>
-      <a:schemeClr val="accent3"/>
-      <a:schemeClr val="accent4"/>
-      <a:schemeClr val="accent5"/>
-      <a:schemeClr val="accent6"/>
-    </dgm:fillClrLst>
-    <dgm:linClrLst meth="repeat">
-      <a:schemeClr val="lt1"/>
-    </dgm:linClrLst>
-    <dgm:effectClrLst/>
-    <dgm:txLinClrLst/>
-    <dgm:txFillClrLst/>
-    <dgm:txEffectClrLst/>
-  </dgm:styleLbl>
-  <dgm:styleLbl name="alignNode1">
-    <dgm:fillClrLst meth="repeat">
-      <a:schemeClr val="accent2"/>
-      <a:schemeClr val="accent3"/>
-      <a:schemeClr val="accent4"/>
-      <a:schemeClr val="accent5"/>
-      <a:schemeClr val="accent6"/>
-    </dgm:fillClrLst>
-    <dgm:linClrLst meth="repeat">
-      <a:schemeClr val="accent2"/>
-      <a:schemeClr val="accent3"/>
-      <a:schemeClr val="accent4"/>
-      <a:schemeClr val="accent5"/>
-      <a:schemeClr val="accent6"/>
-    </dgm:linClrLst>
-    <dgm:effectClrLst/>
-    <dgm:txLinClrLst/>
-    <dgm:txFillClrLst/>
-    <dgm:txEffectClrLst/>
-  </dgm:styleLbl>
-  <dgm:styleLbl name="lnNode1">
-    <dgm:fillClrLst meth="repeat">
-      <a:schemeClr val="accent2"/>
-      <a:schemeClr val="accent3"/>
-      <a:schemeClr val="accent4"/>
-      <a:schemeClr val="accent5"/>
-      <a:schemeClr val="accent6"/>
-    </dgm:fillClrLst>
-    <dgm:linClrLst meth="repeat">
-      <a:schemeClr val="lt1"/>
-    </dgm:linClrLst>
-    <dgm:effectClrLst/>
-    <dgm:txLinClrLst/>
-    <dgm:txFillClrLst/>
-    <dgm:txEffectClrLst/>
-  </dgm:styleLbl>
-  <dgm:styleLbl name="vennNode1">
-    <dgm:fillClrLst meth="repeat">
-      <a:schemeClr val="accent2">
-        <a:alpha val="50000"/>
-      </a:schemeClr>
-      <a:schemeClr val="accent3">
-        <a:alpha val="50000"/>
-      </a:schemeClr>
-      <a:schemeClr val="accent4">
-        <a:alpha val="50000"/>
-      </a:schemeClr>
-      <a:schemeClr val="accent5">
-        <a:alpha val="50000"/>
-      </a:schemeClr>
-      <a:schemeClr val="accent6">
-        <a:alpha val="50000"/>
-      </a:schemeClr>
-    </dgm:fillClrLst>
-    <dgm:linClrLst meth="repeat">
-      <a:schemeClr val="lt1"/>
-    </dgm:linClrLst>
-    <dgm:effectClrLst/>
-    <dgm:txLinClrLst/>
-    <dgm:txFillClrLst/>
-    <dgm:txEffectClrLst/>
-  </dgm:styleLbl>
-  <dgm:styleLbl name="node2">
-    <dgm:fillClrLst>
-      <a:schemeClr val="accent2"/>
-    </dgm:fillClrLst>
-    <dgm:linClrLst meth="repeat">
-      <a:schemeClr val="lt1"/>
-    </dgm:linClrLst>
-    <dgm:effectClrLst/>
-    <dgm:txLinClrLst/>
-    <dgm:txFillClrLst/>
-    <dgm:txEffectClrLst/>
-  </dgm:styleLbl>
-  <dgm:styleLbl name="node3">
-    <dgm:fillClrLst>
-      <a:schemeClr val="accent3"/>
-    </dgm:fillClrLst>
-    <dgm:linClrLst meth="repeat">
-      <a:schemeClr val="lt1"/>
-    </dgm:linClrLst>
-    <dgm:effectClrLst/>
-    <dgm:txLinClrLst/>
-    <dgm:txFillClrLst/>
-    <dgm:txEffectClrLst/>
-  </dgm:styleLbl>
-  <dgm:styleLbl name="node4">
-    <dgm:fillClrLst>
-      <a:schemeClr val="accent4"/>
-    </dgm:fillClrLst>
-    <dgm:linClrLst meth="repeat">
-      <a:schemeClr val="lt1"/>
-    </dgm:linClrLst>
-    <dgm:effectClrLst/>
-    <dgm:txLinClrLst/>
-    <dgm:txFillClrLst/>
-    <dgm:txEffectClrLst/>
-  </dgm:styleLbl>
-  <dgm:styleLbl name="fgImgPlace1">
-    <dgm:fillClrLst meth="repeat">
-      <a:schemeClr val="accent2">
-        <a:tint val="50000"/>
-      </a:schemeClr>
-      <a:schemeClr val="accent3">
-        <a:tint val="50000"/>
-      </a:schemeClr>
-      <a:schemeClr val="accent4">
-        <a:tint val="50000"/>
-      </a:schemeClr>
-      <a:schemeClr val="accent5">
-        <a:tint val="50000"/>
-      </a:schemeClr>
-      <a:schemeClr val="accent6">
-        <a:tint val="50000"/>
-      </a:schemeClr>
-    </dgm:fillClrLst>
-    <dgm:linClrLst meth="repeat">
-      <a:schemeClr val="lt1"/>
-    </dgm:linClrLst>
-    <dgm:effectClrLst/>
-    <dgm:txLinClrLst/>
-    <dgm:txFillClrLst meth="repeat">
-      <a:schemeClr val="lt1"/>
-    </dgm:txFillClrLst>
-    <dgm:txEffectClrLst/>
-  </dgm:styleLbl>
-  <dgm:styleLbl name="alignImgPlace1">
-    <dgm:fillClrLst>
-      <a:schemeClr val="accent1">
-        <a:tint val="50000"/>
-      </a:schemeClr>
-      <a:schemeClr val="accent2">
-        <a:tint val="20000"/>
-      </a:schemeClr>
-    </dgm:fillClrLst>
-    <dgm:linClrLst meth="repeat">
-      <a:schemeClr val="lt1"/>
-    </dgm:linClrLst>
-    <dgm:effectClrLst/>
-    <dgm:txLinClrLst/>
-    <dgm:txFillClrLst meth="repeat">
-      <a:schemeClr val="lt1"/>
-    </dgm:txFillClrLst>
-    <dgm:txEffectClrLst/>
-  </dgm:styleLbl>
-  <dgm:styleLbl name="bgImgPlace1">
-    <dgm:fillClrLst>
-      <a:schemeClr val="accent1">
-        <a:tint val="50000"/>
-      </a:schemeClr>
-      <a:schemeClr val="accent2">
-        <a:tint val="20000"/>
-      </a:schemeClr>
-    </dgm:fillClrLst>
-    <dgm:linClrLst meth="repeat">
-      <a:schemeClr val="lt1"/>
-    </dgm:linClrLst>
-    <dgm:effectClrLst/>
-    <dgm:txLinClrLst/>
-    <dgm:txFillClrLst meth="repeat">
-      <a:schemeClr val="lt1"/>
-    </dgm:txFillClrLst>
-    <dgm:txEffectClrLst/>
-  </dgm:styleLbl>
-  <dgm:styleLbl name="sibTrans2D1">
-    <dgm:fillClrLst meth="repeat">
-      <a:schemeClr val="accent2"/>
-      <a:schemeClr val="accent3"/>
-      <a:schemeClr val="accent4"/>
-      <a:schemeClr val="accent5"/>
-      <a:schemeClr val="accent6"/>
-    </dgm:fillClrLst>
-    <dgm:linClrLst meth="cycle">
-      <a:schemeClr val="lt1"/>
-    </dgm:linClrLst>
-    <dgm:effectClrLst/>
-    <dgm:txLinClrLst/>
-    <dgm:txFillClrLst/>
-    <dgm:txEffectClrLst/>
-  </dgm:styleLbl>
-  <dgm:styleLbl name="fgSibTrans2D1">
-    <dgm:fillClrLst meth="repeat">
-      <a:schemeClr val="accent2"/>
-      <a:schemeClr val="accent3"/>
-      <a:schemeClr val="accent4"/>
-      <a:schemeClr val="accent5"/>
-      <a:schemeClr val="accent6"/>
-    </dgm:fillClrLst>
-    <dgm:linClrLst meth="cycle">
-      <a:schemeClr val="lt1"/>
-    </dgm:linClrLst>
-    <dgm:effectClrLst/>
-    <dgm:txLinClrLst/>
-    <dgm:txFillClrLst meth="repeat">
-      <a:schemeClr val="lt1"/>
-    </dgm:txFillClrLst>
-    <dgm:txEffectClrLst/>
-  </dgm:styleLbl>
-  <dgm:styleLbl name="bgSibTrans2D1">
-    <dgm:fillClrLst meth="repeat">
-      <a:schemeClr val="accent2"/>
-      <a:schemeClr val="accent3"/>
-      <a:schemeClr val="accent4"/>
-      <a:schemeClr val="accent5"/>
-      <a:schemeClr val="accent6"/>
-    </dgm:fillClrLst>
-    <dgm:linClrLst meth="cycle">
-      <a:schemeClr val="lt1"/>
-    </dgm:linClrLst>
-    <dgm:effectClrLst/>
-    <dgm:txLinClrLst/>
-    <dgm:txFillClrLst meth="repeat">
-      <a:schemeClr val="lt1"/>
-    </dgm:txFillClrLst>
-    <dgm:txEffectClrLst/>
-  </dgm:styleLbl>
-  <dgm:styleLbl name="sibTrans1D1">
-    <dgm:fillClrLst meth="repeat">
-      <a:schemeClr val="accent2"/>
-      <a:schemeClr val="accent3"/>
-      <a:schemeClr val="accent4"/>
-      <a:schemeClr val="accent5"/>
-      <a:schemeClr val="accent6"/>
-    </dgm:fillClrLst>
-    <dgm:linClrLst meth="repeat">
-      <a:schemeClr val="accent2"/>
-      <a:schemeClr val="accent3"/>
-      <a:schemeClr val="accent4"/>
-      <a:schemeClr val="accent5"/>
-      <a:schemeClr val="accent6"/>
-    </dgm:linClrLst>
-    <dgm:effectClrLst/>
-    <dgm:txLinClrLst/>
-    <dgm:txFillClrLst meth="repeat">
-      <a:schemeClr val="tx1"/>
-    </dgm:txFillClrLst>
-    <dgm:txEffectClrLst/>
-  </dgm:styleLbl>
-  <dgm:styleLbl name="callout">
-    <dgm:fillClrLst meth="repeat">
-      <a:schemeClr val="accent2"/>
-    </dgm:fillClrLst>
-    <dgm:linClrLst meth="repeat">
-      <a:schemeClr val="accent2">
-        <a:tint val="50000"/>
-      </a:schemeClr>
-    </dgm:linClrLst>
-    <dgm:effectClrLst/>
-    <dgm:txLinClrLst/>
-    <dgm:txFillClrLst meth="repeat">
-      <a:schemeClr val="tx1"/>
-    </dgm:txFillClrLst>
-    <dgm:txEffectClrLst/>
-  </dgm:styleLbl>
-  <dgm:styleLbl name="asst0">
-    <dgm:fillClrLst meth="repeat">
-      <a:schemeClr val="accent1"/>
-    </dgm:fillClrLst>
-    <dgm:linClrLst meth="repeat">
-      <a:schemeClr val="lt1"/>
-    </dgm:linClrLst>
-    <dgm:effectClrLst/>
-    <dgm:txLinClrLst/>
-    <dgm:txFillClrLst/>
-    <dgm:txEffectClrLst/>
-  </dgm:styleLbl>
-  <dgm:styleLbl name="asst1">
-    <dgm:fillClrLst meth="repeat">
-      <a:schemeClr val="accent2"/>
-    </dgm:fillClrLst>
-    <dgm:linClrLst meth="repeat">
-      <a:schemeClr val="lt1"/>
-    </dgm:linClrLst>
-    <dgm:effectClrLst/>
-    <dgm:txLinClrLst/>
-    <dgm:txFillClrLst/>
-    <dgm:txEffectClrLst/>
-  </dgm:styleLbl>
-  <dgm:styleLbl name="asst2">
-    <dgm:fillClrLst>
-      <a:schemeClr val="accent3"/>
-    </dgm:fillClrLst>
-    <dgm:linClrLst meth="repeat">
-      <a:schemeClr val="lt1"/>
-    </dgm:linClrLst>
-    <dgm:effectClrLst/>
-    <dgm:txLinClrLst/>
-    <dgm:txFillClrLst/>
-    <dgm:txEffectClrLst/>
-  </dgm:styleLbl>
-  <dgm:styleLbl name="asst3">
-    <dgm:fillClrLst>
-      <a:schemeClr val="accent4"/>
-    </dgm:fillClrLst>
-    <dgm:linClrLst meth="repeat">
-      <a:schemeClr val="lt1"/>
-    </dgm:linClrLst>
-    <dgm:effectClrLst/>
-    <dgm:txLinClrLst/>
-    <dgm:txFillClrLst/>
-    <dgm:txEffectClrLst/>
-  </dgm:styleLbl>
-  <dgm:styleLbl name="asst4">
-    <dgm:fillClrLst>
-      <a:schemeClr val="accent5"/>
-    </dgm:fillClrLst>
-    <dgm:linClrLst meth="repeat">
-      <a:schemeClr val="lt1"/>
-    </dgm:linClrLst>
-    <dgm:effectClrLst/>
-    <dgm:txLinClrLst/>
-    <dgm:txFillClrLst/>
-    <dgm:txEffectClrLst/>
-  </dgm:styleLbl>
-  <dgm:styleLbl name="parChTrans2D1">
-    <dgm:fillClrLst meth="repeat">
-      <a:schemeClr val="accent2"/>
-    </dgm:fillClrLst>
-    <dgm:linClrLst meth="repeat">
-      <a:schemeClr val="lt1"/>
-    </dgm:linClrLst>
-    <dgm:effectClrLst/>
-    <dgm:txLinClrLst/>
-    <dgm:txFillClrLst meth="repeat">
-      <a:schemeClr val="lt1"/>
-    </dgm:txFillClrLst>
-    <dgm:txEffectClrLst/>
-  </dgm:styleLbl>
-  <dgm:styleLbl name="parChTrans2D2">
-    <dgm:fillClrLst meth="repeat">
-      <a:schemeClr val="accent3"/>
-    </dgm:fillClrLst>
-    <dgm:linClrLst meth="repeat">
-      <a:schemeClr val="lt1"/>
-    </dgm:linClrLst>
-    <dgm:effectClrLst/>
-    <dgm:txLinClrLst/>
-    <dgm:txFillClrLst/>
-    <dgm:txEffectClrLst/>
-  </dgm:styleLbl>
-  <dgm:styleLbl name="parChTrans2D3">
-    <dgm:fillClrLst meth="repeat">
-      <a:schemeClr val="accent4"/>
-    </dgm:fillClrLst>
-    <dgm:linClrLst meth="repeat">
-      <a:schemeClr val="lt1"/>
-    </dgm:linClrLst>
-    <dgm:effectClrLst/>
-    <dgm:txLinClrLst/>
-    <dgm:txFillClrLst/>
-    <dgm:txEffectClrLst/>
-  </dgm:styleLbl>
-  <dgm:styleLbl name="parChTrans2D4">
-    <dgm:fillClrLst meth="repeat">
-      <a:schemeClr val="accent5"/>
-    </dgm:fillClrLst>
-    <dgm:linClrLst meth="repeat">
-      <a:schemeClr val="lt1"/>
-    </dgm:linClrLst>
-    <dgm:effectClrLst/>
-    <dgm:txLinClrLst/>
-    <dgm:txFillClrLst meth="repeat">
-      <a:schemeClr val="lt1"/>
-    </dgm:txFillClrLst>
-    <dgm:txEffectClrLst/>
-  </dgm:styleLbl>
-  <dgm:styleLbl name="parChTrans1D1">
-    <dgm:fillClrLst meth="repeat">
-      <a:schemeClr val="accent2"/>
-    </dgm:fillClrLst>
-    <dgm:linClrLst meth="repeat">
-      <a:schemeClr val="accent1"/>
-    </dgm:linClrLst>
-    <dgm:effectClrLst/>
-    <dgm:txLinClrLst/>
-    <dgm:txFillClrLst meth="repeat">
-      <a:schemeClr val="tx1"/>
-    </dgm:txFillClrLst>
-    <dgm:txEffectClrLst/>
-  </dgm:styleLbl>
-  <dgm:styleLbl name="parChTrans1D2">
-    <dgm:fillClrLst meth="repeat">
-      <a:schemeClr val="accent3">
-        <a:tint val="90000"/>
-      </a:schemeClr>
-    </dgm:fillClrLst>
-    <dgm:linClrLst meth="repeat">
-      <a:schemeClr val="accent2"/>
-    </dgm:linClrLst>
-    <dgm:effectClrLst/>
-    <dgm:txLinClrLst/>
-    <dgm:txFillClrLst meth="repeat">
-      <a:schemeClr val="tx1"/>
-    </dgm:txFillClrLst>
-    <dgm:txEffectClrLst/>
-  </dgm:styleLbl>
-  <dgm:styleLbl name="parChTrans1D3">
-    <dgm:fillClrLst meth="repeat">
-      <a:schemeClr val="accent4">
-        <a:tint val="70000"/>
-      </a:schemeClr>
-    </dgm:fillClrLst>
-    <dgm:linClrLst meth="repeat">
-      <a:schemeClr val="accent3"/>
-    </dgm:linClrLst>
-    <dgm:effectClrLst/>
-    <dgm:txLinClrLst/>
-    <dgm:txFillClrLst meth="repeat">
-      <a:schemeClr val="tx1"/>
-    </dgm:txFillClrLst>
-    <dgm:txEffectClrLst/>
-  </dgm:styleLbl>
-  <dgm:styleLbl name="parChTrans1D4">
-    <dgm:fillClrLst meth="repeat">
-      <a:schemeClr val="accent5">
-        <a:tint val="50000"/>
-      </a:schemeClr>
-    </dgm:fillClrLst>
-    <dgm:linClrLst meth="repeat">
-      <a:schemeClr val="accent4"/>
-    </dgm:linClrLst>
-    <dgm:effectClrLst/>
-    <dgm:txLinClrLst/>
-    <dgm:txFillClrLst meth="repeat">
-      <a:schemeClr val="tx1"/>
-    </dgm:txFillClrLst>
-    <dgm:txEffectClrLst/>
-  </dgm:styleLbl>
-  <dgm:styleLbl name="fgAcc1">
-    <dgm:fillClrLst meth="repeat">
-      <a:schemeClr val="lt1">
-        <a:alpha val="90000"/>
-      </a:schemeClr>
-    </dgm:fillClrLst>
-    <dgm:linClrLst meth="repeat">
-      <a:schemeClr val="accent2"/>
-      <a:schemeClr val="accent3"/>
-      <a:schemeClr val="accent4"/>
-      <a:schemeClr val="accent5"/>
-      <a:schemeClr val="accent6"/>
-    </dgm:linClrLst>
-    <dgm:effectClrLst/>
-    <dgm:txLinClrLst/>
-    <dgm:txFillClrLst meth="repeat">
-      <a:schemeClr val="dk1"/>
-    </dgm:txFillClrLst>
-    <dgm:txEffectClrLst/>
-  </dgm:styleLbl>
-  <dgm:styleLbl name="conFgAcc1">
-    <dgm:fillClrLst meth="repeat">
-      <a:schemeClr val="lt1">
-        <a:alpha val="90000"/>
-      </a:schemeClr>
-    </dgm:fillClrLst>
-    <dgm:linClrLst meth="repeat">
-      <a:schemeClr val="accent2"/>
-      <a:schemeClr val="accent3"/>
-      <a:schemeClr val="accent4"/>
-      <a:schemeClr val="accent5"/>
-      <a:schemeClr val="accent6"/>
-    </dgm:linClrLst>
-    <dgm:effectClrLst/>
-    <dgm:txLinClrLst/>
-    <dgm:txFillClrLst meth="repeat">
-      <a:schemeClr val="dk1"/>
-    </dgm:txFillClrLst>
-    <dgm:txEffectClrLst/>
-  </dgm:styleLbl>
-  <dgm:styleLbl name="alignAcc1">
-    <dgm:fillClrLst meth="repeat">
-      <a:schemeClr val="lt1">
-        <a:alpha val="90000"/>
-      </a:schemeClr>
-    </dgm:fillClrLst>
-    <dgm:linClrLst meth="repeat">
-      <a:schemeClr val="accent2"/>
-      <a:schemeClr val="accent3"/>
-      <a:schemeClr val="accent4"/>
-      <a:schemeClr val="accent5"/>
-      <a:schemeClr val="accent6"/>
-    </dgm:linClrLst>
-    <dgm:effectClrLst/>
-    <dgm:txLinClrLst/>
-    <dgm:txFillClrLst meth="repeat">
-      <a:schemeClr val="dk1"/>
-    </dgm:txFillClrLst>
-    <dgm:txEffectClrLst/>
-  </dgm:styleLbl>
-  <dgm:styleLbl name="trAlignAcc1">
-    <dgm:fillClrLst meth="repeat">
-      <a:schemeClr val="lt1">
-        <a:alpha val="40000"/>
-      </a:schemeClr>
-    </dgm:fillClrLst>
-    <dgm:linClrLst meth="repeat">
-      <a:schemeClr val="accent1"/>
-    </dgm:linClrLst>
-    <dgm:effectClrLst/>
-    <dgm:txLinClrLst/>
-    <dgm:txFillClrLst meth="repeat">
-      <a:schemeClr val="dk1"/>
-    </dgm:txFillClrLst>
-    <dgm:txEffectClrLst/>
-  </dgm:styleLbl>
-  <dgm:styleLbl name="bgAcc1">
-    <dgm:fillClrLst meth="repeat">
-      <a:schemeClr val="lt1">
-        <a:alpha val="90000"/>
-      </a:schemeClr>
-    </dgm:fillClrLst>
-    <dgm:linClrLst meth="repeat">
-      <a:schemeClr val="accent2"/>
-      <a:schemeClr val="accent3"/>
-      <a:schemeClr val="accent4"/>
-      <a:schemeClr val="accent5"/>
-      <a:schemeClr val="accent6"/>
-    </dgm:linClrLst>
-    <dgm:effectClrLst/>
-    <dgm:txLinClrLst/>
-    <dgm:txFillClrLst meth="repeat">
-      <a:schemeClr val="dk1"/>
-    </dgm:txFillClrLst>
-    <dgm:txEffectClrLst/>
-  </dgm:styleLbl>
-  <dgm:styleLbl name="solidFgAcc1">
-    <dgm:fillClrLst meth="repeat">
-      <a:schemeClr val="lt1"/>
-    </dgm:fillClrLst>
-    <dgm:linClrLst meth="repeat">
-      <a:schemeClr val="accent2"/>
-      <a:schemeClr val="accent3"/>
-      <a:schemeClr val="accent4"/>
-      <a:schemeClr val="accent5"/>
-      <a:schemeClr val="accent6"/>
-    </dgm:linClrLst>
-    <dgm:effectClrLst/>
-    <dgm:txLinClrLst/>
-    <dgm:txFillClrLst meth="repeat">
-      <a:schemeClr val="dk1"/>
-    </dgm:txFillClrLst>
-    <dgm:txEffectClrLst/>
-  </dgm:styleLbl>
-  <dgm:styleLbl name="solidAlignAcc1">
-    <dgm:fillClrLst meth="repeat">
-      <a:schemeClr val="lt1"/>
-    </dgm:fillClrLst>
-    <dgm:linClrLst meth="repeat">
-      <a:schemeClr val="accent2"/>
-      <a:schemeClr val="accent3"/>
-      <a:schemeClr val="accent4"/>
-      <a:schemeClr val="accent5"/>
-      <a:schemeClr val="accent6"/>
-    </dgm:linClrLst>
-    <dgm:effectClrLst/>
-    <dgm:txLinClrLst/>
-    <dgm:txFillClrLst meth="repeat">
-      <a:schemeClr val="dk1"/>
-    </dgm:txFillClrLst>
-    <dgm:txEffectClrLst/>
-  </dgm:styleLbl>
-  <dgm:styleLbl name="solidBgAcc1">
-    <dgm:fillClrLst meth="repeat">
-      <a:schemeClr val="lt1"/>
-    </dgm:fillClrLst>
-    <dgm:linClrLst meth="repeat">
-      <a:schemeClr val="accent2"/>
-      <a:schemeClr val="accent3"/>
-      <a:schemeClr val="accent4"/>
-      <a:schemeClr val="accent5"/>
-      <a:schemeClr val="accent6"/>
-    </dgm:linClrLst>
-    <dgm:effectClrLst/>
-    <dgm:txLinClrLst/>
-    <dgm:txFillClrLst meth="repeat">
-      <a:schemeClr val="dk1"/>
-    </dgm:txFillClrLst>
-    <dgm:txEffectClrLst/>
-  </dgm:styleLbl>
-  <dgm:styleLbl name="fgAccFollowNode1">
-    <dgm:fillClrLst meth="repeat">
-      <a:schemeClr val="accent2">
-        <a:tint val="40000"/>
-        <a:alpha val="90000"/>
-      </a:schemeClr>
-      <a:schemeClr val="accent3">
-        <a:tint val="40000"/>
-        <a:alpha val="90000"/>
-      </a:schemeClr>
-      <a:schemeClr val="accent4">
-        <a:tint val="40000"/>
-        <a:alpha val="90000"/>
-      </a:schemeClr>
-      <a:schemeClr val="accent5">
-        <a:tint val="40000"/>
-        <a:alpha val="90000"/>
-      </a:schemeClr>
-      <a:schemeClr val="accent6">
-        <a:tint val="40000"/>
-        <a:alpha val="90000"/>
-      </a:schemeClr>
-    </dgm:fillClrLst>
-    <dgm:linClrLst meth="repeat">
-      <a:schemeClr val="accent2">
-        <a:tint val="40000"/>
-        <a:alpha val="90000"/>
-      </a:schemeClr>
-      <a:schemeClr val="accent3">
-        <a:tint val="40000"/>
-        <a:alpha val="90000"/>
-      </a:schemeClr>
-      <a:schemeClr val="accent4">
-        <a:tint val="40000"/>
-        <a:alpha val="90000"/>
-      </a:schemeClr>
-      <a:schemeClr val="accent5">
-        <a:tint val="40000"/>
-        <a:alpha val="90000"/>
-      </a:schemeClr>
-      <a:schemeClr val="accent6">
-        <a:tint val="40000"/>
-        <a:alpha val="90000"/>
-      </a:schemeClr>
-    </dgm:linClrLst>
-    <dgm:effectClrLst/>
-    <dgm:txLinClrLst/>
-    <dgm:txFillClrLst meth="repeat">
-      <a:schemeClr val="dk1"/>
-    </dgm:txFillClrLst>
-    <dgm:txEffectClrLst/>
-  </dgm:styleLbl>
-  <dgm:styleLbl name="alignAccFollowNode1">
-    <dgm:fillClrLst meth="repeat">
-      <a:schemeClr val="accent2">
-        <a:tint val="40000"/>
-        <a:alpha val="90000"/>
-      </a:schemeClr>
-      <a:schemeClr val="accent3">
-        <a:tint val="40000"/>
-        <a:alpha val="90000"/>
-      </a:schemeClr>
-      <a:schemeClr val="accent4">
-        <a:tint val="40000"/>
-        <a:alpha val="90000"/>
-      </a:schemeClr>
-      <a:schemeClr val="accent5">
-        <a:tint val="40000"/>
-        <a:alpha val="90000"/>
-      </a:schemeClr>
-      <a:schemeClr val="accent6">
-        <a:tint val="40000"/>
-        <a:alpha val="90000"/>
-      </a:schemeClr>
-    </dgm:fillClrLst>
-    <dgm:linClrLst meth="repeat">
-      <a:schemeClr val="accent2">
-        <a:tint val="40000"/>
-        <a:alpha val="90000"/>
-      </a:schemeClr>
-      <a:schemeClr val="accent3">
-        <a:tint val="40000"/>
-        <a:alpha val="90000"/>
-      </a:schemeClr>
-      <a:schemeClr val="accent4">
-        <a:tint val="40000"/>
-        <a:alpha val="90000"/>
-      </a:schemeClr>
-      <a:schemeClr val="accent5">
-        <a:tint val="40000"/>
-        <a:alpha val="90000"/>
-      </a:schemeClr>
-      <a:schemeClr val="accent6">
-        <a:tint val="40000"/>
-        <a:alpha val="90000"/>
-      </a:schemeClr>
-    </dgm:linClrLst>
-    <dgm:effectClrLst/>
-    <dgm:txLinClrLst/>
-    <dgm:txFillClrLst meth="repeat">
-      <a:schemeClr val="dk1"/>
-    </dgm:txFillClrLst>
-    <dgm:txEffectClrLst/>
-  </dgm:styleLbl>
-  <dgm:styleLbl name="bgAccFollowNode1">
-    <dgm:fillClrLst meth="repeat">
-      <a:schemeClr val="accent2">
-        <a:tint val="40000"/>
-        <a:alpha val="90000"/>
-      </a:schemeClr>
-      <a:schemeClr val="accent3">
-        <a:tint val="40000"/>
-        <a:alpha val="90000"/>
-      </a:schemeClr>
-      <a:schemeClr val="accent4">
-        <a:tint val="40000"/>
-        <a:alpha val="90000"/>
-      </a:schemeClr>
-      <a:schemeClr val="accent5">
-        <a:tint val="40000"/>
-        <a:alpha val="90000"/>
-      </a:schemeClr>
-      <a:schemeClr val="accent6">
-        <a:tint val="40000"/>
-        <a:alpha val="90000"/>
-      </a:schemeClr>
-    </dgm:fillClrLst>
-    <dgm:linClrLst meth="repeat">
-      <a:schemeClr val="accent2">
-        <a:tint val="40000"/>
-        <a:alpha val="90000"/>
-      </a:schemeClr>
-      <a:schemeClr val="accent3">
-        <a:tint val="40000"/>
-        <a:alpha val="90000"/>
-      </a:schemeClr>
-      <a:schemeClr val="accent4">
-        <a:tint val="40000"/>
-        <a:alpha val="90000"/>
-      </a:schemeClr>
-      <a:schemeClr val="accent5">
-        <a:tint val="40000"/>
-        <a:alpha val="90000"/>
-      </a:schemeClr>
-      <a:schemeClr val="accent6">
-        <a:tint val="40000"/>
-        <a:alpha val="90000"/>
-      </a:schemeClr>
-    </dgm:linClrLst>
-    <dgm:effectClrLst/>
-    <dgm:txLinClrLst/>
-    <dgm:txFillClrLst meth="repeat">
-      <a:schemeClr val="dk1"/>
-    </dgm:txFillClrLst>
-    <dgm:txEffectClrLst/>
-  </dgm:styleLbl>
-  <dgm:styleLbl name="fgAcc0">
-    <dgm:fillClrLst meth="repeat">
-      <a:schemeClr val="lt1">
-        <a:alpha val="90000"/>
-      </a:schemeClr>
-    </dgm:fillClrLst>
-    <dgm:linClrLst>
-      <a:schemeClr val="accent1"/>
-    </dgm:linClrLst>
-    <dgm:effectClrLst/>
-    <dgm:txLinClrLst/>
-    <dgm:txFillClrLst meth="repeat">
-      <a:schemeClr val="dk1"/>
-    </dgm:txFillClrLst>
-    <dgm:txEffectClrLst/>
-  </dgm:styleLbl>
-  <dgm:styleLbl name="fgAcc2">
-    <dgm:fillClrLst meth="repeat">
-      <a:schemeClr val="lt1">
-        <a:alpha val="90000"/>
-      </a:schemeClr>
-    </dgm:fillClrLst>
-    <dgm:linClrLst>
-      <a:schemeClr val="accent2"/>
-    </dgm:linClrLst>
-    <dgm:effectClrLst/>
-    <dgm:txLinClrLst/>
-    <dgm:txFillClrLst meth="repeat">
-      <a:schemeClr val="dk1"/>
-    </dgm:txFillClrLst>
-    <dgm:txEffectClrLst/>
-  </dgm:styleLbl>
-  <dgm:styleLbl name="fgAcc3">
-    <dgm:fillClrLst meth="repeat">
-      <a:schemeClr val="lt1">
-        <a:alpha val="90000"/>
-      </a:schemeClr>
-    </dgm:fillClrLst>
-    <dgm:linClrLst>
-      <a:schemeClr val="accent3"/>
-    </dgm:linClrLst>
-    <dgm:effectClrLst/>
-    <dgm:txLinClrLst/>
-    <dgm:txFillClrLst meth="repeat">
-      <a:schemeClr val="dk1"/>
-    </dgm:txFillClrLst>
-    <dgm:txEffectClrLst/>
-  </dgm:styleLbl>
-  <dgm:styleLbl name="fgAcc4">
-    <dgm:fillClrLst meth="repeat">
-      <a:schemeClr val="lt1">
-        <a:alpha val="90000"/>
-      </a:schemeClr>
-    </dgm:fillClrLst>
-    <dgm:linClrLst>
-      <a:schemeClr val="accent4"/>
-    </dgm:linClrLst>
-    <dgm:effectClrLst/>
-    <dgm:txLinClrLst/>
-    <dgm:txFillClrLst meth="repeat">
-      <a:schemeClr val="dk1"/>
-    </dgm:txFillClrLst>
-    <dgm:txEffectClrLst/>
-  </dgm:styleLbl>
-  <dgm:styleLbl name="bgShp">
-    <dgm:fillClrLst meth="repeat">
-      <a:schemeClr val="accent2">
-        <a:tint val="40000"/>
-      </a:schemeClr>
-    </dgm:fillClrLst>
-    <dgm:linClrLst meth="repeat">
-      <a:schemeClr val="dk1"/>
-    </dgm:linClrLst>
-    <dgm:effectClrLst/>
-    <dgm:txLinClrLst/>
-    <dgm:txFillClrLst meth="repeat">
-      <a:schemeClr val="dk1"/>
-    </dgm:txFillClrLst>
-    <dgm:txEffectClrLst/>
-  </dgm:styleLbl>
-  <dgm:styleLbl name="dkBgShp">
-    <dgm:fillClrLst meth="repeat">
-      <a:schemeClr val="accent2">
-        <a:shade val="90000"/>
-      </a:schemeClr>
-    </dgm:fillClrLst>
-    <dgm:linClrLst meth="repeat">
-      <a:schemeClr val="dk1"/>
-    </dgm:linClrLst>
-    <dgm:effectClrLst/>
-    <dgm:txLinClrLst/>
-    <dgm:txFillClrLst meth="repeat">
-      <a:schemeClr val="lt1"/>
-    </dgm:txFillClrLst>
-    <dgm:txEffectClrLst/>
-  </dgm:styleLbl>
-  <dgm:styleLbl name="trBgShp">
-    <dgm:fillClrLst meth="repeat">
-      <a:schemeClr val="accent1">
-        <a:tint val="50000"/>
-        <a:alpha val="40000"/>
-      </a:schemeClr>
-    </dgm:fillClrLst>
-    <dgm:linClrLst meth="repeat">
-      <a:schemeClr val="accent2"/>
-    </dgm:linClrLst>
-    <dgm:effectClrLst/>
-    <dgm:txLinClrLst/>
-    <dgm:txFillClrLst meth="repeat">
-      <a:schemeClr val="lt1"/>
-    </dgm:txFillClrLst>
-    <dgm:txEffectClrLst/>
-  </dgm:styleLbl>
-  <dgm:styleLbl name="fgShp">
-    <dgm:fillClrLst meth="repeat">
-      <a:schemeClr val="accent2">
-        <a:tint val="40000"/>
-      </a:schemeClr>
-    </dgm:fillClrLst>
-    <dgm:linClrLst meth="repeat">
-      <a:schemeClr val="lt1"/>
-    </dgm:linClrLst>
-    <dgm:effectClrLst/>
-    <dgm:txLinClrLst/>
-    <dgm:txFillClrLst meth="repeat">
-      <a:schemeClr val="dk1"/>
-    </dgm:txFillClrLst>
-    <dgm:txEffectClrLst/>
-  </dgm:styleLbl>
-  <dgm:styleLbl name="revTx">
-    <dgm:fillClrLst meth="repeat">
-      <a:schemeClr val="lt1">
-        <a:alpha val="0"/>
-      </a:schemeClr>
-    </dgm:fillClrLst>
-    <dgm:linClrLst meth="repeat">
-      <a:schemeClr val="dk1">
-        <a:alpha val="0"/>
-      </a:schemeClr>
-    </dgm:linClrLst>
-    <dgm:effectClrLst/>
-    <dgm:txLinClrLst/>
-    <dgm:txFillClrLst meth="repeat">
-      <a:schemeClr val="tx1"/>
-    </dgm:txFillClrLst>
-    <dgm:txEffectClrLst/>
-  </dgm:styleLbl>
-</dgm:colorsDef>
-</file>
-
 <file path=ppt/diagrams/data1.xml><?xml version="1.0" encoding="utf-8"?>
-<dgm:dataModel xmlns:dgm="http://schemas.openxmlformats.org/drawingml/2006/diagram" xmlns:a="http://schemas.openxmlformats.org/drawingml/2006/main">
-  <dgm:ptLst>
-    <dgm:pt modelId="{E9FB0F4E-6967-3B44-A32F-E8B1C7AE98D5}" type="doc">
-      <dgm:prSet loTypeId="urn:microsoft.com/office/officeart/2005/8/layout/process5" loCatId="" qsTypeId="urn:microsoft.com/office/officeart/2005/8/quickstyle/simple1" qsCatId="simple" csTypeId="urn:microsoft.com/office/officeart/2005/8/colors/colorful1" csCatId="colorful" phldr="1"/>
-      <dgm:spPr/>
-      <dgm:t>
-        <a:bodyPr/>
-        <a:lstStyle/>
-        <a:p>
-          <a:endParaRPr lang="en-US"/>
-        </a:p>
-      </dgm:t>
-    </dgm:pt>
-    <dgm:pt modelId="{75350DEC-25F7-F240-A4BF-3A92E80C52F5}">
-      <dgm:prSet phldrT="[Text]"/>
-      <dgm:spPr>
-        <a:solidFill>
-          <a:schemeClr val="tx1">
-            <a:lumMod val="65000"/>
-            <a:lumOff val="35000"/>
-          </a:schemeClr>
-        </a:solidFill>
-      </dgm:spPr>
-      <dgm:t>
-        <a:bodyPr/>
-        <a:lstStyle/>
-        <a:p>
-          <a:r>
-            <a:rPr lang="en-US" dirty="0"/>
-            <a:t>Scope</a:t>
-          </a:r>
-        </a:p>
-      </dgm:t>
-    </dgm:pt>
-    <dgm:pt modelId="{965794C1-5767-E94D-8105-ED104B4D33E2}" type="parTrans" cxnId="{81D07A23-EA35-C94F-81FA-E72150079877}">
-      <dgm:prSet/>
-      <dgm:spPr/>
-      <dgm:t>
-        <a:bodyPr/>
-        <a:lstStyle/>
-        <a:p>
-          <a:endParaRPr lang="en-US"/>
-        </a:p>
-      </dgm:t>
-    </dgm:pt>
-    <dgm:pt modelId="{BAC284C6-3986-1C48-93AC-8FEBC662ECEE}" type="sibTrans" cxnId="{81D07A23-EA35-C94F-81FA-E72150079877}">
-      <dgm:prSet/>
-      <dgm:spPr>
-        <a:solidFill>
-          <a:schemeClr val="bg2"/>
-        </a:solidFill>
-      </dgm:spPr>
-      <dgm:t>
-        <a:bodyPr/>
-        <a:lstStyle/>
-        <a:p>
-          <a:endParaRPr lang="en-US"/>
-        </a:p>
-      </dgm:t>
-    </dgm:pt>
-    <dgm:pt modelId="{4F2509E8-87E6-2347-B926-EB9BDDECA6FD}">
-      <dgm:prSet phldrT="[Text]"/>
-      <dgm:spPr/>
-      <dgm:t>
-        <a:bodyPr/>
-        <a:lstStyle/>
-        <a:p>
-          <a:r>
-            <a:rPr lang="en-US" dirty="0"/>
-            <a:t>Data</a:t>
-          </a:r>
-        </a:p>
-      </dgm:t>
-    </dgm:pt>
-    <dgm:pt modelId="{B4B1EEE1-8225-A643-B681-A7F3FC14ECAD}" type="parTrans" cxnId="{9BF83777-08E0-6140-9D35-BF7D8AF8A067}">
-      <dgm:prSet/>
-      <dgm:spPr/>
-      <dgm:t>
-        <a:bodyPr/>
-        <a:lstStyle/>
-        <a:p>
-          <a:endParaRPr lang="en-US"/>
-        </a:p>
-      </dgm:t>
-    </dgm:pt>
-    <dgm:pt modelId="{748D4455-259E-4245-ADD2-8DDAC2A60773}" type="sibTrans" cxnId="{9BF83777-08E0-6140-9D35-BF7D8AF8A067}">
-      <dgm:prSet/>
-      <dgm:spPr/>
-      <dgm:t>
-        <a:bodyPr/>
-        <a:lstStyle/>
-        <a:p>
-          <a:endParaRPr lang="en-US"/>
-        </a:p>
-      </dgm:t>
-    </dgm:pt>
-    <dgm:pt modelId="{7B079A50-DF5E-0A4C-9491-2FBAFC0F785B}">
-      <dgm:prSet phldrT="[Text]"/>
-      <dgm:spPr>
-        <a:solidFill>
-          <a:schemeClr val="accent6">
-            <a:lumMod val="50000"/>
-          </a:schemeClr>
-        </a:solidFill>
-      </dgm:spPr>
-      <dgm:t>
-        <a:bodyPr/>
-        <a:lstStyle/>
-        <a:p>
-          <a:r>
-            <a:rPr lang="en-US" dirty="0"/>
-            <a:t>Exploration</a:t>
-          </a:r>
-        </a:p>
-      </dgm:t>
-    </dgm:pt>
-    <dgm:pt modelId="{BA902E5D-518F-0749-86BA-04AA510BA959}" type="parTrans" cxnId="{A454DBA0-21A9-3941-9DF2-4DD870F537A3}">
-      <dgm:prSet/>
-      <dgm:spPr/>
-      <dgm:t>
-        <a:bodyPr/>
-        <a:lstStyle/>
-        <a:p>
-          <a:endParaRPr lang="en-US"/>
-        </a:p>
-      </dgm:t>
-    </dgm:pt>
-    <dgm:pt modelId="{00735B98-C924-5743-B429-DBBBDEA50165}" type="sibTrans" cxnId="{A454DBA0-21A9-3941-9DF2-4DD870F537A3}">
-      <dgm:prSet/>
-      <dgm:spPr>
-        <a:solidFill>
-          <a:schemeClr val="accent6">
-            <a:lumMod val="50000"/>
-          </a:schemeClr>
-        </a:solidFill>
-      </dgm:spPr>
-      <dgm:t>
-        <a:bodyPr/>
-        <a:lstStyle/>
-        <a:p>
-          <a:endParaRPr lang="en-US"/>
-        </a:p>
-      </dgm:t>
-    </dgm:pt>
-    <dgm:pt modelId="{EB4866D8-1266-8945-89C4-F4CD4F9D8A6F}">
-      <dgm:prSet phldrT="[Text]"/>
-      <dgm:spPr/>
-      <dgm:t>
-        <a:bodyPr/>
-        <a:lstStyle/>
-        <a:p>
-          <a:r>
-            <a:rPr lang="en-US" dirty="0"/>
-            <a:t>Modeling</a:t>
-          </a:r>
-        </a:p>
-      </dgm:t>
-    </dgm:pt>
-    <dgm:pt modelId="{4276625C-E1F0-F840-90D6-CE76DDBB799C}" type="parTrans" cxnId="{A1CEA2E5-F1DD-EF48-A85B-4A04D4565509}">
-      <dgm:prSet/>
-      <dgm:spPr/>
-      <dgm:t>
-        <a:bodyPr/>
-        <a:lstStyle/>
-        <a:p>
-          <a:endParaRPr lang="en-US"/>
-        </a:p>
-      </dgm:t>
-    </dgm:pt>
-    <dgm:pt modelId="{206E47A8-99B6-484A-AD35-04DCB9238B9B}" type="sibTrans" cxnId="{A1CEA2E5-F1DD-EF48-A85B-4A04D4565509}">
-      <dgm:prSet/>
-      <dgm:spPr/>
-      <dgm:t>
-        <a:bodyPr/>
-        <a:lstStyle/>
-        <a:p>
-          <a:endParaRPr lang="en-US"/>
-        </a:p>
-      </dgm:t>
-    </dgm:pt>
-    <dgm:pt modelId="{F9BD6EF9-8382-F144-B9CD-FB838C6C03F9}">
-      <dgm:prSet phldrT="[Text]"/>
-      <dgm:spPr/>
-      <dgm:t>
-        <a:bodyPr/>
-        <a:lstStyle/>
-        <a:p>
-          <a:r>
-            <a:rPr lang="en-US" dirty="0"/>
-            <a:t>Get Data</a:t>
-          </a:r>
-        </a:p>
-      </dgm:t>
-    </dgm:pt>
-    <dgm:pt modelId="{137D12B5-70FE-6847-BD89-CA99FC0D41AD}" type="parTrans" cxnId="{890194DD-304B-C447-9AF3-AFAE634C6D43}">
-      <dgm:prSet/>
-      <dgm:spPr/>
-      <dgm:t>
-        <a:bodyPr/>
-        <a:lstStyle/>
-        <a:p>
-          <a:endParaRPr lang="en-US"/>
-        </a:p>
-      </dgm:t>
-    </dgm:pt>
-    <dgm:pt modelId="{49EC0DFE-61E7-374D-A1BD-7617E9E9166B}" type="sibTrans" cxnId="{890194DD-304B-C447-9AF3-AFAE634C6D43}">
-      <dgm:prSet/>
-      <dgm:spPr/>
-      <dgm:t>
-        <a:bodyPr/>
-        <a:lstStyle/>
-        <a:p>
-          <a:endParaRPr lang="en-US"/>
-        </a:p>
-      </dgm:t>
-    </dgm:pt>
-    <dgm:pt modelId="{C8AF58C4-450C-0C4C-83CB-1474D3ADA25F}">
-      <dgm:prSet phldrT="[Text]"/>
-      <dgm:spPr/>
-      <dgm:t>
-        <a:bodyPr/>
-        <a:lstStyle/>
-        <a:p>
-          <a:r>
-            <a:rPr lang="en-US" dirty="0"/>
-            <a:t>Store Data</a:t>
-          </a:r>
-        </a:p>
-      </dgm:t>
-    </dgm:pt>
-    <dgm:pt modelId="{DEBC2A1C-65D7-5E43-945C-60BBA4631011}" type="parTrans" cxnId="{43B9E771-FA74-B642-9EED-7FE4A7CDF11A}">
-      <dgm:prSet/>
-      <dgm:spPr/>
-      <dgm:t>
-        <a:bodyPr/>
-        <a:lstStyle/>
-        <a:p>
-          <a:endParaRPr lang="en-US"/>
-        </a:p>
-      </dgm:t>
-    </dgm:pt>
-    <dgm:pt modelId="{51773514-44C5-134E-A69D-D30DCA75AB37}" type="sibTrans" cxnId="{43B9E771-FA74-B642-9EED-7FE4A7CDF11A}">
-      <dgm:prSet/>
-      <dgm:spPr/>
-      <dgm:t>
-        <a:bodyPr/>
-        <a:lstStyle/>
-        <a:p>
-          <a:endParaRPr lang="en-US"/>
-        </a:p>
-      </dgm:t>
-    </dgm:pt>
-    <dgm:pt modelId="{761579F4-10DF-F244-9532-25DEF4807D83}">
-      <dgm:prSet phldrT="[Text]"/>
-      <dgm:spPr/>
-      <dgm:t>
-        <a:bodyPr/>
-        <a:lstStyle/>
-        <a:p>
-          <a:r>
-            <a:rPr lang="en-US" dirty="0"/>
-            <a:t>Link Data</a:t>
-          </a:r>
-        </a:p>
-      </dgm:t>
-    </dgm:pt>
-    <dgm:pt modelId="{4C55FAFB-140B-EA49-9492-2DC8E373D8C0}" type="parTrans" cxnId="{445B7ADC-F7C5-5046-9BEE-3618E0EEE919}">
-      <dgm:prSet/>
-      <dgm:spPr/>
-      <dgm:t>
-        <a:bodyPr/>
-        <a:lstStyle/>
-        <a:p>
-          <a:endParaRPr lang="en-US"/>
-        </a:p>
-      </dgm:t>
-    </dgm:pt>
-    <dgm:pt modelId="{3543ED0F-366F-8D44-8E9F-A843D81464D5}" type="sibTrans" cxnId="{445B7ADC-F7C5-5046-9BEE-3618E0EEE919}">
-      <dgm:prSet/>
-      <dgm:spPr/>
-      <dgm:t>
-        <a:bodyPr/>
-        <a:lstStyle/>
-        <a:p>
-          <a:endParaRPr lang="en-US"/>
-        </a:p>
-      </dgm:t>
-    </dgm:pt>
-    <dgm:pt modelId="{5FE83F24-F694-6A4B-99C0-78300CB546E1}">
-      <dgm:prSet phldrT="[Text]"/>
-      <dgm:spPr/>
-      <dgm:t>
-        <a:bodyPr/>
-        <a:lstStyle/>
-        <a:p>
-          <a:r>
-            <a:rPr lang="en-US" dirty="0"/>
-            <a:t>Rows</a:t>
-          </a:r>
-        </a:p>
-      </dgm:t>
-    </dgm:pt>
-    <dgm:pt modelId="{E15C2973-AC33-0145-8745-682DFB76DED0}" type="parTrans" cxnId="{ED970163-ECEE-D849-9B40-616074ECBD3F}">
-      <dgm:prSet/>
-      <dgm:spPr/>
-      <dgm:t>
-        <a:bodyPr/>
-        <a:lstStyle/>
-        <a:p>
-          <a:endParaRPr lang="en-US"/>
-        </a:p>
-      </dgm:t>
-    </dgm:pt>
-    <dgm:pt modelId="{A1EBC4F8-774A-B045-880A-03E7D798D46B}" type="sibTrans" cxnId="{ED970163-ECEE-D849-9B40-616074ECBD3F}">
-      <dgm:prSet/>
-      <dgm:spPr/>
-      <dgm:t>
-        <a:bodyPr/>
-        <a:lstStyle/>
-        <a:p>
-          <a:endParaRPr lang="en-US"/>
-        </a:p>
-      </dgm:t>
-    </dgm:pt>
-    <dgm:pt modelId="{471C43CE-832D-774D-BB7A-57512EFB5879}">
-      <dgm:prSet phldrT="[Text]"/>
-      <dgm:spPr/>
-      <dgm:t>
-        <a:bodyPr/>
-        <a:lstStyle/>
-        <a:p>
-          <a:r>
-            <a:rPr lang="en-US" dirty="0"/>
-            <a:t>Features</a:t>
-          </a:r>
-        </a:p>
-      </dgm:t>
-    </dgm:pt>
-    <dgm:pt modelId="{C2B9F4EE-A410-1B4C-9D53-DB22DB03D31F}" type="parTrans" cxnId="{E7042CE6-A233-CB47-A6F5-D0D71F329C45}">
-      <dgm:prSet/>
-      <dgm:spPr/>
-      <dgm:t>
-        <a:bodyPr/>
-        <a:lstStyle/>
-        <a:p>
-          <a:endParaRPr lang="en-US"/>
-        </a:p>
-      </dgm:t>
-    </dgm:pt>
-    <dgm:pt modelId="{DE50C641-CD08-A846-B7EB-02241BA70688}" type="sibTrans" cxnId="{E7042CE6-A233-CB47-A6F5-D0D71F329C45}">
-      <dgm:prSet/>
-      <dgm:spPr/>
-      <dgm:t>
-        <a:bodyPr/>
-        <a:lstStyle/>
-        <a:p>
-          <a:endParaRPr lang="en-US"/>
-        </a:p>
-      </dgm:t>
-    </dgm:pt>
-    <dgm:pt modelId="{6E882DEC-3034-E942-B5AA-2835D77DD5C8}">
-      <dgm:prSet phldrT="[Text]"/>
-      <dgm:spPr/>
-      <dgm:t>
-        <a:bodyPr/>
-        <a:lstStyle/>
-        <a:p>
-          <a:r>
-            <a:rPr lang="en-US" dirty="0"/>
-            <a:t>Labels</a:t>
-          </a:r>
-        </a:p>
-      </dgm:t>
-    </dgm:pt>
-    <dgm:pt modelId="{11E32BAA-4A06-9844-B381-3F8D7D686934}" type="parTrans" cxnId="{9A8098B2-9CE9-D942-9547-38EF361DD3D4}">
-      <dgm:prSet/>
-      <dgm:spPr/>
-      <dgm:t>
-        <a:bodyPr/>
-        <a:lstStyle/>
-        <a:p>
-          <a:endParaRPr lang="en-US"/>
-        </a:p>
-      </dgm:t>
-    </dgm:pt>
-    <dgm:pt modelId="{DE8B183B-7E7F-5749-9A67-A6C365A09A85}" type="sibTrans" cxnId="{9A8098B2-9CE9-D942-9547-38EF361DD3D4}">
-      <dgm:prSet/>
-      <dgm:spPr/>
-      <dgm:t>
-        <a:bodyPr/>
-        <a:lstStyle/>
-        <a:p>
-          <a:endParaRPr lang="en-US"/>
-        </a:p>
-      </dgm:t>
-    </dgm:pt>
-    <dgm:pt modelId="{AE199458-77CF-8440-8970-F024006EA226}">
-      <dgm:prSet phldrT="[Text]"/>
-      <dgm:spPr>
-        <a:solidFill>
-          <a:srgbClr val="00B0F0"/>
-        </a:solidFill>
-      </dgm:spPr>
-      <dgm:t>
-        <a:bodyPr/>
-        <a:lstStyle/>
-        <a:p>
-          <a:r>
-            <a:rPr lang="en-US" dirty="0"/>
-            <a:t>Model Selection</a:t>
-          </a:r>
-        </a:p>
-      </dgm:t>
-    </dgm:pt>
-    <dgm:pt modelId="{8FD87771-F4E1-DC47-B38A-8EDD08A5C725}" type="parTrans" cxnId="{8497B9D0-5691-E848-8EE3-C51BC656F8B1}">
-      <dgm:prSet/>
-      <dgm:spPr/>
-      <dgm:t>
-        <a:bodyPr/>
-        <a:lstStyle/>
-        <a:p>
-          <a:endParaRPr lang="en-US"/>
-        </a:p>
-      </dgm:t>
-    </dgm:pt>
-    <dgm:pt modelId="{89DBDFDC-5EB5-0B49-A8D0-DB22ECB982AF}" type="sibTrans" cxnId="{8497B9D0-5691-E848-8EE3-C51BC656F8B1}">
-      <dgm:prSet/>
-      <dgm:spPr>
-        <a:solidFill>
-          <a:srgbClr val="00B0F0"/>
-        </a:solidFill>
-      </dgm:spPr>
-      <dgm:t>
-        <a:bodyPr/>
-        <a:lstStyle/>
-        <a:p>
-          <a:endParaRPr lang="en-US"/>
-        </a:p>
-      </dgm:t>
-    </dgm:pt>
-    <dgm:pt modelId="{86AA592B-D489-5D4D-93FE-79A538493DA3}">
-      <dgm:prSet phldrT="[Text]"/>
-      <dgm:spPr>
-        <a:solidFill>
-          <a:srgbClr val="00B0F0"/>
-        </a:solidFill>
-      </dgm:spPr>
-      <dgm:t>
-        <a:bodyPr/>
-        <a:lstStyle/>
-        <a:p>
-          <a:r>
-            <a:rPr lang="en-US" dirty="0"/>
-            <a:t>Train-Test Splits</a:t>
-          </a:r>
-        </a:p>
-      </dgm:t>
-    </dgm:pt>
-    <dgm:pt modelId="{06E1BE15-F8C7-9C4D-A90E-557728BBB1D3}" type="parTrans" cxnId="{09F5B15E-E1AD-2E4A-AFF2-C91E75C311A9}">
-      <dgm:prSet/>
-      <dgm:spPr/>
-      <dgm:t>
-        <a:bodyPr/>
-        <a:lstStyle/>
-        <a:p>
-          <a:endParaRPr lang="en-US"/>
-        </a:p>
-      </dgm:t>
-    </dgm:pt>
-    <dgm:pt modelId="{9EB8E24C-CDF4-7B49-8A25-38E38E64AA9F}" type="sibTrans" cxnId="{09F5B15E-E1AD-2E4A-AFF2-C91E75C311A9}">
-      <dgm:prSet/>
-      <dgm:spPr/>
-      <dgm:t>
-        <a:bodyPr/>
-        <a:lstStyle/>
-        <a:p>
-          <a:endParaRPr lang="en-US"/>
-        </a:p>
-      </dgm:t>
-    </dgm:pt>
-    <dgm:pt modelId="{69F25C00-F7E1-8B47-8544-B81240B6C7F2}">
-      <dgm:prSet phldrT="[Text]"/>
-      <dgm:spPr>
-        <a:solidFill>
-          <a:srgbClr val="00B0F0"/>
-        </a:solidFill>
-      </dgm:spPr>
-      <dgm:t>
-        <a:bodyPr/>
-        <a:lstStyle/>
-        <a:p>
-          <a:r>
-            <a:rPr lang="en-US" dirty="0"/>
-            <a:t>Performance Metrics</a:t>
-          </a:r>
-        </a:p>
-      </dgm:t>
-    </dgm:pt>
-    <dgm:pt modelId="{258EB4FC-8DB3-204B-AE19-757E57DBF8E2}" type="parTrans" cxnId="{FC1AC939-5A01-D84B-8800-0E045D0F93C8}">
-      <dgm:prSet/>
-      <dgm:spPr/>
-      <dgm:t>
-        <a:bodyPr/>
-        <a:lstStyle/>
-        <a:p>
-          <a:endParaRPr lang="en-US"/>
-        </a:p>
-      </dgm:t>
-    </dgm:pt>
-    <dgm:pt modelId="{2C4AF3F2-4BEF-1E41-A9DC-C2CCA7D68218}" type="sibTrans" cxnId="{FC1AC939-5A01-D84B-8800-0E045D0F93C8}">
-      <dgm:prSet/>
-      <dgm:spPr/>
-      <dgm:t>
-        <a:bodyPr/>
-        <a:lstStyle/>
-        <a:p>
-          <a:endParaRPr lang="en-US"/>
-        </a:p>
-      </dgm:t>
-    </dgm:pt>
-    <dgm:pt modelId="{882FED25-8C48-F941-A0FE-6B2DFF5CD464}">
-      <dgm:prSet phldrT="[Text]"/>
-      <dgm:spPr>
-        <a:solidFill>
-          <a:schemeClr val="tx1">
-            <a:lumMod val="65000"/>
-            <a:lumOff val="35000"/>
-          </a:schemeClr>
-        </a:solidFill>
-      </dgm:spPr>
-      <dgm:t>
-        <a:bodyPr/>
-        <a:lstStyle/>
-        <a:p>
-          <a:r>
-            <a:rPr lang="en-US" dirty="0"/>
-            <a:t>Model Interpretation</a:t>
-          </a:r>
-        </a:p>
-      </dgm:t>
-    </dgm:pt>
-    <dgm:pt modelId="{B419AD8C-EBD7-5443-9C93-E4B849DE07B6}" type="parTrans" cxnId="{467F9BED-D392-3940-B061-1699282DB62A}">
-      <dgm:prSet/>
-      <dgm:spPr/>
-      <dgm:t>
-        <a:bodyPr/>
-        <a:lstStyle/>
-        <a:p>
-          <a:endParaRPr lang="en-US"/>
-        </a:p>
-      </dgm:t>
-    </dgm:pt>
-    <dgm:pt modelId="{030A6B87-CA32-C340-A552-365F7A05C57F}" type="sibTrans" cxnId="{467F9BED-D392-3940-B061-1699282DB62A}">
-      <dgm:prSet/>
-      <dgm:spPr>
-        <a:solidFill>
-          <a:schemeClr val="bg2"/>
-        </a:solidFill>
-      </dgm:spPr>
-      <dgm:t>
-        <a:bodyPr/>
-        <a:lstStyle/>
-        <a:p>
-          <a:endParaRPr lang="en-US"/>
-        </a:p>
-      </dgm:t>
-    </dgm:pt>
-    <dgm:pt modelId="{60FEA49A-52E5-FB49-B9D7-919B8E8D64F4}">
-      <dgm:prSet/>
-      <dgm:spPr>
-        <a:solidFill>
-          <a:schemeClr val="accent6">
-            <a:lumMod val="50000"/>
-          </a:schemeClr>
-        </a:solidFill>
-      </dgm:spPr>
-      <dgm:t>
-        <a:bodyPr/>
-        <a:lstStyle/>
-        <a:p>
-          <a:r>
-            <a:rPr lang="en-US" dirty="0"/>
-            <a:t>Entities</a:t>
-          </a:r>
-        </a:p>
-      </dgm:t>
-    </dgm:pt>
-    <dgm:pt modelId="{7E8F7D45-586B-A641-B509-72E0E3DB9800}" type="parTrans" cxnId="{B650C331-3E4A-9142-9766-ADC1499BB1FB}">
-      <dgm:prSet/>
-      <dgm:spPr/>
-      <dgm:t>
-        <a:bodyPr/>
-        <a:lstStyle/>
-        <a:p>
-          <a:endParaRPr lang="en-US"/>
-        </a:p>
-      </dgm:t>
-    </dgm:pt>
-    <dgm:pt modelId="{E893C522-81CE-8546-BA58-AAD1F1CCD417}" type="sibTrans" cxnId="{B650C331-3E4A-9142-9766-ADC1499BB1FB}">
-      <dgm:prSet/>
-      <dgm:spPr/>
-      <dgm:t>
-        <a:bodyPr/>
-        <a:lstStyle/>
-        <a:p>
-          <a:endParaRPr lang="en-US"/>
-        </a:p>
-      </dgm:t>
-    </dgm:pt>
-    <dgm:pt modelId="{8933D80B-03CB-154C-805F-13221DB1B822}">
-      <dgm:prSet/>
-      <dgm:spPr>
-        <a:solidFill>
-          <a:schemeClr val="accent6">
-            <a:lumMod val="50000"/>
-          </a:schemeClr>
-        </a:solidFill>
-      </dgm:spPr>
-      <dgm:t>
-        <a:bodyPr/>
-        <a:lstStyle/>
-        <a:p>
-          <a:r>
-            <a:rPr lang="en-US" dirty="0"/>
-            <a:t>temporal</a:t>
-          </a:r>
-        </a:p>
-      </dgm:t>
-    </dgm:pt>
-    <dgm:pt modelId="{05F6BE08-6836-6D4D-951F-A258F2E08662}" type="parTrans" cxnId="{01877F06-0601-234E-B04A-2AADE4C2D154}">
-      <dgm:prSet/>
-      <dgm:spPr/>
-      <dgm:t>
-        <a:bodyPr/>
-        <a:lstStyle/>
-        <a:p>
-          <a:endParaRPr lang="en-US"/>
-        </a:p>
-      </dgm:t>
-    </dgm:pt>
-    <dgm:pt modelId="{59F6EB62-364A-E44D-A61C-CEA12AA8589C}" type="sibTrans" cxnId="{01877F06-0601-234E-B04A-2AADE4C2D154}">
-      <dgm:prSet/>
-      <dgm:spPr/>
-      <dgm:t>
-        <a:bodyPr/>
-        <a:lstStyle/>
-        <a:p>
-          <a:endParaRPr lang="en-US"/>
-        </a:p>
-      </dgm:t>
-    </dgm:pt>
-    <dgm:pt modelId="{B1557D1B-A1F8-FC4B-B50D-EA46AEAC83E2}">
-      <dgm:prSet/>
-      <dgm:spPr>
-        <a:solidFill>
-          <a:schemeClr val="accent6">
-            <a:lumMod val="50000"/>
-          </a:schemeClr>
-        </a:solidFill>
-      </dgm:spPr>
-      <dgm:t>
-        <a:bodyPr/>
-        <a:lstStyle/>
-        <a:p>
-          <a:r>
-            <a:rPr lang="en-US" dirty="0"/>
-            <a:t>Spatial</a:t>
-          </a:r>
-        </a:p>
-      </dgm:t>
-    </dgm:pt>
-    <dgm:pt modelId="{301BEF8E-62FD-F942-ABEC-722E78A30EAC}" type="parTrans" cxnId="{0D418D49-B127-3C44-AF37-A060A5F8F42E}">
-      <dgm:prSet/>
-      <dgm:spPr/>
-      <dgm:t>
-        <a:bodyPr/>
-        <a:lstStyle/>
-        <a:p>
-          <a:endParaRPr lang="en-US"/>
-        </a:p>
-      </dgm:t>
-    </dgm:pt>
-    <dgm:pt modelId="{76EC83BA-130D-EA44-8EE3-6264D4A2F0C7}" type="sibTrans" cxnId="{0D418D49-B127-3C44-AF37-A060A5F8F42E}">
-      <dgm:prSet/>
-      <dgm:spPr/>
-      <dgm:t>
-        <a:bodyPr/>
-        <a:lstStyle/>
-        <a:p>
-          <a:endParaRPr lang="en-US"/>
-        </a:p>
-      </dgm:t>
-    </dgm:pt>
-    <dgm:pt modelId="{DDAC47D6-F859-4340-B28C-6D49EE097740}">
-      <dgm:prSet/>
-      <dgm:spPr>
-        <a:solidFill>
-          <a:schemeClr val="accent6">
-            <a:lumMod val="50000"/>
-          </a:schemeClr>
-        </a:solidFill>
-      </dgm:spPr>
-      <dgm:t>
-        <a:bodyPr/>
-        <a:lstStyle/>
-        <a:p>
-          <a:r>
-            <a:rPr lang="en-US" dirty="0"/>
-            <a:t>…</a:t>
-          </a:r>
-        </a:p>
-      </dgm:t>
-    </dgm:pt>
-    <dgm:pt modelId="{5B556703-BE01-8848-BE27-5969CF3D2B5D}" type="parTrans" cxnId="{B5AA2D8B-61D5-DB43-8D06-4875A7EB0CBD}">
-      <dgm:prSet/>
-      <dgm:spPr/>
-      <dgm:t>
-        <a:bodyPr/>
-        <a:lstStyle/>
-        <a:p>
-          <a:endParaRPr lang="en-US"/>
-        </a:p>
-      </dgm:t>
-    </dgm:pt>
-    <dgm:pt modelId="{0A2D5029-F7E5-6C47-9CF0-D5505B2F8FFB}" type="sibTrans" cxnId="{B5AA2D8B-61D5-DB43-8D06-4875A7EB0CBD}">
-      <dgm:prSet/>
-      <dgm:spPr/>
-      <dgm:t>
-        <a:bodyPr/>
-        <a:lstStyle/>
-        <a:p>
-          <a:endParaRPr lang="en-US"/>
-        </a:p>
-      </dgm:t>
-    </dgm:pt>
-    <dgm:pt modelId="{4861F807-1580-8C4F-9C33-66D2EDE9ABAD}">
-      <dgm:prSet phldrT="[Text]"/>
-      <dgm:spPr/>
-      <dgm:t>
-        <a:bodyPr/>
-        <a:lstStyle/>
-        <a:p>
-          <a:r>
-            <a:rPr lang="en-US" dirty="0"/>
-            <a:t>Models</a:t>
-          </a:r>
-        </a:p>
-      </dgm:t>
-    </dgm:pt>
-    <dgm:pt modelId="{8CC078C6-7EFD-9A46-B445-021F345DCF5A}" type="parTrans" cxnId="{881C745A-6BF5-1846-9762-D162446F8EE8}">
-      <dgm:prSet/>
-      <dgm:spPr/>
-      <dgm:t>
-        <a:bodyPr/>
-        <a:lstStyle/>
-        <a:p>
-          <a:endParaRPr lang="en-US"/>
-        </a:p>
-      </dgm:t>
-    </dgm:pt>
-    <dgm:pt modelId="{5D77E747-1467-6249-A64A-E8E192C48D64}" type="sibTrans" cxnId="{881C745A-6BF5-1846-9762-D162446F8EE8}">
-      <dgm:prSet/>
-      <dgm:spPr/>
-      <dgm:t>
-        <a:bodyPr/>
-        <a:lstStyle/>
-        <a:p>
-          <a:endParaRPr lang="en-US"/>
-        </a:p>
-      </dgm:t>
-    </dgm:pt>
-    <dgm:pt modelId="{917501D8-12A6-0D43-82EB-9B8BF9A095D6}">
-      <dgm:prSet phldrT="[Text]"/>
-      <dgm:spPr/>
-      <dgm:t>
-        <a:bodyPr/>
-        <a:lstStyle/>
-        <a:p>
-          <a:r>
-            <a:rPr lang="en-US" dirty="0"/>
-            <a:t>Dealing with Bias and Fairness</a:t>
-          </a:r>
-        </a:p>
-      </dgm:t>
-    </dgm:pt>
-    <dgm:pt modelId="{2189082E-6C82-944A-BE92-D9BC72270382}" type="parTrans" cxnId="{0E3C2485-CAF8-434B-89F0-893517E042E7}">
-      <dgm:prSet/>
-      <dgm:spPr/>
-      <dgm:t>
-        <a:bodyPr/>
-        <a:lstStyle/>
-        <a:p>
-          <a:endParaRPr lang="en-US"/>
-        </a:p>
-      </dgm:t>
-    </dgm:pt>
-    <dgm:pt modelId="{04D5671A-AE7F-BD4E-9B86-A6A6425F59A8}" type="sibTrans" cxnId="{0E3C2485-CAF8-434B-89F0-893517E042E7}">
-      <dgm:prSet/>
-      <dgm:spPr/>
-      <dgm:t>
-        <a:bodyPr/>
-        <a:lstStyle/>
-        <a:p>
-          <a:endParaRPr lang="en-US"/>
-        </a:p>
-      </dgm:t>
-    </dgm:pt>
-    <dgm:pt modelId="{1F12B085-E167-9940-8DCF-A46224752E8F}">
-      <dgm:prSet phldrT="[Text]"/>
-      <dgm:spPr>
-        <a:solidFill>
-          <a:schemeClr val="accent6">
-            <a:lumMod val="50000"/>
-          </a:schemeClr>
-        </a:solidFill>
-      </dgm:spPr>
-      <dgm:t>
-        <a:bodyPr/>
-        <a:lstStyle/>
-        <a:p>
-          <a:r>
-            <a:rPr lang="en-US" dirty="0"/>
-            <a:t>Field Trial Design</a:t>
-          </a:r>
-        </a:p>
-      </dgm:t>
-    </dgm:pt>
-    <dgm:pt modelId="{7A893FC9-C7B2-A646-8934-DEE2F8F265BA}" type="parTrans" cxnId="{87E2372F-44B8-7346-94AD-1B6CD49001EC}">
-      <dgm:prSet/>
-      <dgm:spPr/>
-      <dgm:t>
-        <a:bodyPr/>
-        <a:lstStyle/>
-        <a:p>
-          <a:endParaRPr lang="en-US"/>
-        </a:p>
-      </dgm:t>
-    </dgm:pt>
-    <dgm:pt modelId="{59E7433E-EA1A-A445-8F72-1DCCEC9CF854}" type="sibTrans" cxnId="{87E2372F-44B8-7346-94AD-1B6CD49001EC}">
-      <dgm:prSet/>
-      <dgm:spPr>
-        <a:solidFill>
-          <a:schemeClr val="accent6">
-            <a:lumMod val="50000"/>
-          </a:schemeClr>
-        </a:solidFill>
-      </dgm:spPr>
-      <dgm:t>
-        <a:bodyPr/>
-        <a:lstStyle/>
-        <a:p>
-          <a:endParaRPr lang="en-US"/>
-        </a:p>
-      </dgm:t>
-    </dgm:pt>
-    <dgm:pt modelId="{4300FFA5-0FE1-0644-9B26-EF0EC29D2E58}">
-      <dgm:prSet phldrT="[Text]"/>
-      <dgm:spPr/>
-      <dgm:t>
-        <a:bodyPr/>
-        <a:lstStyle/>
-        <a:p>
-          <a:r>
-            <a:rPr lang="en-US" dirty="0"/>
-            <a:t>Deployment</a:t>
-          </a:r>
-        </a:p>
-      </dgm:t>
-    </dgm:pt>
-    <dgm:pt modelId="{CD73BF7D-329F-4F42-9B2D-1C22A52FFC9D}" type="parTrans" cxnId="{E9A0EB78-92A5-5E4E-8437-0C6B9359762F}">
-      <dgm:prSet/>
-      <dgm:spPr/>
-      <dgm:t>
-        <a:bodyPr/>
-        <a:lstStyle/>
-        <a:p>
-          <a:endParaRPr lang="en-US"/>
-        </a:p>
-      </dgm:t>
-    </dgm:pt>
-    <dgm:pt modelId="{2C4637A3-9257-AA41-A5B8-B87451C5F477}" type="sibTrans" cxnId="{E9A0EB78-92A5-5E4E-8437-0C6B9359762F}">
-      <dgm:prSet/>
-      <dgm:spPr/>
-      <dgm:t>
-        <a:bodyPr/>
-        <a:lstStyle/>
-        <a:p>
-          <a:endParaRPr lang="en-US"/>
-        </a:p>
-      </dgm:t>
-    </dgm:pt>
-    <dgm:pt modelId="{B86E1618-0E2D-E84D-BCEB-2453703211F3}">
-      <dgm:prSet phldrT="[Text]"/>
-      <dgm:spPr>
-        <a:solidFill>
-          <a:srgbClr val="00B0F0"/>
-        </a:solidFill>
-      </dgm:spPr>
-      <dgm:t>
-        <a:bodyPr/>
-        <a:lstStyle/>
-        <a:p>
-          <a:r>
-            <a:rPr lang="en-US" dirty="0"/>
-            <a:t>Monitoring</a:t>
-          </a:r>
-        </a:p>
-      </dgm:t>
-    </dgm:pt>
-    <dgm:pt modelId="{4EFD42D0-7098-564F-980C-3F3CECAA5410}" type="parTrans" cxnId="{BE324233-F9AC-DC43-A89C-3F7FD9B5D466}">
-      <dgm:prSet/>
-      <dgm:spPr/>
-      <dgm:t>
-        <a:bodyPr/>
-        <a:lstStyle/>
-        <a:p>
-          <a:endParaRPr lang="en-US"/>
-        </a:p>
-      </dgm:t>
-    </dgm:pt>
-    <dgm:pt modelId="{877FBD8C-7A3B-5E45-8830-1FEAB09A55C5}" type="sibTrans" cxnId="{BE324233-F9AC-DC43-A89C-3F7FD9B5D466}">
-      <dgm:prSet/>
-      <dgm:spPr/>
-      <dgm:t>
-        <a:bodyPr/>
-        <a:lstStyle/>
-        <a:p>
-          <a:endParaRPr lang="en-US"/>
-        </a:p>
-      </dgm:t>
-    </dgm:pt>
-    <dgm:pt modelId="{63B03111-9832-1646-BDF4-5D9B749EF795}">
-      <dgm:prSet phldrT="[Text]"/>
-      <dgm:spPr>
-        <a:solidFill>
-          <a:schemeClr val="tx1">
-            <a:lumMod val="65000"/>
-            <a:lumOff val="35000"/>
-          </a:schemeClr>
-        </a:solidFill>
-      </dgm:spPr>
-      <dgm:t>
-        <a:bodyPr/>
-        <a:lstStyle/>
-        <a:p>
-          <a:r>
-            <a:rPr lang="en-US" dirty="0"/>
-            <a:t>Goals, Actions, Data, Analysis, Ethics</a:t>
-          </a:r>
-        </a:p>
-      </dgm:t>
-    </dgm:pt>
-    <dgm:pt modelId="{1C812E3F-39E1-CF47-BBBD-159FAEC5C786}" type="parTrans" cxnId="{9F4BBA63-304C-604B-A391-58E4720B5BE5}">
-      <dgm:prSet/>
-      <dgm:spPr/>
-      <dgm:t>
-        <a:bodyPr/>
-        <a:lstStyle/>
-        <a:p>
-          <a:endParaRPr lang="en-US"/>
-        </a:p>
-      </dgm:t>
-    </dgm:pt>
-    <dgm:pt modelId="{702B8123-1BB3-E349-AB4A-1A9D41698317}" type="sibTrans" cxnId="{9F4BBA63-304C-604B-A391-58E4720B5BE5}">
-      <dgm:prSet/>
-      <dgm:spPr/>
-      <dgm:t>
-        <a:bodyPr/>
-        <a:lstStyle/>
-        <a:p>
-          <a:endParaRPr lang="en-US"/>
-        </a:p>
-      </dgm:t>
-    </dgm:pt>
-    <dgm:pt modelId="{CBF254FA-D4E0-B74E-A18D-AE53AEBD67CD}" type="pres">
-      <dgm:prSet presAssocID="{E9FB0F4E-6967-3B44-A32F-E8B1C7AE98D5}" presName="diagram" presStyleCnt="0">
-        <dgm:presLayoutVars>
-          <dgm:dir/>
-          <dgm:resizeHandles val="exact"/>
-        </dgm:presLayoutVars>
-      </dgm:prSet>
-      <dgm:spPr/>
-    </dgm:pt>
-    <dgm:pt modelId="{B4D5E3D8-47D8-1A4C-9387-6DE60324DF6F}" type="pres">
-      <dgm:prSet presAssocID="{75350DEC-25F7-F240-A4BF-3A92E80C52F5}" presName="node" presStyleLbl="node1" presStyleIdx="0" presStyleCnt="10">
-        <dgm:presLayoutVars>
-          <dgm:bulletEnabled val="1"/>
-        </dgm:presLayoutVars>
-      </dgm:prSet>
-      <dgm:spPr/>
-    </dgm:pt>
-    <dgm:pt modelId="{A58869D2-B78E-DD40-ACB3-9F052F33CBCE}" type="pres">
-      <dgm:prSet presAssocID="{BAC284C6-3986-1C48-93AC-8FEBC662ECEE}" presName="sibTrans" presStyleLbl="sibTrans2D1" presStyleIdx="0" presStyleCnt="9"/>
-      <dgm:spPr/>
-    </dgm:pt>
-    <dgm:pt modelId="{814C8FA7-CFA6-FA42-8BC8-CD119ED58623}" type="pres">
-      <dgm:prSet presAssocID="{BAC284C6-3986-1C48-93AC-8FEBC662ECEE}" presName="connectorText" presStyleLbl="sibTrans2D1" presStyleIdx="0" presStyleCnt="9"/>
-      <dgm:spPr/>
-    </dgm:pt>
-    <dgm:pt modelId="{C234DD4B-5CB7-E549-AD0E-83532D584FCF}" type="pres">
-      <dgm:prSet presAssocID="{4F2509E8-87E6-2347-B926-EB9BDDECA6FD}" presName="node" presStyleLbl="node1" presStyleIdx="1" presStyleCnt="10">
-        <dgm:presLayoutVars>
-          <dgm:bulletEnabled val="1"/>
-        </dgm:presLayoutVars>
-      </dgm:prSet>
-      <dgm:spPr/>
-    </dgm:pt>
-    <dgm:pt modelId="{16C02E65-2210-C24E-8692-38A2A70EC148}" type="pres">
-      <dgm:prSet presAssocID="{748D4455-259E-4245-ADD2-8DDAC2A60773}" presName="sibTrans" presStyleLbl="sibTrans2D1" presStyleIdx="1" presStyleCnt="9"/>
-      <dgm:spPr/>
-    </dgm:pt>
-    <dgm:pt modelId="{7060A806-1549-3F45-A072-7BB9691C2D8D}" type="pres">
-      <dgm:prSet presAssocID="{748D4455-259E-4245-ADD2-8DDAC2A60773}" presName="connectorText" presStyleLbl="sibTrans2D1" presStyleIdx="1" presStyleCnt="9"/>
-      <dgm:spPr/>
-    </dgm:pt>
-    <dgm:pt modelId="{FBF1C564-B2B8-4C41-BE63-B8171F8EB76E}" type="pres">
-      <dgm:prSet presAssocID="{7B079A50-DF5E-0A4C-9491-2FBAFC0F785B}" presName="node" presStyleLbl="node1" presStyleIdx="2" presStyleCnt="10">
-        <dgm:presLayoutVars>
-          <dgm:bulletEnabled val="1"/>
-        </dgm:presLayoutVars>
-      </dgm:prSet>
-      <dgm:spPr/>
-    </dgm:pt>
-    <dgm:pt modelId="{680472FB-1DED-B043-9C18-8E9AFCBED6E9}" type="pres">
-      <dgm:prSet presAssocID="{00735B98-C924-5743-B429-DBBBDEA50165}" presName="sibTrans" presStyleLbl="sibTrans2D1" presStyleIdx="2" presStyleCnt="9"/>
-      <dgm:spPr/>
-    </dgm:pt>
-    <dgm:pt modelId="{002AA36D-CAF6-0343-B244-6F6849B9EB75}" type="pres">
-      <dgm:prSet presAssocID="{00735B98-C924-5743-B429-DBBBDEA50165}" presName="connectorText" presStyleLbl="sibTrans2D1" presStyleIdx="2" presStyleCnt="9"/>
-      <dgm:spPr/>
-    </dgm:pt>
-    <dgm:pt modelId="{CC8F3904-974E-2647-9B88-B6062079D1ED}" type="pres">
-      <dgm:prSet presAssocID="{EB4866D8-1266-8945-89C4-F4CD4F9D8A6F}" presName="node" presStyleLbl="node1" presStyleIdx="3" presStyleCnt="10">
-        <dgm:presLayoutVars>
-          <dgm:bulletEnabled val="1"/>
-        </dgm:presLayoutVars>
-      </dgm:prSet>
-      <dgm:spPr/>
-    </dgm:pt>
-    <dgm:pt modelId="{5383FDA3-64FA-604A-8CAF-995772572DB0}" type="pres">
-      <dgm:prSet presAssocID="{206E47A8-99B6-484A-AD35-04DCB9238B9B}" presName="sibTrans" presStyleLbl="sibTrans2D1" presStyleIdx="3" presStyleCnt="9"/>
-      <dgm:spPr/>
-    </dgm:pt>
-    <dgm:pt modelId="{AC48ED73-8B05-6041-911E-F23E178815C4}" type="pres">
-      <dgm:prSet presAssocID="{206E47A8-99B6-484A-AD35-04DCB9238B9B}" presName="connectorText" presStyleLbl="sibTrans2D1" presStyleIdx="3" presStyleCnt="9"/>
-      <dgm:spPr/>
-    </dgm:pt>
-    <dgm:pt modelId="{F11F753D-D453-BC4F-BACE-C4F8A11ECEA5}" type="pres">
-      <dgm:prSet presAssocID="{AE199458-77CF-8440-8970-F024006EA226}" presName="node" presStyleLbl="node1" presStyleIdx="4" presStyleCnt="10">
-        <dgm:presLayoutVars>
-          <dgm:bulletEnabled val="1"/>
-        </dgm:presLayoutVars>
-      </dgm:prSet>
-      <dgm:spPr/>
-    </dgm:pt>
-    <dgm:pt modelId="{F8E19199-589F-1946-8222-73EA4584121E}" type="pres">
-      <dgm:prSet presAssocID="{89DBDFDC-5EB5-0B49-A8D0-DB22ECB982AF}" presName="sibTrans" presStyleLbl="sibTrans2D1" presStyleIdx="4" presStyleCnt="9"/>
-      <dgm:spPr/>
-    </dgm:pt>
-    <dgm:pt modelId="{1E3ABFF9-C6C0-0441-8FEA-3F98FEF0374E}" type="pres">
-      <dgm:prSet presAssocID="{89DBDFDC-5EB5-0B49-A8D0-DB22ECB982AF}" presName="connectorText" presStyleLbl="sibTrans2D1" presStyleIdx="4" presStyleCnt="9"/>
-      <dgm:spPr/>
-    </dgm:pt>
-    <dgm:pt modelId="{529FCC09-4687-E147-80E8-2EB7609DC9CF}" type="pres">
-      <dgm:prSet presAssocID="{882FED25-8C48-F941-A0FE-6B2DFF5CD464}" presName="node" presStyleLbl="node1" presStyleIdx="5" presStyleCnt="10">
-        <dgm:presLayoutVars>
-          <dgm:bulletEnabled val="1"/>
-        </dgm:presLayoutVars>
-      </dgm:prSet>
-      <dgm:spPr/>
-    </dgm:pt>
-    <dgm:pt modelId="{5381123D-2C93-3241-8E06-B77D04CAE8EC}" type="pres">
-      <dgm:prSet presAssocID="{030A6B87-CA32-C340-A552-365F7A05C57F}" presName="sibTrans" presStyleLbl="sibTrans2D1" presStyleIdx="5" presStyleCnt="9"/>
-      <dgm:spPr/>
-    </dgm:pt>
-    <dgm:pt modelId="{2E3787C8-BF17-C343-9F7D-55355502CEE3}" type="pres">
-      <dgm:prSet presAssocID="{030A6B87-CA32-C340-A552-365F7A05C57F}" presName="connectorText" presStyleLbl="sibTrans2D1" presStyleIdx="5" presStyleCnt="9"/>
-      <dgm:spPr/>
-    </dgm:pt>
-    <dgm:pt modelId="{1850AAD1-4903-FE47-A71D-0B73E666CD99}" type="pres">
-      <dgm:prSet presAssocID="{917501D8-12A6-0D43-82EB-9B8BF9A095D6}" presName="node" presStyleLbl="node1" presStyleIdx="6" presStyleCnt="10">
-        <dgm:presLayoutVars>
-          <dgm:bulletEnabled val="1"/>
-        </dgm:presLayoutVars>
-      </dgm:prSet>
-      <dgm:spPr/>
-    </dgm:pt>
-    <dgm:pt modelId="{D7CE2DAE-ABF0-9641-AE1A-0DB79AEBD84A}" type="pres">
-      <dgm:prSet presAssocID="{04D5671A-AE7F-BD4E-9B86-A6A6425F59A8}" presName="sibTrans" presStyleLbl="sibTrans2D1" presStyleIdx="6" presStyleCnt="9"/>
-      <dgm:spPr/>
-    </dgm:pt>
-    <dgm:pt modelId="{DC4C8257-9496-D04B-A26B-2200A3FFE3E7}" type="pres">
-      <dgm:prSet presAssocID="{04D5671A-AE7F-BD4E-9B86-A6A6425F59A8}" presName="connectorText" presStyleLbl="sibTrans2D1" presStyleIdx="6" presStyleCnt="9"/>
-      <dgm:spPr/>
-    </dgm:pt>
-    <dgm:pt modelId="{0538887E-FF31-324E-B401-E87E44AFF0AA}" type="pres">
-      <dgm:prSet presAssocID="{1F12B085-E167-9940-8DCF-A46224752E8F}" presName="node" presStyleLbl="node1" presStyleIdx="7" presStyleCnt="10">
-        <dgm:presLayoutVars>
-          <dgm:bulletEnabled val="1"/>
-        </dgm:presLayoutVars>
-      </dgm:prSet>
-      <dgm:spPr/>
-    </dgm:pt>
-    <dgm:pt modelId="{92EB25B1-D4AE-754E-BD44-115E26D1FF80}" type="pres">
-      <dgm:prSet presAssocID="{59E7433E-EA1A-A445-8F72-1DCCEC9CF854}" presName="sibTrans" presStyleLbl="sibTrans2D1" presStyleIdx="7" presStyleCnt="9"/>
-      <dgm:spPr/>
-    </dgm:pt>
-    <dgm:pt modelId="{B4D2AADB-2320-D741-9683-970A9AF56C3E}" type="pres">
-      <dgm:prSet presAssocID="{59E7433E-EA1A-A445-8F72-1DCCEC9CF854}" presName="connectorText" presStyleLbl="sibTrans2D1" presStyleIdx="7" presStyleCnt="9"/>
-      <dgm:spPr/>
-    </dgm:pt>
-    <dgm:pt modelId="{C225C079-1737-3742-99A0-0A7B593214FB}" type="pres">
-      <dgm:prSet presAssocID="{4300FFA5-0FE1-0644-9B26-EF0EC29D2E58}" presName="node" presStyleLbl="node1" presStyleIdx="8" presStyleCnt="10">
-        <dgm:presLayoutVars>
-          <dgm:bulletEnabled val="1"/>
-        </dgm:presLayoutVars>
-      </dgm:prSet>
-      <dgm:spPr/>
-    </dgm:pt>
-    <dgm:pt modelId="{C8297064-9915-AB4E-A9CB-FFEA8FC197B9}" type="pres">
-      <dgm:prSet presAssocID="{2C4637A3-9257-AA41-A5B8-B87451C5F477}" presName="sibTrans" presStyleLbl="sibTrans2D1" presStyleIdx="8" presStyleCnt="9"/>
-      <dgm:spPr/>
-    </dgm:pt>
-    <dgm:pt modelId="{EDC8E22C-F874-6448-9DE8-54F7348385E0}" type="pres">
-      <dgm:prSet presAssocID="{2C4637A3-9257-AA41-A5B8-B87451C5F477}" presName="connectorText" presStyleLbl="sibTrans2D1" presStyleIdx="8" presStyleCnt="9"/>
-      <dgm:spPr/>
-    </dgm:pt>
-    <dgm:pt modelId="{098F0226-B690-1B45-B506-7C933BFB7998}" type="pres">
-      <dgm:prSet presAssocID="{B86E1618-0E2D-E84D-BCEB-2453703211F3}" presName="node" presStyleLbl="node1" presStyleIdx="9" presStyleCnt="10">
-        <dgm:presLayoutVars>
-          <dgm:bulletEnabled val="1"/>
-        </dgm:presLayoutVars>
-      </dgm:prSet>
-      <dgm:spPr/>
-    </dgm:pt>
-  </dgm:ptLst>
-  <dgm:cxnLst>
-    <dgm:cxn modelId="{B95DCD03-4AAD-4B42-9243-666F8DB599E8}" type="presOf" srcId="{8933D80B-03CB-154C-805F-13221DB1B822}" destId="{FBF1C564-B2B8-4C41-BE63-B8171F8EB76E}" srcOrd="0" destOrd="2" presId="urn:microsoft.com/office/officeart/2005/8/layout/process5"/>
-    <dgm:cxn modelId="{30E4E603-88A2-FC48-B384-BE3A5BB6B8C0}" type="presOf" srcId="{BAC284C6-3986-1C48-93AC-8FEBC662ECEE}" destId="{814C8FA7-CFA6-FA42-8BC8-CD119ED58623}" srcOrd="1" destOrd="0" presId="urn:microsoft.com/office/officeart/2005/8/layout/process5"/>
-    <dgm:cxn modelId="{B3721305-A4DC-1D4B-9870-E1245EA94AA1}" type="presOf" srcId="{5FE83F24-F694-6A4B-99C0-78300CB546E1}" destId="{CC8F3904-974E-2647-9B88-B6062079D1ED}" srcOrd="0" destOrd="1" presId="urn:microsoft.com/office/officeart/2005/8/layout/process5"/>
-    <dgm:cxn modelId="{01877F06-0601-234E-B04A-2AADE4C2D154}" srcId="{7B079A50-DF5E-0A4C-9491-2FBAFC0F785B}" destId="{8933D80B-03CB-154C-805F-13221DB1B822}" srcOrd="1" destOrd="0" parTransId="{05F6BE08-6836-6D4D-951F-A258F2E08662}" sibTransId="{59F6EB62-364A-E44D-A61C-CEA12AA8589C}"/>
-    <dgm:cxn modelId="{0E10E907-0ADA-4D45-9069-B9A3AC9E0310}" type="presOf" srcId="{7B079A50-DF5E-0A4C-9491-2FBAFC0F785B}" destId="{FBF1C564-B2B8-4C41-BE63-B8171F8EB76E}" srcOrd="0" destOrd="0" presId="urn:microsoft.com/office/officeart/2005/8/layout/process5"/>
-    <dgm:cxn modelId="{D5992D08-7598-A94A-AD4C-62B4CD474D26}" type="presOf" srcId="{761579F4-10DF-F244-9532-25DEF4807D83}" destId="{C234DD4B-5CB7-E549-AD0E-83532D584FCF}" srcOrd="0" destOrd="3" presId="urn:microsoft.com/office/officeart/2005/8/layout/process5"/>
-    <dgm:cxn modelId="{F62E5C0C-C9DB-474B-99E5-505C0287727A}" type="presOf" srcId="{B86E1618-0E2D-E84D-BCEB-2453703211F3}" destId="{098F0226-B690-1B45-B506-7C933BFB7998}" srcOrd="0" destOrd="0" presId="urn:microsoft.com/office/officeart/2005/8/layout/process5"/>
-    <dgm:cxn modelId="{81D07A23-EA35-C94F-81FA-E72150079877}" srcId="{E9FB0F4E-6967-3B44-A32F-E8B1C7AE98D5}" destId="{75350DEC-25F7-F240-A4BF-3A92E80C52F5}" srcOrd="0" destOrd="0" parTransId="{965794C1-5767-E94D-8105-ED104B4D33E2}" sibTransId="{BAC284C6-3986-1C48-93AC-8FEBC662ECEE}"/>
-    <dgm:cxn modelId="{BFD8C726-235C-FD40-B9F6-87513427E29C}" type="presOf" srcId="{4861F807-1580-8C4F-9C33-66D2EDE9ABAD}" destId="{CC8F3904-974E-2647-9B88-B6062079D1ED}" srcOrd="0" destOrd="4" presId="urn:microsoft.com/office/officeart/2005/8/layout/process5"/>
-    <dgm:cxn modelId="{A5814027-F41C-1F45-84CD-3391AC53F8A5}" type="presOf" srcId="{DDAC47D6-F859-4340-B28C-6D49EE097740}" destId="{FBF1C564-B2B8-4C41-BE63-B8171F8EB76E}" srcOrd="0" destOrd="4" presId="urn:microsoft.com/office/officeart/2005/8/layout/process5"/>
-    <dgm:cxn modelId="{4252FF2A-9D9C-154A-8E00-7845AEFA42A3}" type="presOf" srcId="{AE199458-77CF-8440-8970-F024006EA226}" destId="{F11F753D-D453-BC4F-BACE-C4F8A11ECEA5}" srcOrd="0" destOrd="0" presId="urn:microsoft.com/office/officeart/2005/8/layout/process5"/>
-    <dgm:cxn modelId="{87E2372F-44B8-7346-94AD-1B6CD49001EC}" srcId="{E9FB0F4E-6967-3B44-A32F-E8B1C7AE98D5}" destId="{1F12B085-E167-9940-8DCF-A46224752E8F}" srcOrd="7" destOrd="0" parTransId="{7A893FC9-C7B2-A646-8934-DEE2F8F265BA}" sibTransId="{59E7433E-EA1A-A445-8F72-1DCCEC9CF854}"/>
-    <dgm:cxn modelId="{B650C331-3E4A-9142-9766-ADC1499BB1FB}" srcId="{7B079A50-DF5E-0A4C-9491-2FBAFC0F785B}" destId="{60FEA49A-52E5-FB49-B9D7-919B8E8D64F4}" srcOrd="0" destOrd="0" parTransId="{7E8F7D45-586B-A641-B509-72E0E3DB9800}" sibTransId="{E893C522-81CE-8546-BA58-AAD1F1CCD417}"/>
-    <dgm:cxn modelId="{BD857532-F26B-7C43-A239-905B90EF1A8C}" type="presOf" srcId="{E9FB0F4E-6967-3B44-A32F-E8B1C7AE98D5}" destId="{CBF254FA-D4E0-B74E-A18D-AE53AEBD67CD}" srcOrd="0" destOrd="0" presId="urn:microsoft.com/office/officeart/2005/8/layout/process5"/>
-    <dgm:cxn modelId="{BE324233-F9AC-DC43-A89C-3F7FD9B5D466}" srcId="{E9FB0F4E-6967-3B44-A32F-E8B1C7AE98D5}" destId="{B86E1618-0E2D-E84D-BCEB-2453703211F3}" srcOrd="9" destOrd="0" parTransId="{4EFD42D0-7098-564F-980C-3F3CECAA5410}" sibTransId="{877FBD8C-7A3B-5E45-8830-1FEAB09A55C5}"/>
-    <dgm:cxn modelId="{27375D36-313F-2A44-B2E2-0C6FE9D62D1A}" type="presOf" srcId="{75350DEC-25F7-F240-A4BF-3A92E80C52F5}" destId="{B4D5E3D8-47D8-1A4C-9387-6DE60324DF6F}" srcOrd="0" destOrd="0" presId="urn:microsoft.com/office/officeart/2005/8/layout/process5"/>
-    <dgm:cxn modelId="{FC1AC939-5A01-D84B-8800-0E045D0F93C8}" srcId="{AE199458-77CF-8440-8970-F024006EA226}" destId="{69F25C00-F7E1-8B47-8544-B81240B6C7F2}" srcOrd="1" destOrd="0" parTransId="{258EB4FC-8DB3-204B-AE19-757E57DBF8E2}" sibTransId="{2C4AF3F2-4BEF-1E41-A9DC-C2CCA7D68218}"/>
-    <dgm:cxn modelId="{DF8FAA3E-AA34-BD4E-87F8-31F1AB63A13B}" type="presOf" srcId="{748D4455-259E-4245-ADD2-8DDAC2A60773}" destId="{16C02E65-2210-C24E-8692-38A2A70EC148}" srcOrd="0" destOrd="0" presId="urn:microsoft.com/office/officeart/2005/8/layout/process5"/>
-    <dgm:cxn modelId="{0D418D49-B127-3C44-AF37-A060A5F8F42E}" srcId="{7B079A50-DF5E-0A4C-9491-2FBAFC0F785B}" destId="{B1557D1B-A1F8-FC4B-B50D-EA46AEAC83E2}" srcOrd="2" destOrd="0" parTransId="{301BEF8E-62FD-F942-ABEC-722E78A30EAC}" sibTransId="{76EC83BA-130D-EA44-8EE3-6264D4A2F0C7}"/>
-    <dgm:cxn modelId="{6A32B64F-6964-414F-AD07-B5887751C75C}" type="presOf" srcId="{882FED25-8C48-F941-A0FE-6B2DFF5CD464}" destId="{529FCC09-4687-E147-80E8-2EB7609DC9CF}" srcOrd="0" destOrd="0" presId="urn:microsoft.com/office/officeart/2005/8/layout/process5"/>
-    <dgm:cxn modelId="{57E78F58-C4F1-C642-9A8E-4D1032FFACD8}" type="presOf" srcId="{471C43CE-832D-774D-BB7A-57512EFB5879}" destId="{CC8F3904-974E-2647-9B88-B6062079D1ED}" srcOrd="0" destOrd="3" presId="urn:microsoft.com/office/officeart/2005/8/layout/process5"/>
-    <dgm:cxn modelId="{881C745A-6BF5-1846-9762-D162446F8EE8}" srcId="{EB4866D8-1266-8945-89C4-F4CD4F9D8A6F}" destId="{4861F807-1580-8C4F-9C33-66D2EDE9ABAD}" srcOrd="3" destOrd="0" parTransId="{8CC078C6-7EFD-9A46-B445-021F345DCF5A}" sibTransId="{5D77E747-1467-6249-A64A-E8E192C48D64}"/>
-    <dgm:cxn modelId="{4D5E675C-49B8-1948-9D17-9FC44F33719A}" type="presOf" srcId="{59E7433E-EA1A-A445-8F72-1DCCEC9CF854}" destId="{B4D2AADB-2320-D741-9683-970A9AF56C3E}" srcOrd="1" destOrd="0" presId="urn:microsoft.com/office/officeart/2005/8/layout/process5"/>
-    <dgm:cxn modelId="{09F5B15E-E1AD-2E4A-AFF2-C91E75C311A9}" srcId="{AE199458-77CF-8440-8970-F024006EA226}" destId="{86AA592B-D489-5D4D-93FE-79A538493DA3}" srcOrd="0" destOrd="0" parTransId="{06E1BE15-F8C7-9C4D-A90E-557728BBB1D3}" sibTransId="{9EB8E24C-CDF4-7B49-8A25-38E38E64AA9F}"/>
-    <dgm:cxn modelId="{ED970163-ECEE-D849-9B40-616074ECBD3F}" srcId="{EB4866D8-1266-8945-89C4-F4CD4F9D8A6F}" destId="{5FE83F24-F694-6A4B-99C0-78300CB546E1}" srcOrd="0" destOrd="0" parTransId="{E15C2973-AC33-0145-8745-682DFB76DED0}" sibTransId="{A1EBC4F8-774A-B045-880A-03E7D798D46B}"/>
-    <dgm:cxn modelId="{6C791863-053A-EA42-B1FD-F40E2AC8732E}" type="presOf" srcId="{6E882DEC-3034-E942-B5AA-2835D77DD5C8}" destId="{CC8F3904-974E-2647-9B88-B6062079D1ED}" srcOrd="0" destOrd="2" presId="urn:microsoft.com/office/officeart/2005/8/layout/process5"/>
-    <dgm:cxn modelId="{9F4BBA63-304C-604B-A391-58E4720B5BE5}" srcId="{75350DEC-25F7-F240-A4BF-3A92E80C52F5}" destId="{63B03111-9832-1646-BDF4-5D9B749EF795}" srcOrd="0" destOrd="0" parTransId="{1C812E3F-39E1-CF47-BBBD-159FAEC5C786}" sibTransId="{702B8123-1BB3-E349-AB4A-1A9D41698317}"/>
-    <dgm:cxn modelId="{315CA365-BBD4-8349-91E9-B1E78879A052}" type="presOf" srcId="{2C4637A3-9257-AA41-A5B8-B87451C5F477}" destId="{EDC8E22C-F874-6448-9DE8-54F7348385E0}" srcOrd="1" destOrd="0" presId="urn:microsoft.com/office/officeart/2005/8/layout/process5"/>
-    <dgm:cxn modelId="{C0BF1A68-E872-0A45-B831-114F7AEF9B31}" type="presOf" srcId="{BAC284C6-3986-1C48-93AC-8FEBC662ECEE}" destId="{A58869D2-B78E-DD40-ACB3-9F052F33CBCE}" srcOrd="0" destOrd="0" presId="urn:microsoft.com/office/officeart/2005/8/layout/process5"/>
-    <dgm:cxn modelId="{CCD2446D-140E-2448-AD38-D7354F2F5BD0}" type="presOf" srcId="{86AA592B-D489-5D4D-93FE-79A538493DA3}" destId="{F11F753D-D453-BC4F-BACE-C4F8A11ECEA5}" srcOrd="0" destOrd="1" presId="urn:microsoft.com/office/officeart/2005/8/layout/process5"/>
-    <dgm:cxn modelId="{E1407870-18DB-5544-A0A5-2DE0EF6D62BF}" type="presOf" srcId="{EB4866D8-1266-8945-89C4-F4CD4F9D8A6F}" destId="{CC8F3904-974E-2647-9B88-B6062079D1ED}" srcOrd="0" destOrd="0" presId="urn:microsoft.com/office/officeart/2005/8/layout/process5"/>
-    <dgm:cxn modelId="{43B9E771-FA74-B642-9EED-7FE4A7CDF11A}" srcId="{4F2509E8-87E6-2347-B926-EB9BDDECA6FD}" destId="{C8AF58C4-450C-0C4C-83CB-1474D3ADA25F}" srcOrd="1" destOrd="0" parTransId="{DEBC2A1C-65D7-5E43-945C-60BBA4631011}" sibTransId="{51773514-44C5-134E-A69D-D30DCA75AB37}"/>
-    <dgm:cxn modelId="{BB741775-A4C8-C54B-B161-F15E4AF928EC}" type="presOf" srcId="{B1557D1B-A1F8-FC4B-B50D-EA46AEAC83E2}" destId="{FBF1C564-B2B8-4C41-BE63-B8171F8EB76E}" srcOrd="0" destOrd="3" presId="urn:microsoft.com/office/officeart/2005/8/layout/process5"/>
-    <dgm:cxn modelId="{9BF83777-08E0-6140-9D35-BF7D8AF8A067}" srcId="{E9FB0F4E-6967-3B44-A32F-E8B1C7AE98D5}" destId="{4F2509E8-87E6-2347-B926-EB9BDDECA6FD}" srcOrd="1" destOrd="0" parTransId="{B4B1EEE1-8225-A643-B681-A7F3FC14ECAD}" sibTransId="{748D4455-259E-4245-ADD2-8DDAC2A60773}"/>
-    <dgm:cxn modelId="{E9A0EB78-92A5-5E4E-8437-0C6B9359762F}" srcId="{E9FB0F4E-6967-3B44-A32F-E8B1C7AE98D5}" destId="{4300FFA5-0FE1-0644-9B26-EF0EC29D2E58}" srcOrd="8" destOrd="0" parTransId="{CD73BF7D-329F-4F42-9B2D-1C22A52FFC9D}" sibTransId="{2C4637A3-9257-AA41-A5B8-B87451C5F477}"/>
-    <dgm:cxn modelId="{E1BE627B-6B84-9F41-8C17-2CB0A302B158}" type="presOf" srcId="{04D5671A-AE7F-BD4E-9B86-A6A6425F59A8}" destId="{D7CE2DAE-ABF0-9641-AE1A-0DB79AEBD84A}" srcOrd="0" destOrd="0" presId="urn:microsoft.com/office/officeart/2005/8/layout/process5"/>
-    <dgm:cxn modelId="{1195907C-1741-0E4D-8E5E-6B3B4B259DEF}" type="presOf" srcId="{030A6B87-CA32-C340-A552-365F7A05C57F}" destId="{5381123D-2C93-3241-8E06-B77D04CAE8EC}" srcOrd="0" destOrd="0" presId="urn:microsoft.com/office/officeart/2005/8/layout/process5"/>
-    <dgm:cxn modelId="{99C2797F-C2E2-3A4C-AAF0-DCC30D2AF05D}" type="presOf" srcId="{4F2509E8-87E6-2347-B926-EB9BDDECA6FD}" destId="{C234DD4B-5CB7-E549-AD0E-83532D584FCF}" srcOrd="0" destOrd="0" presId="urn:microsoft.com/office/officeart/2005/8/layout/process5"/>
-    <dgm:cxn modelId="{85D7D382-FAAC-4F4E-84D6-7849E5E8FF0C}" type="presOf" srcId="{917501D8-12A6-0D43-82EB-9B8BF9A095D6}" destId="{1850AAD1-4903-FE47-A71D-0B73E666CD99}" srcOrd="0" destOrd="0" presId="urn:microsoft.com/office/officeart/2005/8/layout/process5"/>
-    <dgm:cxn modelId="{0E3C2485-CAF8-434B-89F0-893517E042E7}" srcId="{E9FB0F4E-6967-3B44-A32F-E8B1C7AE98D5}" destId="{917501D8-12A6-0D43-82EB-9B8BF9A095D6}" srcOrd="6" destOrd="0" parTransId="{2189082E-6C82-944A-BE92-D9BC72270382}" sibTransId="{04D5671A-AE7F-BD4E-9B86-A6A6425F59A8}"/>
-    <dgm:cxn modelId="{5F1D6487-750A-A04B-B6FA-5348ADB40AA1}" type="presOf" srcId="{2C4637A3-9257-AA41-A5B8-B87451C5F477}" destId="{C8297064-9915-AB4E-A9CB-FFEA8FC197B9}" srcOrd="0" destOrd="0" presId="urn:microsoft.com/office/officeart/2005/8/layout/process5"/>
-    <dgm:cxn modelId="{B5AA2D8B-61D5-DB43-8D06-4875A7EB0CBD}" srcId="{7B079A50-DF5E-0A4C-9491-2FBAFC0F785B}" destId="{DDAC47D6-F859-4340-B28C-6D49EE097740}" srcOrd="3" destOrd="0" parTransId="{5B556703-BE01-8848-BE27-5969CF3D2B5D}" sibTransId="{0A2D5029-F7E5-6C47-9CF0-D5505B2F8FFB}"/>
-    <dgm:cxn modelId="{94756F8D-4FC3-2F4F-8093-95D1E8FDA07D}" type="presOf" srcId="{89DBDFDC-5EB5-0B49-A8D0-DB22ECB982AF}" destId="{1E3ABFF9-C6C0-0441-8FEA-3F98FEF0374E}" srcOrd="1" destOrd="0" presId="urn:microsoft.com/office/officeart/2005/8/layout/process5"/>
-    <dgm:cxn modelId="{78913F91-30D2-D14B-B80B-1BDF3244B2A6}" type="presOf" srcId="{1F12B085-E167-9940-8DCF-A46224752E8F}" destId="{0538887E-FF31-324E-B401-E87E44AFF0AA}" srcOrd="0" destOrd="0" presId="urn:microsoft.com/office/officeart/2005/8/layout/process5"/>
-    <dgm:cxn modelId="{B494B79C-7119-2745-954F-0FE480A17145}" type="presOf" srcId="{C8AF58C4-450C-0C4C-83CB-1474D3ADA25F}" destId="{C234DD4B-5CB7-E549-AD0E-83532D584FCF}" srcOrd="0" destOrd="2" presId="urn:microsoft.com/office/officeart/2005/8/layout/process5"/>
-    <dgm:cxn modelId="{A454DBA0-21A9-3941-9DF2-4DD870F537A3}" srcId="{E9FB0F4E-6967-3B44-A32F-E8B1C7AE98D5}" destId="{7B079A50-DF5E-0A4C-9491-2FBAFC0F785B}" srcOrd="2" destOrd="0" parTransId="{BA902E5D-518F-0749-86BA-04AA510BA959}" sibTransId="{00735B98-C924-5743-B429-DBBBDEA50165}"/>
-    <dgm:cxn modelId="{8C017CA3-42AB-BD48-8C05-A5BDA2B79E4B}" type="presOf" srcId="{59E7433E-EA1A-A445-8F72-1DCCEC9CF854}" destId="{92EB25B1-D4AE-754E-BD44-115E26D1FF80}" srcOrd="0" destOrd="0" presId="urn:microsoft.com/office/officeart/2005/8/layout/process5"/>
-    <dgm:cxn modelId="{88A5F4A3-745B-D44B-AEC4-67B96700A686}" type="presOf" srcId="{206E47A8-99B6-484A-AD35-04DCB9238B9B}" destId="{AC48ED73-8B05-6041-911E-F23E178815C4}" srcOrd="1" destOrd="0" presId="urn:microsoft.com/office/officeart/2005/8/layout/process5"/>
-    <dgm:cxn modelId="{2038CBA5-A8B4-2F4F-88D5-D270FCD148DC}" type="presOf" srcId="{89DBDFDC-5EB5-0B49-A8D0-DB22ECB982AF}" destId="{F8E19199-589F-1946-8222-73EA4584121E}" srcOrd="0" destOrd="0" presId="urn:microsoft.com/office/officeart/2005/8/layout/process5"/>
-    <dgm:cxn modelId="{9A8098B2-9CE9-D942-9547-38EF361DD3D4}" srcId="{EB4866D8-1266-8945-89C4-F4CD4F9D8A6F}" destId="{6E882DEC-3034-E942-B5AA-2835D77DD5C8}" srcOrd="1" destOrd="0" parTransId="{11E32BAA-4A06-9844-B381-3F8D7D686934}" sibTransId="{DE8B183B-7E7F-5749-9A67-A6C365A09A85}"/>
-    <dgm:cxn modelId="{AA15AFB2-2C77-3142-AD36-8D6ED0CAACDE}" type="presOf" srcId="{04D5671A-AE7F-BD4E-9B86-A6A6425F59A8}" destId="{DC4C8257-9496-D04B-A26B-2200A3FFE3E7}" srcOrd="1" destOrd="0" presId="urn:microsoft.com/office/officeart/2005/8/layout/process5"/>
-    <dgm:cxn modelId="{A56E20BA-CE81-3845-B63D-BDC1718CA0DA}" type="presOf" srcId="{F9BD6EF9-8382-F144-B9CD-FB838C6C03F9}" destId="{C234DD4B-5CB7-E549-AD0E-83532D584FCF}" srcOrd="0" destOrd="1" presId="urn:microsoft.com/office/officeart/2005/8/layout/process5"/>
-    <dgm:cxn modelId="{B77E5BBC-E48A-9F44-93AA-F124CC378B7E}" type="presOf" srcId="{00735B98-C924-5743-B429-DBBBDEA50165}" destId="{680472FB-1DED-B043-9C18-8E9AFCBED6E9}" srcOrd="0" destOrd="0" presId="urn:microsoft.com/office/officeart/2005/8/layout/process5"/>
-    <dgm:cxn modelId="{3DE395BD-2A5C-D449-AF86-99D3C112784F}" type="presOf" srcId="{748D4455-259E-4245-ADD2-8DDAC2A60773}" destId="{7060A806-1549-3F45-A072-7BB9691C2D8D}" srcOrd="1" destOrd="0" presId="urn:microsoft.com/office/officeart/2005/8/layout/process5"/>
-    <dgm:cxn modelId="{871584CA-547D-DB48-94C4-0F86427D355B}" type="presOf" srcId="{63B03111-9832-1646-BDF4-5D9B749EF795}" destId="{B4D5E3D8-47D8-1A4C-9387-6DE60324DF6F}" srcOrd="0" destOrd="1" presId="urn:microsoft.com/office/officeart/2005/8/layout/process5"/>
-    <dgm:cxn modelId="{7508F7CB-76FC-3043-811E-8A4CE7CBEBA3}" type="presOf" srcId="{60FEA49A-52E5-FB49-B9D7-919B8E8D64F4}" destId="{FBF1C564-B2B8-4C41-BE63-B8171F8EB76E}" srcOrd="0" destOrd="1" presId="urn:microsoft.com/office/officeart/2005/8/layout/process5"/>
-    <dgm:cxn modelId="{A0E506CD-09B9-3549-9920-3C48F6D1CA55}" type="presOf" srcId="{69F25C00-F7E1-8B47-8544-B81240B6C7F2}" destId="{F11F753D-D453-BC4F-BACE-C4F8A11ECEA5}" srcOrd="0" destOrd="2" presId="urn:microsoft.com/office/officeart/2005/8/layout/process5"/>
-    <dgm:cxn modelId="{8497B9D0-5691-E848-8EE3-C51BC656F8B1}" srcId="{E9FB0F4E-6967-3B44-A32F-E8B1C7AE98D5}" destId="{AE199458-77CF-8440-8970-F024006EA226}" srcOrd="4" destOrd="0" parTransId="{8FD87771-F4E1-DC47-B38A-8EDD08A5C725}" sibTransId="{89DBDFDC-5EB5-0B49-A8D0-DB22ECB982AF}"/>
-    <dgm:cxn modelId="{445B7ADC-F7C5-5046-9BEE-3618E0EEE919}" srcId="{4F2509E8-87E6-2347-B926-EB9BDDECA6FD}" destId="{761579F4-10DF-F244-9532-25DEF4807D83}" srcOrd="2" destOrd="0" parTransId="{4C55FAFB-140B-EA49-9492-2DC8E373D8C0}" sibTransId="{3543ED0F-366F-8D44-8E9F-A843D81464D5}"/>
-    <dgm:cxn modelId="{890194DD-304B-C447-9AF3-AFAE634C6D43}" srcId="{4F2509E8-87E6-2347-B926-EB9BDDECA6FD}" destId="{F9BD6EF9-8382-F144-B9CD-FB838C6C03F9}" srcOrd="0" destOrd="0" parTransId="{137D12B5-70FE-6847-BD89-CA99FC0D41AD}" sibTransId="{49EC0DFE-61E7-374D-A1BD-7617E9E9166B}"/>
-    <dgm:cxn modelId="{2CEF06DE-6258-7440-8A8D-E90FA2F30839}" type="presOf" srcId="{4300FFA5-0FE1-0644-9B26-EF0EC29D2E58}" destId="{C225C079-1737-3742-99A0-0A7B593214FB}" srcOrd="0" destOrd="0" presId="urn:microsoft.com/office/officeart/2005/8/layout/process5"/>
-    <dgm:cxn modelId="{A1CEA2E5-F1DD-EF48-A85B-4A04D4565509}" srcId="{E9FB0F4E-6967-3B44-A32F-E8B1C7AE98D5}" destId="{EB4866D8-1266-8945-89C4-F4CD4F9D8A6F}" srcOrd="3" destOrd="0" parTransId="{4276625C-E1F0-F840-90D6-CE76DDBB799C}" sibTransId="{206E47A8-99B6-484A-AD35-04DCB9238B9B}"/>
-    <dgm:cxn modelId="{E7042CE6-A233-CB47-A6F5-D0D71F329C45}" srcId="{EB4866D8-1266-8945-89C4-F4CD4F9D8A6F}" destId="{471C43CE-832D-774D-BB7A-57512EFB5879}" srcOrd="2" destOrd="0" parTransId="{C2B9F4EE-A410-1B4C-9D53-DB22DB03D31F}" sibTransId="{DE50C641-CD08-A846-B7EB-02241BA70688}"/>
-    <dgm:cxn modelId="{45F7F9E8-95D2-CA40-854F-9EFFBA8C51D6}" type="presOf" srcId="{206E47A8-99B6-484A-AD35-04DCB9238B9B}" destId="{5383FDA3-64FA-604A-8CAF-995772572DB0}" srcOrd="0" destOrd="0" presId="urn:microsoft.com/office/officeart/2005/8/layout/process5"/>
-    <dgm:cxn modelId="{467F9BED-D392-3940-B061-1699282DB62A}" srcId="{E9FB0F4E-6967-3B44-A32F-E8B1C7AE98D5}" destId="{882FED25-8C48-F941-A0FE-6B2DFF5CD464}" srcOrd="5" destOrd="0" parTransId="{B419AD8C-EBD7-5443-9C93-E4B849DE07B6}" sibTransId="{030A6B87-CA32-C340-A552-365F7A05C57F}"/>
-    <dgm:cxn modelId="{ACB3C1F8-AF17-F641-83DF-2B77AC2173F2}" type="presOf" srcId="{030A6B87-CA32-C340-A552-365F7A05C57F}" destId="{2E3787C8-BF17-C343-9F7D-55355502CEE3}" srcOrd="1" destOrd="0" presId="urn:microsoft.com/office/officeart/2005/8/layout/process5"/>
-    <dgm:cxn modelId="{E57CD3FB-72DE-F644-89FB-39D8FB6599FA}" type="presOf" srcId="{00735B98-C924-5743-B429-DBBBDEA50165}" destId="{002AA36D-CAF6-0343-B244-6F6849B9EB75}" srcOrd="1" destOrd="0" presId="urn:microsoft.com/office/officeart/2005/8/layout/process5"/>
-    <dgm:cxn modelId="{7F8A83C4-DF92-674F-9901-9E29B216E0A2}" type="presParOf" srcId="{CBF254FA-D4E0-B74E-A18D-AE53AEBD67CD}" destId="{B4D5E3D8-47D8-1A4C-9387-6DE60324DF6F}" srcOrd="0" destOrd="0" presId="urn:microsoft.com/office/officeart/2005/8/layout/process5"/>
-    <dgm:cxn modelId="{A08B2B19-5656-5E46-BB58-7FE7B6C3A7C9}" type="presParOf" srcId="{CBF254FA-D4E0-B74E-A18D-AE53AEBD67CD}" destId="{A58869D2-B78E-DD40-ACB3-9F052F33CBCE}" srcOrd="1" destOrd="0" presId="urn:microsoft.com/office/officeart/2005/8/layout/process5"/>
-    <dgm:cxn modelId="{C454612D-F0F0-E14D-8E48-86577D0681D6}" type="presParOf" srcId="{A58869D2-B78E-DD40-ACB3-9F052F33CBCE}" destId="{814C8FA7-CFA6-FA42-8BC8-CD119ED58623}" srcOrd="0" destOrd="0" presId="urn:microsoft.com/office/officeart/2005/8/layout/process5"/>
-    <dgm:cxn modelId="{71DD84D1-0B88-C84F-AE6E-112D74268CE8}" type="presParOf" srcId="{CBF254FA-D4E0-B74E-A18D-AE53AEBD67CD}" destId="{C234DD4B-5CB7-E549-AD0E-83532D584FCF}" srcOrd="2" destOrd="0" presId="urn:microsoft.com/office/officeart/2005/8/layout/process5"/>
-    <dgm:cxn modelId="{A6608B84-5BAF-A846-85DB-0D0B91E37986}" type="presParOf" srcId="{CBF254FA-D4E0-B74E-A18D-AE53AEBD67CD}" destId="{16C02E65-2210-C24E-8692-38A2A70EC148}" srcOrd="3" destOrd="0" presId="urn:microsoft.com/office/officeart/2005/8/layout/process5"/>
-    <dgm:cxn modelId="{DDA86523-6C9F-E448-845B-0A42D6E12684}" type="presParOf" srcId="{16C02E65-2210-C24E-8692-38A2A70EC148}" destId="{7060A806-1549-3F45-A072-7BB9691C2D8D}" srcOrd="0" destOrd="0" presId="urn:microsoft.com/office/officeart/2005/8/layout/process5"/>
-    <dgm:cxn modelId="{E512A88E-2481-0A4E-9C24-EB75ACF64300}" type="presParOf" srcId="{CBF254FA-D4E0-B74E-A18D-AE53AEBD67CD}" destId="{FBF1C564-B2B8-4C41-BE63-B8171F8EB76E}" srcOrd="4" destOrd="0" presId="urn:microsoft.com/office/officeart/2005/8/layout/process5"/>
-    <dgm:cxn modelId="{9D8126B7-D264-0641-A0BE-EA0877F06B45}" type="presParOf" srcId="{CBF254FA-D4E0-B74E-A18D-AE53AEBD67CD}" destId="{680472FB-1DED-B043-9C18-8E9AFCBED6E9}" srcOrd="5" destOrd="0" presId="urn:microsoft.com/office/officeart/2005/8/layout/process5"/>
-    <dgm:cxn modelId="{56198BEB-49F7-2C4B-8D22-8DBDD2B6C84D}" type="presParOf" srcId="{680472FB-1DED-B043-9C18-8E9AFCBED6E9}" destId="{002AA36D-CAF6-0343-B244-6F6849B9EB75}" srcOrd="0" destOrd="0" presId="urn:microsoft.com/office/officeart/2005/8/layout/process5"/>
-    <dgm:cxn modelId="{5C2B0342-8FFD-164D-AD17-CD41A98EF156}" type="presParOf" srcId="{CBF254FA-D4E0-B74E-A18D-AE53AEBD67CD}" destId="{CC8F3904-974E-2647-9B88-B6062079D1ED}" srcOrd="6" destOrd="0" presId="urn:microsoft.com/office/officeart/2005/8/layout/process5"/>
-    <dgm:cxn modelId="{9C15ACB1-1411-DD42-A865-934CA5C7156B}" type="presParOf" srcId="{CBF254FA-D4E0-B74E-A18D-AE53AEBD67CD}" destId="{5383FDA3-64FA-604A-8CAF-995772572DB0}" srcOrd="7" destOrd="0" presId="urn:microsoft.com/office/officeart/2005/8/layout/process5"/>
-    <dgm:cxn modelId="{DC9BD835-FC77-4E4F-ACB0-CA983131FD0B}" type="presParOf" srcId="{5383FDA3-64FA-604A-8CAF-995772572DB0}" destId="{AC48ED73-8B05-6041-911E-F23E178815C4}" srcOrd="0" destOrd="0" presId="urn:microsoft.com/office/officeart/2005/8/layout/process5"/>
-    <dgm:cxn modelId="{5C74A403-0B11-AF4B-9244-65D39232F884}" type="presParOf" srcId="{CBF254FA-D4E0-B74E-A18D-AE53AEBD67CD}" destId="{F11F753D-D453-BC4F-BACE-C4F8A11ECEA5}" srcOrd="8" destOrd="0" presId="urn:microsoft.com/office/officeart/2005/8/layout/process5"/>
-    <dgm:cxn modelId="{485F9726-05AC-F441-8FE0-385E5B103E36}" type="presParOf" srcId="{CBF254FA-D4E0-B74E-A18D-AE53AEBD67CD}" destId="{F8E19199-589F-1946-8222-73EA4584121E}" srcOrd="9" destOrd="0" presId="urn:microsoft.com/office/officeart/2005/8/layout/process5"/>
-    <dgm:cxn modelId="{678B64E3-BB14-9443-9C28-BAF379A94C2A}" type="presParOf" srcId="{F8E19199-589F-1946-8222-73EA4584121E}" destId="{1E3ABFF9-C6C0-0441-8FEA-3F98FEF0374E}" srcOrd="0" destOrd="0" presId="urn:microsoft.com/office/officeart/2005/8/layout/process5"/>
-    <dgm:cxn modelId="{82332E0B-3DF2-A24D-BC83-2EBFB8E2E536}" type="presParOf" srcId="{CBF254FA-D4E0-B74E-A18D-AE53AEBD67CD}" destId="{529FCC09-4687-E147-80E8-2EB7609DC9CF}" srcOrd="10" destOrd="0" presId="urn:microsoft.com/office/officeart/2005/8/layout/process5"/>
-    <dgm:cxn modelId="{84E727FC-8DF8-9948-B439-07C8E787C3A6}" type="presParOf" srcId="{CBF254FA-D4E0-B74E-A18D-AE53AEBD67CD}" destId="{5381123D-2C93-3241-8E06-B77D04CAE8EC}" srcOrd="11" destOrd="0" presId="urn:microsoft.com/office/officeart/2005/8/layout/process5"/>
-    <dgm:cxn modelId="{782EF668-7538-6A4E-B319-8B048FFE4044}" type="presParOf" srcId="{5381123D-2C93-3241-8E06-B77D04CAE8EC}" destId="{2E3787C8-BF17-C343-9F7D-55355502CEE3}" srcOrd="0" destOrd="0" presId="urn:microsoft.com/office/officeart/2005/8/layout/process5"/>
-    <dgm:cxn modelId="{6AEAA92D-C4D5-D643-8CD4-71C3C81BEC92}" type="presParOf" srcId="{CBF254FA-D4E0-B74E-A18D-AE53AEBD67CD}" destId="{1850AAD1-4903-FE47-A71D-0B73E666CD99}" srcOrd="12" destOrd="0" presId="urn:microsoft.com/office/officeart/2005/8/layout/process5"/>
-    <dgm:cxn modelId="{063A4DBB-D75A-ED40-B0C7-C31F5B69AAC9}" type="presParOf" srcId="{CBF254FA-D4E0-B74E-A18D-AE53AEBD67CD}" destId="{D7CE2DAE-ABF0-9641-AE1A-0DB79AEBD84A}" srcOrd="13" destOrd="0" presId="urn:microsoft.com/office/officeart/2005/8/layout/process5"/>
-    <dgm:cxn modelId="{0AD1E0B4-C417-0647-9C40-7D0AFD2699D0}" type="presParOf" srcId="{D7CE2DAE-ABF0-9641-AE1A-0DB79AEBD84A}" destId="{DC4C8257-9496-D04B-A26B-2200A3FFE3E7}" srcOrd="0" destOrd="0" presId="urn:microsoft.com/office/officeart/2005/8/layout/process5"/>
-    <dgm:cxn modelId="{345AAA4E-7EE1-C44D-B312-3D470151EE07}" type="presParOf" srcId="{CBF254FA-D4E0-B74E-A18D-AE53AEBD67CD}" destId="{0538887E-FF31-324E-B401-E87E44AFF0AA}" srcOrd="14" destOrd="0" presId="urn:microsoft.com/office/officeart/2005/8/layout/process5"/>
-    <dgm:cxn modelId="{274BBA1F-00C9-4243-B04B-070A035D8E9F}" type="presParOf" srcId="{CBF254FA-D4E0-B74E-A18D-AE53AEBD67CD}" destId="{92EB25B1-D4AE-754E-BD44-115E26D1FF80}" srcOrd="15" destOrd="0" presId="urn:microsoft.com/office/officeart/2005/8/layout/process5"/>
-    <dgm:cxn modelId="{3F5A20A5-5E14-734D-BDC8-243E9B365827}" type="presParOf" srcId="{92EB25B1-D4AE-754E-BD44-115E26D1FF80}" destId="{B4D2AADB-2320-D741-9683-970A9AF56C3E}" srcOrd="0" destOrd="0" presId="urn:microsoft.com/office/officeart/2005/8/layout/process5"/>
-    <dgm:cxn modelId="{9D22F929-339A-844D-9885-66AB1512A8AB}" type="presParOf" srcId="{CBF254FA-D4E0-B74E-A18D-AE53AEBD67CD}" destId="{C225C079-1737-3742-99A0-0A7B593214FB}" srcOrd="16" destOrd="0" presId="urn:microsoft.com/office/officeart/2005/8/layout/process5"/>
-    <dgm:cxn modelId="{8E9D851C-5056-C849-9EBF-A78085CCC5D8}" type="presParOf" srcId="{CBF254FA-D4E0-B74E-A18D-AE53AEBD67CD}" destId="{C8297064-9915-AB4E-A9CB-FFEA8FC197B9}" srcOrd="17" destOrd="0" presId="urn:microsoft.com/office/officeart/2005/8/layout/process5"/>
-    <dgm:cxn modelId="{94895D36-40FD-1046-B05E-C751DB16DF6D}" type="presParOf" srcId="{C8297064-9915-AB4E-A9CB-FFEA8FC197B9}" destId="{EDC8E22C-F874-6448-9DE8-54F7348385E0}" srcOrd="0" destOrd="0" presId="urn:microsoft.com/office/officeart/2005/8/layout/process5"/>
-    <dgm:cxn modelId="{AEDD76F6-F2A2-594E-A0EE-C6571AC46FF2}" type="presParOf" srcId="{CBF254FA-D4E0-B74E-A18D-AE53AEBD67CD}" destId="{098F0226-B690-1B45-B506-7C933BFB7998}" srcOrd="18" destOrd="0" presId="urn:microsoft.com/office/officeart/2005/8/layout/process5"/>
-  </dgm:cxnLst>
-  <dgm:bg/>
-  <dgm:whole/>
-  <dgm:extLst>
-    <a:ext uri="http://schemas.microsoft.com/office/drawing/2008/diagram">
-      <dsp:dataModelExt xmlns:dsp="http://schemas.microsoft.com/office/drawing/2008/diagram" relId="rId6" minVer="http://schemas.openxmlformats.org/drawingml/2006/diagram"/>
-    </a:ext>
-    <a:ext uri="{C62137D5-CB1D-491B-B009-E17868A290BF}">
-      <dgm14:recolorImg xmlns:dgm14="http://schemas.microsoft.com/office/drawing/2010/diagram" val="1"/>
-    </a:ext>
-  </dgm:extLst>
-</dgm:dataModel>
-</file>
-
-<file path=ppt/diagrams/data2.xml><?xml version="1.0" encoding="utf-8"?>
 <dgm:dataModel xmlns:dgm="http://schemas.openxmlformats.org/drawingml/2006/diagram" xmlns:a="http://schemas.openxmlformats.org/drawingml/2006/main">
   <dgm:ptLst>
     <dgm:pt modelId="{E9FB0F4E-6967-3B44-A32F-E8B1C7AE98D5}" type="doc">
@@ -6243,1812 +4079,7 @@
 </dsp:drawing>
 </file>
 
-<file path=ppt/diagrams/drawing2.xml><?xml version="1.0" encoding="utf-8"?>
-<dsp:drawing xmlns:dgm="http://schemas.openxmlformats.org/drawingml/2006/diagram" xmlns:dsp="http://schemas.microsoft.com/office/drawing/2008/diagram" xmlns:a="http://schemas.openxmlformats.org/drawingml/2006/main">
-  <dsp:spTree>
-    <dsp:nvGrpSpPr>
-      <dsp:cNvPr id="0" name=""/>
-      <dsp:cNvGrpSpPr/>
-    </dsp:nvGrpSpPr>
-    <dsp:grpSpPr/>
-    <dsp:sp modelId="{B4D5E3D8-47D8-1A4C-9387-6DE60324DF6F}">
-      <dsp:nvSpPr>
-        <dsp:cNvPr id="0" name=""/>
-        <dsp:cNvSpPr/>
-      </dsp:nvSpPr>
-      <dsp:spPr>
-        <a:xfrm>
-          <a:off x="5175" y="487487"/>
-          <a:ext cx="2262701" cy="1357621"/>
-        </a:xfrm>
-        <a:prstGeom prst="roundRect">
-          <a:avLst>
-            <a:gd name="adj" fmla="val 10000"/>
-          </a:avLst>
-        </a:prstGeom>
-        <a:solidFill>
-          <a:schemeClr val="tx1">
-            <a:lumMod val="65000"/>
-            <a:lumOff val="35000"/>
-          </a:schemeClr>
-        </a:solidFill>
-        <a:ln w="25400" cap="flat" cmpd="sng" algn="ctr">
-          <a:solidFill>
-            <a:schemeClr val="lt1">
-              <a:hueOff val="0"/>
-              <a:satOff val="0"/>
-              <a:lumOff val="0"/>
-              <a:alphaOff val="0"/>
-            </a:schemeClr>
-          </a:solidFill>
-          <a:prstDash val="solid"/>
-        </a:ln>
-        <a:effectLst/>
-      </dsp:spPr>
-      <dsp:style>
-        <a:lnRef idx="2">
-          <a:scrgbClr r="0" g="0" b="0"/>
-        </a:lnRef>
-        <a:fillRef idx="1">
-          <a:scrgbClr r="0" g="0" b="0"/>
-        </a:fillRef>
-        <a:effectRef idx="0">
-          <a:scrgbClr r="0" g="0" b="0"/>
-        </a:effectRef>
-        <a:fontRef idx="minor">
-          <a:schemeClr val="lt1"/>
-        </a:fontRef>
-      </dsp:style>
-      <dsp:txBody>
-        <a:bodyPr spcFirstLastPara="0" vert="horz" wrap="square" lIns="64770" tIns="64770" rIns="64770" bIns="64770" numCol="1" spcCol="1270" anchor="t" anchorCtr="0">
-          <a:noAutofit/>
-        </a:bodyPr>
-        <a:lstStyle/>
-        <a:p>
-          <a:pPr marL="0" lvl="0" indent="0" algn="l" defTabSz="755650">
-            <a:lnSpc>
-              <a:spcPct val="90000"/>
-            </a:lnSpc>
-            <a:spcBef>
-              <a:spcPct val="0"/>
-            </a:spcBef>
-            <a:spcAft>
-              <a:spcPct val="35000"/>
-            </a:spcAft>
-            <a:buNone/>
-          </a:pPr>
-          <a:r>
-            <a:rPr lang="en-US" sz="1700" kern="1200" dirty="0"/>
-            <a:t>Scope</a:t>
-          </a:r>
-        </a:p>
-        <a:p>
-          <a:pPr marL="114300" lvl="1" indent="-114300" algn="l" defTabSz="577850">
-            <a:lnSpc>
-              <a:spcPct val="90000"/>
-            </a:lnSpc>
-            <a:spcBef>
-              <a:spcPct val="0"/>
-            </a:spcBef>
-            <a:spcAft>
-              <a:spcPct val="15000"/>
-            </a:spcAft>
-            <a:buChar char="•"/>
-          </a:pPr>
-          <a:r>
-            <a:rPr lang="en-US" sz="1300" kern="1200" dirty="0"/>
-            <a:t>Goals, Actions, Data, Analysis, Ethics</a:t>
-          </a:r>
-        </a:p>
-      </dsp:txBody>
-      <dsp:txXfrm>
-        <a:off x="44938" y="527250"/>
-        <a:ext cx="2183175" cy="1278095"/>
-      </dsp:txXfrm>
-    </dsp:sp>
-    <dsp:sp modelId="{A58869D2-B78E-DD40-ACB3-9F052F33CBCE}">
-      <dsp:nvSpPr>
-        <dsp:cNvPr id="0" name=""/>
-        <dsp:cNvSpPr/>
-      </dsp:nvSpPr>
-      <dsp:spPr>
-        <a:xfrm>
-          <a:off x="2466994" y="885723"/>
-          <a:ext cx="479692" cy="561150"/>
-        </a:xfrm>
-        <a:prstGeom prst="rightArrow">
-          <a:avLst>
-            <a:gd name="adj1" fmla="val 60000"/>
-            <a:gd name="adj2" fmla="val 50000"/>
-          </a:avLst>
-        </a:prstGeom>
-        <a:solidFill>
-          <a:schemeClr val="bg2"/>
-        </a:solidFill>
-        <a:ln>
-          <a:noFill/>
-        </a:ln>
-        <a:effectLst/>
-      </dsp:spPr>
-      <dsp:style>
-        <a:lnRef idx="0">
-          <a:scrgbClr r="0" g="0" b="0"/>
-        </a:lnRef>
-        <a:fillRef idx="1">
-          <a:scrgbClr r="0" g="0" b="0"/>
-        </a:fillRef>
-        <a:effectRef idx="0">
-          <a:scrgbClr r="0" g="0" b="0"/>
-        </a:effectRef>
-        <a:fontRef idx="minor">
-          <a:schemeClr val="lt1"/>
-        </a:fontRef>
-      </dsp:style>
-      <dsp:txBody>
-        <a:bodyPr spcFirstLastPara="0" vert="horz" wrap="square" lIns="0" tIns="0" rIns="0" bIns="0" numCol="1" spcCol="1270" anchor="ctr" anchorCtr="0">
-          <a:noAutofit/>
-        </a:bodyPr>
-        <a:lstStyle/>
-        <a:p>
-          <a:pPr marL="0" lvl="0" indent="0" algn="ctr" defTabSz="622300">
-            <a:lnSpc>
-              <a:spcPct val="90000"/>
-            </a:lnSpc>
-            <a:spcBef>
-              <a:spcPct val="0"/>
-            </a:spcBef>
-            <a:spcAft>
-              <a:spcPct val="35000"/>
-            </a:spcAft>
-            <a:buNone/>
-          </a:pPr>
-          <a:endParaRPr lang="en-US" sz="1400" kern="1200"/>
-        </a:p>
-      </dsp:txBody>
-      <dsp:txXfrm>
-        <a:off x="2466994" y="997953"/>
-        <a:ext cx="335784" cy="336690"/>
-      </dsp:txXfrm>
-    </dsp:sp>
-    <dsp:sp modelId="{C234DD4B-5CB7-E549-AD0E-83532D584FCF}">
-      <dsp:nvSpPr>
-        <dsp:cNvPr id="0" name=""/>
-        <dsp:cNvSpPr/>
-      </dsp:nvSpPr>
-      <dsp:spPr>
-        <a:xfrm>
-          <a:off x="3172957" y="487487"/>
-          <a:ext cx="2262701" cy="1357621"/>
-        </a:xfrm>
-        <a:prstGeom prst="roundRect">
-          <a:avLst>
-            <a:gd name="adj" fmla="val 10000"/>
-          </a:avLst>
-        </a:prstGeom>
-        <a:solidFill>
-          <a:schemeClr val="accent3">
-            <a:hueOff val="0"/>
-            <a:satOff val="0"/>
-            <a:lumOff val="0"/>
-            <a:alphaOff val="0"/>
-          </a:schemeClr>
-        </a:solidFill>
-        <a:ln w="25400" cap="flat" cmpd="sng" algn="ctr">
-          <a:solidFill>
-            <a:schemeClr val="lt1">
-              <a:hueOff val="0"/>
-              <a:satOff val="0"/>
-              <a:lumOff val="0"/>
-              <a:alphaOff val="0"/>
-            </a:schemeClr>
-          </a:solidFill>
-          <a:prstDash val="solid"/>
-        </a:ln>
-        <a:effectLst/>
-      </dsp:spPr>
-      <dsp:style>
-        <a:lnRef idx="2">
-          <a:scrgbClr r="0" g="0" b="0"/>
-        </a:lnRef>
-        <a:fillRef idx="1">
-          <a:scrgbClr r="0" g="0" b="0"/>
-        </a:fillRef>
-        <a:effectRef idx="0">
-          <a:scrgbClr r="0" g="0" b="0"/>
-        </a:effectRef>
-        <a:fontRef idx="minor">
-          <a:schemeClr val="lt1"/>
-        </a:fontRef>
-      </dsp:style>
-      <dsp:txBody>
-        <a:bodyPr spcFirstLastPara="0" vert="horz" wrap="square" lIns="64770" tIns="64770" rIns="64770" bIns="64770" numCol="1" spcCol="1270" anchor="t" anchorCtr="0">
-          <a:noAutofit/>
-        </a:bodyPr>
-        <a:lstStyle/>
-        <a:p>
-          <a:pPr marL="0" lvl="0" indent="0" algn="l" defTabSz="755650">
-            <a:lnSpc>
-              <a:spcPct val="90000"/>
-            </a:lnSpc>
-            <a:spcBef>
-              <a:spcPct val="0"/>
-            </a:spcBef>
-            <a:spcAft>
-              <a:spcPct val="35000"/>
-            </a:spcAft>
-            <a:buNone/>
-          </a:pPr>
-          <a:r>
-            <a:rPr lang="en-US" sz="1700" kern="1200" dirty="0"/>
-            <a:t>Data</a:t>
-          </a:r>
-        </a:p>
-        <a:p>
-          <a:pPr marL="114300" lvl="1" indent="-114300" algn="l" defTabSz="577850">
-            <a:lnSpc>
-              <a:spcPct val="90000"/>
-            </a:lnSpc>
-            <a:spcBef>
-              <a:spcPct val="0"/>
-            </a:spcBef>
-            <a:spcAft>
-              <a:spcPct val="15000"/>
-            </a:spcAft>
-            <a:buChar char="•"/>
-          </a:pPr>
-          <a:r>
-            <a:rPr lang="en-US" sz="1300" kern="1200" dirty="0"/>
-            <a:t>Get Data</a:t>
-          </a:r>
-        </a:p>
-        <a:p>
-          <a:pPr marL="114300" lvl="1" indent="-114300" algn="l" defTabSz="577850">
-            <a:lnSpc>
-              <a:spcPct val="90000"/>
-            </a:lnSpc>
-            <a:spcBef>
-              <a:spcPct val="0"/>
-            </a:spcBef>
-            <a:spcAft>
-              <a:spcPct val="15000"/>
-            </a:spcAft>
-            <a:buChar char="•"/>
-          </a:pPr>
-          <a:r>
-            <a:rPr lang="en-US" sz="1300" kern="1200" dirty="0"/>
-            <a:t>Store Data</a:t>
-          </a:r>
-        </a:p>
-        <a:p>
-          <a:pPr marL="114300" lvl="1" indent="-114300" algn="l" defTabSz="577850">
-            <a:lnSpc>
-              <a:spcPct val="90000"/>
-            </a:lnSpc>
-            <a:spcBef>
-              <a:spcPct val="0"/>
-            </a:spcBef>
-            <a:spcAft>
-              <a:spcPct val="15000"/>
-            </a:spcAft>
-            <a:buChar char="•"/>
-          </a:pPr>
-          <a:r>
-            <a:rPr lang="en-US" sz="1300" kern="1200" dirty="0"/>
-            <a:t>Link Data</a:t>
-          </a:r>
-        </a:p>
-      </dsp:txBody>
-      <dsp:txXfrm>
-        <a:off x="3212720" y="527250"/>
-        <a:ext cx="2183175" cy="1278095"/>
-      </dsp:txXfrm>
-    </dsp:sp>
-    <dsp:sp modelId="{16C02E65-2210-C24E-8692-38A2A70EC148}">
-      <dsp:nvSpPr>
-        <dsp:cNvPr id="0" name=""/>
-        <dsp:cNvSpPr/>
-      </dsp:nvSpPr>
-      <dsp:spPr>
-        <a:xfrm>
-          <a:off x="5634777" y="885723"/>
-          <a:ext cx="479692" cy="561150"/>
-        </a:xfrm>
-        <a:prstGeom prst="rightArrow">
-          <a:avLst>
-            <a:gd name="adj1" fmla="val 60000"/>
-            <a:gd name="adj2" fmla="val 50000"/>
-          </a:avLst>
-        </a:prstGeom>
-        <a:solidFill>
-          <a:schemeClr val="accent3">
-            <a:hueOff val="0"/>
-            <a:satOff val="0"/>
-            <a:lumOff val="0"/>
-            <a:alphaOff val="0"/>
-          </a:schemeClr>
-        </a:solidFill>
-        <a:ln>
-          <a:noFill/>
-        </a:ln>
-        <a:effectLst/>
-      </dsp:spPr>
-      <dsp:style>
-        <a:lnRef idx="0">
-          <a:scrgbClr r="0" g="0" b="0"/>
-        </a:lnRef>
-        <a:fillRef idx="1">
-          <a:scrgbClr r="0" g="0" b="0"/>
-        </a:fillRef>
-        <a:effectRef idx="0">
-          <a:scrgbClr r="0" g="0" b="0"/>
-        </a:effectRef>
-        <a:fontRef idx="minor">
-          <a:schemeClr val="lt1"/>
-        </a:fontRef>
-      </dsp:style>
-      <dsp:txBody>
-        <a:bodyPr spcFirstLastPara="0" vert="horz" wrap="square" lIns="0" tIns="0" rIns="0" bIns="0" numCol="1" spcCol="1270" anchor="ctr" anchorCtr="0">
-          <a:noAutofit/>
-        </a:bodyPr>
-        <a:lstStyle/>
-        <a:p>
-          <a:pPr marL="0" lvl="0" indent="0" algn="ctr" defTabSz="622300">
-            <a:lnSpc>
-              <a:spcPct val="90000"/>
-            </a:lnSpc>
-            <a:spcBef>
-              <a:spcPct val="0"/>
-            </a:spcBef>
-            <a:spcAft>
-              <a:spcPct val="35000"/>
-            </a:spcAft>
-            <a:buNone/>
-          </a:pPr>
-          <a:endParaRPr lang="en-US" sz="1400" kern="1200"/>
-        </a:p>
-      </dsp:txBody>
-      <dsp:txXfrm>
-        <a:off x="5634777" y="997953"/>
-        <a:ext cx="335784" cy="336690"/>
-      </dsp:txXfrm>
-    </dsp:sp>
-    <dsp:sp modelId="{FBF1C564-B2B8-4C41-BE63-B8171F8EB76E}">
-      <dsp:nvSpPr>
-        <dsp:cNvPr id="0" name=""/>
-        <dsp:cNvSpPr/>
-      </dsp:nvSpPr>
-      <dsp:spPr>
-        <a:xfrm>
-          <a:off x="6340740" y="487487"/>
-          <a:ext cx="2262701" cy="1357621"/>
-        </a:xfrm>
-        <a:prstGeom prst="roundRect">
-          <a:avLst>
-            <a:gd name="adj" fmla="val 10000"/>
-          </a:avLst>
-        </a:prstGeom>
-        <a:solidFill>
-          <a:schemeClr val="accent6">
-            <a:lumMod val="50000"/>
-          </a:schemeClr>
-        </a:solidFill>
-        <a:ln w="25400" cap="flat" cmpd="sng" algn="ctr">
-          <a:solidFill>
-            <a:schemeClr val="lt1">
-              <a:hueOff val="0"/>
-              <a:satOff val="0"/>
-              <a:lumOff val="0"/>
-              <a:alphaOff val="0"/>
-            </a:schemeClr>
-          </a:solidFill>
-          <a:prstDash val="solid"/>
-        </a:ln>
-        <a:effectLst/>
-      </dsp:spPr>
-      <dsp:style>
-        <a:lnRef idx="2">
-          <a:scrgbClr r="0" g="0" b="0"/>
-        </a:lnRef>
-        <a:fillRef idx="1">
-          <a:scrgbClr r="0" g="0" b="0"/>
-        </a:fillRef>
-        <a:effectRef idx="0">
-          <a:scrgbClr r="0" g="0" b="0"/>
-        </a:effectRef>
-        <a:fontRef idx="minor">
-          <a:schemeClr val="lt1"/>
-        </a:fontRef>
-      </dsp:style>
-      <dsp:txBody>
-        <a:bodyPr spcFirstLastPara="0" vert="horz" wrap="square" lIns="64770" tIns="64770" rIns="64770" bIns="64770" numCol="1" spcCol="1270" anchor="t" anchorCtr="0">
-          <a:noAutofit/>
-        </a:bodyPr>
-        <a:lstStyle/>
-        <a:p>
-          <a:pPr marL="0" lvl="0" indent="0" algn="l" defTabSz="755650">
-            <a:lnSpc>
-              <a:spcPct val="90000"/>
-            </a:lnSpc>
-            <a:spcBef>
-              <a:spcPct val="0"/>
-            </a:spcBef>
-            <a:spcAft>
-              <a:spcPct val="35000"/>
-            </a:spcAft>
-            <a:buNone/>
-          </a:pPr>
-          <a:r>
-            <a:rPr lang="en-US" sz="1700" kern="1200" dirty="0"/>
-            <a:t>Exploration</a:t>
-          </a:r>
-        </a:p>
-        <a:p>
-          <a:pPr marL="114300" lvl="1" indent="-114300" algn="l" defTabSz="577850">
-            <a:lnSpc>
-              <a:spcPct val="90000"/>
-            </a:lnSpc>
-            <a:spcBef>
-              <a:spcPct val="0"/>
-            </a:spcBef>
-            <a:spcAft>
-              <a:spcPct val="15000"/>
-            </a:spcAft>
-            <a:buChar char="•"/>
-          </a:pPr>
-          <a:r>
-            <a:rPr lang="en-US" sz="1300" kern="1200" dirty="0"/>
-            <a:t>Entities</a:t>
-          </a:r>
-        </a:p>
-        <a:p>
-          <a:pPr marL="114300" lvl="1" indent="-114300" algn="l" defTabSz="577850">
-            <a:lnSpc>
-              <a:spcPct val="90000"/>
-            </a:lnSpc>
-            <a:spcBef>
-              <a:spcPct val="0"/>
-            </a:spcBef>
-            <a:spcAft>
-              <a:spcPct val="15000"/>
-            </a:spcAft>
-            <a:buChar char="•"/>
-          </a:pPr>
-          <a:r>
-            <a:rPr lang="en-US" sz="1300" kern="1200" dirty="0"/>
-            <a:t>temporal</a:t>
-          </a:r>
-        </a:p>
-        <a:p>
-          <a:pPr marL="114300" lvl="1" indent="-114300" algn="l" defTabSz="577850">
-            <a:lnSpc>
-              <a:spcPct val="90000"/>
-            </a:lnSpc>
-            <a:spcBef>
-              <a:spcPct val="0"/>
-            </a:spcBef>
-            <a:spcAft>
-              <a:spcPct val="15000"/>
-            </a:spcAft>
-            <a:buChar char="•"/>
-          </a:pPr>
-          <a:r>
-            <a:rPr lang="en-US" sz="1300" kern="1200" dirty="0"/>
-            <a:t>Spatial</a:t>
-          </a:r>
-        </a:p>
-        <a:p>
-          <a:pPr marL="114300" lvl="1" indent="-114300" algn="l" defTabSz="577850">
-            <a:lnSpc>
-              <a:spcPct val="90000"/>
-            </a:lnSpc>
-            <a:spcBef>
-              <a:spcPct val="0"/>
-            </a:spcBef>
-            <a:spcAft>
-              <a:spcPct val="15000"/>
-            </a:spcAft>
-            <a:buChar char="•"/>
-          </a:pPr>
-          <a:r>
-            <a:rPr lang="en-US" sz="1300" kern="1200" dirty="0"/>
-            <a:t>…</a:t>
-          </a:r>
-        </a:p>
-      </dsp:txBody>
-      <dsp:txXfrm>
-        <a:off x="6380503" y="527250"/>
-        <a:ext cx="2183175" cy="1278095"/>
-      </dsp:txXfrm>
-    </dsp:sp>
-    <dsp:sp modelId="{680472FB-1DED-B043-9C18-8E9AFCBED6E9}">
-      <dsp:nvSpPr>
-        <dsp:cNvPr id="0" name=""/>
-        <dsp:cNvSpPr/>
-      </dsp:nvSpPr>
-      <dsp:spPr>
-        <a:xfrm>
-          <a:off x="8802559" y="885723"/>
-          <a:ext cx="479692" cy="561150"/>
-        </a:xfrm>
-        <a:prstGeom prst="rightArrow">
-          <a:avLst>
-            <a:gd name="adj1" fmla="val 60000"/>
-            <a:gd name="adj2" fmla="val 50000"/>
-          </a:avLst>
-        </a:prstGeom>
-        <a:solidFill>
-          <a:schemeClr val="accent6">
-            <a:lumMod val="50000"/>
-          </a:schemeClr>
-        </a:solidFill>
-        <a:ln>
-          <a:noFill/>
-        </a:ln>
-        <a:effectLst/>
-      </dsp:spPr>
-      <dsp:style>
-        <a:lnRef idx="0">
-          <a:scrgbClr r="0" g="0" b="0"/>
-        </a:lnRef>
-        <a:fillRef idx="1">
-          <a:scrgbClr r="0" g="0" b="0"/>
-        </a:fillRef>
-        <a:effectRef idx="0">
-          <a:scrgbClr r="0" g="0" b="0"/>
-        </a:effectRef>
-        <a:fontRef idx="minor">
-          <a:schemeClr val="lt1"/>
-        </a:fontRef>
-      </dsp:style>
-      <dsp:txBody>
-        <a:bodyPr spcFirstLastPara="0" vert="horz" wrap="square" lIns="0" tIns="0" rIns="0" bIns="0" numCol="1" spcCol="1270" anchor="ctr" anchorCtr="0">
-          <a:noAutofit/>
-        </a:bodyPr>
-        <a:lstStyle/>
-        <a:p>
-          <a:pPr marL="0" lvl="0" indent="0" algn="ctr" defTabSz="622300">
-            <a:lnSpc>
-              <a:spcPct val="90000"/>
-            </a:lnSpc>
-            <a:spcBef>
-              <a:spcPct val="0"/>
-            </a:spcBef>
-            <a:spcAft>
-              <a:spcPct val="35000"/>
-            </a:spcAft>
-            <a:buNone/>
-          </a:pPr>
-          <a:endParaRPr lang="en-US" sz="1400" kern="1200"/>
-        </a:p>
-      </dsp:txBody>
-      <dsp:txXfrm>
-        <a:off x="8802559" y="997953"/>
-        <a:ext cx="335784" cy="336690"/>
-      </dsp:txXfrm>
-    </dsp:sp>
-    <dsp:sp modelId="{CC8F3904-974E-2647-9B88-B6062079D1ED}">
-      <dsp:nvSpPr>
-        <dsp:cNvPr id="0" name=""/>
-        <dsp:cNvSpPr/>
-      </dsp:nvSpPr>
-      <dsp:spPr>
-        <a:xfrm>
-          <a:off x="9508522" y="487487"/>
-          <a:ext cx="2262701" cy="1357621"/>
-        </a:xfrm>
-        <a:prstGeom prst="roundRect">
-          <a:avLst>
-            <a:gd name="adj" fmla="val 10000"/>
-          </a:avLst>
-        </a:prstGeom>
-        <a:solidFill>
-          <a:schemeClr val="accent5">
-            <a:hueOff val="0"/>
-            <a:satOff val="0"/>
-            <a:lumOff val="0"/>
-            <a:alphaOff val="0"/>
-          </a:schemeClr>
-        </a:solidFill>
-        <a:ln w="25400" cap="flat" cmpd="sng" algn="ctr">
-          <a:solidFill>
-            <a:schemeClr val="lt1">
-              <a:hueOff val="0"/>
-              <a:satOff val="0"/>
-              <a:lumOff val="0"/>
-              <a:alphaOff val="0"/>
-            </a:schemeClr>
-          </a:solidFill>
-          <a:prstDash val="solid"/>
-        </a:ln>
-        <a:effectLst/>
-      </dsp:spPr>
-      <dsp:style>
-        <a:lnRef idx="2">
-          <a:scrgbClr r="0" g="0" b="0"/>
-        </a:lnRef>
-        <a:fillRef idx="1">
-          <a:scrgbClr r="0" g="0" b="0"/>
-        </a:fillRef>
-        <a:effectRef idx="0">
-          <a:scrgbClr r="0" g="0" b="0"/>
-        </a:effectRef>
-        <a:fontRef idx="minor">
-          <a:schemeClr val="lt1"/>
-        </a:fontRef>
-      </dsp:style>
-      <dsp:txBody>
-        <a:bodyPr spcFirstLastPara="0" vert="horz" wrap="square" lIns="64770" tIns="64770" rIns="64770" bIns="64770" numCol="1" spcCol="1270" anchor="t" anchorCtr="0">
-          <a:noAutofit/>
-        </a:bodyPr>
-        <a:lstStyle/>
-        <a:p>
-          <a:pPr marL="0" lvl="0" indent="0" algn="l" defTabSz="755650">
-            <a:lnSpc>
-              <a:spcPct val="90000"/>
-            </a:lnSpc>
-            <a:spcBef>
-              <a:spcPct val="0"/>
-            </a:spcBef>
-            <a:spcAft>
-              <a:spcPct val="35000"/>
-            </a:spcAft>
-            <a:buNone/>
-          </a:pPr>
-          <a:r>
-            <a:rPr lang="en-US" sz="1700" kern="1200" dirty="0"/>
-            <a:t>Modeling</a:t>
-          </a:r>
-        </a:p>
-        <a:p>
-          <a:pPr marL="114300" lvl="1" indent="-114300" algn="l" defTabSz="577850">
-            <a:lnSpc>
-              <a:spcPct val="90000"/>
-            </a:lnSpc>
-            <a:spcBef>
-              <a:spcPct val="0"/>
-            </a:spcBef>
-            <a:spcAft>
-              <a:spcPct val="15000"/>
-            </a:spcAft>
-            <a:buChar char="•"/>
-          </a:pPr>
-          <a:r>
-            <a:rPr lang="en-US" sz="1300" kern="1200" dirty="0"/>
-            <a:t>Rows</a:t>
-          </a:r>
-        </a:p>
-        <a:p>
-          <a:pPr marL="114300" lvl="1" indent="-114300" algn="l" defTabSz="577850">
-            <a:lnSpc>
-              <a:spcPct val="90000"/>
-            </a:lnSpc>
-            <a:spcBef>
-              <a:spcPct val="0"/>
-            </a:spcBef>
-            <a:spcAft>
-              <a:spcPct val="15000"/>
-            </a:spcAft>
-            <a:buChar char="•"/>
-          </a:pPr>
-          <a:r>
-            <a:rPr lang="en-US" sz="1300" kern="1200" dirty="0"/>
-            <a:t>Labels</a:t>
-          </a:r>
-        </a:p>
-        <a:p>
-          <a:pPr marL="114300" lvl="1" indent="-114300" algn="l" defTabSz="577850">
-            <a:lnSpc>
-              <a:spcPct val="90000"/>
-            </a:lnSpc>
-            <a:spcBef>
-              <a:spcPct val="0"/>
-            </a:spcBef>
-            <a:spcAft>
-              <a:spcPct val="15000"/>
-            </a:spcAft>
-            <a:buChar char="•"/>
-          </a:pPr>
-          <a:r>
-            <a:rPr lang="en-US" sz="1300" kern="1200" dirty="0"/>
-            <a:t>Features</a:t>
-          </a:r>
-        </a:p>
-        <a:p>
-          <a:pPr marL="114300" lvl="1" indent="-114300" algn="l" defTabSz="577850">
-            <a:lnSpc>
-              <a:spcPct val="90000"/>
-            </a:lnSpc>
-            <a:spcBef>
-              <a:spcPct val="0"/>
-            </a:spcBef>
-            <a:spcAft>
-              <a:spcPct val="15000"/>
-            </a:spcAft>
-            <a:buChar char="•"/>
-          </a:pPr>
-          <a:r>
-            <a:rPr lang="en-US" sz="1300" kern="1200" dirty="0"/>
-            <a:t>Models</a:t>
-          </a:r>
-        </a:p>
-      </dsp:txBody>
-      <dsp:txXfrm>
-        <a:off x="9548285" y="527250"/>
-        <a:ext cx="2183175" cy="1278095"/>
-      </dsp:txXfrm>
-    </dsp:sp>
-    <dsp:sp modelId="{5383FDA3-64FA-604A-8CAF-995772572DB0}">
-      <dsp:nvSpPr>
-        <dsp:cNvPr id="0" name=""/>
-        <dsp:cNvSpPr/>
-      </dsp:nvSpPr>
-      <dsp:spPr>
-        <a:xfrm rot="5400000">
-          <a:off x="10400027" y="2003497"/>
-          <a:ext cx="479692" cy="561150"/>
-        </a:xfrm>
-        <a:prstGeom prst="rightArrow">
-          <a:avLst>
-            <a:gd name="adj1" fmla="val 60000"/>
-            <a:gd name="adj2" fmla="val 50000"/>
-          </a:avLst>
-        </a:prstGeom>
-        <a:solidFill>
-          <a:schemeClr val="accent5">
-            <a:hueOff val="0"/>
-            <a:satOff val="0"/>
-            <a:lumOff val="0"/>
-            <a:alphaOff val="0"/>
-          </a:schemeClr>
-        </a:solidFill>
-        <a:ln>
-          <a:noFill/>
-        </a:ln>
-        <a:effectLst/>
-      </dsp:spPr>
-      <dsp:style>
-        <a:lnRef idx="0">
-          <a:scrgbClr r="0" g="0" b="0"/>
-        </a:lnRef>
-        <a:fillRef idx="1">
-          <a:scrgbClr r="0" g="0" b="0"/>
-        </a:fillRef>
-        <a:effectRef idx="0">
-          <a:scrgbClr r="0" g="0" b="0"/>
-        </a:effectRef>
-        <a:fontRef idx="minor">
-          <a:schemeClr val="lt1"/>
-        </a:fontRef>
-      </dsp:style>
-      <dsp:txBody>
-        <a:bodyPr spcFirstLastPara="0" vert="horz" wrap="square" lIns="0" tIns="0" rIns="0" bIns="0" numCol="1" spcCol="1270" anchor="ctr" anchorCtr="0">
-          <a:noAutofit/>
-        </a:bodyPr>
-        <a:lstStyle/>
-        <a:p>
-          <a:pPr marL="0" lvl="0" indent="0" algn="ctr" defTabSz="622300">
-            <a:lnSpc>
-              <a:spcPct val="90000"/>
-            </a:lnSpc>
-            <a:spcBef>
-              <a:spcPct val="0"/>
-            </a:spcBef>
-            <a:spcAft>
-              <a:spcPct val="35000"/>
-            </a:spcAft>
-            <a:buNone/>
-          </a:pPr>
-          <a:endParaRPr lang="en-US" sz="1400" kern="1200"/>
-        </a:p>
-      </dsp:txBody>
-      <dsp:txXfrm rot="-5400000">
-        <a:off x="10471528" y="2044226"/>
-        <a:ext cx="336690" cy="335784"/>
-      </dsp:txXfrm>
-    </dsp:sp>
-    <dsp:sp modelId="{F11F753D-D453-BC4F-BACE-C4F8A11ECEA5}">
-      <dsp:nvSpPr>
-        <dsp:cNvPr id="0" name=""/>
-        <dsp:cNvSpPr/>
-      </dsp:nvSpPr>
-      <dsp:spPr>
-        <a:xfrm>
-          <a:off x="9508522" y="2750189"/>
-          <a:ext cx="2262701" cy="1357621"/>
-        </a:xfrm>
-        <a:prstGeom prst="roundRect">
-          <a:avLst>
-            <a:gd name="adj" fmla="val 10000"/>
-          </a:avLst>
-        </a:prstGeom>
-        <a:solidFill>
-          <a:srgbClr val="00B0F0"/>
-        </a:solidFill>
-        <a:ln w="25400" cap="flat" cmpd="sng" algn="ctr">
-          <a:solidFill>
-            <a:schemeClr val="lt1">
-              <a:hueOff val="0"/>
-              <a:satOff val="0"/>
-              <a:lumOff val="0"/>
-              <a:alphaOff val="0"/>
-            </a:schemeClr>
-          </a:solidFill>
-          <a:prstDash val="solid"/>
-        </a:ln>
-        <a:effectLst/>
-      </dsp:spPr>
-      <dsp:style>
-        <a:lnRef idx="2">
-          <a:scrgbClr r="0" g="0" b="0"/>
-        </a:lnRef>
-        <a:fillRef idx="1">
-          <a:scrgbClr r="0" g="0" b="0"/>
-        </a:fillRef>
-        <a:effectRef idx="0">
-          <a:scrgbClr r="0" g="0" b="0"/>
-        </a:effectRef>
-        <a:fontRef idx="minor">
-          <a:schemeClr val="lt1"/>
-        </a:fontRef>
-      </dsp:style>
-      <dsp:txBody>
-        <a:bodyPr spcFirstLastPara="0" vert="horz" wrap="square" lIns="64770" tIns="64770" rIns="64770" bIns="64770" numCol="1" spcCol="1270" anchor="t" anchorCtr="0">
-          <a:noAutofit/>
-        </a:bodyPr>
-        <a:lstStyle/>
-        <a:p>
-          <a:pPr marL="0" lvl="0" indent="0" algn="l" defTabSz="755650">
-            <a:lnSpc>
-              <a:spcPct val="90000"/>
-            </a:lnSpc>
-            <a:spcBef>
-              <a:spcPct val="0"/>
-            </a:spcBef>
-            <a:spcAft>
-              <a:spcPct val="35000"/>
-            </a:spcAft>
-            <a:buNone/>
-          </a:pPr>
-          <a:r>
-            <a:rPr lang="en-US" sz="1700" kern="1200" dirty="0"/>
-            <a:t>Model Selection</a:t>
-          </a:r>
-        </a:p>
-        <a:p>
-          <a:pPr marL="114300" lvl="1" indent="-114300" algn="l" defTabSz="577850">
-            <a:lnSpc>
-              <a:spcPct val="90000"/>
-            </a:lnSpc>
-            <a:spcBef>
-              <a:spcPct val="0"/>
-            </a:spcBef>
-            <a:spcAft>
-              <a:spcPct val="15000"/>
-            </a:spcAft>
-            <a:buChar char="•"/>
-          </a:pPr>
-          <a:r>
-            <a:rPr lang="en-US" sz="1300" kern="1200" dirty="0"/>
-            <a:t>Train-Test Splits</a:t>
-          </a:r>
-        </a:p>
-        <a:p>
-          <a:pPr marL="114300" lvl="1" indent="-114300" algn="l" defTabSz="577850">
-            <a:lnSpc>
-              <a:spcPct val="90000"/>
-            </a:lnSpc>
-            <a:spcBef>
-              <a:spcPct val="0"/>
-            </a:spcBef>
-            <a:spcAft>
-              <a:spcPct val="15000"/>
-            </a:spcAft>
-            <a:buChar char="•"/>
-          </a:pPr>
-          <a:r>
-            <a:rPr lang="en-US" sz="1300" kern="1200" dirty="0"/>
-            <a:t>Performance Metrics</a:t>
-          </a:r>
-        </a:p>
-      </dsp:txBody>
-      <dsp:txXfrm>
-        <a:off x="9548285" y="2789952"/>
-        <a:ext cx="2183175" cy="1278095"/>
-      </dsp:txXfrm>
-    </dsp:sp>
-    <dsp:sp modelId="{F8E19199-589F-1946-8222-73EA4584121E}">
-      <dsp:nvSpPr>
-        <dsp:cNvPr id="0" name=""/>
-        <dsp:cNvSpPr/>
-      </dsp:nvSpPr>
-      <dsp:spPr>
-        <a:xfrm rot="10800000">
-          <a:off x="8829712" y="3148424"/>
-          <a:ext cx="479692" cy="561150"/>
-        </a:xfrm>
-        <a:prstGeom prst="rightArrow">
-          <a:avLst>
-            <a:gd name="adj1" fmla="val 60000"/>
-            <a:gd name="adj2" fmla="val 50000"/>
-          </a:avLst>
-        </a:prstGeom>
-        <a:solidFill>
-          <a:srgbClr val="00B0F0"/>
-        </a:solidFill>
-        <a:ln>
-          <a:noFill/>
-        </a:ln>
-        <a:effectLst/>
-      </dsp:spPr>
-      <dsp:style>
-        <a:lnRef idx="0">
-          <a:scrgbClr r="0" g="0" b="0"/>
-        </a:lnRef>
-        <a:fillRef idx="1">
-          <a:scrgbClr r="0" g="0" b="0"/>
-        </a:fillRef>
-        <a:effectRef idx="0">
-          <a:scrgbClr r="0" g="0" b="0"/>
-        </a:effectRef>
-        <a:fontRef idx="minor">
-          <a:schemeClr val="lt1"/>
-        </a:fontRef>
-      </dsp:style>
-      <dsp:txBody>
-        <a:bodyPr spcFirstLastPara="0" vert="horz" wrap="square" lIns="0" tIns="0" rIns="0" bIns="0" numCol="1" spcCol="1270" anchor="ctr" anchorCtr="0">
-          <a:noAutofit/>
-        </a:bodyPr>
-        <a:lstStyle/>
-        <a:p>
-          <a:pPr marL="0" lvl="0" indent="0" algn="ctr" defTabSz="622300">
-            <a:lnSpc>
-              <a:spcPct val="90000"/>
-            </a:lnSpc>
-            <a:spcBef>
-              <a:spcPct val="0"/>
-            </a:spcBef>
-            <a:spcAft>
-              <a:spcPct val="35000"/>
-            </a:spcAft>
-            <a:buNone/>
-          </a:pPr>
-          <a:endParaRPr lang="en-US" sz="1400" kern="1200"/>
-        </a:p>
-      </dsp:txBody>
-      <dsp:txXfrm rot="10800000">
-        <a:off x="8973620" y="3260654"/>
-        <a:ext cx="335784" cy="336690"/>
-      </dsp:txXfrm>
-    </dsp:sp>
-    <dsp:sp modelId="{529FCC09-4687-E147-80E8-2EB7609DC9CF}">
-      <dsp:nvSpPr>
-        <dsp:cNvPr id="0" name=""/>
-        <dsp:cNvSpPr/>
-      </dsp:nvSpPr>
-      <dsp:spPr>
-        <a:xfrm>
-          <a:off x="6340740" y="2750189"/>
-          <a:ext cx="2262701" cy="1357621"/>
-        </a:xfrm>
-        <a:prstGeom prst="roundRect">
-          <a:avLst>
-            <a:gd name="adj" fmla="val 10000"/>
-          </a:avLst>
-        </a:prstGeom>
-        <a:solidFill>
-          <a:schemeClr val="tx1">
-            <a:lumMod val="65000"/>
-            <a:lumOff val="35000"/>
-          </a:schemeClr>
-        </a:solidFill>
-        <a:ln w="25400" cap="flat" cmpd="sng" algn="ctr">
-          <a:solidFill>
-            <a:schemeClr val="lt1">
-              <a:hueOff val="0"/>
-              <a:satOff val="0"/>
-              <a:lumOff val="0"/>
-              <a:alphaOff val="0"/>
-            </a:schemeClr>
-          </a:solidFill>
-          <a:prstDash val="solid"/>
-        </a:ln>
-        <a:effectLst/>
-      </dsp:spPr>
-      <dsp:style>
-        <a:lnRef idx="2">
-          <a:scrgbClr r="0" g="0" b="0"/>
-        </a:lnRef>
-        <a:fillRef idx="1">
-          <a:scrgbClr r="0" g="0" b="0"/>
-        </a:fillRef>
-        <a:effectRef idx="0">
-          <a:scrgbClr r="0" g="0" b="0"/>
-        </a:effectRef>
-        <a:fontRef idx="minor">
-          <a:schemeClr val="lt1"/>
-        </a:fontRef>
-      </dsp:style>
-      <dsp:txBody>
-        <a:bodyPr spcFirstLastPara="0" vert="horz" wrap="square" lIns="64770" tIns="64770" rIns="64770" bIns="64770" numCol="1" spcCol="1270" anchor="ctr" anchorCtr="0">
-          <a:noAutofit/>
-        </a:bodyPr>
-        <a:lstStyle/>
-        <a:p>
-          <a:pPr marL="0" lvl="0" indent="0" algn="ctr" defTabSz="755650">
-            <a:lnSpc>
-              <a:spcPct val="90000"/>
-            </a:lnSpc>
-            <a:spcBef>
-              <a:spcPct val="0"/>
-            </a:spcBef>
-            <a:spcAft>
-              <a:spcPct val="35000"/>
-            </a:spcAft>
-            <a:buNone/>
-          </a:pPr>
-          <a:r>
-            <a:rPr lang="en-US" sz="1700" kern="1200" dirty="0"/>
-            <a:t>Model Interpretation</a:t>
-          </a:r>
-        </a:p>
-      </dsp:txBody>
-      <dsp:txXfrm>
-        <a:off x="6380503" y="2789952"/>
-        <a:ext cx="2183175" cy="1278095"/>
-      </dsp:txXfrm>
-    </dsp:sp>
-    <dsp:sp modelId="{5381123D-2C93-3241-8E06-B77D04CAE8EC}">
-      <dsp:nvSpPr>
-        <dsp:cNvPr id="0" name=""/>
-        <dsp:cNvSpPr/>
-      </dsp:nvSpPr>
-      <dsp:spPr>
-        <a:xfrm rot="10800000">
-          <a:off x="5661929" y="3148424"/>
-          <a:ext cx="479692" cy="561150"/>
-        </a:xfrm>
-        <a:prstGeom prst="rightArrow">
-          <a:avLst>
-            <a:gd name="adj1" fmla="val 60000"/>
-            <a:gd name="adj2" fmla="val 50000"/>
-          </a:avLst>
-        </a:prstGeom>
-        <a:solidFill>
-          <a:schemeClr val="bg2"/>
-        </a:solidFill>
-        <a:ln>
-          <a:noFill/>
-        </a:ln>
-        <a:effectLst/>
-      </dsp:spPr>
-      <dsp:style>
-        <a:lnRef idx="0">
-          <a:scrgbClr r="0" g="0" b="0"/>
-        </a:lnRef>
-        <a:fillRef idx="1">
-          <a:scrgbClr r="0" g="0" b="0"/>
-        </a:fillRef>
-        <a:effectRef idx="0">
-          <a:scrgbClr r="0" g="0" b="0"/>
-        </a:effectRef>
-        <a:fontRef idx="minor">
-          <a:schemeClr val="lt1"/>
-        </a:fontRef>
-      </dsp:style>
-      <dsp:txBody>
-        <a:bodyPr spcFirstLastPara="0" vert="horz" wrap="square" lIns="0" tIns="0" rIns="0" bIns="0" numCol="1" spcCol="1270" anchor="ctr" anchorCtr="0">
-          <a:noAutofit/>
-        </a:bodyPr>
-        <a:lstStyle/>
-        <a:p>
-          <a:pPr marL="0" lvl="0" indent="0" algn="ctr" defTabSz="622300">
-            <a:lnSpc>
-              <a:spcPct val="90000"/>
-            </a:lnSpc>
-            <a:spcBef>
-              <a:spcPct val="0"/>
-            </a:spcBef>
-            <a:spcAft>
-              <a:spcPct val="35000"/>
-            </a:spcAft>
-            <a:buNone/>
-          </a:pPr>
-          <a:endParaRPr lang="en-US" sz="1400" kern="1200"/>
-        </a:p>
-      </dsp:txBody>
-      <dsp:txXfrm rot="10800000">
-        <a:off x="5805837" y="3260654"/>
-        <a:ext cx="335784" cy="336690"/>
-      </dsp:txXfrm>
-    </dsp:sp>
-    <dsp:sp modelId="{1850AAD1-4903-FE47-A71D-0B73E666CD99}">
-      <dsp:nvSpPr>
-        <dsp:cNvPr id="0" name=""/>
-        <dsp:cNvSpPr/>
-      </dsp:nvSpPr>
-      <dsp:spPr>
-        <a:xfrm>
-          <a:off x="3172957" y="2750189"/>
-          <a:ext cx="2262701" cy="1357621"/>
-        </a:xfrm>
-        <a:prstGeom prst="roundRect">
-          <a:avLst>
-            <a:gd name="adj" fmla="val 10000"/>
-          </a:avLst>
-        </a:prstGeom>
-        <a:solidFill>
-          <a:schemeClr val="accent3">
-            <a:hueOff val="0"/>
-            <a:satOff val="0"/>
-            <a:lumOff val="0"/>
-            <a:alphaOff val="0"/>
-          </a:schemeClr>
-        </a:solidFill>
-        <a:ln w="25400" cap="flat" cmpd="sng" algn="ctr">
-          <a:solidFill>
-            <a:schemeClr val="lt1">
-              <a:hueOff val="0"/>
-              <a:satOff val="0"/>
-              <a:lumOff val="0"/>
-              <a:alphaOff val="0"/>
-            </a:schemeClr>
-          </a:solidFill>
-          <a:prstDash val="solid"/>
-        </a:ln>
-        <a:effectLst/>
-      </dsp:spPr>
-      <dsp:style>
-        <a:lnRef idx="2">
-          <a:scrgbClr r="0" g="0" b="0"/>
-        </a:lnRef>
-        <a:fillRef idx="1">
-          <a:scrgbClr r="0" g="0" b="0"/>
-        </a:fillRef>
-        <a:effectRef idx="0">
-          <a:scrgbClr r="0" g="0" b="0"/>
-        </a:effectRef>
-        <a:fontRef idx="minor">
-          <a:schemeClr val="lt1"/>
-        </a:fontRef>
-      </dsp:style>
-      <dsp:txBody>
-        <a:bodyPr spcFirstLastPara="0" vert="horz" wrap="square" lIns="64770" tIns="64770" rIns="64770" bIns="64770" numCol="1" spcCol="1270" anchor="ctr" anchorCtr="0">
-          <a:noAutofit/>
-        </a:bodyPr>
-        <a:lstStyle/>
-        <a:p>
-          <a:pPr marL="0" lvl="0" indent="0" algn="ctr" defTabSz="755650">
-            <a:lnSpc>
-              <a:spcPct val="90000"/>
-            </a:lnSpc>
-            <a:spcBef>
-              <a:spcPct val="0"/>
-            </a:spcBef>
-            <a:spcAft>
-              <a:spcPct val="35000"/>
-            </a:spcAft>
-            <a:buNone/>
-          </a:pPr>
-          <a:r>
-            <a:rPr lang="en-US" sz="1700" kern="1200" dirty="0"/>
-            <a:t>Dealing with Bias and Fairness</a:t>
-          </a:r>
-        </a:p>
-      </dsp:txBody>
-      <dsp:txXfrm>
-        <a:off x="3212720" y="2789952"/>
-        <a:ext cx="2183175" cy="1278095"/>
-      </dsp:txXfrm>
-    </dsp:sp>
-    <dsp:sp modelId="{D7CE2DAE-ABF0-9641-AE1A-0DB79AEBD84A}">
-      <dsp:nvSpPr>
-        <dsp:cNvPr id="0" name=""/>
-        <dsp:cNvSpPr/>
-      </dsp:nvSpPr>
-      <dsp:spPr>
-        <a:xfrm rot="10800000">
-          <a:off x="2494147" y="3148424"/>
-          <a:ext cx="479692" cy="561150"/>
-        </a:xfrm>
-        <a:prstGeom prst="rightArrow">
-          <a:avLst>
-            <a:gd name="adj1" fmla="val 60000"/>
-            <a:gd name="adj2" fmla="val 50000"/>
-          </a:avLst>
-        </a:prstGeom>
-        <a:solidFill>
-          <a:schemeClr val="accent3">
-            <a:hueOff val="0"/>
-            <a:satOff val="0"/>
-            <a:lumOff val="0"/>
-            <a:alphaOff val="0"/>
-          </a:schemeClr>
-        </a:solidFill>
-        <a:ln>
-          <a:noFill/>
-        </a:ln>
-        <a:effectLst/>
-      </dsp:spPr>
-      <dsp:style>
-        <a:lnRef idx="0">
-          <a:scrgbClr r="0" g="0" b="0"/>
-        </a:lnRef>
-        <a:fillRef idx="1">
-          <a:scrgbClr r="0" g="0" b="0"/>
-        </a:fillRef>
-        <a:effectRef idx="0">
-          <a:scrgbClr r="0" g="0" b="0"/>
-        </a:effectRef>
-        <a:fontRef idx="minor">
-          <a:schemeClr val="lt1"/>
-        </a:fontRef>
-      </dsp:style>
-      <dsp:txBody>
-        <a:bodyPr spcFirstLastPara="0" vert="horz" wrap="square" lIns="0" tIns="0" rIns="0" bIns="0" numCol="1" spcCol="1270" anchor="ctr" anchorCtr="0">
-          <a:noAutofit/>
-        </a:bodyPr>
-        <a:lstStyle/>
-        <a:p>
-          <a:pPr marL="0" lvl="0" indent="0" algn="ctr" defTabSz="622300">
-            <a:lnSpc>
-              <a:spcPct val="90000"/>
-            </a:lnSpc>
-            <a:spcBef>
-              <a:spcPct val="0"/>
-            </a:spcBef>
-            <a:spcAft>
-              <a:spcPct val="35000"/>
-            </a:spcAft>
-            <a:buNone/>
-          </a:pPr>
-          <a:endParaRPr lang="en-US" sz="1400" kern="1200"/>
-        </a:p>
-      </dsp:txBody>
-      <dsp:txXfrm rot="10800000">
-        <a:off x="2638055" y="3260654"/>
-        <a:ext cx="335784" cy="336690"/>
-      </dsp:txXfrm>
-    </dsp:sp>
-    <dsp:sp modelId="{0538887E-FF31-324E-B401-E87E44AFF0AA}">
-      <dsp:nvSpPr>
-        <dsp:cNvPr id="0" name=""/>
-        <dsp:cNvSpPr/>
-      </dsp:nvSpPr>
-      <dsp:spPr>
-        <a:xfrm>
-          <a:off x="5175" y="2750189"/>
-          <a:ext cx="2262701" cy="1357621"/>
-        </a:xfrm>
-        <a:prstGeom prst="roundRect">
-          <a:avLst>
-            <a:gd name="adj" fmla="val 10000"/>
-          </a:avLst>
-        </a:prstGeom>
-        <a:solidFill>
-          <a:schemeClr val="accent6">
-            <a:lumMod val="50000"/>
-          </a:schemeClr>
-        </a:solidFill>
-        <a:ln w="25400" cap="flat" cmpd="sng" algn="ctr">
-          <a:solidFill>
-            <a:schemeClr val="lt1">
-              <a:hueOff val="0"/>
-              <a:satOff val="0"/>
-              <a:lumOff val="0"/>
-              <a:alphaOff val="0"/>
-            </a:schemeClr>
-          </a:solidFill>
-          <a:prstDash val="solid"/>
-        </a:ln>
-        <a:effectLst/>
-      </dsp:spPr>
-      <dsp:style>
-        <a:lnRef idx="2">
-          <a:scrgbClr r="0" g="0" b="0"/>
-        </a:lnRef>
-        <a:fillRef idx="1">
-          <a:scrgbClr r="0" g="0" b="0"/>
-        </a:fillRef>
-        <a:effectRef idx="0">
-          <a:scrgbClr r="0" g="0" b="0"/>
-        </a:effectRef>
-        <a:fontRef idx="minor">
-          <a:schemeClr val="lt1"/>
-        </a:fontRef>
-      </dsp:style>
-      <dsp:txBody>
-        <a:bodyPr spcFirstLastPara="0" vert="horz" wrap="square" lIns="64770" tIns="64770" rIns="64770" bIns="64770" numCol="1" spcCol="1270" anchor="ctr" anchorCtr="0">
-          <a:noAutofit/>
-        </a:bodyPr>
-        <a:lstStyle/>
-        <a:p>
-          <a:pPr marL="0" lvl="0" indent="0" algn="ctr" defTabSz="755650">
-            <a:lnSpc>
-              <a:spcPct val="90000"/>
-            </a:lnSpc>
-            <a:spcBef>
-              <a:spcPct val="0"/>
-            </a:spcBef>
-            <a:spcAft>
-              <a:spcPct val="35000"/>
-            </a:spcAft>
-            <a:buNone/>
-          </a:pPr>
-          <a:r>
-            <a:rPr lang="en-US" sz="1700" kern="1200" dirty="0"/>
-            <a:t>Field Trial Design</a:t>
-          </a:r>
-        </a:p>
-      </dsp:txBody>
-      <dsp:txXfrm>
-        <a:off x="44938" y="2789952"/>
-        <a:ext cx="2183175" cy="1278095"/>
-      </dsp:txXfrm>
-    </dsp:sp>
-    <dsp:sp modelId="{92EB25B1-D4AE-754E-BD44-115E26D1FF80}">
-      <dsp:nvSpPr>
-        <dsp:cNvPr id="0" name=""/>
-        <dsp:cNvSpPr/>
-      </dsp:nvSpPr>
-      <dsp:spPr>
-        <a:xfrm rot="5400000">
-          <a:off x="896679" y="4266199"/>
-          <a:ext cx="479692" cy="561150"/>
-        </a:xfrm>
-        <a:prstGeom prst="rightArrow">
-          <a:avLst>
-            <a:gd name="adj1" fmla="val 60000"/>
-            <a:gd name="adj2" fmla="val 50000"/>
-          </a:avLst>
-        </a:prstGeom>
-        <a:solidFill>
-          <a:schemeClr val="accent6">
-            <a:lumMod val="50000"/>
-          </a:schemeClr>
-        </a:solidFill>
-        <a:ln>
-          <a:noFill/>
-        </a:ln>
-        <a:effectLst/>
-      </dsp:spPr>
-      <dsp:style>
-        <a:lnRef idx="0">
-          <a:scrgbClr r="0" g="0" b="0"/>
-        </a:lnRef>
-        <a:fillRef idx="1">
-          <a:scrgbClr r="0" g="0" b="0"/>
-        </a:fillRef>
-        <a:effectRef idx="0">
-          <a:scrgbClr r="0" g="0" b="0"/>
-        </a:effectRef>
-        <a:fontRef idx="minor">
-          <a:schemeClr val="lt1"/>
-        </a:fontRef>
-      </dsp:style>
-      <dsp:txBody>
-        <a:bodyPr spcFirstLastPara="0" vert="horz" wrap="square" lIns="0" tIns="0" rIns="0" bIns="0" numCol="1" spcCol="1270" anchor="ctr" anchorCtr="0">
-          <a:noAutofit/>
-        </a:bodyPr>
-        <a:lstStyle/>
-        <a:p>
-          <a:pPr marL="0" lvl="0" indent="0" algn="ctr" defTabSz="622300">
-            <a:lnSpc>
-              <a:spcPct val="90000"/>
-            </a:lnSpc>
-            <a:spcBef>
-              <a:spcPct val="0"/>
-            </a:spcBef>
-            <a:spcAft>
-              <a:spcPct val="35000"/>
-            </a:spcAft>
-            <a:buNone/>
-          </a:pPr>
-          <a:endParaRPr lang="en-US" sz="1400" kern="1200"/>
-        </a:p>
-      </dsp:txBody>
-      <dsp:txXfrm rot="-5400000">
-        <a:off x="968180" y="4306928"/>
-        <a:ext cx="336690" cy="335784"/>
-      </dsp:txXfrm>
-    </dsp:sp>
-    <dsp:sp modelId="{C225C079-1737-3742-99A0-0A7B593214FB}">
-      <dsp:nvSpPr>
-        <dsp:cNvPr id="0" name=""/>
-        <dsp:cNvSpPr/>
-      </dsp:nvSpPr>
-      <dsp:spPr>
-        <a:xfrm>
-          <a:off x="5175" y="5012891"/>
-          <a:ext cx="2262701" cy="1357621"/>
-        </a:xfrm>
-        <a:prstGeom prst="roundRect">
-          <a:avLst>
-            <a:gd name="adj" fmla="val 10000"/>
-          </a:avLst>
-        </a:prstGeom>
-        <a:solidFill>
-          <a:schemeClr val="accent5">
-            <a:hueOff val="0"/>
-            <a:satOff val="0"/>
-            <a:lumOff val="0"/>
-            <a:alphaOff val="0"/>
-          </a:schemeClr>
-        </a:solidFill>
-        <a:ln w="25400" cap="flat" cmpd="sng" algn="ctr">
-          <a:solidFill>
-            <a:schemeClr val="lt1">
-              <a:hueOff val="0"/>
-              <a:satOff val="0"/>
-              <a:lumOff val="0"/>
-              <a:alphaOff val="0"/>
-            </a:schemeClr>
-          </a:solidFill>
-          <a:prstDash val="solid"/>
-        </a:ln>
-        <a:effectLst/>
-      </dsp:spPr>
-      <dsp:style>
-        <a:lnRef idx="2">
-          <a:scrgbClr r="0" g="0" b="0"/>
-        </a:lnRef>
-        <a:fillRef idx="1">
-          <a:scrgbClr r="0" g="0" b="0"/>
-        </a:fillRef>
-        <a:effectRef idx="0">
-          <a:scrgbClr r="0" g="0" b="0"/>
-        </a:effectRef>
-        <a:fontRef idx="minor">
-          <a:schemeClr val="lt1"/>
-        </a:fontRef>
-      </dsp:style>
-      <dsp:txBody>
-        <a:bodyPr spcFirstLastPara="0" vert="horz" wrap="square" lIns="64770" tIns="64770" rIns="64770" bIns="64770" numCol="1" spcCol="1270" anchor="ctr" anchorCtr="0">
-          <a:noAutofit/>
-        </a:bodyPr>
-        <a:lstStyle/>
-        <a:p>
-          <a:pPr marL="0" lvl="0" indent="0" algn="ctr" defTabSz="755650">
-            <a:lnSpc>
-              <a:spcPct val="90000"/>
-            </a:lnSpc>
-            <a:spcBef>
-              <a:spcPct val="0"/>
-            </a:spcBef>
-            <a:spcAft>
-              <a:spcPct val="35000"/>
-            </a:spcAft>
-            <a:buNone/>
-          </a:pPr>
-          <a:r>
-            <a:rPr lang="en-US" sz="1700" kern="1200" dirty="0"/>
-            <a:t>Deployment</a:t>
-          </a:r>
-        </a:p>
-      </dsp:txBody>
-      <dsp:txXfrm>
-        <a:off x="44938" y="5052654"/>
-        <a:ext cx="2183175" cy="1278095"/>
-      </dsp:txXfrm>
-    </dsp:sp>
-    <dsp:sp modelId="{C8297064-9915-AB4E-A9CB-FFEA8FC197B9}">
-      <dsp:nvSpPr>
-        <dsp:cNvPr id="0" name=""/>
-        <dsp:cNvSpPr/>
-      </dsp:nvSpPr>
-      <dsp:spPr>
-        <a:xfrm>
-          <a:off x="2466994" y="5411126"/>
-          <a:ext cx="479692" cy="561150"/>
-        </a:xfrm>
-        <a:prstGeom prst="rightArrow">
-          <a:avLst>
-            <a:gd name="adj1" fmla="val 60000"/>
-            <a:gd name="adj2" fmla="val 50000"/>
-          </a:avLst>
-        </a:prstGeom>
-        <a:solidFill>
-          <a:schemeClr val="accent5">
-            <a:hueOff val="0"/>
-            <a:satOff val="0"/>
-            <a:lumOff val="0"/>
-            <a:alphaOff val="0"/>
-          </a:schemeClr>
-        </a:solidFill>
-        <a:ln>
-          <a:noFill/>
-        </a:ln>
-        <a:effectLst/>
-      </dsp:spPr>
-      <dsp:style>
-        <a:lnRef idx="0">
-          <a:scrgbClr r="0" g="0" b="0"/>
-        </a:lnRef>
-        <a:fillRef idx="1">
-          <a:scrgbClr r="0" g="0" b="0"/>
-        </a:fillRef>
-        <a:effectRef idx="0">
-          <a:scrgbClr r="0" g="0" b="0"/>
-        </a:effectRef>
-        <a:fontRef idx="minor">
-          <a:schemeClr val="lt1"/>
-        </a:fontRef>
-      </dsp:style>
-      <dsp:txBody>
-        <a:bodyPr spcFirstLastPara="0" vert="horz" wrap="square" lIns="0" tIns="0" rIns="0" bIns="0" numCol="1" spcCol="1270" anchor="ctr" anchorCtr="0">
-          <a:noAutofit/>
-        </a:bodyPr>
-        <a:lstStyle/>
-        <a:p>
-          <a:pPr marL="0" lvl="0" indent="0" algn="ctr" defTabSz="622300">
-            <a:lnSpc>
-              <a:spcPct val="90000"/>
-            </a:lnSpc>
-            <a:spcBef>
-              <a:spcPct val="0"/>
-            </a:spcBef>
-            <a:spcAft>
-              <a:spcPct val="35000"/>
-            </a:spcAft>
-            <a:buNone/>
-          </a:pPr>
-          <a:endParaRPr lang="en-US" sz="1400" kern="1200"/>
-        </a:p>
-      </dsp:txBody>
-      <dsp:txXfrm>
-        <a:off x="2466994" y="5523356"/>
-        <a:ext cx="335784" cy="336690"/>
-      </dsp:txXfrm>
-    </dsp:sp>
-    <dsp:sp modelId="{098F0226-B690-1B45-B506-7C933BFB7998}">
-      <dsp:nvSpPr>
-        <dsp:cNvPr id="0" name=""/>
-        <dsp:cNvSpPr/>
-      </dsp:nvSpPr>
-      <dsp:spPr>
-        <a:xfrm>
-          <a:off x="3172957" y="5012891"/>
-          <a:ext cx="2262701" cy="1357621"/>
-        </a:xfrm>
-        <a:prstGeom prst="roundRect">
-          <a:avLst>
-            <a:gd name="adj" fmla="val 10000"/>
-          </a:avLst>
-        </a:prstGeom>
-        <a:solidFill>
-          <a:srgbClr val="00B0F0"/>
-        </a:solidFill>
-        <a:ln w="25400" cap="flat" cmpd="sng" algn="ctr">
-          <a:solidFill>
-            <a:schemeClr val="lt1">
-              <a:hueOff val="0"/>
-              <a:satOff val="0"/>
-              <a:lumOff val="0"/>
-              <a:alphaOff val="0"/>
-            </a:schemeClr>
-          </a:solidFill>
-          <a:prstDash val="solid"/>
-        </a:ln>
-        <a:effectLst/>
-      </dsp:spPr>
-      <dsp:style>
-        <a:lnRef idx="2">
-          <a:scrgbClr r="0" g="0" b="0"/>
-        </a:lnRef>
-        <a:fillRef idx="1">
-          <a:scrgbClr r="0" g="0" b="0"/>
-        </a:fillRef>
-        <a:effectRef idx="0">
-          <a:scrgbClr r="0" g="0" b="0"/>
-        </a:effectRef>
-        <a:fontRef idx="minor">
-          <a:schemeClr val="lt1"/>
-        </a:fontRef>
-      </dsp:style>
-      <dsp:txBody>
-        <a:bodyPr spcFirstLastPara="0" vert="horz" wrap="square" lIns="64770" tIns="64770" rIns="64770" bIns="64770" numCol="1" spcCol="1270" anchor="ctr" anchorCtr="0">
-          <a:noAutofit/>
-        </a:bodyPr>
-        <a:lstStyle/>
-        <a:p>
-          <a:pPr marL="0" lvl="0" indent="0" algn="ctr" defTabSz="755650">
-            <a:lnSpc>
-              <a:spcPct val="90000"/>
-            </a:lnSpc>
-            <a:spcBef>
-              <a:spcPct val="0"/>
-            </a:spcBef>
-            <a:spcAft>
-              <a:spcPct val="35000"/>
-            </a:spcAft>
-            <a:buNone/>
-          </a:pPr>
-          <a:r>
-            <a:rPr lang="en-US" sz="1700" kern="1200" dirty="0"/>
-            <a:t>Monitoring</a:t>
-          </a:r>
-        </a:p>
-      </dsp:txBody>
-      <dsp:txXfrm>
-        <a:off x="3212720" y="5052654"/>
-        <a:ext cx="2183175" cy="1278095"/>
-      </dsp:txXfrm>
-    </dsp:sp>
-  </dsp:spTree>
-</dsp:drawing>
-</file>
-
 <file path=ppt/diagrams/layout1.xml><?xml version="1.0" encoding="utf-8"?>
-<dgm:layoutDef xmlns:dgm="http://schemas.openxmlformats.org/drawingml/2006/diagram" xmlns:a="http://schemas.openxmlformats.org/drawingml/2006/main" uniqueId="urn:microsoft.com/office/officeart/2005/8/layout/process5">
-  <dgm:title val=""/>
-  <dgm:desc val=""/>
-  <dgm:catLst>
-    <dgm:cat type="process" pri="17000"/>
-  </dgm:catLst>
-  <dgm:sampData>
-    <dgm:dataModel>
-      <dgm:ptLst>
-        <dgm:pt modelId="0" type="doc"/>
-        <dgm:pt modelId="1">
-          <dgm:prSet phldr="1"/>
-        </dgm:pt>
-        <dgm:pt modelId="2">
-          <dgm:prSet phldr="1"/>
-        </dgm:pt>
-        <dgm:pt modelId="3">
-          <dgm:prSet phldr="1"/>
-        </dgm:pt>
-        <dgm:pt modelId="4">
-          <dgm:prSet phldr="1"/>
-        </dgm:pt>
-        <dgm:pt modelId="5">
-          <dgm:prSet phldr="1"/>
-        </dgm:pt>
-      </dgm:ptLst>
-      <dgm:cxnLst>
-        <dgm:cxn modelId="7" srcId="0" destId="1" srcOrd="0" destOrd="0"/>
-        <dgm:cxn modelId="8" srcId="0" destId="2" srcOrd="1" destOrd="0"/>
-        <dgm:cxn modelId="9" srcId="0" destId="3" srcOrd="2" destOrd="0"/>
-        <dgm:cxn modelId="10" srcId="0" destId="4" srcOrd="3" destOrd="0"/>
-        <dgm:cxn modelId="11" srcId="0" destId="5" srcOrd="4" destOrd="0"/>
-      </dgm:cxnLst>
-      <dgm:bg/>
-      <dgm:whole/>
-    </dgm:dataModel>
-  </dgm:sampData>
-  <dgm:styleData>
-    <dgm:dataModel>
-      <dgm:ptLst>
-        <dgm:pt modelId="0" type="doc"/>
-        <dgm:pt modelId="1"/>
-        <dgm:pt modelId="2"/>
-      </dgm:ptLst>
-      <dgm:cxnLst>
-        <dgm:cxn modelId="3" srcId="0" destId="1" srcOrd="0" destOrd="0"/>
-        <dgm:cxn modelId="4" srcId="0" destId="2" srcOrd="1" destOrd="0"/>
-      </dgm:cxnLst>
-      <dgm:bg/>
-      <dgm:whole/>
-    </dgm:dataModel>
-  </dgm:styleData>
-  <dgm:clrData>
-    <dgm:dataModel>
-      <dgm:ptLst>
-        <dgm:pt modelId="0" type="doc"/>
-        <dgm:pt modelId="1"/>
-        <dgm:pt modelId="2"/>
-        <dgm:pt modelId="3"/>
-        <dgm:pt modelId="4"/>
-      </dgm:ptLst>
-      <dgm:cxnLst>
-        <dgm:cxn modelId="5" srcId="0" destId="1" srcOrd="0" destOrd="0"/>
-        <dgm:cxn modelId="6" srcId="0" destId="2" srcOrd="1" destOrd="0"/>
-        <dgm:cxn modelId="7" srcId="0" destId="3" srcOrd="2" destOrd="0"/>
-        <dgm:cxn modelId="8" srcId="0" destId="4" srcOrd="3" destOrd="0"/>
-      </dgm:cxnLst>
-      <dgm:bg/>
-      <dgm:whole/>
-    </dgm:dataModel>
-  </dgm:clrData>
-  <dgm:layoutNode name="diagram">
-    <dgm:varLst>
-      <dgm:dir/>
-      <dgm:resizeHandles val="exact"/>
-    </dgm:varLst>
-    <dgm:choose name="Name0">
-      <dgm:if name="Name1" axis="self" func="var" arg="dir" op="equ" val="norm">
-        <dgm:alg type="snake">
-          <dgm:param type="grDir" val="tL"/>
-          <dgm:param type="flowDir" val="row"/>
-          <dgm:param type="contDir" val="revDir"/>
-          <dgm:param type="bkpt" val="endCnv"/>
-        </dgm:alg>
-      </dgm:if>
-      <dgm:else name="Name2">
-        <dgm:alg type="snake">
-          <dgm:param type="grDir" val="tR"/>
-          <dgm:param type="flowDir" val="row"/>
-          <dgm:param type="contDir" val="revDir"/>
-          <dgm:param type="bkpt" val="endCnv"/>
-        </dgm:alg>
-      </dgm:else>
-    </dgm:choose>
-    <dgm:shape xmlns:r="http://schemas.openxmlformats.org/officeDocument/2006/relationships" r:blip="">
-      <dgm:adjLst/>
-    </dgm:shape>
-    <dgm:presOf/>
-    <dgm:constrLst>
-      <dgm:constr type="w" for="ch" ptType="node" refType="w"/>
-      <dgm:constr type="w" for="ch" forName="sibTrans" refType="w" refFor="ch" refPtType="node" op="equ" fact="0.4"/>
-      <dgm:constr type="sp" refType="w" refFor="ch" refForName="sibTrans" op="equ"/>
-      <dgm:constr type="primFontSz" for="ch" ptType="node" op="equ" val="65"/>
-      <dgm:constr type="primFontSz" for="des" forName="connectorText" op="equ" val="55"/>
-      <dgm:constr type="primFontSz" for="des" forName="connectorText" refType="primFontSz" refFor="ch" refPtType="node" op="lte" fact="0.8"/>
-    </dgm:constrLst>
-    <dgm:ruleLst/>
-    <dgm:forEach name="nodesForEach" axis="ch" ptType="node">
-      <dgm:layoutNode name="node">
-        <dgm:varLst>
-          <dgm:bulletEnabled val="1"/>
-        </dgm:varLst>
-        <dgm:alg type="tx"/>
-        <dgm:shape xmlns:r="http://schemas.openxmlformats.org/officeDocument/2006/relationships" type="roundRect" r:blip="">
-          <dgm:adjLst>
-            <dgm:adj idx="1" val="0.1"/>
-          </dgm:adjLst>
-        </dgm:shape>
-        <dgm:presOf axis="desOrSelf" ptType="node"/>
-        <dgm:constrLst>
-          <dgm:constr type="h" refType="w" fact="0.6"/>
-          <dgm:constr type="tMarg" refType="primFontSz" fact="0.3"/>
-          <dgm:constr type="bMarg" refType="primFontSz" fact="0.3"/>
-          <dgm:constr type="lMarg" refType="primFontSz" fact="0.3"/>
-          <dgm:constr type="rMarg" refType="primFontSz" fact="0.3"/>
-        </dgm:constrLst>
-        <dgm:ruleLst>
-          <dgm:rule type="primFontSz" val="5" fact="NaN" max="NaN"/>
-        </dgm:ruleLst>
-      </dgm:layoutNode>
-      <dgm:forEach name="sibTransForEach" axis="followSib" ptType="sibTrans" cnt="1">
-        <dgm:layoutNode name="sibTrans">
-          <dgm:alg type="conn">
-            <dgm:param type="begPts" val="auto"/>
-            <dgm:param type="endPts" val="auto"/>
-          </dgm:alg>
-          <dgm:shape xmlns:r="http://schemas.openxmlformats.org/officeDocument/2006/relationships" type="conn" r:blip="">
-            <dgm:adjLst/>
-          </dgm:shape>
-          <dgm:presOf axis="self"/>
-          <dgm:constrLst>
-            <dgm:constr type="h" refType="w" fact="0.62"/>
-            <dgm:constr type="connDist"/>
-          </dgm:constrLst>
-          <dgm:ruleLst/>
-          <dgm:layoutNode name="connectorText">
-            <dgm:alg type="tx">
-              <dgm:param type="autoTxRot" val="upr"/>
-            </dgm:alg>
-            <dgm:shape xmlns:r="http://schemas.openxmlformats.org/officeDocument/2006/relationships" type="conn" r:blip="" hideGeom="1">
-              <dgm:adjLst/>
-            </dgm:shape>
-            <dgm:presOf axis="self"/>
-            <dgm:constrLst>
-              <dgm:constr type="lMarg"/>
-              <dgm:constr type="rMarg"/>
-              <dgm:constr type="tMarg"/>
-              <dgm:constr type="bMarg"/>
-            </dgm:constrLst>
-            <dgm:ruleLst>
-              <dgm:rule type="primFontSz" val="5" fact="NaN" max="NaN"/>
-            </dgm:ruleLst>
-          </dgm:layoutNode>
-        </dgm:layoutNode>
-      </dgm:forEach>
-    </dgm:forEach>
-  </dgm:layoutNode>
-</dgm:layoutDef>
-</file>
-
-<file path=ppt/diagrams/layout2.xml><?xml version="1.0" encoding="utf-8"?>
 <dgm:layoutDef xmlns:dgm="http://schemas.openxmlformats.org/drawingml/2006/diagram" xmlns:a="http://schemas.openxmlformats.org/drawingml/2006/main" uniqueId="urn:microsoft.com/office/officeart/2005/8/layout/process5">
   <dgm:title val=""/>
   <dgm:desc val=""/>
@@ -9253,1040 +5284,6 @@
 </dgm:styleDef>
 </file>
 
-<file path=ppt/diagrams/quickStyle2.xml><?xml version="1.0" encoding="utf-8"?>
-<dgm:styleDef xmlns:dgm="http://schemas.openxmlformats.org/drawingml/2006/diagram" xmlns:a="http://schemas.openxmlformats.org/drawingml/2006/main" uniqueId="urn:microsoft.com/office/officeart/2005/8/quickstyle/simple1">
-  <dgm:title val=""/>
-  <dgm:desc val=""/>
-  <dgm:catLst>
-    <dgm:cat type="simple" pri="10100"/>
-  </dgm:catLst>
-  <dgm:scene3d>
-    <a:camera prst="orthographicFront"/>
-    <a:lightRig rig="threePt" dir="t"/>
-  </dgm:scene3d>
-  <dgm:styleLbl name="node0">
-    <dgm:scene3d>
-      <a:camera prst="orthographicFront"/>
-      <a:lightRig rig="threePt" dir="t"/>
-    </dgm:scene3d>
-    <dgm:sp3d/>
-    <dgm:txPr/>
-    <dgm:style>
-      <a:lnRef idx="2">
-        <a:scrgbClr r="0" g="0" b="0"/>
-      </a:lnRef>
-      <a:fillRef idx="1">
-        <a:scrgbClr r="0" g="0" b="0"/>
-      </a:fillRef>
-      <a:effectRef idx="0">
-        <a:scrgbClr r="0" g="0" b="0"/>
-      </a:effectRef>
-      <a:fontRef idx="minor">
-        <a:schemeClr val="lt1"/>
-      </a:fontRef>
-    </dgm:style>
-  </dgm:styleLbl>
-  <dgm:styleLbl name="lnNode1">
-    <dgm:scene3d>
-      <a:camera prst="orthographicFront"/>
-      <a:lightRig rig="threePt" dir="t"/>
-    </dgm:scene3d>
-    <dgm:sp3d/>
-    <dgm:txPr/>
-    <dgm:style>
-      <a:lnRef idx="2">
-        <a:scrgbClr r="0" g="0" b="0"/>
-      </a:lnRef>
-      <a:fillRef idx="1">
-        <a:scrgbClr r="0" g="0" b="0"/>
-      </a:fillRef>
-      <a:effectRef idx="0">
-        <a:scrgbClr r="0" g="0" b="0"/>
-      </a:effectRef>
-      <a:fontRef idx="minor">
-        <a:schemeClr val="lt1"/>
-      </a:fontRef>
-    </dgm:style>
-  </dgm:styleLbl>
-  <dgm:styleLbl name="vennNode1">
-    <dgm:scene3d>
-      <a:camera prst="orthographicFront"/>
-      <a:lightRig rig="threePt" dir="t"/>
-    </dgm:scene3d>
-    <dgm:sp3d/>
-    <dgm:txPr/>
-    <dgm:style>
-      <a:lnRef idx="2">
-        <a:scrgbClr r="0" g="0" b="0"/>
-      </a:lnRef>
-      <a:fillRef idx="1">
-        <a:scrgbClr r="0" g="0" b="0"/>
-      </a:fillRef>
-      <a:effectRef idx="0">
-        <a:scrgbClr r="0" g="0" b="0"/>
-      </a:effectRef>
-      <a:fontRef idx="minor">
-        <a:schemeClr val="tx1"/>
-      </a:fontRef>
-    </dgm:style>
-  </dgm:styleLbl>
-  <dgm:styleLbl name="alignNode1">
-    <dgm:scene3d>
-      <a:camera prst="orthographicFront"/>
-      <a:lightRig rig="threePt" dir="t"/>
-    </dgm:scene3d>
-    <dgm:sp3d/>
-    <dgm:txPr/>
-    <dgm:style>
-      <a:lnRef idx="2">
-        <a:scrgbClr r="0" g="0" b="0"/>
-      </a:lnRef>
-      <a:fillRef idx="1">
-        <a:scrgbClr r="0" g="0" b="0"/>
-      </a:fillRef>
-      <a:effectRef idx="0">
-        <a:scrgbClr r="0" g="0" b="0"/>
-      </a:effectRef>
-      <a:fontRef idx="minor">
-        <a:schemeClr val="lt1"/>
-      </a:fontRef>
-    </dgm:style>
-  </dgm:styleLbl>
-  <dgm:styleLbl name="node1">
-    <dgm:scene3d>
-      <a:camera prst="orthographicFront"/>
-      <a:lightRig rig="threePt" dir="t"/>
-    </dgm:scene3d>
-    <dgm:sp3d/>
-    <dgm:txPr/>
-    <dgm:style>
-      <a:lnRef idx="2">
-        <a:scrgbClr r="0" g="0" b="0"/>
-      </a:lnRef>
-      <a:fillRef idx="1">
-        <a:scrgbClr r="0" g="0" b="0"/>
-      </a:fillRef>
-      <a:effectRef idx="0">
-        <a:scrgbClr r="0" g="0" b="0"/>
-      </a:effectRef>
-      <a:fontRef idx="minor">
-        <a:schemeClr val="lt1"/>
-      </a:fontRef>
-    </dgm:style>
-  </dgm:styleLbl>
-  <dgm:styleLbl name="node2">
-    <dgm:scene3d>
-      <a:camera prst="orthographicFront"/>
-      <a:lightRig rig="threePt" dir="t"/>
-    </dgm:scene3d>
-    <dgm:sp3d/>
-    <dgm:txPr/>
-    <dgm:style>
-      <a:lnRef idx="2">
-        <a:scrgbClr r="0" g="0" b="0"/>
-      </a:lnRef>
-      <a:fillRef idx="1">
-        <a:scrgbClr r="0" g="0" b="0"/>
-      </a:fillRef>
-      <a:effectRef idx="0">
-        <a:scrgbClr r="0" g="0" b="0"/>
-      </a:effectRef>
-      <a:fontRef idx="minor">
-        <a:schemeClr val="lt1"/>
-      </a:fontRef>
-    </dgm:style>
-  </dgm:styleLbl>
-  <dgm:styleLbl name="node3">
-    <dgm:scene3d>
-      <a:camera prst="orthographicFront"/>
-      <a:lightRig rig="threePt" dir="t"/>
-    </dgm:scene3d>
-    <dgm:sp3d/>
-    <dgm:txPr/>
-    <dgm:style>
-      <a:lnRef idx="2">
-        <a:scrgbClr r="0" g="0" b="0"/>
-      </a:lnRef>
-      <a:fillRef idx="1">
-        <a:scrgbClr r="0" g="0" b="0"/>
-      </a:fillRef>
-      <a:effectRef idx="0">
-        <a:scrgbClr r="0" g="0" b="0"/>
-      </a:effectRef>
-      <a:fontRef idx="minor">
-        <a:schemeClr val="lt1"/>
-      </a:fontRef>
-    </dgm:style>
-  </dgm:styleLbl>
-  <dgm:styleLbl name="node4">
-    <dgm:scene3d>
-      <a:camera prst="orthographicFront"/>
-      <a:lightRig rig="threePt" dir="t"/>
-    </dgm:scene3d>
-    <dgm:sp3d/>
-    <dgm:txPr/>
-    <dgm:style>
-      <a:lnRef idx="2">
-        <a:scrgbClr r="0" g="0" b="0"/>
-      </a:lnRef>
-      <a:fillRef idx="1">
-        <a:scrgbClr r="0" g="0" b="0"/>
-      </a:fillRef>
-      <a:effectRef idx="0">
-        <a:scrgbClr r="0" g="0" b="0"/>
-      </a:effectRef>
-      <a:fontRef idx="minor">
-        <a:schemeClr val="lt1"/>
-      </a:fontRef>
-    </dgm:style>
-  </dgm:styleLbl>
-  <dgm:styleLbl name="fgImgPlace1">
-    <dgm:scene3d>
-      <a:camera prst="orthographicFront"/>
-      <a:lightRig rig="threePt" dir="t"/>
-    </dgm:scene3d>
-    <dgm:sp3d/>
-    <dgm:txPr/>
-    <dgm:style>
-      <a:lnRef idx="2">
-        <a:scrgbClr r="0" g="0" b="0"/>
-      </a:lnRef>
-      <a:fillRef idx="1">
-        <a:scrgbClr r="0" g="0" b="0"/>
-      </a:fillRef>
-      <a:effectRef idx="0">
-        <a:scrgbClr r="0" g="0" b="0"/>
-      </a:effectRef>
-      <a:fontRef idx="minor"/>
-    </dgm:style>
-  </dgm:styleLbl>
-  <dgm:styleLbl name="alignImgPlace1">
-    <dgm:scene3d>
-      <a:camera prst="orthographicFront"/>
-      <a:lightRig rig="threePt" dir="t"/>
-    </dgm:scene3d>
-    <dgm:sp3d/>
-    <dgm:txPr/>
-    <dgm:style>
-      <a:lnRef idx="2">
-        <a:scrgbClr r="0" g="0" b="0"/>
-      </a:lnRef>
-      <a:fillRef idx="1">
-        <a:scrgbClr r="0" g="0" b="0"/>
-      </a:fillRef>
-      <a:effectRef idx="0">
-        <a:scrgbClr r="0" g="0" b="0"/>
-      </a:effectRef>
-      <a:fontRef idx="minor"/>
-    </dgm:style>
-  </dgm:styleLbl>
-  <dgm:styleLbl name="bgImgPlace1">
-    <dgm:scene3d>
-      <a:camera prst="orthographicFront"/>
-      <a:lightRig rig="threePt" dir="t"/>
-    </dgm:scene3d>
-    <dgm:sp3d/>
-    <dgm:txPr/>
-    <dgm:style>
-      <a:lnRef idx="2">
-        <a:scrgbClr r="0" g="0" b="0"/>
-      </a:lnRef>
-      <a:fillRef idx="1">
-        <a:scrgbClr r="0" g="0" b="0"/>
-      </a:fillRef>
-      <a:effectRef idx="0">
-        <a:scrgbClr r="0" g="0" b="0"/>
-      </a:effectRef>
-      <a:fontRef idx="minor"/>
-    </dgm:style>
-  </dgm:styleLbl>
-  <dgm:styleLbl name="sibTrans2D1">
-    <dgm:scene3d>
-      <a:camera prst="orthographicFront"/>
-      <a:lightRig rig="threePt" dir="t"/>
-    </dgm:scene3d>
-    <dgm:sp3d/>
-    <dgm:txPr/>
-    <dgm:style>
-      <a:lnRef idx="0">
-        <a:scrgbClr r="0" g="0" b="0"/>
-      </a:lnRef>
-      <a:fillRef idx="1">
-        <a:scrgbClr r="0" g="0" b="0"/>
-      </a:fillRef>
-      <a:effectRef idx="0">
-        <a:scrgbClr r="0" g="0" b="0"/>
-      </a:effectRef>
-      <a:fontRef idx="minor">
-        <a:schemeClr val="lt1"/>
-      </a:fontRef>
-    </dgm:style>
-  </dgm:styleLbl>
-  <dgm:styleLbl name="fgSibTrans2D1">
-    <dgm:scene3d>
-      <a:camera prst="orthographicFront"/>
-      <a:lightRig rig="threePt" dir="t"/>
-    </dgm:scene3d>
-    <dgm:sp3d/>
-    <dgm:txPr/>
-    <dgm:style>
-      <a:lnRef idx="0">
-        <a:scrgbClr r="0" g="0" b="0"/>
-      </a:lnRef>
-      <a:fillRef idx="1">
-        <a:scrgbClr r="0" g="0" b="0"/>
-      </a:fillRef>
-      <a:effectRef idx="0">
-        <a:scrgbClr r="0" g="0" b="0"/>
-      </a:effectRef>
-      <a:fontRef idx="minor">
-        <a:schemeClr val="lt1"/>
-      </a:fontRef>
-    </dgm:style>
-  </dgm:styleLbl>
-  <dgm:styleLbl name="bgSibTrans2D1">
-    <dgm:scene3d>
-      <a:camera prst="orthographicFront"/>
-      <a:lightRig rig="threePt" dir="t"/>
-    </dgm:scene3d>
-    <dgm:sp3d/>
-    <dgm:txPr/>
-    <dgm:style>
-      <a:lnRef idx="0">
-        <a:scrgbClr r="0" g="0" b="0"/>
-      </a:lnRef>
-      <a:fillRef idx="1">
-        <a:scrgbClr r="0" g="0" b="0"/>
-      </a:fillRef>
-      <a:effectRef idx="0">
-        <a:scrgbClr r="0" g="0" b="0"/>
-      </a:effectRef>
-      <a:fontRef idx="minor">
-        <a:schemeClr val="lt1"/>
-      </a:fontRef>
-    </dgm:style>
-  </dgm:styleLbl>
-  <dgm:styleLbl name="sibTrans1D1">
-    <dgm:scene3d>
-      <a:camera prst="orthographicFront"/>
-      <a:lightRig rig="threePt" dir="t"/>
-    </dgm:scene3d>
-    <dgm:sp3d/>
-    <dgm:txPr/>
-    <dgm:style>
-      <a:lnRef idx="1">
-        <a:scrgbClr r="0" g="0" b="0"/>
-      </a:lnRef>
-      <a:fillRef idx="0">
-        <a:scrgbClr r="0" g="0" b="0"/>
-      </a:fillRef>
-      <a:effectRef idx="0">
-        <a:scrgbClr r="0" g="0" b="0"/>
-      </a:effectRef>
-      <a:fontRef idx="minor"/>
-    </dgm:style>
-  </dgm:styleLbl>
-  <dgm:styleLbl name="callout">
-    <dgm:scene3d>
-      <a:camera prst="orthographicFront"/>
-      <a:lightRig rig="threePt" dir="t"/>
-    </dgm:scene3d>
-    <dgm:sp3d/>
-    <dgm:txPr/>
-    <dgm:style>
-      <a:lnRef idx="2">
-        <a:scrgbClr r="0" g="0" b="0"/>
-      </a:lnRef>
-      <a:fillRef idx="1">
-        <a:scrgbClr r="0" g="0" b="0"/>
-      </a:fillRef>
-      <a:effectRef idx="0">
-        <a:scrgbClr r="0" g="0" b="0"/>
-      </a:effectRef>
-      <a:fontRef idx="minor"/>
-    </dgm:style>
-  </dgm:styleLbl>
-  <dgm:styleLbl name="asst0">
-    <dgm:scene3d>
-      <a:camera prst="orthographicFront"/>
-      <a:lightRig rig="threePt" dir="t"/>
-    </dgm:scene3d>
-    <dgm:sp3d/>
-    <dgm:txPr/>
-    <dgm:style>
-      <a:lnRef idx="2">
-        <a:scrgbClr r="0" g="0" b="0"/>
-      </a:lnRef>
-      <a:fillRef idx="1">
-        <a:scrgbClr r="0" g="0" b="0"/>
-      </a:fillRef>
-      <a:effectRef idx="0">
-        <a:scrgbClr r="0" g="0" b="0"/>
-      </a:effectRef>
-      <a:fontRef idx="minor">
-        <a:schemeClr val="lt1"/>
-      </a:fontRef>
-    </dgm:style>
-  </dgm:styleLbl>
-  <dgm:styleLbl name="asst1">
-    <dgm:scene3d>
-      <a:camera prst="orthographicFront"/>
-      <a:lightRig rig="threePt" dir="t"/>
-    </dgm:scene3d>
-    <dgm:sp3d/>
-    <dgm:txPr/>
-    <dgm:style>
-      <a:lnRef idx="2">
-        <a:scrgbClr r="0" g="0" b="0"/>
-      </a:lnRef>
-      <a:fillRef idx="1">
-        <a:scrgbClr r="0" g="0" b="0"/>
-      </a:fillRef>
-      <a:effectRef idx="0">
-        <a:scrgbClr r="0" g="0" b="0"/>
-      </a:effectRef>
-      <a:fontRef idx="minor">
-        <a:schemeClr val="lt1"/>
-      </a:fontRef>
-    </dgm:style>
-  </dgm:styleLbl>
-  <dgm:styleLbl name="asst2">
-    <dgm:scene3d>
-      <a:camera prst="orthographicFront"/>
-      <a:lightRig rig="threePt" dir="t"/>
-    </dgm:scene3d>
-    <dgm:sp3d/>
-    <dgm:txPr/>
-    <dgm:style>
-      <a:lnRef idx="2">
-        <a:scrgbClr r="0" g="0" b="0"/>
-      </a:lnRef>
-      <a:fillRef idx="1">
-        <a:scrgbClr r="0" g="0" b="0"/>
-      </a:fillRef>
-      <a:effectRef idx="0">
-        <a:scrgbClr r="0" g="0" b="0"/>
-      </a:effectRef>
-      <a:fontRef idx="minor">
-        <a:schemeClr val="lt1"/>
-      </a:fontRef>
-    </dgm:style>
-  </dgm:styleLbl>
-  <dgm:styleLbl name="asst3">
-    <dgm:scene3d>
-      <a:camera prst="orthographicFront"/>
-      <a:lightRig rig="threePt" dir="t"/>
-    </dgm:scene3d>
-    <dgm:sp3d/>
-    <dgm:txPr/>
-    <dgm:style>
-      <a:lnRef idx="2">
-        <a:scrgbClr r="0" g="0" b="0"/>
-      </a:lnRef>
-      <a:fillRef idx="1">
-        <a:scrgbClr r="0" g="0" b="0"/>
-      </a:fillRef>
-      <a:effectRef idx="0">
-        <a:scrgbClr r="0" g="0" b="0"/>
-      </a:effectRef>
-      <a:fontRef idx="minor">
-        <a:schemeClr val="lt1"/>
-      </a:fontRef>
-    </dgm:style>
-  </dgm:styleLbl>
-  <dgm:styleLbl name="asst4">
-    <dgm:scene3d>
-      <a:camera prst="orthographicFront"/>
-      <a:lightRig rig="threePt" dir="t"/>
-    </dgm:scene3d>
-    <dgm:sp3d/>
-    <dgm:txPr/>
-    <dgm:style>
-      <a:lnRef idx="2">
-        <a:scrgbClr r="0" g="0" b="0"/>
-      </a:lnRef>
-      <a:fillRef idx="1">
-        <a:scrgbClr r="0" g="0" b="0"/>
-      </a:fillRef>
-      <a:effectRef idx="0">
-        <a:scrgbClr r="0" g="0" b="0"/>
-      </a:effectRef>
-      <a:fontRef idx="minor">
-        <a:schemeClr val="lt1"/>
-      </a:fontRef>
-    </dgm:style>
-  </dgm:styleLbl>
-  <dgm:styleLbl name="parChTrans2D1">
-    <dgm:scene3d>
-      <a:camera prst="orthographicFront"/>
-      <a:lightRig rig="threePt" dir="t"/>
-    </dgm:scene3d>
-    <dgm:sp3d/>
-    <dgm:txPr/>
-    <dgm:style>
-      <a:lnRef idx="2">
-        <a:scrgbClr r="0" g="0" b="0"/>
-      </a:lnRef>
-      <a:fillRef idx="1">
-        <a:scrgbClr r="0" g="0" b="0"/>
-      </a:fillRef>
-      <a:effectRef idx="0">
-        <a:scrgbClr r="0" g="0" b="0"/>
-      </a:effectRef>
-      <a:fontRef idx="minor">
-        <a:schemeClr val="lt1"/>
-      </a:fontRef>
-    </dgm:style>
-  </dgm:styleLbl>
-  <dgm:styleLbl name="parChTrans2D2">
-    <dgm:scene3d>
-      <a:camera prst="orthographicFront"/>
-      <a:lightRig rig="threePt" dir="t"/>
-    </dgm:scene3d>
-    <dgm:sp3d/>
-    <dgm:txPr/>
-    <dgm:style>
-      <a:lnRef idx="2">
-        <a:scrgbClr r="0" g="0" b="0"/>
-      </a:lnRef>
-      <a:fillRef idx="1">
-        <a:scrgbClr r="0" g="0" b="0"/>
-      </a:fillRef>
-      <a:effectRef idx="0">
-        <a:scrgbClr r="0" g="0" b="0"/>
-      </a:effectRef>
-      <a:fontRef idx="minor">
-        <a:schemeClr val="lt1"/>
-      </a:fontRef>
-    </dgm:style>
-  </dgm:styleLbl>
-  <dgm:styleLbl name="parChTrans2D3">
-    <dgm:scene3d>
-      <a:camera prst="orthographicFront"/>
-      <a:lightRig rig="threePt" dir="t"/>
-    </dgm:scene3d>
-    <dgm:sp3d/>
-    <dgm:txPr/>
-    <dgm:style>
-      <a:lnRef idx="2">
-        <a:scrgbClr r="0" g="0" b="0"/>
-      </a:lnRef>
-      <a:fillRef idx="1">
-        <a:scrgbClr r="0" g="0" b="0"/>
-      </a:fillRef>
-      <a:effectRef idx="0">
-        <a:scrgbClr r="0" g="0" b="0"/>
-      </a:effectRef>
-      <a:fontRef idx="minor">
-        <a:schemeClr val="lt1"/>
-      </a:fontRef>
-    </dgm:style>
-  </dgm:styleLbl>
-  <dgm:styleLbl name="parChTrans2D4">
-    <dgm:scene3d>
-      <a:camera prst="orthographicFront"/>
-      <a:lightRig rig="threePt" dir="t"/>
-    </dgm:scene3d>
-    <dgm:sp3d/>
-    <dgm:txPr/>
-    <dgm:style>
-      <a:lnRef idx="2">
-        <a:scrgbClr r="0" g="0" b="0"/>
-      </a:lnRef>
-      <a:fillRef idx="1">
-        <a:scrgbClr r="0" g="0" b="0"/>
-      </a:fillRef>
-      <a:effectRef idx="0">
-        <a:scrgbClr r="0" g="0" b="0"/>
-      </a:effectRef>
-      <a:fontRef idx="minor">
-        <a:schemeClr val="lt1"/>
-      </a:fontRef>
-    </dgm:style>
-  </dgm:styleLbl>
-  <dgm:styleLbl name="parChTrans1D1">
-    <dgm:scene3d>
-      <a:camera prst="orthographicFront"/>
-      <a:lightRig rig="threePt" dir="t"/>
-    </dgm:scene3d>
-    <dgm:sp3d/>
-    <dgm:txPr/>
-    <dgm:style>
-      <a:lnRef idx="2">
-        <a:scrgbClr r="0" g="0" b="0"/>
-      </a:lnRef>
-      <a:fillRef idx="0">
-        <a:scrgbClr r="0" g="0" b="0"/>
-      </a:fillRef>
-      <a:effectRef idx="0">
-        <a:scrgbClr r="0" g="0" b="0"/>
-      </a:effectRef>
-      <a:fontRef idx="minor"/>
-    </dgm:style>
-  </dgm:styleLbl>
-  <dgm:styleLbl name="parChTrans1D2">
-    <dgm:scene3d>
-      <a:camera prst="orthographicFront"/>
-      <a:lightRig rig="threePt" dir="t"/>
-    </dgm:scene3d>
-    <dgm:sp3d/>
-    <dgm:txPr/>
-    <dgm:style>
-      <a:lnRef idx="2">
-        <a:scrgbClr r="0" g="0" b="0"/>
-      </a:lnRef>
-      <a:fillRef idx="0">
-        <a:scrgbClr r="0" g="0" b="0"/>
-      </a:fillRef>
-      <a:effectRef idx="0">
-        <a:scrgbClr r="0" g="0" b="0"/>
-      </a:effectRef>
-      <a:fontRef idx="minor"/>
-    </dgm:style>
-  </dgm:styleLbl>
-  <dgm:styleLbl name="parChTrans1D3">
-    <dgm:scene3d>
-      <a:camera prst="orthographicFront"/>
-      <a:lightRig rig="threePt" dir="t"/>
-    </dgm:scene3d>
-    <dgm:sp3d/>
-    <dgm:txPr/>
-    <dgm:style>
-      <a:lnRef idx="2">
-        <a:scrgbClr r="0" g="0" b="0"/>
-      </a:lnRef>
-      <a:fillRef idx="0">
-        <a:scrgbClr r="0" g="0" b="0"/>
-      </a:fillRef>
-      <a:effectRef idx="0">
-        <a:scrgbClr r="0" g="0" b="0"/>
-      </a:effectRef>
-      <a:fontRef idx="minor"/>
-    </dgm:style>
-  </dgm:styleLbl>
-  <dgm:styleLbl name="parChTrans1D4">
-    <dgm:scene3d>
-      <a:camera prst="orthographicFront"/>
-      <a:lightRig rig="threePt" dir="t"/>
-    </dgm:scene3d>
-    <dgm:sp3d/>
-    <dgm:txPr/>
-    <dgm:style>
-      <a:lnRef idx="2">
-        <a:scrgbClr r="0" g="0" b="0"/>
-      </a:lnRef>
-      <a:fillRef idx="0">
-        <a:scrgbClr r="0" g="0" b="0"/>
-      </a:fillRef>
-      <a:effectRef idx="0">
-        <a:scrgbClr r="0" g="0" b="0"/>
-      </a:effectRef>
-      <a:fontRef idx="minor"/>
-    </dgm:style>
-  </dgm:styleLbl>
-  <dgm:styleLbl name="fgAcc1">
-    <dgm:scene3d>
-      <a:camera prst="orthographicFront"/>
-      <a:lightRig rig="threePt" dir="t"/>
-    </dgm:scene3d>
-    <dgm:sp3d/>
-    <dgm:txPr/>
-    <dgm:style>
-      <a:lnRef idx="2">
-        <a:scrgbClr r="0" g="0" b="0"/>
-      </a:lnRef>
-      <a:fillRef idx="1">
-        <a:scrgbClr r="0" g="0" b="0"/>
-      </a:fillRef>
-      <a:effectRef idx="0">
-        <a:scrgbClr r="0" g="0" b="0"/>
-      </a:effectRef>
-      <a:fontRef idx="minor"/>
-    </dgm:style>
-  </dgm:styleLbl>
-  <dgm:styleLbl name="conFgAcc1">
-    <dgm:scene3d>
-      <a:camera prst="orthographicFront"/>
-      <a:lightRig rig="threePt" dir="t"/>
-    </dgm:scene3d>
-    <dgm:sp3d/>
-    <dgm:txPr/>
-    <dgm:style>
-      <a:lnRef idx="2">
-        <a:scrgbClr r="0" g="0" b="0"/>
-      </a:lnRef>
-      <a:fillRef idx="1">
-        <a:scrgbClr r="0" g="0" b="0"/>
-      </a:fillRef>
-      <a:effectRef idx="0">
-        <a:scrgbClr r="0" g="0" b="0"/>
-      </a:effectRef>
-      <a:fontRef idx="minor"/>
-    </dgm:style>
-  </dgm:styleLbl>
-  <dgm:styleLbl name="alignAcc1">
-    <dgm:scene3d>
-      <a:camera prst="orthographicFront"/>
-      <a:lightRig rig="threePt" dir="t"/>
-    </dgm:scene3d>
-    <dgm:sp3d/>
-    <dgm:txPr/>
-    <dgm:style>
-      <a:lnRef idx="2">
-        <a:scrgbClr r="0" g="0" b="0"/>
-      </a:lnRef>
-      <a:fillRef idx="1">
-        <a:scrgbClr r="0" g="0" b="0"/>
-      </a:fillRef>
-      <a:effectRef idx="0">
-        <a:scrgbClr r="0" g="0" b="0"/>
-      </a:effectRef>
-      <a:fontRef idx="minor"/>
-    </dgm:style>
-  </dgm:styleLbl>
-  <dgm:styleLbl name="trAlignAcc1">
-    <dgm:scene3d>
-      <a:camera prst="orthographicFront"/>
-      <a:lightRig rig="threePt" dir="t"/>
-    </dgm:scene3d>
-    <dgm:sp3d/>
-    <dgm:txPr/>
-    <dgm:style>
-      <a:lnRef idx="1">
-        <a:scrgbClr r="0" g="0" b="0"/>
-      </a:lnRef>
-      <a:fillRef idx="1">
-        <a:scrgbClr r="0" g="0" b="0"/>
-      </a:fillRef>
-      <a:effectRef idx="0">
-        <a:scrgbClr r="0" g="0" b="0"/>
-      </a:effectRef>
-      <a:fontRef idx="minor"/>
-    </dgm:style>
-  </dgm:styleLbl>
-  <dgm:styleLbl name="bgAcc1">
-    <dgm:scene3d>
-      <a:camera prst="orthographicFront"/>
-      <a:lightRig rig="threePt" dir="t"/>
-    </dgm:scene3d>
-    <dgm:sp3d/>
-    <dgm:txPr/>
-    <dgm:style>
-      <a:lnRef idx="2">
-        <a:scrgbClr r="0" g="0" b="0"/>
-      </a:lnRef>
-      <a:fillRef idx="1">
-        <a:scrgbClr r="0" g="0" b="0"/>
-      </a:fillRef>
-      <a:effectRef idx="0">
-        <a:scrgbClr r="0" g="0" b="0"/>
-      </a:effectRef>
-      <a:fontRef idx="minor"/>
-    </dgm:style>
-  </dgm:styleLbl>
-  <dgm:styleLbl name="solidFgAcc1">
-    <dgm:scene3d>
-      <a:camera prst="orthographicFront"/>
-      <a:lightRig rig="threePt" dir="t"/>
-    </dgm:scene3d>
-    <dgm:sp3d/>
-    <dgm:txPr/>
-    <dgm:style>
-      <a:lnRef idx="2">
-        <a:scrgbClr r="0" g="0" b="0"/>
-      </a:lnRef>
-      <a:fillRef idx="1">
-        <a:scrgbClr r="0" g="0" b="0"/>
-      </a:fillRef>
-      <a:effectRef idx="0">
-        <a:scrgbClr r="0" g="0" b="0"/>
-      </a:effectRef>
-      <a:fontRef idx="minor"/>
-    </dgm:style>
-  </dgm:styleLbl>
-  <dgm:styleLbl name="solidAlignAcc1">
-    <dgm:scene3d>
-      <a:camera prst="orthographicFront"/>
-      <a:lightRig rig="threePt" dir="t"/>
-    </dgm:scene3d>
-    <dgm:sp3d/>
-    <dgm:txPr/>
-    <dgm:style>
-      <a:lnRef idx="2">
-        <a:scrgbClr r="0" g="0" b="0"/>
-      </a:lnRef>
-      <a:fillRef idx="1">
-        <a:scrgbClr r="0" g="0" b="0"/>
-      </a:fillRef>
-      <a:effectRef idx="0">
-        <a:scrgbClr r="0" g="0" b="0"/>
-      </a:effectRef>
-      <a:fontRef idx="minor"/>
-    </dgm:style>
-  </dgm:styleLbl>
-  <dgm:styleLbl name="solidBgAcc1">
-    <dgm:scene3d>
-      <a:camera prst="orthographicFront"/>
-      <a:lightRig rig="threePt" dir="t"/>
-    </dgm:scene3d>
-    <dgm:sp3d/>
-    <dgm:txPr/>
-    <dgm:style>
-      <a:lnRef idx="2">
-        <a:scrgbClr r="0" g="0" b="0"/>
-      </a:lnRef>
-      <a:fillRef idx="1">
-        <a:scrgbClr r="0" g="0" b="0"/>
-      </a:fillRef>
-      <a:effectRef idx="0">
-        <a:scrgbClr r="0" g="0" b="0"/>
-      </a:effectRef>
-      <a:fontRef idx="minor"/>
-    </dgm:style>
-  </dgm:styleLbl>
-  <dgm:styleLbl name="fgAccFollowNode1">
-    <dgm:scene3d>
-      <a:camera prst="orthographicFront"/>
-      <a:lightRig rig="threePt" dir="t"/>
-    </dgm:scene3d>
-    <dgm:sp3d/>
-    <dgm:txPr/>
-    <dgm:style>
-      <a:lnRef idx="2">
-        <a:scrgbClr r="0" g="0" b="0"/>
-      </a:lnRef>
-      <a:fillRef idx="1">
-        <a:scrgbClr r="0" g="0" b="0"/>
-      </a:fillRef>
-      <a:effectRef idx="0">
-        <a:scrgbClr r="0" g="0" b="0"/>
-      </a:effectRef>
-      <a:fontRef idx="minor"/>
-    </dgm:style>
-  </dgm:styleLbl>
-  <dgm:styleLbl name="alignAccFollowNode1">
-    <dgm:scene3d>
-      <a:camera prst="orthographicFront"/>
-      <a:lightRig rig="threePt" dir="t"/>
-    </dgm:scene3d>
-    <dgm:sp3d/>
-    <dgm:txPr/>
-    <dgm:style>
-      <a:lnRef idx="2">
-        <a:scrgbClr r="0" g="0" b="0"/>
-      </a:lnRef>
-      <a:fillRef idx="1">
-        <a:scrgbClr r="0" g="0" b="0"/>
-      </a:fillRef>
-      <a:effectRef idx="0">
-        <a:scrgbClr r="0" g="0" b="0"/>
-      </a:effectRef>
-      <a:fontRef idx="minor"/>
-    </dgm:style>
-  </dgm:styleLbl>
-  <dgm:styleLbl name="bgAccFollowNode1">
-    <dgm:scene3d>
-      <a:camera prst="orthographicFront"/>
-      <a:lightRig rig="threePt" dir="t"/>
-    </dgm:scene3d>
-    <dgm:sp3d/>
-    <dgm:txPr/>
-    <dgm:style>
-      <a:lnRef idx="2">
-        <a:scrgbClr r="0" g="0" b="0"/>
-      </a:lnRef>
-      <a:fillRef idx="1">
-        <a:scrgbClr r="0" g="0" b="0"/>
-      </a:fillRef>
-      <a:effectRef idx="0">
-        <a:scrgbClr r="0" g="0" b="0"/>
-      </a:effectRef>
-      <a:fontRef idx="minor"/>
-    </dgm:style>
-  </dgm:styleLbl>
-  <dgm:styleLbl name="fgAcc0">
-    <dgm:scene3d>
-      <a:camera prst="orthographicFront"/>
-      <a:lightRig rig="threePt" dir="t"/>
-    </dgm:scene3d>
-    <dgm:sp3d/>
-    <dgm:txPr/>
-    <dgm:style>
-      <a:lnRef idx="2">
-        <a:scrgbClr r="0" g="0" b="0"/>
-      </a:lnRef>
-      <a:fillRef idx="1">
-        <a:scrgbClr r="0" g="0" b="0"/>
-      </a:fillRef>
-      <a:effectRef idx="0">
-        <a:scrgbClr r="0" g="0" b="0"/>
-      </a:effectRef>
-      <a:fontRef idx="minor"/>
-    </dgm:style>
-  </dgm:styleLbl>
-  <dgm:styleLbl name="fgAcc2">
-    <dgm:scene3d>
-      <a:camera prst="orthographicFront"/>
-      <a:lightRig rig="threePt" dir="t"/>
-    </dgm:scene3d>
-    <dgm:sp3d/>
-    <dgm:txPr/>
-    <dgm:style>
-      <a:lnRef idx="2">
-        <a:scrgbClr r="0" g="0" b="0"/>
-      </a:lnRef>
-      <a:fillRef idx="1">
-        <a:scrgbClr r="0" g="0" b="0"/>
-      </a:fillRef>
-      <a:effectRef idx="0">
-        <a:scrgbClr r="0" g="0" b="0"/>
-      </a:effectRef>
-      <a:fontRef idx="minor"/>
-    </dgm:style>
-  </dgm:styleLbl>
-  <dgm:styleLbl name="fgAcc3">
-    <dgm:scene3d>
-      <a:camera prst="orthographicFront"/>
-      <a:lightRig rig="threePt" dir="t"/>
-    </dgm:scene3d>
-    <dgm:sp3d/>
-    <dgm:txPr/>
-    <dgm:style>
-      <a:lnRef idx="2">
-        <a:scrgbClr r="0" g="0" b="0"/>
-      </a:lnRef>
-      <a:fillRef idx="1">
-        <a:scrgbClr r="0" g="0" b="0"/>
-      </a:fillRef>
-      <a:effectRef idx="0">
-        <a:scrgbClr r="0" g="0" b="0"/>
-      </a:effectRef>
-      <a:fontRef idx="minor"/>
-    </dgm:style>
-  </dgm:styleLbl>
-  <dgm:styleLbl name="fgAcc4">
-    <dgm:scene3d>
-      <a:camera prst="orthographicFront"/>
-      <a:lightRig rig="threePt" dir="t"/>
-    </dgm:scene3d>
-    <dgm:sp3d/>
-    <dgm:txPr/>
-    <dgm:style>
-      <a:lnRef idx="2">
-        <a:scrgbClr r="0" g="0" b="0"/>
-      </a:lnRef>
-      <a:fillRef idx="1">
-        <a:scrgbClr r="0" g="0" b="0"/>
-      </a:fillRef>
-      <a:effectRef idx="0">
-        <a:scrgbClr r="0" g="0" b="0"/>
-      </a:effectRef>
-      <a:fontRef idx="minor"/>
-    </dgm:style>
-  </dgm:styleLbl>
-  <dgm:styleLbl name="bgShp">
-    <dgm:scene3d>
-      <a:camera prst="orthographicFront"/>
-      <a:lightRig rig="threePt" dir="t"/>
-    </dgm:scene3d>
-    <dgm:sp3d/>
-    <dgm:txPr/>
-    <dgm:style>
-      <a:lnRef idx="0">
-        <a:scrgbClr r="0" g="0" b="0"/>
-      </a:lnRef>
-      <a:fillRef idx="1">
-        <a:scrgbClr r="0" g="0" b="0"/>
-      </a:fillRef>
-      <a:effectRef idx="0">
-        <a:scrgbClr r="0" g="0" b="0"/>
-      </a:effectRef>
-      <a:fontRef idx="minor"/>
-    </dgm:style>
-  </dgm:styleLbl>
-  <dgm:styleLbl name="dkBgShp">
-    <dgm:scene3d>
-      <a:camera prst="orthographicFront"/>
-      <a:lightRig rig="threePt" dir="t"/>
-    </dgm:scene3d>
-    <dgm:sp3d/>
-    <dgm:txPr/>
-    <dgm:style>
-      <a:lnRef idx="0">
-        <a:scrgbClr r="0" g="0" b="0"/>
-      </a:lnRef>
-      <a:fillRef idx="1">
-        <a:scrgbClr r="0" g="0" b="0"/>
-      </a:fillRef>
-      <a:effectRef idx="0">
-        <a:scrgbClr r="0" g="0" b="0"/>
-      </a:effectRef>
-      <a:fontRef idx="minor"/>
-    </dgm:style>
-  </dgm:styleLbl>
-  <dgm:styleLbl name="trBgShp">
-    <dgm:scene3d>
-      <a:camera prst="orthographicFront"/>
-      <a:lightRig rig="threePt" dir="t"/>
-    </dgm:scene3d>
-    <dgm:sp3d/>
-    <dgm:txPr/>
-    <dgm:style>
-      <a:lnRef idx="0">
-        <a:scrgbClr r="0" g="0" b="0"/>
-      </a:lnRef>
-      <a:fillRef idx="1">
-        <a:scrgbClr r="0" g="0" b="0"/>
-      </a:fillRef>
-      <a:effectRef idx="0">
-        <a:scrgbClr r="0" g="0" b="0"/>
-      </a:effectRef>
-      <a:fontRef idx="minor"/>
-    </dgm:style>
-  </dgm:styleLbl>
-  <dgm:styleLbl name="fgShp">
-    <dgm:scene3d>
-      <a:camera prst="orthographicFront"/>
-      <a:lightRig rig="threePt" dir="t"/>
-    </dgm:scene3d>
-    <dgm:sp3d/>
-    <dgm:txPr/>
-    <dgm:style>
-      <a:lnRef idx="2">
-        <a:scrgbClr r="0" g="0" b="0"/>
-      </a:lnRef>
-      <a:fillRef idx="1">
-        <a:scrgbClr r="0" g="0" b="0"/>
-      </a:fillRef>
-      <a:effectRef idx="0">
-        <a:scrgbClr r="0" g="0" b="0"/>
-      </a:effectRef>
-      <a:fontRef idx="minor"/>
-    </dgm:style>
-  </dgm:styleLbl>
-  <dgm:styleLbl name="revTx">
-    <dgm:scene3d>
-      <a:camera prst="orthographicFront"/>
-      <a:lightRig rig="threePt" dir="t"/>
-    </dgm:scene3d>
-    <dgm:sp3d/>
-    <dgm:txPr/>
-    <dgm:style>
-      <a:lnRef idx="0">
-        <a:scrgbClr r="0" g="0" b="0"/>
-      </a:lnRef>
-      <a:fillRef idx="0">
-        <a:scrgbClr r="0" g="0" b="0"/>
-      </a:fillRef>
-      <a:effectRef idx="0">
-        <a:scrgbClr r="0" g="0" b="0"/>
-      </a:effectRef>
-      <a:fontRef idx="minor"/>
-    </dgm:style>
-  </dgm:styleLbl>
-</dgm:styleDef>
-</file>
-
 <file path=ppt/notesMasters/notesMaster1.xml><?xml version="1.0" encoding="utf-8"?>
 <p:notesMaster xmlns:a="http://schemas.openxmlformats.org/drawingml/2006/main" xmlns:r="http://schemas.openxmlformats.org/officeDocument/2006/relationships" xmlns:p="http://schemas.openxmlformats.org/presentationml/2006/main">
   <p:cSld>
@@ -17216,15 +12213,9 @@
       </p:grpSpPr>
       <p:sp>
         <p:nvSpPr>
-          <p:cNvPr id="2" name="Title 1">
-            <a:extLst>
-              <a:ext uri="{FF2B5EF4-FFF2-40B4-BE49-F238E27FC236}">
-                <a16:creationId xmlns:a16="http://schemas.microsoft.com/office/drawing/2014/main" id="{21359BA9-BA2B-D148-89DA-A99081B1FF81}"/>
-              </a:ext>
-            </a:extLst>
-          </p:cNvPr>
+          <p:cNvPr id="7170" name="Rectangle 2"/>
           <p:cNvSpPr>
-            <a:spLocks noGrp="1"/>
+            <a:spLocks noGrp="1" noChangeArrowheads="1"/>
           </p:cNvSpPr>
           <p:nvPr>
             <p:ph type="title"/>
@@ -17236,23 +12227,17 @@
           <a:lstStyle/>
           <a:p>
             <a:r>
-              <a:rPr lang="en-US" dirty="0"/>
-              <a:t>Challenges</a:t>
+              <a:rPr lang="en-US" altLang="en-US" dirty="0"/>
+              <a:t> Linkage: Goals</a:t>
             </a:r>
           </a:p>
         </p:txBody>
       </p:sp>
       <p:sp>
         <p:nvSpPr>
-          <p:cNvPr id="3" name="Text Placeholder 2">
-            <a:extLst>
-              <a:ext uri="{FF2B5EF4-FFF2-40B4-BE49-F238E27FC236}">
-                <a16:creationId xmlns:a16="http://schemas.microsoft.com/office/drawing/2014/main" id="{DDA03E0F-5F3D-5B4D-8232-BF72B84A198E}"/>
-              </a:ext>
-            </a:extLst>
-          </p:cNvPr>
+          <p:cNvPr id="7171" name="Rectangle 3"/>
           <p:cNvSpPr>
-            <a:spLocks noGrp="1"/>
+            <a:spLocks noGrp="1" noChangeArrowheads="1"/>
           </p:cNvSpPr>
           <p:nvPr>
             <p:ph type="body" idx="1"/>
@@ -17260,47 +12245,66 @@
         </p:nvSpPr>
         <p:spPr/>
         <p:txBody>
-          <a:bodyPr/>
+          <a:bodyPr>
+            <a:normAutofit/>
+          </a:bodyPr>
           <a:lstStyle/>
           <a:p>
             <a:r>
-              <a:rPr lang="en-US" dirty="0"/>
-              <a:t>Political</a:t>
+              <a:rPr lang="en-US" altLang="en-US" sz="3200" dirty="0"/>
+              <a:t>Determine if pairs of </a:t>
             </a:r>
-          </a:p>
-          <a:p>
             <a:r>
-              <a:rPr lang="en-US" dirty="0"/>
-              <a:t>Internal Awareness</a:t>
+              <a:rPr lang="en-US" altLang="en-US" sz="3200" i="1" dirty="0"/>
+              <a:t>records </a:t>
             </a:r>
-          </a:p>
-          <a:p>
             <a:r>
-              <a:rPr lang="en-US" dirty="0"/>
-              <a:t>Legal/Contractual</a:t>
+              <a:rPr lang="en-US" altLang="en-US" sz="3200" dirty="0"/>
+              <a:t>describe the same </a:t>
             </a:r>
-          </a:p>
-          <a:p>
             <a:r>
-              <a:rPr lang="en-US" dirty="0"/>
-              <a:t>Ethical</a:t>
+              <a:rPr lang="en-US" altLang="en-US" sz="3200"/>
+              <a:t>entity </a:t>
             </a:r>
+            <a:endParaRPr lang="en-US" altLang="en-US" sz="3200" dirty="0"/>
+          </a:p>
+          <a:p>
+            <a:endParaRPr lang="en-US" altLang="en-US" sz="3200" dirty="0"/>
           </a:p>
           <a:p>
             <a:r>
-              <a:rPr lang="en-US" dirty="0"/>
-              <a:t>Technical</a:t>
+              <a:rPr lang="en-US" altLang="en-US" sz="3200" dirty="0"/>
+              <a:t>Main applications: </a:t>
             </a:r>
           </a:p>
           <a:p>
-            <a:endParaRPr lang="en-US" dirty="0"/>
+            <a:pPr lvl="1"/>
+            <a:r>
+              <a:rPr lang="en-US" altLang="en-US" sz="2800" i="1" dirty="0"/>
+              <a:t>Joining</a:t>
+            </a:r>
+            <a:r>
+              <a:rPr lang="en-US" altLang="en-US" sz="2800" dirty="0"/>
+              <a:t> two different data sources</a:t>
+            </a:r>
+          </a:p>
+          <a:p>
+            <a:pPr lvl="1"/>
+            <a:r>
+              <a:rPr lang="en-US" altLang="en-US" sz="2800" i="1" dirty="0"/>
+              <a:t>Removing duplicates</a:t>
+            </a:r>
+            <a:r>
+              <a:rPr lang="en-US" altLang="en-US" sz="2800" dirty="0"/>
+              <a:t> from a single data source</a:t>
+            </a:r>
           </a:p>
         </p:txBody>
       </p:sp>
     </p:spTree>
     <p:extLst>
       <p:ext uri="{BB962C8B-B14F-4D97-AF65-F5344CB8AC3E}">
-        <p14:creationId xmlns:p14="http://schemas.microsoft.com/office/powerpoint/2010/main" val="1721185332"/>
+        <p14:creationId xmlns:p14="http://schemas.microsoft.com/office/powerpoint/2010/main" val="3416135692"/>
       </p:ext>
     </p:extLst>
   </p:cSld>
@@ -17311,8 +12315,16 @@
 </file>
 
 <file path=ppt/slides/slide11.xml><?xml version="1.0" encoding="utf-8"?>
-<p:sld xmlns:a="http://schemas.openxmlformats.org/drawingml/2006/main" xmlns:r="http://schemas.openxmlformats.org/officeDocument/2006/relationships" xmlns:p="http://schemas.openxmlformats.org/presentationml/2006/main">
+<p:sld xmlns:a="http://schemas.openxmlformats.org/drawingml/2006/main" xmlns:r="http://schemas.openxmlformats.org/officeDocument/2006/relationships" xmlns:p="http://schemas.openxmlformats.org/presentationml/2006/main" showMasterSp="0">
   <p:cSld>
+    <p:bg>
+      <p:bgPr>
+        <a:solidFill>
+          <a:srgbClr val="FFFFFF"/>
+        </a:solidFill>
+        <a:effectLst/>
+      </p:bgPr>
+    </p:bg>
     <p:spTree>
       <p:nvGrpSpPr>
         <p:cNvPr id="1" name=""/>
@@ -17329,248 +12341,418 @@
       </p:grpSpPr>
       <p:sp>
         <p:nvSpPr>
-          <p:cNvPr id="2" name="Title 1">
+          <p:cNvPr id="2" name="Rectangle 1">
             <a:extLst>
               <a:ext uri="{FF2B5EF4-FFF2-40B4-BE49-F238E27FC236}">
-                <a16:creationId xmlns:a16="http://schemas.microsoft.com/office/drawing/2014/main" id="{C8E60A25-02BD-674B-9661-DF031B0CB52C}"/>
+                <a16:creationId xmlns:a16="http://schemas.microsoft.com/office/drawing/2014/main" id="{F5A27326-4218-CA5D-9C44-15561D415332}"/>
               </a:ext>
             </a:extLst>
           </p:cNvPr>
-          <p:cNvSpPr>
-            <a:spLocks noGrp="1"/>
-          </p:cNvSpPr>
+          <p:cNvSpPr/>
           <p:nvPr>
-            <p:ph type="title"/>
+            <p:custDataLst>
+              <p:tags r:id="rId2"/>
+            </p:custDataLst>
           </p:nvPr>
         </p:nvSpPr>
-        <p:spPr/>
+        <p:spPr>
+          <a:xfrm>
+            <a:off x="444693" y="1742703"/>
+            <a:ext cx="2371696" cy="2371696"/>
+          </a:xfrm>
+          <a:prstGeom prst="rect">
+            <a:avLst/>
+          </a:prstGeom>
+          <a:blipFill>
+            <a:blip r:embed="rId5">
+              <a:extLst>
+                <a:ext uri="{96DAC541-7B7A-43D3-8B79-37D633B846F1}">
+                  <asvg:svgBlip xmlns:asvg="http://schemas.microsoft.com/office/drawing/2016/SVG/main" r:embed="rId6"/>
+                </a:ext>
+              </a:extLst>
+            </a:blip>
+            <a:stretch>
+              <a:fillRect/>
+            </a:stretch>
+          </a:blipFill>
+          <a:ln>
+            <a:solidFill>
+              <a:srgbClr val="FFFFFF"/>
+            </a:solidFill>
+          </a:ln>
+        </p:spPr>
+        <p:style>
+          <a:lnRef idx="2">
+            <a:schemeClr val="accent1">
+              <a:shade val="15000"/>
+            </a:schemeClr>
+          </a:lnRef>
+          <a:fillRef idx="1">
+            <a:schemeClr val="accent1"/>
+          </a:fillRef>
+          <a:effectRef idx="0">
+            <a:schemeClr val="accent1"/>
+          </a:effectRef>
+          <a:fontRef idx="minor">
+            <a:schemeClr val="lt1"/>
+          </a:fontRef>
+        </p:style>
         <p:txBody>
-          <a:bodyPr/>
+          <a:bodyPr rtlCol="0" anchor="ctr"/>
           <a:lstStyle/>
           <a:p>
-            <a:r>
-              <a:rPr lang="en-US" dirty="0"/>
-              <a:t>Data Acquisition: Technical (challenges)</a:t>
-            </a:r>
+            <a:pPr algn="ctr"/>
+            <a:endParaRPr lang="en-US"/>
           </a:p>
         </p:txBody>
       </p:sp>
       <p:sp>
         <p:nvSpPr>
-          <p:cNvPr id="3" name="Text Placeholder 2">
+          <p:cNvPr id="3" name="Rectangle 2">
             <a:extLst>
               <a:ext uri="{FF2B5EF4-FFF2-40B4-BE49-F238E27FC236}">
-                <a16:creationId xmlns:a16="http://schemas.microsoft.com/office/drawing/2014/main" id="{B47464FC-F480-BD4E-8C73-EA0095EB65C0}"/>
+                <a16:creationId xmlns:a16="http://schemas.microsoft.com/office/drawing/2014/main" id="{5F8BB997-FAE1-8DF0-BB01-6279EE673C0E}"/>
               </a:ext>
             </a:extLst>
           </p:cNvPr>
-          <p:cNvSpPr>
-            <a:spLocks noGrp="1"/>
-          </p:cNvSpPr>
+          <p:cNvSpPr/>
           <p:nvPr>
-            <p:ph type="body" idx="1"/>
+            <p:custDataLst>
+              <p:tags r:id="rId3"/>
+            </p:custDataLst>
           </p:nvPr>
         </p:nvSpPr>
-        <p:spPr/>
+        <p:spPr>
+          <a:xfrm>
+            <a:off x="3112851" y="1000897"/>
+            <a:ext cx="8486226" cy="3855308"/>
+          </a:xfrm>
+          <a:prstGeom prst="rect">
+            <a:avLst/>
+          </a:prstGeom>
+          <a:noFill/>
+          <a:ln w="25400" cap="flat" cmpd="sng" algn="ctr">
+            <a:solidFill>
+              <a:srgbClr val="FFFFFF"/>
+            </a:solidFill>
+            <a:prstDash val="solid"/>
+          </a:ln>
+          <a:effectLst/>
+          <a:extLst>
+            <a:ext uri="{909E8E84-426E-40DD-AFC4-6F175D3DCCD1}">
+              <a14:hiddenFill xmlns:a14="http://schemas.microsoft.com/office/drawing/2010/main">
+                <a:solidFill>
+                  <a:schemeClr val="accent1"/>
+                </a:solidFill>
+              </a14:hiddenFill>
+            </a:ext>
+          </a:extLst>
+        </p:spPr>
+        <p:style>
+          <a:lnRef idx="2">
+            <a:schemeClr val="accent1">
+              <a:shade val="15000"/>
+            </a:schemeClr>
+          </a:lnRef>
+          <a:fillRef idx="1">
+            <a:schemeClr val="accent1"/>
+          </a:fillRef>
+          <a:effectRef idx="0">
+            <a:schemeClr val="accent1"/>
+          </a:effectRef>
+          <a:fontRef idx="minor">
+            <a:schemeClr val="lt1"/>
+          </a:fontRef>
+        </p:style>
         <p:txBody>
-          <a:bodyPr/>
+          <a:bodyPr rtlCol="0" anchor="ctr"/>
           <a:lstStyle/>
           <a:p>
             <a:r>
-              <a:rPr lang="en-US" dirty="0"/>
-              <a:t>You rarely work with production data directly so how should you get data?</a:t>
-            </a:r>
-          </a:p>
-          <a:p>
-            <a:pPr lvl="1">
-              <a:spcBef>
-                <a:spcPts val="0"/>
-              </a:spcBef>
-            </a:pPr>
-            <a:r>
-              <a:rPr lang="en-US" dirty="0"/>
-              <a:t>API access</a:t>
-            </a:r>
-          </a:p>
-          <a:p>
-            <a:pPr lvl="1">
-              <a:spcBef>
-                <a:spcPts val="0"/>
-              </a:spcBef>
-            </a:pPr>
-            <a:r>
-              <a:rPr lang="en-US" dirty="0"/>
-              <a:t>Flat files</a:t>
-            </a:r>
-          </a:p>
-          <a:p>
-            <a:pPr lvl="1">
-              <a:spcBef>
-                <a:spcPts val="0"/>
-              </a:spcBef>
-            </a:pPr>
-            <a:r>
-              <a:rPr lang="en-US" dirty="0"/>
-              <a:t>Database dumps</a:t>
-            </a:r>
-          </a:p>
-          <a:p>
-            <a:pPr lvl="1">
-              <a:spcBef>
-                <a:spcPts val="0"/>
-              </a:spcBef>
-            </a:pPr>
-            <a:endParaRPr lang="en-US" dirty="0"/>
-          </a:p>
-          <a:p>
-            <a:r>
-              <a:rPr lang="en-US" dirty="0"/>
-              <a:t>How much should it be processed before you get it?</a:t>
-            </a:r>
-          </a:p>
-          <a:p>
-            <a:endParaRPr lang="en-US" dirty="0"/>
-          </a:p>
-          <a:p>
-            <a:r>
-              <a:rPr lang="en-US" dirty="0"/>
-              <a:t>How do you build a repeatable data acquisition pipeline?</a:t>
-            </a:r>
-          </a:p>
-          <a:p>
-            <a:endParaRPr lang="en-US" dirty="0"/>
-          </a:p>
-          <a:p>
-            <a:r>
-              <a:rPr lang="en-US" dirty="0"/>
-              <a:t>When do you collect new data?</a:t>
-            </a:r>
-          </a:p>
-          <a:p>
-            <a:pPr marL="565150" lvl="1" indent="0">
-              <a:spcBef>
-                <a:spcPts val="0"/>
-              </a:spcBef>
-              <a:buNone/>
-            </a:pPr>
-            <a:endParaRPr lang="en-US" dirty="0"/>
-          </a:p>
-        </p:txBody>
-      </p:sp>
-    </p:spTree>
-    <p:extLst>
-      <p:ext uri="{BB962C8B-B14F-4D97-AF65-F5344CB8AC3E}">
-        <p14:creationId xmlns:p14="http://schemas.microsoft.com/office/powerpoint/2010/main" val="4069897732"/>
-      </p:ext>
-    </p:extLst>
-  </p:cSld>
-  <p:clrMapOvr>
-    <a:masterClrMapping/>
-  </p:clrMapOvr>
-</p:sld>
-</file>
-
-<file path=ppt/slides/slide12.xml><?xml version="1.0" encoding="utf-8"?>
-<p:sld xmlns:a="http://schemas.openxmlformats.org/drawingml/2006/main" xmlns:r="http://schemas.openxmlformats.org/officeDocument/2006/relationships" xmlns:p="http://schemas.openxmlformats.org/presentationml/2006/main">
-  <p:cSld>
-    <p:spTree>
-      <p:nvGrpSpPr>
-        <p:cNvPr id="1" name=""/>
-        <p:cNvGrpSpPr/>
-        <p:nvPr/>
-      </p:nvGrpSpPr>
-      <p:grpSpPr>
-        <a:xfrm>
-          <a:off x="0" y="0"/>
-          <a:ext cx="0" cy="0"/>
-          <a:chOff x="0" y="0"/>
-          <a:chExt cx="0" cy="0"/>
-        </a:xfrm>
-      </p:grpSpPr>
-      <p:sp>
-        <p:nvSpPr>
-          <p:cNvPr id="2" name="Title 1">
-            <a:extLst>
-              <a:ext uri="{FF2B5EF4-FFF2-40B4-BE49-F238E27FC236}">
-                <a16:creationId xmlns:a16="http://schemas.microsoft.com/office/drawing/2014/main" id="{976F140B-CCBA-6544-AE2A-A3E88E046C57}"/>
-              </a:ext>
-            </a:extLst>
-          </p:cNvPr>
-          <p:cNvSpPr>
-            <a:spLocks noGrp="1"/>
-          </p:cNvSpPr>
-          <p:nvPr>
-            <p:ph type="title"/>
-          </p:nvPr>
-        </p:nvSpPr>
-        <p:spPr/>
-        <p:txBody>
-          <a:bodyPr/>
-          <a:lstStyle/>
-          <a:p>
-            <a:r>
-              <a:rPr lang="en-US" dirty="0"/>
-              <a:t>Data Storage</a:t>
+              <a:rPr lang="en-US" sz="3400" b="1">
+                <a:solidFill>
+                  <a:srgbClr val="000000"/>
+                </a:solidFill>
+              </a:rPr>
+              <a:t>How much experience do you have with record linkage/matching in your prior (or current) work?</a:t>
             </a:r>
           </a:p>
         </p:txBody>
       </p:sp>
       <p:sp>
         <p:nvSpPr>
-          <p:cNvPr id="3" name="Text Placeholder 2">
+          <p:cNvPr id="4" name="Rectangle 3">
             <a:extLst>
               <a:ext uri="{FF2B5EF4-FFF2-40B4-BE49-F238E27FC236}">
-                <a16:creationId xmlns:a16="http://schemas.microsoft.com/office/drawing/2014/main" id="{88BFB7A9-1DE4-3B44-ACD9-B7066AE5097C}"/>
+                <a16:creationId xmlns:a16="http://schemas.microsoft.com/office/drawing/2014/main" id="{3E786180-F13C-4AB9-F137-5B0ABC38AEC9}"/>
               </a:ext>
             </a:extLst>
           </p:cNvPr>
-          <p:cNvSpPr>
-            <a:spLocks noGrp="1"/>
-          </p:cNvSpPr>
-          <p:nvPr>
-            <p:ph type="body" idx="1"/>
-          </p:nvPr>
+          <p:cNvSpPr/>
+          <p:nvPr/>
         </p:nvSpPr>
-        <p:spPr/>
+        <p:spPr>
+          <a:xfrm>
+            <a:off x="0" y="5820032"/>
+            <a:ext cx="12192001" cy="1037968"/>
+          </a:xfrm>
+          <a:prstGeom prst="rect">
+            <a:avLst/>
+          </a:prstGeom>
+          <a:solidFill>
+            <a:srgbClr val="198038"/>
+          </a:solidFill>
+          <a:ln w="25400" cap="flat" cmpd="sng" algn="ctr">
+            <a:noFill/>
+            <a:prstDash val="solid"/>
+          </a:ln>
+          <a:effectLst/>
+          <a:extLst>
+            <a:ext uri="{91240B29-F687-4F45-9708-019B960494DF}">
+              <a14:hiddenLine xmlns:a14="http://schemas.microsoft.com/office/drawing/2010/main" w="25400" cap="flat" cmpd="sng" algn="ctr">
+                <a:solidFill>
+                  <a:schemeClr val="accent1">
+                    <a:shade val="15000"/>
+                  </a:schemeClr>
+                </a:solidFill>
+                <a:prstDash val="solid"/>
+              </a14:hiddenLine>
+            </a:ext>
+          </a:extLst>
+        </p:spPr>
+        <p:style>
+          <a:lnRef idx="2">
+            <a:schemeClr val="accent1">
+              <a:shade val="15000"/>
+            </a:schemeClr>
+          </a:lnRef>
+          <a:fillRef idx="1">
+            <a:schemeClr val="accent1"/>
+          </a:fillRef>
+          <a:effectRef idx="0">
+            <a:schemeClr val="accent1"/>
+          </a:effectRef>
+          <a:fontRef idx="minor">
+            <a:schemeClr val="lt1"/>
+          </a:fontRef>
+        </p:style>
         <p:txBody>
-          <a:bodyPr/>
+          <a:bodyPr lIns="741155" tIns="259492" rIns="1852888" bIns="203886" rtlCol="0" anchor="ctr">
+            <a:normAutofit fontScale="85000" lnSpcReduction="10000"/>
+          </a:bodyPr>
           <a:lstStyle/>
           <a:p>
             <a:r>
-              <a:rPr lang="en-US" dirty="0"/>
-              <a:t>Use Databases whenever possible</a:t>
+              <a:rPr lang="en-US" sz="2600">
+                <a:solidFill>
+                  <a:srgbClr val="FFFFFF"/>
+                </a:solidFill>
+              </a:rPr>
+              <a:t>The </a:t>
             </a:r>
-          </a:p>
-          <a:p>
-            <a:pPr lvl="1"/>
             <a:r>
-              <a:rPr lang="en-US" dirty="0"/>
-              <a:t>Types of databases</a:t>
+              <a:rPr lang="en-US" sz="2600">
+                <a:solidFill>
+                  <a:srgbClr val="FFFFFF"/>
+                </a:solidFill>
+                <a:hlinkClick r:id="rId7">
+                  <a:extLst>
+                    <a:ext uri="{A12FA001-AC4F-418D-AE19-62706E023703}">
+                      <ahyp:hlinkClr xmlns:ahyp="http://schemas.microsoft.com/office/drawing/2018/hyperlinkcolor" val="tx"/>
+                    </a:ext>
+                  </a:extLst>
+                </a:hlinkClick>
+              </a:rPr>
+              <a:t>Slido app</a:t>
             </a:r>
-          </a:p>
-          <a:p>
-            <a:pPr lvl="1"/>
-            <a:endParaRPr lang="en-US" dirty="0"/>
-          </a:p>
-          <a:p>
             <a:r>
-              <a:rPr lang="en-US" dirty="0"/>
-              <a:t>Deidentification when dealing with confidential/sensitive identifiable data</a:t>
-            </a:r>
-          </a:p>
-          <a:p>
-            <a:pPr lvl="1"/>
-            <a:r>
-              <a:rPr lang="en-US" dirty="0"/>
-              <a:t>hashing</a:t>
+              <a:rPr lang="en-US" sz="2600">
+                <a:solidFill>
+                  <a:srgbClr val="FFFFFF"/>
+                </a:solidFill>
+              </a:rPr>
+              <a:t> must be installed on every computer you’re presenting from</a:t>
             </a:r>
           </a:p>
         </p:txBody>
       </p:sp>
+      <p:pic>
+        <p:nvPicPr>
+          <p:cNvPr id="6" name="Graphic 5">
+            <a:extLst>
+              <a:ext uri="{FF2B5EF4-FFF2-40B4-BE49-F238E27FC236}">
+                <a16:creationId xmlns:a16="http://schemas.microsoft.com/office/drawing/2014/main" id="{6F0427CE-988D-4F98-A9FA-52855AA165E9}"/>
+              </a:ext>
+            </a:extLst>
+          </p:cNvPr>
+          <p:cNvPicPr>
+            <a:picLocks/>
+          </p:cNvPicPr>
+          <p:nvPr/>
+        </p:nvPicPr>
+        <p:blipFill>
+          <a:blip r:embed="rId8">
+            <a:extLst>
+              <a:ext uri="{96DAC541-7B7A-43D3-8B79-37D633B846F1}">
+                <asvg:svgBlip xmlns:asvg="http://schemas.microsoft.com/office/drawing/2016/SVG/main" r:embed="rId9"/>
+              </a:ext>
+            </a:extLst>
+          </a:blip>
+          <a:stretch>
+            <a:fillRect/>
+          </a:stretch>
+        </p:blipFill>
+        <p:spPr>
+          <a:xfrm>
+            <a:off x="296462" y="6190785"/>
+            <a:ext cx="296462" cy="296462"/>
+          </a:xfrm>
+          <a:prstGeom prst="rect">
+            <a:avLst/>
+          </a:prstGeom>
+        </p:spPr>
+      </p:pic>
+      <p:sp>
+        <p:nvSpPr>
+          <p:cNvPr id="7" name="Trapezoid 6">
+            <a:extLst>
+              <a:ext uri="{FF2B5EF4-FFF2-40B4-BE49-F238E27FC236}">
+                <a16:creationId xmlns:a16="http://schemas.microsoft.com/office/drawing/2014/main" id="{97E181FC-7003-C137-0682-08A32365436B}"/>
+              </a:ext>
+            </a:extLst>
+          </p:cNvPr>
+          <p:cNvSpPr/>
+          <p:nvPr/>
+        </p:nvSpPr>
+        <p:spPr>
+          <a:xfrm rot="2700000">
+            <a:off x="9620371" y="514924"/>
+            <a:ext cx="3335198" cy="778213"/>
+          </a:xfrm>
+          <a:prstGeom prst="trapezoid">
+            <a:avLst>
+              <a:gd name="adj" fmla="val 100000"/>
+            </a:avLst>
+          </a:prstGeom>
+          <a:solidFill>
+            <a:srgbClr val="EDFAF2"/>
+          </a:solidFill>
+          <a:ln w="25400" cap="flat" cmpd="sng" algn="ctr">
+            <a:noFill/>
+            <a:prstDash val="solid"/>
+          </a:ln>
+          <a:effectLst/>
+          <a:extLst>
+            <a:ext uri="{91240B29-F687-4F45-9708-019B960494DF}">
+              <a14:hiddenLine xmlns:a14="http://schemas.microsoft.com/office/drawing/2010/main" w="25400" cap="flat" cmpd="sng" algn="ctr">
+                <a:solidFill>
+                  <a:schemeClr val="accent1">
+                    <a:shade val="15000"/>
+                  </a:schemeClr>
+                </a:solidFill>
+                <a:prstDash val="solid"/>
+              </a14:hiddenLine>
+            </a:ext>
+          </a:extLst>
+        </p:spPr>
+        <p:style>
+          <a:lnRef idx="2">
+            <a:schemeClr val="accent1">
+              <a:shade val="15000"/>
+            </a:schemeClr>
+          </a:lnRef>
+          <a:fillRef idx="1">
+            <a:schemeClr val="accent1"/>
+          </a:fillRef>
+          <a:effectRef idx="0">
+            <a:schemeClr val="accent1"/>
+          </a:effectRef>
+          <a:fontRef idx="minor">
+            <a:schemeClr val="lt1"/>
+          </a:fontRef>
+        </p:style>
+        <p:txBody>
+          <a:bodyPr tIns="0" bIns="0" rtlCol="0" anchor="t">
+            <a:normAutofit fontScale="70000" lnSpcReduction="20000"/>
+          </a:bodyPr>
+          <a:lstStyle/>
+          <a:p>
+            <a:pPr algn="ctr"/>
+            <a:r>
+              <a:rPr lang="en-US" sz="2600" b="1">
+                <a:solidFill>
+                  <a:srgbClr val="198038"/>
+                </a:solidFill>
+              </a:rPr>
+              <a:t>Do not edit
+</a:t>
+            </a:r>
+            <a:r>
+              <a:rPr lang="en-US" sz="2200">
+                <a:solidFill>
+                  <a:srgbClr val="198038"/>
+                </a:solidFill>
+                <a:hlinkClick r:id="rId10">
+                  <a:extLst>
+                    <a:ext uri="{A12FA001-AC4F-418D-AE19-62706E023703}">
+                      <ahyp:hlinkClr xmlns:ahyp="http://schemas.microsoft.com/office/drawing/2018/hyperlinkcolor" val="tx"/>
+                    </a:ext>
+                  </a:extLst>
+                </a:hlinkClick>
+              </a:rPr>
+              <a:t>How to change the design</a:t>
+            </a:r>
+            <a:endParaRPr lang="en-US" sz="2200">
+              <a:solidFill>
+                <a:srgbClr val="198038"/>
+              </a:solidFill>
+            </a:endParaRPr>
+          </a:p>
+        </p:txBody>
+      </p:sp>
+      <p:pic>
+        <p:nvPicPr>
+          <p:cNvPr id="9" name="Graphic 8">
+            <a:extLst>
+              <a:ext uri="{FF2B5EF4-FFF2-40B4-BE49-F238E27FC236}">
+                <a16:creationId xmlns:a16="http://schemas.microsoft.com/office/drawing/2014/main" id="{FE7835DF-1211-1025-ACB5-92B674ADF7DF}"/>
+              </a:ext>
+            </a:extLst>
+          </p:cNvPr>
+          <p:cNvPicPr>
+            <a:picLocks/>
+          </p:cNvPicPr>
+          <p:nvPr/>
+        </p:nvPicPr>
+        <p:blipFill>
+          <a:blip r:embed="rId11">
+            <a:extLst>
+              <a:ext uri="{96DAC541-7B7A-43D3-8B79-37D633B846F1}">
+                <asvg:svgBlip xmlns:asvg="http://schemas.microsoft.com/office/drawing/2016/SVG/main" r:embed="rId12"/>
+              </a:ext>
+            </a:extLst>
+          </a:blip>
+          <a:stretch>
+            <a:fillRect/>
+          </a:stretch>
+        </p:blipFill>
+        <p:spPr>
+          <a:xfrm>
+            <a:off x="10746748" y="6153727"/>
+            <a:ext cx="1111733" cy="370578"/>
+          </a:xfrm>
+          <a:prstGeom prst="rect">
+            <a:avLst/>
+          </a:prstGeom>
+        </p:spPr>
+      </p:pic>
     </p:spTree>
+    <p:custDataLst>
+      <p:tags r:id="rId1"/>
+    </p:custDataLst>
     <p:extLst>
       <p:ext uri="{BB962C8B-B14F-4D97-AF65-F5344CB8AC3E}">
-        <p14:creationId xmlns:p14="http://schemas.microsoft.com/office/powerpoint/2010/main" val="1278687259"/>
+        <p14:creationId xmlns:p14="http://schemas.microsoft.com/office/powerpoint/2010/main" val="3483924495"/>
       </p:ext>
     </p:extLst>
   </p:cSld>
@@ -17598,144 +12780,28 @@
                             </p:stCondLst>
                             <p:childTnLst>
                               <p:par>
-                                <p:cTn id="5" presetID="1" presetClass="entr" presetSubtype="0" fill="hold" grpId="0" nodeType="clickEffect">
+                                <p:cTn id="5" presetID="26" presetClass="emph" presetSubtype="0" fill="hold" grpId="0" nodeType="clickEffect">
                                   <p:stCondLst>
                                     <p:cond delay="0"/>
                                   </p:stCondLst>
                                   <p:childTnLst>
-                                    <p:set>
+                                    <p:animEffect transition="out" filter="fade">
                                       <p:cBhvr>
-                                        <p:cTn id="6" dur="1" fill="hold">
-                                          <p:stCondLst>
-                                            <p:cond delay="0"/>
-                                          </p:stCondLst>
-                                        </p:cTn>
+                                        <p:cTn id="6" dur="50" tmFilter="0, 0; .2, .5; .8, .5; 1, 0"/>
                                         <p:tgtEl>
-                                          <p:spTgt spid="3">
-                                            <p:txEl>
-                                              <p:pRg st="0" end="0"/>
-                                            </p:txEl>
-                                          </p:spTgt>
+                                          <p:spTgt spid="3"/>
                                         </p:tgtEl>
-                                        <p:attrNameLst>
-                                          <p:attrName>style.visibility</p:attrName>
-                                        </p:attrNameLst>
                                       </p:cBhvr>
-                                      <p:to>
-                                        <p:strVal val="visible"/>
-                                      </p:to>
-                                    </p:set>
-                                  </p:childTnLst>
-                                </p:cTn>
-                              </p:par>
-                              <p:par>
-                                <p:cTn id="7" presetID="1" presetClass="entr" presetSubtype="0" fill="hold" grpId="0" nodeType="withEffect">
-                                  <p:stCondLst>
-                                    <p:cond delay="0"/>
-                                  </p:stCondLst>
-                                  <p:childTnLst>
-                                    <p:set>
+                                    </p:animEffect>
+                                    <p:animScale>
                                       <p:cBhvr>
-                                        <p:cTn id="8" dur="1" fill="hold">
-                                          <p:stCondLst>
-                                            <p:cond delay="0"/>
-                                          </p:stCondLst>
-                                        </p:cTn>
+                                        <p:cTn id="7" dur="25" autoRev="1" fill="hold"/>
                                         <p:tgtEl>
-                                          <p:spTgt spid="3">
-                                            <p:txEl>
-                                              <p:pRg st="1" end="1"/>
-                                            </p:txEl>
-                                          </p:spTgt>
+                                          <p:spTgt spid="3"/>
                                         </p:tgtEl>
-                                        <p:attrNameLst>
-                                          <p:attrName>style.visibility</p:attrName>
-                                        </p:attrNameLst>
                                       </p:cBhvr>
-                                      <p:to>
-                                        <p:strVal val="visible"/>
-                                      </p:to>
-                                    </p:set>
-                                  </p:childTnLst>
-                                </p:cTn>
-                              </p:par>
-                            </p:childTnLst>
-                          </p:cTn>
-                        </p:par>
-                      </p:childTnLst>
-                    </p:cTn>
-                  </p:par>
-                  <p:par>
-                    <p:cTn id="9" fill="hold">
-                      <p:stCondLst>
-                        <p:cond delay="indefinite"/>
-                      </p:stCondLst>
-                      <p:childTnLst>
-                        <p:par>
-                          <p:cTn id="10" fill="hold">
-                            <p:stCondLst>
-                              <p:cond delay="0"/>
-                            </p:stCondLst>
-                            <p:childTnLst>
-                              <p:par>
-                                <p:cTn id="11" presetID="1" presetClass="entr" presetSubtype="0" fill="hold" grpId="0" nodeType="clickEffect">
-                                  <p:stCondLst>
-                                    <p:cond delay="0"/>
-                                  </p:stCondLst>
-                                  <p:childTnLst>
-                                    <p:set>
-                                      <p:cBhvr>
-                                        <p:cTn id="12" dur="1" fill="hold">
-                                          <p:stCondLst>
-                                            <p:cond delay="0"/>
-                                          </p:stCondLst>
-                                        </p:cTn>
-                                        <p:tgtEl>
-                                          <p:spTgt spid="3">
-                                            <p:txEl>
-                                              <p:pRg st="3" end="3"/>
-                                            </p:txEl>
-                                          </p:spTgt>
-                                        </p:tgtEl>
-                                        <p:attrNameLst>
-                                          <p:attrName>style.visibility</p:attrName>
-                                        </p:attrNameLst>
-                                      </p:cBhvr>
-                                      <p:to>
-                                        <p:strVal val="visible"/>
-                                      </p:to>
-                                    </p:set>
-                                  </p:childTnLst>
-                                </p:cTn>
-                              </p:par>
-                              <p:par>
-                                <p:cTn id="13" presetID="1" presetClass="entr" presetSubtype="0" fill="hold" grpId="0" nodeType="withEffect">
-                                  <p:stCondLst>
-                                    <p:cond delay="0"/>
-                                  </p:stCondLst>
-                                  <p:childTnLst>
-                                    <p:set>
-                                      <p:cBhvr>
-                                        <p:cTn id="14" dur="1" fill="hold">
-                                          <p:stCondLst>
-                                            <p:cond delay="0"/>
-                                          </p:stCondLst>
-                                        </p:cTn>
-                                        <p:tgtEl>
-                                          <p:spTgt spid="3">
-                                            <p:txEl>
-                                              <p:pRg st="4" end="4"/>
-                                            </p:txEl>
-                                          </p:spTgt>
-                                        </p:tgtEl>
-                                        <p:attrNameLst>
-                                          <p:attrName>style.visibility</p:attrName>
-                                        </p:attrNameLst>
-                                      </p:cBhvr>
-                                      <p:to>
-                                        <p:strVal val="visible"/>
-                                      </p:to>
-                                    </p:set>
+                                      <p:by x="105000" y="105000"/>
+                                    </p:animScale>
                                   </p:childTnLst>
                                 </p:cTn>
                               </p:par>
@@ -17767,14 +12833,14 @@
       </p:par>
     </p:tnLst>
     <p:bldLst>
-      <p:bldP spid="3" grpId="0" build="p"/>
+      <p:bldP spid="3" grpId="0" animBg="1"/>
     </p:bldLst>
   </p:timing>
 </p:sld>
 </file>
 
-<file path=ppt/slides/slide13.xml><?xml version="1.0" encoding="utf-8"?>
-<p:sld xmlns:a="http://schemas.openxmlformats.org/drawingml/2006/main" xmlns:r="http://schemas.openxmlformats.org/officeDocument/2006/relationships" xmlns:p="http://schemas.openxmlformats.org/presentationml/2006/main">
+<file path=ppt/slides/slide12.xml><?xml version="1.0" encoding="utf-8"?>
+<p:sld xmlns:a="http://schemas.openxmlformats.org/drawingml/2006/main" xmlns:r="http://schemas.openxmlformats.org/officeDocument/2006/relationships" xmlns:p="http://schemas.openxmlformats.org/presentationml/2006/main" show="0">
   <p:cSld>
     <p:spTree>
       <p:nvGrpSpPr>
@@ -17807,7 +12873,15 @@
           <a:p>
             <a:r>
               <a:rPr lang="en-US" altLang="en-US" dirty="0"/>
-              <a:t> Linkage: Goals</a:t>
+              <a:t> Quick Poll (</a:t>
+            </a:r>
+            <a:r>
+              <a:rPr lang="en-US" altLang="en-US" dirty="0" err="1"/>
+              <a:t>slido</a:t>
+            </a:r>
+            <a:r>
+              <a:rPr lang="en-US" altLang="en-US" dirty="0"/>
+              <a:t>)</a:t>
             </a:r>
           </a:p>
         </p:txBody>
@@ -17829,134 +12903,6 @@
           </a:bodyPr>
           <a:lstStyle/>
           <a:p>
-            <a:r>
-              <a:rPr lang="en-US" altLang="en-US" sz="3200" dirty="0"/>
-              <a:t>Determine if pairs of </a:t>
-            </a:r>
-            <a:r>
-              <a:rPr lang="en-US" altLang="en-US" sz="3200" i="1" dirty="0"/>
-              <a:t>records </a:t>
-            </a:r>
-            <a:r>
-              <a:rPr lang="en-US" altLang="en-US" sz="3200" dirty="0"/>
-              <a:t>describe the same </a:t>
-            </a:r>
-            <a:r>
-              <a:rPr lang="en-US" altLang="en-US" sz="3200"/>
-              <a:t>entity </a:t>
-            </a:r>
-            <a:endParaRPr lang="en-US" altLang="en-US" sz="3200" dirty="0"/>
-          </a:p>
-          <a:p>
-            <a:endParaRPr lang="en-US" altLang="en-US" sz="3200" dirty="0"/>
-          </a:p>
-          <a:p>
-            <a:r>
-              <a:rPr lang="en-US" altLang="en-US" sz="3200" dirty="0"/>
-              <a:t>Main applications: </a:t>
-            </a:r>
-          </a:p>
-          <a:p>
-            <a:pPr lvl="1"/>
-            <a:r>
-              <a:rPr lang="en-US" altLang="en-US" sz="2800" i="1" dirty="0"/>
-              <a:t>Joining</a:t>
-            </a:r>
-            <a:r>
-              <a:rPr lang="en-US" altLang="en-US" sz="2800" dirty="0"/>
-              <a:t> two different data sources</a:t>
-            </a:r>
-          </a:p>
-          <a:p>
-            <a:pPr lvl="1"/>
-            <a:r>
-              <a:rPr lang="en-US" altLang="en-US" sz="2800" i="1" dirty="0"/>
-              <a:t>Removing duplicates</a:t>
-            </a:r>
-            <a:r>
-              <a:rPr lang="en-US" altLang="en-US" sz="2800" dirty="0"/>
-              <a:t> from a single data source</a:t>
-            </a:r>
-          </a:p>
-        </p:txBody>
-      </p:sp>
-    </p:spTree>
-    <p:extLst>
-      <p:ext uri="{BB962C8B-B14F-4D97-AF65-F5344CB8AC3E}">
-        <p14:creationId xmlns:p14="http://schemas.microsoft.com/office/powerpoint/2010/main" val="3416135692"/>
-      </p:ext>
-    </p:extLst>
-  </p:cSld>
-  <p:clrMapOvr>
-    <a:masterClrMapping/>
-  </p:clrMapOvr>
-</p:sld>
-</file>
-
-<file path=ppt/slides/slide14.xml><?xml version="1.0" encoding="utf-8"?>
-<p:sld xmlns:a="http://schemas.openxmlformats.org/drawingml/2006/main" xmlns:r="http://schemas.openxmlformats.org/officeDocument/2006/relationships" xmlns:p="http://schemas.openxmlformats.org/presentationml/2006/main">
-  <p:cSld>
-    <p:spTree>
-      <p:nvGrpSpPr>
-        <p:cNvPr id="1" name=""/>
-        <p:cNvGrpSpPr/>
-        <p:nvPr/>
-      </p:nvGrpSpPr>
-      <p:grpSpPr>
-        <a:xfrm>
-          <a:off x="0" y="0"/>
-          <a:ext cx="0" cy="0"/>
-          <a:chOff x="0" y="0"/>
-          <a:chExt cx="0" cy="0"/>
-        </a:xfrm>
-      </p:grpSpPr>
-      <p:sp>
-        <p:nvSpPr>
-          <p:cNvPr id="7170" name="Rectangle 2"/>
-          <p:cNvSpPr>
-            <a:spLocks noGrp="1" noChangeArrowheads="1"/>
-          </p:cNvSpPr>
-          <p:nvPr>
-            <p:ph type="title"/>
-          </p:nvPr>
-        </p:nvSpPr>
-        <p:spPr/>
-        <p:txBody>
-          <a:bodyPr/>
-          <a:lstStyle/>
-          <a:p>
-            <a:r>
-              <a:rPr lang="en-US" altLang="en-US" dirty="0"/>
-              <a:t> Quick Poll (</a:t>
-            </a:r>
-            <a:r>
-              <a:rPr lang="en-US" altLang="en-US" dirty="0" err="1"/>
-              <a:t>slido</a:t>
-            </a:r>
-            <a:r>
-              <a:rPr lang="en-US" altLang="en-US" dirty="0"/>
-              <a:t>)</a:t>
-            </a:r>
-          </a:p>
-        </p:txBody>
-      </p:sp>
-      <p:sp>
-        <p:nvSpPr>
-          <p:cNvPr id="7171" name="Rectangle 3"/>
-          <p:cNvSpPr>
-            <a:spLocks noGrp="1" noChangeArrowheads="1"/>
-          </p:cNvSpPr>
-          <p:nvPr>
-            <p:ph type="body" idx="1"/>
-          </p:nvPr>
-        </p:nvSpPr>
-        <p:spPr/>
-        <p:txBody>
-          <a:bodyPr>
-            <a:normAutofit/>
-          </a:bodyPr>
-          <a:lstStyle/>
-          <a:p>
             <a:pPr marL="76200" indent="0" algn="ctr">
               <a:buNone/>
             </a:pPr>
@@ -18015,7 +12961,7 @@
 </p:sld>
 </file>
 
-<file path=ppt/slides/slide15.xml><?xml version="1.0" encoding="utf-8"?>
+<file path=ppt/slides/slide13.xml><?xml version="1.0" encoding="utf-8"?>
 <p:sld xmlns:a="http://schemas.openxmlformats.org/drawingml/2006/main" xmlns:r="http://schemas.openxmlformats.org/officeDocument/2006/relationships" xmlns:p="http://schemas.openxmlformats.org/presentationml/2006/main">
   <p:cSld>
     <p:spTree>
@@ -18149,7 +13095,90 @@
 </p:sld>
 </file>
 
-<file path=ppt/slides/slide16.xml><?xml version="1.0" encoding="utf-8"?>
+<file path=ppt/slides/slide14.xml><?xml version="1.0" encoding="utf-8"?>
+<p:sld xmlns:a="http://schemas.openxmlformats.org/drawingml/2006/main" xmlns:r="http://schemas.openxmlformats.org/officeDocument/2006/relationships" xmlns:p="http://schemas.openxmlformats.org/presentationml/2006/main">
+  <p:cSld>
+    <p:spTree>
+      <p:nvGrpSpPr>
+        <p:cNvPr id="1" name=""/>
+        <p:cNvGrpSpPr/>
+        <p:nvPr/>
+      </p:nvGrpSpPr>
+      <p:grpSpPr>
+        <a:xfrm>
+          <a:off x="0" y="0"/>
+          <a:ext cx="0" cy="0"/>
+          <a:chOff x="0" y="0"/>
+          <a:chExt cx="0" cy="0"/>
+        </a:xfrm>
+      </p:grpSpPr>
+      <p:sp>
+        <p:nvSpPr>
+          <p:cNvPr id="2" name="Title 1">
+            <a:extLst>
+              <a:ext uri="{FF2B5EF4-FFF2-40B4-BE49-F238E27FC236}">
+                <a16:creationId xmlns:a16="http://schemas.microsoft.com/office/drawing/2014/main" id="{CE43F62F-D0EC-DDA3-C252-1D5EC08BEEA0}"/>
+              </a:ext>
+            </a:extLst>
+          </p:cNvPr>
+          <p:cNvSpPr>
+            <a:spLocks noGrp="1"/>
+          </p:cNvSpPr>
+          <p:nvPr>
+            <p:ph type="title"/>
+          </p:nvPr>
+        </p:nvSpPr>
+        <p:spPr/>
+        <p:txBody>
+          <a:bodyPr/>
+          <a:lstStyle/>
+          <a:p>
+            <a:r>
+              <a:rPr lang="en-US" dirty="0"/>
+              <a:t>Use cases in practice</a:t>
+            </a:r>
+          </a:p>
+        </p:txBody>
+      </p:sp>
+      <p:sp>
+        <p:nvSpPr>
+          <p:cNvPr id="3" name="Text Placeholder 2">
+            <a:extLst>
+              <a:ext uri="{FF2B5EF4-FFF2-40B4-BE49-F238E27FC236}">
+                <a16:creationId xmlns:a16="http://schemas.microsoft.com/office/drawing/2014/main" id="{608DF6B7-AAAA-B333-F8AE-570DC8B5243C}"/>
+              </a:ext>
+            </a:extLst>
+          </p:cNvPr>
+          <p:cNvSpPr>
+            <a:spLocks noGrp="1"/>
+          </p:cNvSpPr>
+          <p:nvPr>
+            <p:ph type="body" idx="1"/>
+          </p:nvPr>
+        </p:nvSpPr>
+        <p:spPr/>
+        <p:txBody>
+          <a:bodyPr/>
+          <a:lstStyle/>
+          <a:p>
+            <a:endParaRPr lang="en-US"/>
+          </a:p>
+        </p:txBody>
+      </p:sp>
+    </p:spTree>
+    <p:extLst>
+      <p:ext uri="{BB962C8B-B14F-4D97-AF65-F5344CB8AC3E}">
+        <p14:creationId xmlns:p14="http://schemas.microsoft.com/office/powerpoint/2010/main" val="3585064670"/>
+      </p:ext>
+    </p:extLst>
+  </p:cSld>
+  <p:clrMapOvr>
+    <a:masterClrMapping/>
+  </p:clrMapOvr>
+</p:sld>
+</file>
+
+<file path=ppt/slides/slide15.xml><?xml version="1.0" encoding="utf-8"?>
 <p:sld xmlns:a="http://schemas.openxmlformats.org/drawingml/2006/main" xmlns:r="http://schemas.openxmlformats.org/officeDocument/2006/relationships" xmlns:p="http://schemas.openxmlformats.org/presentationml/2006/main">
   <p:cSld>
     <p:spTree>
@@ -18286,7 +13315,7 @@
 </p:sld>
 </file>
 
-<file path=ppt/slides/slide17.xml><?xml version="1.0" encoding="utf-8"?>
+<file path=ppt/slides/slide16.xml><?xml version="1.0" encoding="utf-8"?>
 <p:sld xmlns:a="http://schemas.openxmlformats.org/drawingml/2006/main" xmlns:r="http://schemas.openxmlformats.org/officeDocument/2006/relationships" xmlns:p="http://schemas.openxmlformats.org/presentationml/2006/main">
   <p:cSld>
     <p:spTree>
@@ -18374,7 +13403,7 @@
 </p:sld>
 </file>
 
-<file path=ppt/slides/slide18.xml><?xml version="1.0" encoding="utf-8"?>
+<file path=ppt/slides/slide17.xml><?xml version="1.0" encoding="utf-8"?>
 <p:sld xmlns:a="http://schemas.openxmlformats.org/drawingml/2006/main" xmlns:r="http://schemas.openxmlformats.org/officeDocument/2006/relationships" xmlns:p="http://schemas.openxmlformats.org/presentationml/2006/main">
   <p:cSld>
     <p:spTree>
@@ -19033,6 +14062,98 @@
 </p:sld>
 </file>
 
+<file path=ppt/slides/slide18.xml><?xml version="1.0" encoding="utf-8"?>
+<p:sld xmlns:a="http://schemas.openxmlformats.org/drawingml/2006/main" xmlns:r="http://schemas.openxmlformats.org/officeDocument/2006/relationships" xmlns:p="http://schemas.openxmlformats.org/presentationml/2006/main">
+  <p:cSld>
+    <p:spTree>
+      <p:nvGrpSpPr>
+        <p:cNvPr id="1" name=""/>
+        <p:cNvGrpSpPr/>
+        <p:nvPr/>
+      </p:nvGrpSpPr>
+      <p:grpSpPr>
+        <a:xfrm>
+          <a:off x="0" y="0"/>
+          <a:ext cx="0" cy="0"/>
+          <a:chOff x="0" y="0"/>
+          <a:chExt cx="0" cy="0"/>
+        </a:xfrm>
+      </p:grpSpPr>
+      <p:sp>
+        <p:nvSpPr>
+          <p:cNvPr id="2" name="Title 1"/>
+          <p:cNvSpPr>
+            <a:spLocks noGrp="1"/>
+          </p:cNvSpPr>
+          <p:nvPr>
+            <p:ph type="title"/>
+          </p:nvPr>
+        </p:nvSpPr>
+        <p:spPr/>
+        <p:txBody>
+          <a:bodyPr/>
+          <a:lstStyle/>
+          <a:p>
+            <a:r>
+              <a:rPr lang="en-US" dirty="0"/>
+              <a:t>When are two records about the same entity?</a:t>
+            </a:r>
+          </a:p>
+        </p:txBody>
+      </p:sp>
+      <p:sp>
+        <p:nvSpPr>
+          <p:cNvPr id="3" name="Content Placeholder 2"/>
+          <p:cNvSpPr>
+            <a:spLocks noGrp="1"/>
+          </p:cNvSpPr>
+          <p:nvPr>
+            <p:ph type="body" idx="1"/>
+          </p:nvPr>
+        </p:nvSpPr>
+        <p:spPr/>
+        <p:txBody>
+          <a:bodyPr/>
+          <a:lstStyle/>
+          <a:p>
+            <a:r>
+              <a:rPr lang="en-US" dirty="0"/>
+              <a:t>Examples of possible similarity metrics</a:t>
+            </a:r>
+          </a:p>
+          <a:p>
+            <a:pPr lvl="1"/>
+            <a:r>
+              <a:rPr lang="en-US" dirty="0"/>
+              <a:t>Edit distance</a:t>
+            </a:r>
+          </a:p>
+          <a:p>
+            <a:pPr lvl="1"/>
+            <a:r>
+              <a:rPr lang="en-US" dirty="0" err="1"/>
+              <a:t>Soundex</a:t>
+            </a:r>
+            <a:endParaRPr lang="en-US" dirty="0"/>
+          </a:p>
+          <a:p>
+            <a:endParaRPr lang="en-US" dirty="0"/>
+          </a:p>
+        </p:txBody>
+      </p:sp>
+    </p:spTree>
+    <p:extLst>
+      <p:ext uri="{BB962C8B-B14F-4D97-AF65-F5344CB8AC3E}">
+        <p14:creationId xmlns:p14="http://schemas.microsoft.com/office/powerpoint/2010/main" val="32033496"/>
+      </p:ext>
+    </p:extLst>
+  </p:cSld>
+  <p:clrMapOvr>
+    <a:masterClrMapping/>
+  </p:clrMapOvr>
+</p:sld>
+</file>
+
 <file path=ppt/slides/slide19.xml><?xml version="1.0" encoding="utf-8"?>
 <p:sld xmlns:a="http://schemas.openxmlformats.org/drawingml/2006/main" xmlns:r="http://schemas.openxmlformats.org/officeDocument/2006/relationships" xmlns:p="http://schemas.openxmlformats.org/presentationml/2006/main">
   <p:cSld>
@@ -19067,7 +14188,7 @@
           <a:p>
             <a:r>
               <a:rPr lang="en-US" dirty="0"/>
-              <a:t>When are two records about the same entity?</a:t>
+              <a:t>“Fuzzy” Matching System	</a:t>
             </a:r>
           </a:p>
         </p:txBody>
@@ -19089,33 +14210,21 @@
           <a:p>
             <a:r>
               <a:rPr lang="en-US" dirty="0"/>
-              <a:t>Examples of possible similarity metrics</a:t>
+              <a:t>Apply set of cascading rules</a:t>
             </a:r>
           </a:p>
           <a:p>
-            <a:pPr lvl="1"/>
             <a:r>
               <a:rPr lang="en-US" dirty="0"/>
-              <a:t>Edit distance</a:t>
+              <a:t>Assign confidence score based on which rules fire</a:t>
             </a:r>
-          </a:p>
-          <a:p>
-            <a:pPr lvl="1"/>
-            <a:r>
-              <a:rPr lang="en-US" dirty="0" err="1"/>
-              <a:t>Soundex</a:t>
-            </a:r>
-            <a:endParaRPr lang="en-US" dirty="0"/>
-          </a:p>
-          <a:p>
-            <a:endParaRPr lang="en-US" dirty="0"/>
           </a:p>
         </p:txBody>
       </p:sp>
     </p:spTree>
     <p:extLst>
       <p:ext uri="{BB962C8B-B14F-4D97-AF65-F5344CB8AC3E}">
-        <p14:creationId xmlns:p14="http://schemas.microsoft.com/office/powerpoint/2010/main" val="32033496"/>
+        <p14:creationId xmlns:p14="http://schemas.microsoft.com/office/powerpoint/2010/main" val="2363932908"/>
       </p:ext>
     </p:extLst>
   </p:cSld>
@@ -19193,43 +14302,23 @@
           <a:p>
             <a:r>
               <a:rPr lang="en-US" b="1" dirty="0"/>
-              <a:t>Make sure and check that you can access your project repo today and download the data</a:t>
-            </a:r>
-          </a:p>
-          <a:p>
-            <a:endParaRPr lang="en-US" dirty="0"/>
-          </a:p>
-          <a:p>
-            <a:r>
-              <a:rPr lang="en-US" dirty="0"/>
-              <a:t>Thursday:</a:t>
-            </a:r>
-          </a:p>
-          <a:p>
-            <a:pPr lvl="1"/>
-            <a:r>
-              <a:rPr lang="en-US" dirty="0"/>
-              <a:t>Readings (Obermeyer et al; </a:t>
+              <a:t>Make sure and check that you can access your project repo today and </a:t>
             </a:r>
             <a:r>
-              <a:rPr lang="en-US" dirty="0" err="1"/>
-              <a:t>Passi</a:t>
+              <a:rPr lang="en-US" b="1" dirty="0">
+                <a:hlinkClick r:id="rId2"/>
+              </a:rPr>
+              <a:t>download the data</a:t>
             </a:r>
-            <a:r>
-              <a:rPr lang="en-US" dirty="0"/>
-              <a:t> &amp; </a:t>
-            </a:r>
-            <a:r>
-              <a:rPr lang="en-US" dirty="0" err="1"/>
-              <a:t>Barocas</a:t>
-            </a:r>
-            <a:r>
-              <a:rPr lang="en-US" dirty="0"/>
-              <a:t>)</a:t>
-            </a:r>
-            <a:br>
-              <a:rPr lang="en-US" dirty="0"/>
-            </a:br>
+            <a:endParaRPr lang="en-US" b="1" dirty="0"/>
+          </a:p>
+          <a:p>
+            <a:endParaRPr lang="en-US" dirty="0"/>
+          </a:p>
+          <a:p>
+            <a:pPr marL="565150" lvl="1" indent="0">
+              <a:buNone/>
+            </a:pPr>
             <a:endParaRPr lang="en-US" dirty="0"/>
           </a:p>
           <a:p>
@@ -19242,25 +14331,8 @@
             <a:pPr lvl="1"/>
             <a:r>
               <a:rPr lang="en-US" dirty="0"/>
-              <a:t>Assignment due Monday</a:t>
+              <a:t>Data Exploration Assignment and Presentation</a:t>
             </a:r>
-          </a:p>
-          <a:p>
-            <a:pPr lvl="2">
-              <a:lnSpc>
-                <a:spcPct val="100000"/>
-              </a:lnSpc>
-              <a:spcBef>
-                <a:spcPts val="500"/>
-              </a:spcBef>
-            </a:pPr>
-            <a:r>
-              <a:rPr lang="en-US" dirty="0">
-                <a:hlinkClick r:id="rId2"/>
-              </a:rPr>
-              <a:t>Project Formulation and Baselines</a:t>
-            </a:r>
-            <a:endParaRPr lang="en-US" dirty="0"/>
           </a:p>
           <a:p>
             <a:pPr lvl="1">
@@ -19273,7 +14345,7 @@
             </a:pPr>
             <a:r>
               <a:rPr lang="en-US" dirty="0"/>
-              <a:t>Readings</a:t>
+              <a:t>Formulation and Baselines: Readings (Obermeyer et al; Passi &amp; Barocas)</a:t>
             </a:r>
           </a:p>
         </p:txBody>
@@ -19310,86 +14382,6 @@
       </p:grpSpPr>
       <p:sp>
         <p:nvSpPr>
-          <p:cNvPr id="2" name="Title 1"/>
-          <p:cNvSpPr>
-            <a:spLocks noGrp="1"/>
-          </p:cNvSpPr>
-          <p:nvPr>
-            <p:ph type="title"/>
-          </p:nvPr>
-        </p:nvSpPr>
-        <p:spPr/>
-        <p:txBody>
-          <a:bodyPr/>
-          <a:lstStyle/>
-          <a:p>
-            <a:r>
-              <a:rPr lang="en-US" dirty="0"/>
-              <a:t>“Fuzzy” Matching System	</a:t>
-            </a:r>
-          </a:p>
-        </p:txBody>
-      </p:sp>
-      <p:sp>
-        <p:nvSpPr>
-          <p:cNvPr id="3" name="Content Placeholder 2"/>
-          <p:cNvSpPr>
-            <a:spLocks noGrp="1"/>
-          </p:cNvSpPr>
-          <p:nvPr>
-            <p:ph type="body" idx="1"/>
-          </p:nvPr>
-        </p:nvSpPr>
-        <p:spPr/>
-        <p:txBody>
-          <a:bodyPr/>
-          <a:lstStyle/>
-          <a:p>
-            <a:r>
-              <a:rPr lang="en-US" dirty="0"/>
-              <a:t>Apply set of cascading rules</a:t>
-            </a:r>
-          </a:p>
-          <a:p>
-            <a:r>
-              <a:rPr lang="en-US" dirty="0"/>
-              <a:t>Assign confidence score based on which rules fire</a:t>
-            </a:r>
-          </a:p>
-        </p:txBody>
-      </p:sp>
-    </p:spTree>
-    <p:extLst>
-      <p:ext uri="{BB962C8B-B14F-4D97-AF65-F5344CB8AC3E}">
-        <p14:creationId xmlns:p14="http://schemas.microsoft.com/office/powerpoint/2010/main" val="2363932908"/>
-      </p:ext>
-    </p:extLst>
-  </p:cSld>
-  <p:clrMapOvr>
-    <a:masterClrMapping/>
-  </p:clrMapOvr>
-</p:sld>
-</file>
-
-<file path=ppt/slides/slide21.xml><?xml version="1.0" encoding="utf-8"?>
-<p:sld xmlns:a="http://schemas.openxmlformats.org/drawingml/2006/main" xmlns:r="http://schemas.openxmlformats.org/officeDocument/2006/relationships" xmlns:p="http://schemas.openxmlformats.org/presentationml/2006/main">
-  <p:cSld>
-    <p:spTree>
-      <p:nvGrpSpPr>
-        <p:cNvPr id="1" name=""/>
-        <p:cNvGrpSpPr/>
-        <p:nvPr/>
-      </p:nvGrpSpPr>
-      <p:grpSpPr>
-        <a:xfrm>
-          <a:off x="0" y="0"/>
-          <a:ext cx="0" cy="0"/>
-          <a:chOff x="0" y="0"/>
-          <a:chExt cx="0" cy="0"/>
-        </a:xfrm>
-      </p:grpSpPr>
-      <p:sp>
-        <p:nvSpPr>
           <p:cNvPr id="35842" name="Rectangle 2"/>
           <p:cNvSpPr>
             <a:spLocks noGrp="1" noChangeArrowheads="1"/>
@@ -19553,7 +14545,7 @@
 </p:sld>
 </file>
 
-<file path=ppt/slides/slide22.xml><?xml version="1.0" encoding="utf-8"?>
+<file path=ppt/slides/slide21.xml><?xml version="1.0" encoding="utf-8"?>
 <p:sld xmlns:a="http://schemas.openxmlformats.org/drawingml/2006/main" xmlns:r="http://schemas.openxmlformats.org/officeDocument/2006/relationships" xmlns:p="http://schemas.openxmlformats.org/presentationml/2006/main">
   <p:cSld>
     <p:spTree>
@@ -19688,7 +14680,7 @@
 </p:sld>
 </file>
 
-<file path=ppt/slides/slide23.xml><?xml version="1.0" encoding="utf-8"?>
+<file path=ppt/slides/slide22.xml><?xml version="1.0" encoding="utf-8"?>
 <p:sld xmlns:a="http://schemas.openxmlformats.org/drawingml/2006/main" xmlns:r="http://schemas.openxmlformats.org/officeDocument/2006/relationships" xmlns:p="http://schemas.openxmlformats.org/presentationml/2006/main">
   <p:cSld>
     <p:spTree>
@@ -19774,6 +14766,108 @@
     <p:extLst>
       <p:ext uri="{BB962C8B-B14F-4D97-AF65-F5344CB8AC3E}">
         <p14:creationId xmlns:p14="http://schemas.microsoft.com/office/powerpoint/2010/main" val="834575629"/>
+      </p:ext>
+    </p:extLst>
+  </p:cSld>
+  <p:clrMapOvr>
+    <a:masterClrMapping/>
+  </p:clrMapOvr>
+</p:sld>
+</file>
+
+<file path=ppt/slides/slide23.xml><?xml version="1.0" encoding="utf-8"?>
+<p:sld xmlns:a="http://schemas.openxmlformats.org/drawingml/2006/main" xmlns:r="http://schemas.openxmlformats.org/officeDocument/2006/relationships" xmlns:p="http://schemas.openxmlformats.org/presentationml/2006/main">
+  <p:cSld>
+    <p:spTree>
+      <p:nvGrpSpPr>
+        <p:cNvPr id="1" name=""/>
+        <p:cNvGrpSpPr/>
+        <p:nvPr/>
+      </p:nvGrpSpPr>
+      <p:grpSpPr>
+        <a:xfrm>
+          <a:off x="0" y="0"/>
+          <a:ext cx="0" cy="0"/>
+          <a:chOff x="0" y="0"/>
+          <a:chExt cx="0" cy="0"/>
+        </a:xfrm>
+      </p:grpSpPr>
+      <p:sp>
+        <p:nvSpPr>
+          <p:cNvPr id="2" name="Title 1">
+            <a:extLst>
+              <a:ext uri="{FF2B5EF4-FFF2-40B4-BE49-F238E27FC236}">
+                <a16:creationId xmlns:a16="http://schemas.microsoft.com/office/drawing/2014/main" id="{52E04EB1-290D-E647-B684-F8A3D3B280EE}"/>
+              </a:ext>
+            </a:extLst>
+          </p:cNvPr>
+          <p:cNvSpPr>
+            <a:spLocks noGrp="1"/>
+          </p:cNvSpPr>
+          <p:nvPr>
+            <p:ph type="title"/>
+          </p:nvPr>
+        </p:nvSpPr>
+        <p:spPr/>
+        <p:txBody>
+          <a:bodyPr/>
+          <a:lstStyle/>
+          <a:p>
+            <a:r>
+              <a:rPr lang="en-US" dirty="0"/>
+              <a:t>Discussion Topic</a:t>
+            </a:r>
+          </a:p>
+        </p:txBody>
+      </p:sp>
+      <p:sp>
+        <p:nvSpPr>
+          <p:cNvPr id="3" name="Text Placeholder 2">
+            <a:extLst>
+              <a:ext uri="{FF2B5EF4-FFF2-40B4-BE49-F238E27FC236}">
+                <a16:creationId xmlns:a16="http://schemas.microsoft.com/office/drawing/2014/main" id="{73DF5889-4B8C-7449-87CD-1929C07EE849}"/>
+              </a:ext>
+            </a:extLst>
+          </p:cNvPr>
+          <p:cNvSpPr>
+            <a:spLocks noGrp="1"/>
+          </p:cNvSpPr>
+          <p:nvPr>
+            <p:ph type="body" idx="1"/>
+          </p:nvPr>
+        </p:nvSpPr>
+        <p:spPr/>
+        <p:txBody>
+          <a:bodyPr/>
+          <a:lstStyle/>
+          <a:p>
+            <a:pPr marL="76200" indent="0">
+              <a:buNone/>
+            </a:pPr>
+            <a:endParaRPr lang="en-US" dirty="0"/>
+          </a:p>
+          <a:p>
+            <a:pPr marL="76200" indent="0">
+              <a:buNone/>
+            </a:pPr>
+            <a:endParaRPr lang="en-US" dirty="0"/>
+          </a:p>
+          <a:p>
+            <a:pPr marL="76200" indent="0">
+              <a:buNone/>
+            </a:pPr>
+            <a:r>
+              <a:rPr lang="en-US" sz="3200" dirty="0"/>
+              <a:t>What are downstream impacts (generally) of a false positive in record linkage? What about a false negative?</a:t>
+            </a:r>
+            <a:endParaRPr lang="en-US" dirty="0"/>
+          </a:p>
+        </p:txBody>
+      </p:sp>
+    </p:spTree>
+    <p:extLst>
+      <p:ext uri="{BB962C8B-B14F-4D97-AF65-F5344CB8AC3E}">
+        <p14:creationId xmlns:p14="http://schemas.microsoft.com/office/powerpoint/2010/main" val="4210785574"/>
       </p:ext>
     </p:extLst>
   </p:cSld>
@@ -19866,108 +14960,6 @@
             </a:pPr>
             <a:r>
               <a:rPr lang="en-US" sz="3200" dirty="0"/>
-              <a:t>What are downstream impacts (generally) of a false positive in record linkage? What about a false negative?</a:t>
-            </a:r>
-            <a:endParaRPr lang="en-US" dirty="0"/>
-          </a:p>
-        </p:txBody>
-      </p:sp>
-    </p:spTree>
-    <p:extLst>
-      <p:ext uri="{BB962C8B-B14F-4D97-AF65-F5344CB8AC3E}">
-        <p14:creationId xmlns:p14="http://schemas.microsoft.com/office/powerpoint/2010/main" val="4210785574"/>
-      </p:ext>
-    </p:extLst>
-  </p:cSld>
-  <p:clrMapOvr>
-    <a:masterClrMapping/>
-  </p:clrMapOvr>
-</p:sld>
-</file>
-
-<file path=ppt/slides/slide25.xml><?xml version="1.0" encoding="utf-8"?>
-<p:sld xmlns:a="http://schemas.openxmlformats.org/drawingml/2006/main" xmlns:r="http://schemas.openxmlformats.org/officeDocument/2006/relationships" xmlns:p="http://schemas.openxmlformats.org/presentationml/2006/main">
-  <p:cSld>
-    <p:spTree>
-      <p:nvGrpSpPr>
-        <p:cNvPr id="1" name=""/>
-        <p:cNvGrpSpPr/>
-        <p:nvPr/>
-      </p:nvGrpSpPr>
-      <p:grpSpPr>
-        <a:xfrm>
-          <a:off x="0" y="0"/>
-          <a:ext cx="0" cy="0"/>
-          <a:chOff x="0" y="0"/>
-          <a:chExt cx="0" cy="0"/>
-        </a:xfrm>
-      </p:grpSpPr>
-      <p:sp>
-        <p:nvSpPr>
-          <p:cNvPr id="2" name="Title 1">
-            <a:extLst>
-              <a:ext uri="{FF2B5EF4-FFF2-40B4-BE49-F238E27FC236}">
-                <a16:creationId xmlns:a16="http://schemas.microsoft.com/office/drawing/2014/main" id="{52E04EB1-290D-E647-B684-F8A3D3B280EE}"/>
-              </a:ext>
-            </a:extLst>
-          </p:cNvPr>
-          <p:cNvSpPr>
-            <a:spLocks noGrp="1"/>
-          </p:cNvSpPr>
-          <p:nvPr>
-            <p:ph type="title"/>
-          </p:nvPr>
-        </p:nvSpPr>
-        <p:spPr/>
-        <p:txBody>
-          <a:bodyPr/>
-          <a:lstStyle/>
-          <a:p>
-            <a:r>
-              <a:rPr lang="en-US" dirty="0"/>
-              <a:t>Discussion Topic</a:t>
-            </a:r>
-          </a:p>
-        </p:txBody>
-      </p:sp>
-      <p:sp>
-        <p:nvSpPr>
-          <p:cNvPr id="3" name="Text Placeholder 2">
-            <a:extLst>
-              <a:ext uri="{FF2B5EF4-FFF2-40B4-BE49-F238E27FC236}">
-                <a16:creationId xmlns:a16="http://schemas.microsoft.com/office/drawing/2014/main" id="{73DF5889-4B8C-7449-87CD-1929C07EE849}"/>
-              </a:ext>
-            </a:extLst>
-          </p:cNvPr>
-          <p:cNvSpPr>
-            <a:spLocks noGrp="1"/>
-          </p:cNvSpPr>
-          <p:nvPr>
-            <p:ph type="body" idx="1"/>
-          </p:nvPr>
-        </p:nvSpPr>
-        <p:spPr/>
-        <p:txBody>
-          <a:bodyPr/>
-          <a:lstStyle/>
-          <a:p>
-            <a:pPr marL="76200" indent="0">
-              <a:buNone/>
-            </a:pPr>
-            <a:endParaRPr lang="en-US" dirty="0"/>
-          </a:p>
-          <a:p>
-            <a:pPr marL="76200" indent="0">
-              <a:buNone/>
-            </a:pPr>
-            <a:endParaRPr lang="en-US" dirty="0"/>
-          </a:p>
-          <a:p>
-            <a:pPr marL="76200" indent="0">
-              <a:buNone/>
-            </a:pPr>
-            <a:r>
-              <a:rPr lang="en-US" sz="3200" dirty="0"/>
               <a:t>What types of common mismatch errors might affect groups differently, resulting in downstream fairness impacts?</a:t>
             </a:r>
             <a:endParaRPr lang="en-US" dirty="0"/>
@@ -19987,12 +14979,18 @@
 </p:sld>
 </file>
 
-<file path=ppt/slides/slide26.xml><?xml version="1.0" encoding="utf-8"?>
+<file path=ppt/slides/slide25.xml><?xml version="1.0" encoding="utf-8"?>
 <p:sld xmlns:a="http://schemas.openxmlformats.org/drawingml/2006/main" xmlns:r="http://schemas.openxmlformats.org/officeDocument/2006/relationships" xmlns:p="http://schemas.openxmlformats.org/presentationml/2006/main">
   <p:cSld>
     <p:spTree>
       <p:nvGrpSpPr>
-        <p:cNvPr id="1" name=""/>
+        <p:cNvPr id="1" name="">
+          <a:extLst>
+            <a:ext uri="{FF2B5EF4-FFF2-40B4-BE49-F238E27FC236}">
+              <a16:creationId xmlns:a16="http://schemas.microsoft.com/office/drawing/2014/main" id="{47075AFB-0551-A3F4-DB9F-48A98B0398E9}"/>
+            </a:ext>
+          </a:extLst>
+        </p:cNvPr>
         <p:cNvGrpSpPr/>
         <p:nvPr/>
       </p:nvGrpSpPr>
@@ -20009,7 +15007,7 @@
           <p:cNvPr id="3" name="Title 2">
             <a:extLst>
               <a:ext uri="{FF2B5EF4-FFF2-40B4-BE49-F238E27FC236}">
-                <a16:creationId xmlns:a16="http://schemas.microsoft.com/office/drawing/2014/main" id="{9323871C-7CA8-1448-8FFC-1AE6E1838941}"/>
+                <a16:creationId xmlns:a16="http://schemas.microsoft.com/office/drawing/2014/main" id="{4131A580-2B74-0FD7-92F1-2AF7D56F40F6}"/>
               </a:ext>
             </a:extLst>
           </p:cNvPr>
@@ -20037,7 +15035,7 @@
           <p:cNvPr id="4" name="Text Placeholder 3">
             <a:extLst>
               <a:ext uri="{FF2B5EF4-FFF2-40B4-BE49-F238E27FC236}">
-                <a16:creationId xmlns:a16="http://schemas.microsoft.com/office/drawing/2014/main" id="{5E600BA7-FA45-884F-9820-9E5F2CB7AA48}"/>
+                <a16:creationId xmlns:a16="http://schemas.microsoft.com/office/drawing/2014/main" id="{06E3AA1A-3A9E-D3B0-9450-631D7833C71D}"/>
               </a:ext>
             </a:extLst>
           </p:cNvPr>
@@ -20055,43 +15053,23 @@
           <a:p>
             <a:r>
               <a:rPr lang="en-US" b="1" dirty="0"/>
-              <a:t>Make sure and check that you can access your project data today</a:t>
-            </a:r>
-          </a:p>
-          <a:p>
-            <a:endParaRPr lang="en-US" dirty="0"/>
-          </a:p>
-          <a:p>
-            <a:r>
-              <a:rPr lang="en-US" dirty="0"/>
-              <a:t>Thursday:</a:t>
-            </a:r>
-          </a:p>
-          <a:p>
-            <a:pPr lvl="1"/>
-            <a:r>
-              <a:rPr lang="en-US" dirty="0"/>
-              <a:t>Reading (Obermeyer et al; </a:t>
+              <a:t>Make sure and check that you can access your project repo today and </a:t>
             </a:r>
             <a:r>
-              <a:rPr lang="en-US" dirty="0" err="1"/>
-              <a:t>Passi</a:t>
+              <a:rPr lang="en-US" b="1" dirty="0">
+                <a:hlinkClick r:id="rId2"/>
+              </a:rPr>
+              <a:t>download the data</a:t>
             </a:r>
-            <a:r>
-              <a:rPr lang="en-US" dirty="0"/>
-              <a:t> &amp; </a:t>
-            </a:r>
-            <a:r>
-              <a:rPr lang="en-US" dirty="0" err="1"/>
-              <a:t>Barocas</a:t>
-            </a:r>
-            <a:r>
-              <a:rPr lang="en-US" dirty="0"/>
-              <a:t>)</a:t>
-            </a:r>
-            <a:br>
-              <a:rPr lang="en-US" dirty="0"/>
-            </a:br>
+            <a:endParaRPr lang="en-US" b="1" dirty="0"/>
+          </a:p>
+          <a:p>
+            <a:endParaRPr lang="en-US" dirty="0"/>
+          </a:p>
+          <a:p>
+            <a:pPr marL="565150" lvl="1" indent="0">
+              <a:buNone/>
+            </a:pPr>
             <a:endParaRPr lang="en-US" dirty="0"/>
           </a:p>
           <a:p>
@@ -20104,21 +15082,7 @@
             <a:pPr lvl="1"/>
             <a:r>
               <a:rPr lang="en-US" dirty="0"/>
-              <a:t>Assignment due Monday</a:t>
-            </a:r>
-          </a:p>
-          <a:p>
-            <a:pPr lvl="2">
-              <a:lnSpc>
-                <a:spcPct val="100000"/>
-              </a:lnSpc>
-              <a:spcBef>
-                <a:spcPts val="500"/>
-              </a:spcBef>
-            </a:pPr>
-            <a:r>
-              <a:rPr lang="en-US" dirty="0"/>
-              <a:t>Project Formulation and Baselines</a:t>
+              <a:t>Data Exploration Assignment and Presentation</a:t>
             </a:r>
           </a:p>
           <a:p>
@@ -20132,7 +15096,7 @@
             </a:pPr>
             <a:r>
               <a:rPr lang="en-US" dirty="0"/>
-              <a:t>Readings</a:t>
+              <a:t>Formulation and Baselines: Readings (Obermeyer et al; Passi &amp; Barocas)</a:t>
             </a:r>
           </a:p>
         </p:txBody>
@@ -20140,7 +15104,7 @@
     </p:spTree>
     <p:extLst>
       <p:ext uri="{BB962C8B-B14F-4D97-AF65-F5344CB8AC3E}">
-        <p14:creationId xmlns:p14="http://schemas.microsoft.com/office/powerpoint/2010/main" val="390960049"/>
+        <p14:creationId xmlns:p14="http://schemas.microsoft.com/office/powerpoint/2010/main" val="93290584"/>
       </p:ext>
     </p:extLst>
   </p:cSld>
@@ -20151,135 +15115,6 @@
 </file>
 
 <file path=ppt/slides/slide3.xml><?xml version="1.0" encoding="utf-8"?>
-<p:sld xmlns:a="http://schemas.openxmlformats.org/drawingml/2006/main" xmlns:r="http://schemas.openxmlformats.org/officeDocument/2006/relationships" xmlns:p="http://schemas.openxmlformats.org/presentationml/2006/main">
-  <p:cSld>
-    <p:spTree>
-      <p:nvGrpSpPr>
-        <p:cNvPr id="1" name=""/>
-        <p:cNvGrpSpPr/>
-        <p:nvPr/>
-      </p:nvGrpSpPr>
-      <p:grpSpPr>
-        <a:xfrm>
-          <a:off x="0" y="0"/>
-          <a:ext cx="0" cy="0"/>
-          <a:chOff x="0" y="0"/>
-          <a:chExt cx="0" cy="0"/>
-        </a:xfrm>
-      </p:grpSpPr>
-      <p:sp>
-        <p:nvSpPr>
-          <p:cNvPr id="2" name="Title 1">
-            <a:extLst>
-              <a:ext uri="{FF2B5EF4-FFF2-40B4-BE49-F238E27FC236}">
-                <a16:creationId xmlns:a16="http://schemas.microsoft.com/office/drawing/2014/main" id="{94CF2A94-A63F-6149-AA28-2E35B60E3D3E}"/>
-              </a:ext>
-            </a:extLst>
-          </p:cNvPr>
-          <p:cNvSpPr>
-            <a:spLocks noGrp="1"/>
-          </p:cNvSpPr>
-          <p:nvPr>
-            <p:ph type="title"/>
-          </p:nvPr>
-        </p:nvSpPr>
-        <p:spPr/>
-        <p:txBody>
-          <a:bodyPr/>
-          <a:lstStyle/>
-          <a:p>
-            <a:endParaRPr lang="en-US"/>
-          </a:p>
-        </p:txBody>
-      </p:sp>
-      <p:graphicFrame>
-        <p:nvGraphicFramePr>
-          <p:cNvPr id="3" name="Diagram 2">
-            <a:extLst>
-              <a:ext uri="{FF2B5EF4-FFF2-40B4-BE49-F238E27FC236}">
-                <a16:creationId xmlns:a16="http://schemas.microsoft.com/office/drawing/2014/main" id="{8E902576-68A9-6E48-B0FE-5B1889953DC8}"/>
-              </a:ext>
-            </a:extLst>
-          </p:cNvPr>
-          <p:cNvGraphicFramePr/>
-          <p:nvPr/>
-        </p:nvGraphicFramePr>
-        <p:xfrm>
-          <a:off x="180467" y="0"/>
-          <a:ext cx="11776400" cy="6858000"/>
-        </p:xfrm>
-        <a:graphic>
-          <a:graphicData uri="http://schemas.openxmlformats.org/drawingml/2006/diagram">
-            <dgm:relIds xmlns:dgm="http://schemas.openxmlformats.org/drawingml/2006/diagram" xmlns:r="http://schemas.openxmlformats.org/officeDocument/2006/relationships" r:dm="rId2" r:lo="rId3" r:qs="rId4" r:cs="rId5"/>
-          </a:graphicData>
-        </a:graphic>
-      </p:graphicFrame>
-      <p:sp>
-        <p:nvSpPr>
-          <p:cNvPr id="4" name="Rectangle 3">
-            <a:extLst>
-              <a:ext uri="{FF2B5EF4-FFF2-40B4-BE49-F238E27FC236}">
-                <a16:creationId xmlns:a16="http://schemas.microsoft.com/office/drawing/2014/main" id="{E2C99BF2-C81A-5246-89D3-E49BCDCAD699}"/>
-              </a:ext>
-            </a:extLst>
-          </p:cNvPr>
-          <p:cNvSpPr/>
-          <p:nvPr/>
-        </p:nvSpPr>
-        <p:spPr>
-          <a:xfrm>
-            <a:off x="42040" y="221768"/>
-            <a:ext cx="2534195" cy="1789611"/>
-          </a:xfrm>
-          <a:prstGeom prst="rect">
-            <a:avLst/>
-          </a:prstGeom>
-          <a:noFill/>
-          <a:ln w="76200">
-            <a:solidFill>
-              <a:srgbClr val="C00000"/>
-            </a:solidFill>
-          </a:ln>
-        </p:spPr>
-        <p:style>
-          <a:lnRef idx="2">
-            <a:schemeClr val="accent1">
-              <a:shade val="50000"/>
-            </a:schemeClr>
-          </a:lnRef>
-          <a:fillRef idx="1">
-            <a:schemeClr val="accent1"/>
-          </a:fillRef>
-          <a:effectRef idx="0">
-            <a:schemeClr val="accent1"/>
-          </a:effectRef>
-          <a:fontRef idx="minor">
-            <a:schemeClr val="lt1"/>
-          </a:fontRef>
-        </p:style>
-        <p:txBody>
-          <a:bodyPr rtlCol="0" anchor="ctr"/>
-          <a:lstStyle/>
-          <a:p>
-            <a:pPr algn="ctr"/>
-            <a:endParaRPr lang="en-US"/>
-          </a:p>
-        </p:txBody>
-      </p:sp>
-    </p:spTree>
-    <p:extLst>
-      <p:ext uri="{BB962C8B-B14F-4D97-AF65-F5344CB8AC3E}">
-        <p14:creationId xmlns:p14="http://schemas.microsoft.com/office/powerpoint/2010/main" val="2576858030"/>
-      </p:ext>
-    </p:extLst>
-  </p:cSld>
-  <p:clrMapOvr>
-    <a:masterClrMapping/>
-  </p:clrMapOvr>
-</p:sld>
-</file>
-
-<file path=ppt/slides/slide4.xml><?xml version="1.0" encoding="utf-8"?>
 <p:sld xmlns:a="http://schemas.openxmlformats.org/drawingml/2006/main" xmlns:r="http://schemas.openxmlformats.org/officeDocument/2006/relationships" xmlns:p="http://schemas.openxmlformats.org/presentationml/2006/main">
   <p:cSld>
     <p:spTree>
@@ -20460,123 +15295,7 @@
 </p:sld>
 </file>
 
-<file path=ppt/slides/slide5.xml><?xml version="1.0" encoding="utf-8"?>
-<p:sld xmlns:a="http://schemas.openxmlformats.org/drawingml/2006/main" xmlns:r="http://schemas.openxmlformats.org/officeDocument/2006/relationships" xmlns:p="http://schemas.openxmlformats.org/presentationml/2006/main">
-  <p:cSld>
-    <p:spTree>
-      <p:nvGrpSpPr>
-        <p:cNvPr id="1" name=""/>
-        <p:cNvGrpSpPr/>
-        <p:nvPr/>
-      </p:nvGrpSpPr>
-      <p:grpSpPr>
-        <a:xfrm>
-          <a:off x="0" y="0"/>
-          <a:ext cx="0" cy="0"/>
-          <a:chOff x="0" y="0"/>
-          <a:chExt cx="0" cy="0"/>
-        </a:xfrm>
-      </p:grpSpPr>
-      <p:sp>
-        <p:nvSpPr>
-          <p:cNvPr id="2" name="Title 1">
-            <a:extLst>
-              <a:ext uri="{FF2B5EF4-FFF2-40B4-BE49-F238E27FC236}">
-                <a16:creationId xmlns:a16="http://schemas.microsoft.com/office/drawing/2014/main" id="{CF028D5D-6294-E265-9456-78B2307FD9DB}"/>
-              </a:ext>
-            </a:extLst>
-          </p:cNvPr>
-          <p:cNvSpPr>
-            <a:spLocks noGrp="1"/>
-          </p:cNvSpPr>
-          <p:nvPr>
-            <p:ph type="title"/>
-          </p:nvPr>
-        </p:nvSpPr>
-        <p:spPr/>
-        <p:txBody>
-          <a:bodyPr/>
-          <a:lstStyle/>
-          <a:p>
-            <a:r>
-              <a:rPr lang="en-US" dirty="0"/>
-              <a:t>Continuing from last week - Ethical issues </a:t>
-            </a:r>
-          </a:p>
-        </p:txBody>
-      </p:sp>
-      <p:sp>
-        <p:nvSpPr>
-          <p:cNvPr id="3" name="Text Placeholder 2">
-            <a:extLst>
-              <a:ext uri="{FF2B5EF4-FFF2-40B4-BE49-F238E27FC236}">
-                <a16:creationId xmlns:a16="http://schemas.microsoft.com/office/drawing/2014/main" id="{75418C83-B3C2-5526-1D8B-0DB4F84EF06A}"/>
-              </a:ext>
-            </a:extLst>
-          </p:cNvPr>
-          <p:cNvSpPr>
-            <a:spLocks noGrp="1"/>
-          </p:cNvSpPr>
-          <p:nvPr>
-            <p:ph type="body" idx="1"/>
-          </p:nvPr>
-        </p:nvSpPr>
-        <p:spPr/>
-        <p:txBody>
-          <a:bodyPr/>
-          <a:lstStyle/>
-          <a:p>
-            <a:r>
-              <a:rPr lang="en-US" dirty="0"/>
-              <a:t>Privacy</a:t>
-            </a:r>
-          </a:p>
-          <a:p>
-            <a:r>
-              <a:rPr lang="en-US" dirty="0"/>
-              <a:t>Accountability</a:t>
-            </a:r>
-          </a:p>
-          <a:p>
-            <a:r>
-              <a:rPr lang="en-US" dirty="0"/>
-              <a:t>Fairness</a:t>
-            </a:r>
-          </a:p>
-          <a:p>
-            <a:r>
-              <a:rPr lang="en-US" dirty="0"/>
-              <a:t>Transparency</a:t>
-            </a:r>
-          </a:p>
-          <a:p>
-            <a:r>
-              <a:rPr lang="en-US" dirty="0"/>
-              <a:t>…</a:t>
-            </a:r>
-          </a:p>
-          <a:p>
-            <a:endParaRPr lang="en-US" dirty="0"/>
-          </a:p>
-          <a:p>
-            <a:endParaRPr lang="en-US" dirty="0"/>
-          </a:p>
-        </p:txBody>
-      </p:sp>
-    </p:spTree>
-    <p:extLst>
-      <p:ext uri="{BB962C8B-B14F-4D97-AF65-F5344CB8AC3E}">
-        <p14:creationId xmlns:p14="http://schemas.microsoft.com/office/powerpoint/2010/main" val="291807102"/>
-      </p:ext>
-    </p:extLst>
-  </p:cSld>
-  <p:clrMapOvr>
-    <a:masterClrMapping/>
-  </p:clrMapOvr>
-</p:sld>
-</file>
-
-<file path=ppt/slides/slide6.xml><?xml version="1.0" encoding="utf-8"?>
+<file path=ppt/slides/slide4.xml><?xml version="1.0" encoding="utf-8"?>
 <p:sld xmlns:a="http://schemas.openxmlformats.org/drawingml/2006/main" xmlns:r="http://schemas.openxmlformats.org/officeDocument/2006/relationships" xmlns:p="http://schemas.openxmlformats.org/presentationml/2006/main">
   <p:cSld>
     <p:spTree>
@@ -20722,7 +15441,7 @@
 </p:sld>
 </file>
 
-<file path=ppt/slides/slide7.xml><?xml version="1.0" encoding="utf-8"?>
+<file path=ppt/slides/slide5.xml><?xml version="1.0" encoding="utf-8"?>
 <p:sld xmlns:a="http://schemas.openxmlformats.org/drawingml/2006/main" xmlns:r="http://schemas.openxmlformats.org/officeDocument/2006/relationships" xmlns:p="http://schemas.openxmlformats.org/presentationml/2006/main">
   <p:cSld>
     <p:spTree>
@@ -20781,137 +15500,6 @@
           <a:bodyPr/>
           <a:lstStyle/>
           <a:p>
-            <a:pPr marL="76200" indent="0">
-              <a:lnSpc>
-                <a:spcPct val="150000"/>
-              </a:lnSpc>
-              <a:buNone/>
-            </a:pPr>
-            <a:endParaRPr lang="en-US" altLang="en-US" dirty="0"/>
-          </a:p>
-          <a:p>
-            <a:pPr>
-              <a:lnSpc>
-                <a:spcPct val="150000"/>
-              </a:lnSpc>
-            </a:pPr>
-            <a:r>
-              <a:rPr lang="en-US" altLang="en-US" dirty="0"/>
-              <a:t>Tools for coordination:</a:t>
-            </a:r>
-          </a:p>
-          <a:p>
-            <a:pPr lvl="1">
-              <a:lnSpc>
-                <a:spcPct val="150000"/>
-              </a:lnSpc>
-            </a:pPr>
-            <a:r>
-              <a:rPr lang="en-US" altLang="en-US" dirty="0"/>
-              <a:t>Slack: we’ll create group-level and project-level channels. Additionally, feel free to use group DMs and video calls with your group to coordinate as well.</a:t>
-            </a:r>
-          </a:p>
-          <a:p>
-            <a:pPr lvl="1">
-              <a:lnSpc>
-                <a:spcPct val="150000"/>
-              </a:lnSpc>
-            </a:pPr>
-            <a:r>
-              <a:rPr lang="en-US" altLang="en-US" dirty="0"/>
-              <a:t>Many good free options for task tracking/management: </a:t>
-            </a:r>
-            <a:r>
-              <a:rPr lang="en-US" altLang="en-US" dirty="0" err="1"/>
-              <a:t>github</a:t>
-            </a:r>
-            <a:r>
-              <a:rPr lang="en-US" altLang="en-US" dirty="0"/>
-              <a:t> issues or project boards, </a:t>
-            </a:r>
-            <a:r>
-              <a:rPr lang="en-US" altLang="en-US" dirty="0" err="1"/>
-              <a:t>trello</a:t>
-            </a:r>
-            <a:r>
-              <a:rPr lang="en-US" altLang="en-US" dirty="0"/>
-              <a:t>, etc.</a:t>
-            </a:r>
-          </a:p>
-        </p:txBody>
-      </p:sp>
-    </p:spTree>
-    <p:extLst>
-      <p:ext uri="{BB962C8B-B14F-4D97-AF65-F5344CB8AC3E}">
-        <p14:creationId xmlns:p14="http://schemas.microsoft.com/office/powerpoint/2010/main" val="2143740766"/>
-      </p:ext>
-    </p:extLst>
-  </p:cSld>
-  <p:clrMapOvr>
-    <a:masterClrMapping/>
-  </p:clrMapOvr>
-</p:sld>
-</file>
-
-<file path=ppt/slides/slide8.xml><?xml version="1.0" encoding="utf-8"?>
-<p:sld xmlns:a="http://schemas.openxmlformats.org/drawingml/2006/main" xmlns:r="http://schemas.openxmlformats.org/officeDocument/2006/relationships" xmlns:p="http://schemas.openxmlformats.org/presentationml/2006/main">
-  <p:cSld>
-    <p:spTree>
-      <p:nvGrpSpPr>
-        <p:cNvPr id="1" name=""/>
-        <p:cNvGrpSpPr/>
-        <p:nvPr/>
-      </p:nvGrpSpPr>
-      <p:grpSpPr>
-        <a:xfrm>
-          <a:off x="0" y="0"/>
-          <a:ext cx="0" cy="0"/>
-          <a:chOff x="0" y="0"/>
-          <a:chExt cx="0" cy="0"/>
-        </a:xfrm>
-      </p:grpSpPr>
-      <p:sp>
-        <p:nvSpPr>
-          <p:cNvPr id="8194" name="Rectangle 2"/>
-          <p:cNvSpPr>
-            <a:spLocks noGrp="1" noChangeArrowheads="1"/>
-          </p:cNvSpPr>
-          <p:nvPr>
-            <p:ph type="title"/>
-          </p:nvPr>
-        </p:nvSpPr>
-        <p:spPr/>
-        <p:txBody>
-          <a:bodyPr/>
-          <a:lstStyle/>
-          <a:p>
-            <a:r>
-              <a:rPr lang="en-US" altLang="en-US" dirty="0"/>
-              <a:t> Working with Your Project Team</a:t>
-            </a:r>
-          </a:p>
-        </p:txBody>
-      </p:sp>
-      <p:sp>
-        <p:nvSpPr>
-          <p:cNvPr id="8195" name="Rectangle 3"/>
-          <p:cNvSpPr>
-            <a:spLocks noGrp="1" noChangeArrowheads="1"/>
-          </p:cNvSpPr>
-          <p:nvPr>
-            <p:ph type="body" idx="1"/>
-          </p:nvPr>
-        </p:nvSpPr>
-        <p:spPr>
-          <a:xfrm>
-            <a:off x="207750" y="1548990"/>
-            <a:ext cx="11776400" cy="4555200"/>
-          </a:xfrm>
-        </p:spPr>
-        <p:txBody>
-          <a:bodyPr/>
-          <a:lstStyle/>
-          <a:p>
             <a:pPr>
               <a:lnSpc>
                 <a:spcPct val="150000"/>
@@ -20967,7 +15555,7 @@
 </p:sld>
 </file>
 
-<file path=ppt/slides/slide9.xml><?xml version="1.0" encoding="utf-8"?>
+<file path=ppt/slides/slide6.xml><?xml version="1.0" encoding="utf-8"?>
 <p:sld xmlns:a="http://schemas.openxmlformats.org/drawingml/2006/main" xmlns:r="http://schemas.openxmlformats.org/officeDocument/2006/relationships" xmlns:p="http://schemas.openxmlformats.org/presentationml/2006/main">
   <p:cSld>
     <p:spTree>
@@ -21100,6 +15688,612 @@
     <a:masterClrMapping/>
   </p:clrMapOvr>
 </p:sld>
+</file>
+
+<file path=ppt/slides/slide7.xml><?xml version="1.0" encoding="utf-8"?>
+<p:sld xmlns:a="http://schemas.openxmlformats.org/drawingml/2006/main" xmlns:r="http://schemas.openxmlformats.org/officeDocument/2006/relationships" xmlns:p="http://schemas.openxmlformats.org/presentationml/2006/main">
+  <p:cSld>
+    <p:spTree>
+      <p:nvGrpSpPr>
+        <p:cNvPr id="1" name=""/>
+        <p:cNvGrpSpPr/>
+        <p:nvPr/>
+      </p:nvGrpSpPr>
+      <p:grpSpPr>
+        <a:xfrm>
+          <a:off x="0" y="0"/>
+          <a:ext cx="0" cy="0"/>
+          <a:chOff x="0" y="0"/>
+          <a:chExt cx="0" cy="0"/>
+        </a:xfrm>
+      </p:grpSpPr>
+      <p:sp>
+        <p:nvSpPr>
+          <p:cNvPr id="2" name="Title 1">
+            <a:extLst>
+              <a:ext uri="{FF2B5EF4-FFF2-40B4-BE49-F238E27FC236}">
+                <a16:creationId xmlns:a16="http://schemas.microsoft.com/office/drawing/2014/main" id="{21359BA9-BA2B-D148-89DA-A99081B1FF81}"/>
+              </a:ext>
+            </a:extLst>
+          </p:cNvPr>
+          <p:cNvSpPr>
+            <a:spLocks noGrp="1"/>
+          </p:cNvSpPr>
+          <p:nvPr>
+            <p:ph type="title"/>
+          </p:nvPr>
+        </p:nvSpPr>
+        <p:spPr/>
+        <p:txBody>
+          <a:bodyPr/>
+          <a:lstStyle/>
+          <a:p>
+            <a:r>
+              <a:rPr lang="en-US" dirty="0"/>
+              <a:t>Challenges</a:t>
+            </a:r>
+          </a:p>
+        </p:txBody>
+      </p:sp>
+      <p:sp>
+        <p:nvSpPr>
+          <p:cNvPr id="3" name="Text Placeholder 2">
+            <a:extLst>
+              <a:ext uri="{FF2B5EF4-FFF2-40B4-BE49-F238E27FC236}">
+                <a16:creationId xmlns:a16="http://schemas.microsoft.com/office/drawing/2014/main" id="{DDA03E0F-5F3D-5B4D-8232-BF72B84A198E}"/>
+              </a:ext>
+            </a:extLst>
+          </p:cNvPr>
+          <p:cNvSpPr>
+            <a:spLocks noGrp="1"/>
+          </p:cNvSpPr>
+          <p:nvPr>
+            <p:ph type="body" idx="1"/>
+          </p:nvPr>
+        </p:nvSpPr>
+        <p:spPr/>
+        <p:txBody>
+          <a:bodyPr/>
+          <a:lstStyle/>
+          <a:p>
+            <a:r>
+              <a:rPr lang="en-US" dirty="0"/>
+              <a:t>Political</a:t>
+            </a:r>
+          </a:p>
+          <a:p>
+            <a:r>
+              <a:rPr lang="en-US" dirty="0"/>
+              <a:t>Internal Awareness</a:t>
+            </a:r>
+          </a:p>
+          <a:p>
+            <a:r>
+              <a:rPr lang="en-US" dirty="0"/>
+              <a:t>Legal/Contractual</a:t>
+            </a:r>
+          </a:p>
+          <a:p>
+            <a:r>
+              <a:rPr lang="en-US" dirty="0"/>
+              <a:t>Ethical</a:t>
+            </a:r>
+          </a:p>
+          <a:p>
+            <a:r>
+              <a:rPr lang="en-US" dirty="0"/>
+              <a:t>Technical</a:t>
+            </a:r>
+          </a:p>
+          <a:p>
+            <a:endParaRPr lang="en-US" dirty="0"/>
+          </a:p>
+        </p:txBody>
+      </p:sp>
+    </p:spTree>
+    <p:extLst>
+      <p:ext uri="{BB962C8B-B14F-4D97-AF65-F5344CB8AC3E}">
+        <p14:creationId xmlns:p14="http://schemas.microsoft.com/office/powerpoint/2010/main" val="1721185332"/>
+      </p:ext>
+    </p:extLst>
+  </p:cSld>
+  <p:clrMapOvr>
+    <a:masterClrMapping/>
+  </p:clrMapOvr>
+</p:sld>
+</file>
+
+<file path=ppt/slides/slide8.xml><?xml version="1.0" encoding="utf-8"?>
+<p:sld xmlns:a="http://schemas.openxmlformats.org/drawingml/2006/main" xmlns:r="http://schemas.openxmlformats.org/officeDocument/2006/relationships" xmlns:p="http://schemas.openxmlformats.org/presentationml/2006/main">
+  <p:cSld>
+    <p:spTree>
+      <p:nvGrpSpPr>
+        <p:cNvPr id="1" name=""/>
+        <p:cNvGrpSpPr/>
+        <p:nvPr/>
+      </p:nvGrpSpPr>
+      <p:grpSpPr>
+        <a:xfrm>
+          <a:off x="0" y="0"/>
+          <a:ext cx="0" cy="0"/>
+          <a:chOff x="0" y="0"/>
+          <a:chExt cx="0" cy="0"/>
+        </a:xfrm>
+      </p:grpSpPr>
+      <p:sp>
+        <p:nvSpPr>
+          <p:cNvPr id="2" name="Title 1">
+            <a:extLst>
+              <a:ext uri="{FF2B5EF4-FFF2-40B4-BE49-F238E27FC236}">
+                <a16:creationId xmlns:a16="http://schemas.microsoft.com/office/drawing/2014/main" id="{C8E60A25-02BD-674B-9661-DF031B0CB52C}"/>
+              </a:ext>
+            </a:extLst>
+          </p:cNvPr>
+          <p:cNvSpPr>
+            <a:spLocks noGrp="1"/>
+          </p:cNvSpPr>
+          <p:nvPr>
+            <p:ph type="title"/>
+          </p:nvPr>
+        </p:nvSpPr>
+        <p:spPr/>
+        <p:txBody>
+          <a:bodyPr/>
+          <a:lstStyle/>
+          <a:p>
+            <a:r>
+              <a:rPr lang="en-US" dirty="0"/>
+              <a:t>Data Acquisition: Technical (challenges)</a:t>
+            </a:r>
+          </a:p>
+        </p:txBody>
+      </p:sp>
+      <p:sp>
+        <p:nvSpPr>
+          <p:cNvPr id="3" name="Text Placeholder 2">
+            <a:extLst>
+              <a:ext uri="{FF2B5EF4-FFF2-40B4-BE49-F238E27FC236}">
+                <a16:creationId xmlns:a16="http://schemas.microsoft.com/office/drawing/2014/main" id="{B47464FC-F480-BD4E-8C73-EA0095EB65C0}"/>
+              </a:ext>
+            </a:extLst>
+          </p:cNvPr>
+          <p:cNvSpPr>
+            <a:spLocks noGrp="1"/>
+          </p:cNvSpPr>
+          <p:nvPr>
+            <p:ph type="body" idx="1"/>
+          </p:nvPr>
+        </p:nvSpPr>
+        <p:spPr/>
+        <p:txBody>
+          <a:bodyPr/>
+          <a:lstStyle/>
+          <a:p>
+            <a:r>
+              <a:rPr lang="en-US" dirty="0"/>
+              <a:t>You rarely work with production data directly so how should you get data?</a:t>
+            </a:r>
+          </a:p>
+          <a:p>
+            <a:pPr lvl="1">
+              <a:spcBef>
+                <a:spcPts val="0"/>
+              </a:spcBef>
+            </a:pPr>
+            <a:r>
+              <a:rPr lang="en-US" dirty="0"/>
+              <a:t>API access</a:t>
+            </a:r>
+          </a:p>
+          <a:p>
+            <a:pPr lvl="1">
+              <a:spcBef>
+                <a:spcPts val="0"/>
+              </a:spcBef>
+            </a:pPr>
+            <a:r>
+              <a:rPr lang="en-US" dirty="0"/>
+              <a:t>Flat files</a:t>
+            </a:r>
+          </a:p>
+          <a:p>
+            <a:pPr lvl="1">
+              <a:spcBef>
+                <a:spcPts val="0"/>
+              </a:spcBef>
+            </a:pPr>
+            <a:r>
+              <a:rPr lang="en-US" dirty="0"/>
+              <a:t>Database dumps</a:t>
+            </a:r>
+          </a:p>
+          <a:p>
+            <a:pPr lvl="1">
+              <a:spcBef>
+                <a:spcPts val="0"/>
+              </a:spcBef>
+            </a:pPr>
+            <a:endParaRPr lang="en-US" dirty="0"/>
+          </a:p>
+          <a:p>
+            <a:r>
+              <a:rPr lang="en-US" dirty="0"/>
+              <a:t>How much should it be processed before you get it?</a:t>
+            </a:r>
+          </a:p>
+          <a:p>
+            <a:endParaRPr lang="en-US" dirty="0"/>
+          </a:p>
+          <a:p>
+            <a:r>
+              <a:rPr lang="en-US" dirty="0"/>
+              <a:t>How do you build a repeatable data acquisition pipeline?</a:t>
+            </a:r>
+          </a:p>
+          <a:p>
+            <a:endParaRPr lang="en-US" dirty="0"/>
+          </a:p>
+          <a:p>
+            <a:r>
+              <a:rPr lang="en-US" dirty="0"/>
+              <a:t>When do you collect new data?</a:t>
+            </a:r>
+          </a:p>
+          <a:p>
+            <a:pPr marL="565150" lvl="1" indent="0">
+              <a:spcBef>
+                <a:spcPts val="0"/>
+              </a:spcBef>
+              <a:buNone/>
+            </a:pPr>
+            <a:endParaRPr lang="en-US" dirty="0"/>
+          </a:p>
+        </p:txBody>
+      </p:sp>
+    </p:spTree>
+    <p:extLst>
+      <p:ext uri="{BB962C8B-B14F-4D97-AF65-F5344CB8AC3E}">
+        <p14:creationId xmlns:p14="http://schemas.microsoft.com/office/powerpoint/2010/main" val="4069897732"/>
+      </p:ext>
+    </p:extLst>
+  </p:cSld>
+  <p:clrMapOvr>
+    <a:masterClrMapping/>
+  </p:clrMapOvr>
+</p:sld>
+</file>
+
+<file path=ppt/slides/slide9.xml><?xml version="1.0" encoding="utf-8"?>
+<p:sld xmlns:a="http://schemas.openxmlformats.org/drawingml/2006/main" xmlns:r="http://schemas.openxmlformats.org/officeDocument/2006/relationships" xmlns:p="http://schemas.openxmlformats.org/presentationml/2006/main">
+  <p:cSld>
+    <p:spTree>
+      <p:nvGrpSpPr>
+        <p:cNvPr id="1" name=""/>
+        <p:cNvGrpSpPr/>
+        <p:nvPr/>
+      </p:nvGrpSpPr>
+      <p:grpSpPr>
+        <a:xfrm>
+          <a:off x="0" y="0"/>
+          <a:ext cx="0" cy="0"/>
+          <a:chOff x="0" y="0"/>
+          <a:chExt cx="0" cy="0"/>
+        </a:xfrm>
+      </p:grpSpPr>
+      <p:sp>
+        <p:nvSpPr>
+          <p:cNvPr id="2" name="Title 1">
+            <a:extLst>
+              <a:ext uri="{FF2B5EF4-FFF2-40B4-BE49-F238E27FC236}">
+                <a16:creationId xmlns:a16="http://schemas.microsoft.com/office/drawing/2014/main" id="{976F140B-CCBA-6544-AE2A-A3E88E046C57}"/>
+              </a:ext>
+            </a:extLst>
+          </p:cNvPr>
+          <p:cNvSpPr>
+            <a:spLocks noGrp="1"/>
+          </p:cNvSpPr>
+          <p:nvPr>
+            <p:ph type="title"/>
+          </p:nvPr>
+        </p:nvSpPr>
+        <p:spPr/>
+        <p:txBody>
+          <a:bodyPr/>
+          <a:lstStyle/>
+          <a:p>
+            <a:r>
+              <a:rPr lang="en-US" dirty="0"/>
+              <a:t>Data Storage</a:t>
+            </a:r>
+          </a:p>
+        </p:txBody>
+      </p:sp>
+      <p:sp>
+        <p:nvSpPr>
+          <p:cNvPr id="3" name="Text Placeholder 2">
+            <a:extLst>
+              <a:ext uri="{FF2B5EF4-FFF2-40B4-BE49-F238E27FC236}">
+                <a16:creationId xmlns:a16="http://schemas.microsoft.com/office/drawing/2014/main" id="{88BFB7A9-1DE4-3B44-ACD9-B7066AE5097C}"/>
+              </a:ext>
+            </a:extLst>
+          </p:cNvPr>
+          <p:cNvSpPr>
+            <a:spLocks noGrp="1"/>
+          </p:cNvSpPr>
+          <p:nvPr>
+            <p:ph type="body" idx="1"/>
+          </p:nvPr>
+        </p:nvSpPr>
+        <p:spPr/>
+        <p:txBody>
+          <a:bodyPr/>
+          <a:lstStyle/>
+          <a:p>
+            <a:r>
+              <a:rPr lang="en-US" dirty="0"/>
+              <a:t>Use Databases whenever possible</a:t>
+            </a:r>
+          </a:p>
+          <a:p>
+            <a:pPr lvl="1"/>
+            <a:r>
+              <a:rPr lang="en-US" dirty="0"/>
+              <a:t>Types of databases</a:t>
+            </a:r>
+          </a:p>
+          <a:p>
+            <a:pPr lvl="1"/>
+            <a:endParaRPr lang="en-US" dirty="0"/>
+          </a:p>
+          <a:p>
+            <a:r>
+              <a:rPr lang="en-US" dirty="0"/>
+              <a:t>Deidentification when dealing with confidential/sensitive identifiable data</a:t>
+            </a:r>
+          </a:p>
+          <a:p>
+            <a:pPr lvl="1"/>
+            <a:r>
+              <a:rPr lang="en-US" dirty="0"/>
+              <a:t>hashing</a:t>
+            </a:r>
+          </a:p>
+        </p:txBody>
+      </p:sp>
+    </p:spTree>
+    <p:extLst>
+      <p:ext uri="{BB962C8B-B14F-4D97-AF65-F5344CB8AC3E}">
+        <p14:creationId xmlns:p14="http://schemas.microsoft.com/office/powerpoint/2010/main" val="1278687259"/>
+      </p:ext>
+    </p:extLst>
+  </p:cSld>
+  <p:clrMapOvr>
+    <a:masterClrMapping/>
+  </p:clrMapOvr>
+  <p:timing>
+    <p:tnLst>
+      <p:par>
+        <p:cTn id="1" dur="indefinite" restart="never" nodeType="tmRoot">
+          <p:childTnLst>
+            <p:seq concurrent="1" nextAc="seek">
+              <p:cTn id="2" dur="indefinite" nodeType="mainSeq">
+                <p:childTnLst>
+                  <p:par>
+                    <p:cTn id="3" fill="hold">
+                      <p:stCondLst>
+                        <p:cond delay="indefinite"/>
+                      </p:stCondLst>
+                      <p:childTnLst>
+                        <p:par>
+                          <p:cTn id="4" fill="hold">
+                            <p:stCondLst>
+                              <p:cond delay="0"/>
+                            </p:stCondLst>
+                            <p:childTnLst>
+                              <p:par>
+                                <p:cTn id="5" presetID="1" presetClass="entr" presetSubtype="0" fill="hold" grpId="0" nodeType="clickEffect">
+                                  <p:stCondLst>
+                                    <p:cond delay="0"/>
+                                  </p:stCondLst>
+                                  <p:childTnLst>
+                                    <p:set>
+                                      <p:cBhvr>
+                                        <p:cTn id="6" dur="1" fill="hold">
+                                          <p:stCondLst>
+                                            <p:cond delay="0"/>
+                                          </p:stCondLst>
+                                        </p:cTn>
+                                        <p:tgtEl>
+                                          <p:spTgt spid="3">
+                                            <p:txEl>
+                                              <p:pRg st="0" end="0"/>
+                                            </p:txEl>
+                                          </p:spTgt>
+                                        </p:tgtEl>
+                                        <p:attrNameLst>
+                                          <p:attrName>style.visibility</p:attrName>
+                                        </p:attrNameLst>
+                                      </p:cBhvr>
+                                      <p:to>
+                                        <p:strVal val="visible"/>
+                                      </p:to>
+                                    </p:set>
+                                  </p:childTnLst>
+                                </p:cTn>
+                              </p:par>
+                              <p:par>
+                                <p:cTn id="7" presetID="1" presetClass="entr" presetSubtype="0" fill="hold" grpId="0" nodeType="withEffect">
+                                  <p:stCondLst>
+                                    <p:cond delay="0"/>
+                                  </p:stCondLst>
+                                  <p:childTnLst>
+                                    <p:set>
+                                      <p:cBhvr>
+                                        <p:cTn id="8" dur="1" fill="hold">
+                                          <p:stCondLst>
+                                            <p:cond delay="0"/>
+                                          </p:stCondLst>
+                                        </p:cTn>
+                                        <p:tgtEl>
+                                          <p:spTgt spid="3">
+                                            <p:txEl>
+                                              <p:pRg st="1" end="1"/>
+                                            </p:txEl>
+                                          </p:spTgt>
+                                        </p:tgtEl>
+                                        <p:attrNameLst>
+                                          <p:attrName>style.visibility</p:attrName>
+                                        </p:attrNameLst>
+                                      </p:cBhvr>
+                                      <p:to>
+                                        <p:strVal val="visible"/>
+                                      </p:to>
+                                    </p:set>
+                                  </p:childTnLst>
+                                </p:cTn>
+                              </p:par>
+                            </p:childTnLst>
+                          </p:cTn>
+                        </p:par>
+                      </p:childTnLst>
+                    </p:cTn>
+                  </p:par>
+                  <p:par>
+                    <p:cTn id="9" fill="hold">
+                      <p:stCondLst>
+                        <p:cond delay="indefinite"/>
+                      </p:stCondLst>
+                      <p:childTnLst>
+                        <p:par>
+                          <p:cTn id="10" fill="hold">
+                            <p:stCondLst>
+                              <p:cond delay="0"/>
+                            </p:stCondLst>
+                            <p:childTnLst>
+                              <p:par>
+                                <p:cTn id="11" presetID="1" presetClass="entr" presetSubtype="0" fill="hold" grpId="0" nodeType="clickEffect">
+                                  <p:stCondLst>
+                                    <p:cond delay="0"/>
+                                  </p:stCondLst>
+                                  <p:childTnLst>
+                                    <p:set>
+                                      <p:cBhvr>
+                                        <p:cTn id="12" dur="1" fill="hold">
+                                          <p:stCondLst>
+                                            <p:cond delay="0"/>
+                                          </p:stCondLst>
+                                        </p:cTn>
+                                        <p:tgtEl>
+                                          <p:spTgt spid="3">
+                                            <p:txEl>
+                                              <p:pRg st="3" end="3"/>
+                                            </p:txEl>
+                                          </p:spTgt>
+                                        </p:tgtEl>
+                                        <p:attrNameLst>
+                                          <p:attrName>style.visibility</p:attrName>
+                                        </p:attrNameLst>
+                                      </p:cBhvr>
+                                      <p:to>
+                                        <p:strVal val="visible"/>
+                                      </p:to>
+                                    </p:set>
+                                  </p:childTnLst>
+                                </p:cTn>
+                              </p:par>
+                              <p:par>
+                                <p:cTn id="13" presetID="1" presetClass="entr" presetSubtype="0" fill="hold" grpId="0" nodeType="withEffect">
+                                  <p:stCondLst>
+                                    <p:cond delay="0"/>
+                                  </p:stCondLst>
+                                  <p:childTnLst>
+                                    <p:set>
+                                      <p:cBhvr>
+                                        <p:cTn id="14" dur="1" fill="hold">
+                                          <p:stCondLst>
+                                            <p:cond delay="0"/>
+                                          </p:stCondLst>
+                                        </p:cTn>
+                                        <p:tgtEl>
+                                          <p:spTgt spid="3">
+                                            <p:txEl>
+                                              <p:pRg st="4" end="4"/>
+                                            </p:txEl>
+                                          </p:spTgt>
+                                        </p:tgtEl>
+                                        <p:attrNameLst>
+                                          <p:attrName>style.visibility</p:attrName>
+                                        </p:attrNameLst>
+                                      </p:cBhvr>
+                                      <p:to>
+                                        <p:strVal val="visible"/>
+                                      </p:to>
+                                    </p:set>
+                                  </p:childTnLst>
+                                </p:cTn>
+                              </p:par>
+                            </p:childTnLst>
+                          </p:cTn>
+                        </p:par>
+                      </p:childTnLst>
+                    </p:cTn>
+                  </p:par>
+                </p:childTnLst>
+              </p:cTn>
+              <p:prevCondLst>
+                <p:cond evt="onPrev" delay="0">
+                  <p:tgtEl>
+                    <p:sldTgt/>
+                  </p:tgtEl>
+                </p:cond>
+              </p:prevCondLst>
+              <p:nextCondLst>
+                <p:cond evt="onNext" delay="0">
+                  <p:tgtEl>
+                    <p:sldTgt/>
+                  </p:tgtEl>
+                </p:cond>
+              </p:nextCondLst>
+            </p:seq>
+          </p:childTnLst>
+        </p:cTn>
+      </p:par>
+    </p:tnLst>
+    <p:bldLst>
+      <p:bldP spid="3" grpId="0" build="p"/>
+    </p:bldLst>
+  </p:timing>
+</p:sld>
+</file>
+
+<file path=ppt/tags/tag1.xml><?xml version="1.0" encoding="utf-8"?>
+<p:tagLst xmlns:a="http://schemas.openxmlformats.org/drawingml/2006/main" xmlns:r="http://schemas.openxmlformats.org/officeDocument/2006/relationships" xmlns:p="http://schemas.openxmlformats.org/presentationml/2006/main">
+  <p:tag name="SLIDO_APP_VERSION" val="1.5.0.0"/>
+  <p:tag name="SLIDO_PRESENTATION_ID" val="6b8172e1-10b1-440c-ad33-3aaaf891be27"/>
+  <p:tag name="SLIDO_EVENT_UUID" val="0161bee7-9b52-48ab-bd01-308fc07c8a33"/>
+  <p:tag name="SLIDO_EVENT_SECTION_UUID" val="53f7b2fd-9b37-4ce9-89ff-a9a7d9b782ad"/>
+</p:tagLst>
+</file>
+
+<file path=ppt/tags/tag2.xml><?xml version="1.0" encoding="utf-8"?>
+<p:tagLst xmlns:a="http://schemas.openxmlformats.org/drawingml/2006/main" xmlns:r="http://schemas.openxmlformats.org/officeDocument/2006/relationships" xmlns:p="http://schemas.openxmlformats.org/presentationml/2006/main">
+  <p:tag name="SLIDO_TYPE" val="SlidoPoll"/>
+  <p:tag name="SLIDO_POLL_UUID" val="cc6ad4e3-ae10-4be2-b854-927465caf366"/>
+  <p:tag name="SLIDO_TIMELINE" val="W3sicG9sbFF1ZXN0aW9uVXVpZCI6ImU2MTFlYzQzLTBlOGUtNDQ4OS04YTY5LTBiNDNhNDZmM2I3OSIsInNob3dSZXN1bHRzIjpmYWxzZX0seyJwb2xsUXVlc3Rpb25VdWlkIjoiZTYxMWVjNDMtMGU4ZS00NDg5LThhNjktMGI0M2E0NmYzYjc5Iiwic2hvd1Jlc3VsdHMiOnRydWV9XQ=="/>
+</p:tagLst>
+</file>
+
+<file path=ppt/tags/tag3.xml><?xml version="1.0" encoding="utf-8"?>
+<p:tagLst xmlns:a="http://schemas.openxmlformats.org/drawingml/2006/main" xmlns:r="http://schemas.openxmlformats.org/officeDocument/2006/relationships" xmlns:p="http://schemas.openxmlformats.org/presentationml/2006/main">
+  <p:tag name="SLIDO_ELEMENT" val="interaction_image"/>
+  <p:tag name="INTERACTION_TYPE" val="MultipleChoice"/>
+</p:tagLst>
+</file>
+
+<file path=ppt/tags/tag4.xml><?xml version="1.0" encoding="utf-8"?>
+<p:tagLst xmlns:a="http://schemas.openxmlformats.org/drawingml/2006/main" xmlns:r="http://schemas.openxmlformats.org/officeDocument/2006/relationships" xmlns:p="http://schemas.openxmlformats.org/presentationml/2006/main">
+  <p:tag name="SLIDO_ELEMENT" val="title"/>
+</p:tagLst>
 </file>
 
 <file path=ppt/theme/theme1.xml><?xml version="1.0" encoding="utf-8"?>

--- a/Lectures/Lecture3-Data.pptx
+++ b/Lectures/Lecture3-Data.pptx
@@ -5,7 +5,7 @@
     <p:sldMasterId id="2147483648" r:id="rId1"/>
   </p:sldMasterIdLst>
   <p:notesMasterIdLst>
-    <p:notesMasterId r:id="rId27"/>
+    <p:notesMasterId r:id="rId29"/>
   </p:notesMasterIdLst>
   <p:sldIdLst>
     <p:sldId id="256" r:id="rId2"/>
@@ -16,28 +16,30 @@
     <p:sldId id="295" r:id="rId7"/>
     <p:sldId id="282" r:id="rId8"/>
     <p:sldId id="285" r:id="rId9"/>
-    <p:sldId id="283" r:id="rId10"/>
-    <p:sldId id="260" r:id="rId11"/>
-    <p:sldId id="304" r:id="rId12"/>
-    <p:sldId id="303" r:id="rId13"/>
-    <p:sldId id="261" r:id="rId14"/>
-    <p:sldId id="306" r:id="rId15"/>
-    <p:sldId id="287" r:id="rId16"/>
-    <p:sldId id="262" r:id="rId17"/>
-    <p:sldId id="288" r:id="rId18"/>
-    <p:sldId id="289" r:id="rId19"/>
-    <p:sldId id="290" r:id="rId20"/>
-    <p:sldId id="280" r:id="rId21"/>
-    <p:sldId id="291" r:id="rId22"/>
-    <p:sldId id="293" r:id="rId23"/>
-    <p:sldId id="296" r:id="rId24"/>
-    <p:sldId id="302" r:id="rId25"/>
-    <p:sldId id="305" r:id="rId26"/>
+    <p:sldId id="307" r:id="rId10"/>
+    <p:sldId id="283" r:id="rId11"/>
+    <p:sldId id="260" r:id="rId12"/>
+    <p:sldId id="308" r:id="rId13"/>
+    <p:sldId id="304" r:id="rId14"/>
+    <p:sldId id="303" r:id="rId15"/>
+    <p:sldId id="261" r:id="rId16"/>
+    <p:sldId id="306" r:id="rId17"/>
+    <p:sldId id="287" r:id="rId18"/>
+    <p:sldId id="262" r:id="rId19"/>
+    <p:sldId id="288" r:id="rId20"/>
+    <p:sldId id="289" r:id="rId21"/>
+    <p:sldId id="290" r:id="rId22"/>
+    <p:sldId id="280" r:id="rId23"/>
+    <p:sldId id="291" r:id="rId24"/>
+    <p:sldId id="293" r:id="rId25"/>
+    <p:sldId id="296" r:id="rId26"/>
+    <p:sldId id="302" r:id="rId27"/>
+    <p:sldId id="305" r:id="rId28"/>
   </p:sldIdLst>
   <p:sldSz cx="12192000" cy="6858000"/>
   <p:notesSz cx="6858000" cy="9144000"/>
   <p:custDataLst>
-    <p:tags r:id="rId28"/>
+    <p:tags r:id="rId30"/>
   </p:custDataLst>
   <p:defaultTextStyle>
     <a:defPPr marR="0" lvl="0" algn="l" rtl="0">
@@ -12213,6 +12215,309 @@
       </p:grpSpPr>
       <p:sp>
         <p:nvSpPr>
+          <p:cNvPr id="2" name="Title 1">
+            <a:extLst>
+              <a:ext uri="{FF2B5EF4-FFF2-40B4-BE49-F238E27FC236}">
+                <a16:creationId xmlns:a16="http://schemas.microsoft.com/office/drawing/2014/main" id="{976F140B-CCBA-6544-AE2A-A3E88E046C57}"/>
+              </a:ext>
+            </a:extLst>
+          </p:cNvPr>
+          <p:cNvSpPr>
+            <a:spLocks noGrp="1"/>
+          </p:cNvSpPr>
+          <p:nvPr>
+            <p:ph type="title"/>
+          </p:nvPr>
+        </p:nvSpPr>
+        <p:spPr/>
+        <p:txBody>
+          <a:bodyPr/>
+          <a:lstStyle/>
+          <a:p>
+            <a:r>
+              <a:rPr lang="en-US" dirty="0"/>
+              <a:t>Data Storage</a:t>
+            </a:r>
+          </a:p>
+        </p:txBody>
+      </p:sp>
+      <p:sp>
+        <p:nvSpPr>
+          <p:cNvPr id="3" name="Text Placeholder 2">
+            <a:extLst>
+              <a:ext uri="{FF2B5EF4-FFF2-40B4-BE49-F238E27FC236}">
+                <a16:creationId xmlns:a16="http://schemas.microsoft.com/office/drawing/2014/main" id="{88BFB7A9-1DE4-3B44-ACD9-B7066AE5097C}"/>
+              </a:ext>
+            </a:extLst>
+          </p:cNvPr>
+          <p:cNvSpPr>
+            <a:spLocks noGrp="1"/>
+          </p:cNvSpPr>
+          <p:nvPr>
+            <p:ph type="body" idx="1"/>
+          </p:nvPr>
+        </p:nvSpPr>
+        <p:spPr/>
+        <p:txBody>
+          <a:bodyPr/>
+          <a:lstStyle/>
+          <a:p>
+            <a:r>
+              <a:rPr lang="en-US" dirty="0"/>
+              <a:t>Use Databases whenever possible</a:t>
+            </a:r>
+          </a:p>
+          <a:p>
+            <a:pPr lvl="1"/>
+            <a:r>
+              <a:rPr lang="en-US" dirty="0"/>
+              <a:t>Types of databases</a:t>
+            </a:r>
+          </a:p>
+          <a:p>
+            <a:pPr lvl="1"/>
+            <a:endParaRPr lang="en-US" dirty="0"/>
+          </a:p>
+          <a:p>
+            <a:r>
+              <a:rPr lang="en-US" dirty="0"/>
+              <a:t>Deidentification when dealing with confidential/sensitive identifiable data</a:t>
+            </a:r>
+          </a:p>
+          <a:p>
+            <a:pPr lvl="1"/>
+            <a:r>
+              <a:rPr lang="en-US" dirty="0"/>
+              <a:t>hashing</a:t>
+            </a:r>
+          </a:p>
+        </p:txBody>
+      </p:sp>
+    </p:spTree>
+    <p:extLst>
+      <p:ext uri="{BB962C8B-B14F-4D97-AF65-F5344CB8AC3E}">
+        <p14:creationId xmlns:p14="http://schemas.microsoft.com/office/powerpoint/2010/main" val="1278687259"/>
+      </p:ext>
+    </p:extLst>
+  </p:cSld>
+  <p:clrMapOvr>
+    <a:masterClrMapping/>
+  </p:clrMapOvr>
+  <p:timing>
+    <p:tnLst>
+      <p:par>
+        <p:cTn id="1" dur="indefinite" restart="never" nodeType="tmRoot">
+          <p:childTnLst>
+            <p:seq concurrent="1" nextAc="seek">
+              <p:cTn id="2" dur="indefinite" nodeType="mainSeq">
+                <p:childTnLst>
+                  <p:par>
+                    <p:cTn id="3" fill="hold">
+                      <p:stCondLst>
+                        <p:cond delay="indefinite"/>
+                      </p:stCondLst>
+                      <p:childTnLst>
+                        <p:par>
+                          <p:cTn id="4" fill="hold">
+                            <p:stCondLst>
+                              <p:cond delay="0"/>
+                            </p:stCondLst>
+                            <p:childTnLst>
+                              <p:par>
+                                <p:cTn id="5" presetID="1" presetClass="entr" presetSubtype="0" fill="hold" grpId="0" nodeType="clickEffect">
+                                  <p:stCondLst>
+                                    <p:cond delay="0"/>
+                                  </p:stCondLst>
+                                  <p:childTnLst>
+                                    <p:set>
+                                      <p:cBhvr>
+                                        <p:cTn id="6" dur="1" fill="hold">
+                                          <p:stCondLst>
+                                            <p:cond delay="0"/>
+                                          </p:stCondLst>
+                                        </p:cTn>
+                                        <p:tgtEl>
+                                          <p:spTgt spid="3">
+                                            <p:txEl>
+                                              <p:pRg st="0" end="0"/>
+                                            </p:txEl>
+                                          </p:spTgt>
+                                        </p:tgtEl>
+                                        <p:attrNameLst>
+                                          <p:attrName>style.visibility</p:attrName>
+                                        </p:attrNameLst>
+                                      </p:cBhvr>
+                                      <p:to>
+                                        <p:strVal val="visible"/>
+                                      </p:to>
+                                    </p:set>
+                                  </p:childTnLst>
+                                </p:cTn>
+                              </p:par>
+                              <p:par>
+                                <p:cTn id="7" presetID="1" presetClass="entr" presetSubtype="0" fill="hold" grpId="0" nodeType="withEffect">
+                                  <p:stCondLst>
+                                    <p:cond delay="0"/>
+                                  </p:stCondLst>
+                                  <p:childTnLst>
+                                    <p:set>
+                                      <p:cBhvr>
+                                        <p:cTn id="8" dur="1" fill="hold">
+                                          <p:stCondLst>
+                                            <p:cond delay="0"/>
+                                          </p:stCondLst>
+                                        </p:cTn>
+                                        <p:tgtEl>
+                                          <p:spTgt spid="3">
+                                            <p:txEl>
+                                              <p:pRg st="1" end="1"/>
+                                            </p:txEl>
+                                          </p:spTgt>
+                                        </p:tgtEl>
+                                        <p:attrNameLst>
+                                          <p:attrName>style.visibility</p:attrName>
+                                        </p:attrNameLst>
+                                      </p:cBhvr>
+                                      <p:to>
+                                        <p:strVal val="visible"/>
+                                      </p:to>
+                                    </p:set>
+                                  </p:childTnLst>
+                                </p:cTn>
+                              </p:par>
+                            </p:childTnLst>
+                          </p:cTn>
+                        </p:par>
+                      </p:childTnLst>
+                    </p:cTn>
+                  </p:par>
+                  <p:par>
+                    <p:cTn id="9" fill="hold">
+                      <p:stCondLst>
+                        <p:cond delay="indefinite"/>
+                      </p:stCondLst>
+                      <p:childTnLst>
+                        <p:par>
+                          <p:cTn id="10" fill="hold">
+                            <p:stCondLst>
+                              <p:cond delay="0"/>
+                            </p:stCondLst>
+                            <p:childTnLst>
+                              <p:par>
+                                <p:cTn id="11" presetID="1" presetClass="entr" presetSubtype="0" fill="hold" grpId="0" nodeType="clickEffect">
+                                  <p:stCondLst>
+                                    <p:cond delay="0"/>
+                                  </p:stCondLst>
+                                  <p:childTnLst>
+                                    <p:set>
+                                      <p:cBhvr>
+                                        <p:cTn id="12" dur="1" fill="hold">
+                                          <p:stCondLst>
+                                            <p:cond delay="0"/>
+                                          </p:stCondLst>
+                                        </p:cTn>
+                                        <p:tgtEl>
+                                          <p:spTgt spid="3">
+                                            <p:txEl>
+                                              <p:pRg st="3" end="3"/>
+                                            </p:txEl>
+                                          </p:spTgt>
+                                        </p:tgtEl>
+                                        <p:attrNameLst>
+                                          <p:attrName>style.visibility</p:attrName>
+                                        </p:attrNameLst>
+                                      </p:cBhvr>
+                                      <p:to>
+                                        <p:strVal val="visible"/>
+                                      </p:to>
+                                    </p:set>
+                                  </p:childTnLst>
+                                </p:cTn>
+                              </p:par>
+                              <p:par>
+                                <p:cTn id="13" presetID="1" presetClass="entr" presetSubtype="0" fill="hold" grpId="0" nodeType="withEffect">
+                                  <p:stCondLst>
+                                    <p:cond delay="0"/>
+                                  </p:stCondLst>
+                                  <p:childTnLst>
+                                    <p:set>
+                                      <p:cBhvr>
+                                        <p:cTn id="14" dur="1" fill="hold">
+                                          <p:stCondLst>
+                                            <p:cond delay="0"/>
+                                          </p:stCondLst>
+                                        </p:cTn>
+                                        <p:tgtEl>
+                                          <p:spTgt spid="3">
+                                            <p:txEl>
+                                              <p:pRg st="4" end="4"/>
+                                            </p:txEl>
+                                          </p:spTgt>
+                                        </p:tgtEl>
+                                        <p:attrNameLst>
+                                          <p:attrName>style.visibility</p:attrName>
+                                        </p:attrNameLst>
+                                      </p:cBhvr>
+                                      <p:to>
+                                        <p:strVal val="visible"/>
+                                      </p:to>
+                                    </p:set>
+                                  </p:childTnLst>
+                                </p:cTn>
+                              </p:par>
+                            </p:childTnLst>
+                          </p:cTn>
+                        </p:par>
+                      </p:childTnLst>
+                    </p:cTn>
+                  </p:par>
+                </p:childTnLst>
+              </p:cTn>
+              <p:prevCondLst>
+                <p:cond evt="onPrev" delay="0">
+                  <p:tgtEl>
+                    <p:sldTgt/>
+                  </p:tgtEl>
+                </p:cond>
+              </p:prevCondLst>
+              <p:nextCondLst>
+                <p:cond evt="onNext" delay="0">
+                  <p:tgtEl>
+                    <p:sldTgt/>
+                  </p:tgtEl>
+                </p:cond>
+              </p:nextCondLst>
+            </p:seq>
+          </p:childTnLst>
+        </p:cTn>
+      </p:par>
+    </p:tnLst>
+    <p:bldLst>
+      <p:bldP spid="3" grpId="0" build="p"/>
+    </p:bldLst>
+  </p:timing>
+</p:sld>
+</file>
+
+<file path=ppt/slides/slide11.xml><?xml version="1.0" encoding="utf-8"?>
+<p:sld xmlns:a="http://schemas.openxmlformats.org/drawingml/2006/main" xmlns:r="http://schemas.openxmlformats.org/officeDocument/2006/relationships" xmlns:p="http://schemas.openxmlformats.org/presentationml/2006/main">
+  <p:cSld>
+    <p:spTree>
+      <p:nvGrpSpPr>
+        <p:cNvPr id="1" name=""/>
+        <p:cNvGrpSpPr/>
+        <p:nvPr/>
+      </p:nvGrpSpPr>
+      <p:grpSpPr>
+        <a:xfrm>
+          <a:off x="0" y="0"/>
+          <a:ext cx="0" cy="0"/>
+          <a:chOff x="0" y="0"/>
+          <a:chExt cx="0" cy="0"/>
+        </a:xfrm>
+      </p:grpSpPr>
+      <p:sp>
+        <p:nvSpPr>
           <p:cNvPr id="7170" name="Rectangle 2"/>
           <p:cNvSpPr>
             <a:spLocks noGrp="1" noChangeArrowheads="1"/>
@@ -12314,7 +12619,90 @@
 </p:sld>
 </file>
 
-<file path=ppt/slides/slide11.xml><?xml version="1.0" encoding="utf-8"?>
+<file path=ppt/slides/slide12.xml><?xml version="1.0" encoding="utf-8"?>
+<p:sld xmlns:a="http://schemas.openxmlformats.org/drawingml/2006/main" xmlns:r="http://schemas.openxmlformats.org/officeDocument/2006/relationships" xmlns:p="http://schemas.openxmlformats.org/presentationml/2006/main">
+  <p:cSld>
+    <p:spTree>
+      <p:nvGrpSpPr>
+        <p:cNvPr id="1" name=""/>
+        <p:cNvGrpSpPr/>
+        <p:nvPr/>
+      </p:nvGrpSpPr>
+      <p:grpSpPr>
+        <a:xfrm>
+          <a:off x="0" y="0"/>
+          <a:ext cx="0" cy="0"/>
+          <a:chOff x="0" y="0"/>
+          <a:chExt cx="0" cy="0"/>
+        </a:xfrm>
+      </p:grpSpPr>
+      <p:sp>
+        <p:nvSpPr>
+          <p:cNvPr id="2" name="Title 1">
+            <a:extLst>
+              <a:ext uri="{FF2B5EF4-FFF2-40B4-BE49-F238E27FC236}">
+                <a16:creationId xmlns:a16="http://schemas.microsoft.com/office/drawing/2014/main" id="{C4A4ABBF-C32C-078E-B9A3-ED051C31AC90}"/>
+              </a:ext>
+            </a:extLst>
+          </p:cNvPr>
+          <p:cNvSpPr>
+            <a:spLocks noGrp="1"/>
+          </p:cNvSpPr>
+          <p:nvPr>
+            <p:ph type="title"/>
+          </p:nvPr>
+        </p:nvSpPr>
+        <p:spPr/>
+        <p:txBody>
+          <a:bodyPr/>
+          <a:lstStyle/>
+          <a:p>
+            <a:r>
+              <a:rPr lang="en-US" dirty="0"/>
+              <a:t>Data Storage</a:t>
+            </a:r>
+          </a:p>
+        </p:txBody>
+      </p:sp>
+      <p:sp>
+        <p:nvSpPr>
+          <p:cNvPr id="3" name="Text Placeholder 2">
+            <a:extLst>
+              <a:ext uri="{FF2B5EF4-FFF2-40B4-BE49-F238E27FC236}">
+                <a16:creationId xmlns:a16="http://schemas.microsoft.com/office/drawing/2014/main" id="{A1D2E0EA-3A79-4F68-09CD-D83E4DBE23E6}"/>
+              </a:ext>
+            </a:extLst>
+          </p:cNvPr>
+          <p:cNvSpPr>
+            <a:spLocks noGrp="1"/>
+          </p:cNvSpPr>
+          <p:nvPr>
+            <p:ph type="body" idx="1"/>
+          </p:nvPr>
+        </p:nvSpPr>
+        <p:spPr/>
+        <p:txBody>
+          <a:bodyPr/>
+          <a:lstStyle/>
+          <a:p>
+            <a:endParaRPr lang="en-US"/>
+          </a:p>
+        </p:txBody>
+      </p:sp>
+    </p:spTree>
+    <p:extLst>
+      <p:ext uri="{BB962C8B-B14F-4D97-AF65-F5344CB8AC3E}">
+        <p14:creationId xmlns:p14="http://schemas.microsoft.com/office/powerpoint/2010/main" val="1043085120"/>
+      </p:ext>
+    </p:extLst>
+  </p:cSld>
+  <p:clrMapOvr>
+    <a:masterClrMapping/>
+  </p:clrMapOvr>
+</p:sld>
+</file>
+
+<file path=ppt/slides/slide13.xml><?xml version="1.0" encoding="utf-8"?>
 <p:sld xmlns:a="http://schemas.openxmlformats.org/drawingml/2006/main" xmlns:r="http://schemas.openxmlformats.org/officeDocument/2006/relationships" xmlns:p="http://schemas.openxmlformats.org/presentationml/2006/main" showMasterSp="0">
   <p:cSld>
     <p:bg>
@@ -12839,7 +13227,7 @@
 </p:sld>
 </file>
 
-<file path=ppt/slides/slide12.xml><?xml version="1.0" encoding="utf-8"?>
+<file path=ppt/slides/slide14.xml><?xml version="1.0" encoding="utf-8"?>
 <p:sld xmlns:a="http://schemas.openxmlformats.org/drawingml/2006/main" xmlns:r="http://schemas.openxmlformats.org/officeDocument/2006/relationships" xmlns:p="http://schemas.openxmlformats.org/presentationml/2006/main" show="0">
   <p:cSld>
     <p:spTree>
@@ -12961,7 +13349,7 @@
 </p:sld>
 </file>
 
-<file path=ppt/slides/slide13.xml><?xml version="1.0" encoding="utf-8"?>
+<file path=ppt/slides/slide15.xml><?xml version="1.0" encoding="utf-8"?>
 <p:sld xmlns:a="http://schemas.openxmlformats.org/drawingml/2006/main" xmlns:r="http://schemas.openxmlformats.org/officeDocument/2006/relationships" xmlns:p="http://schemas.openxmlformats.org/presentationml/2006/main">
   <p:cSld>
     <p:spTree>
@@ -13095,7 +13483,7 @@
 </p:sld>
 </file>
 
-<file path=ppt/slides/slide14.xml><?xml version="1.0" encoding="utf-8"?>
+<file path=ppt/slides/slide16.xml><?xml version="1.0" encoding="utf-8"?>
 <p:sld xmlns:a="http://schemas.openxmlformats.org/drawingml/2006/main" xmlns:r="http://schemas.openxmlformats.org/officeDocument/2006/relationships" xmlns:p="http://schemas.openxmlformats.org/presentationml/2006/main">
   <p:cSld>
     <p:spTree>
@@ -13178,7 +13566,7 @@
 </p:sld>
 </file>
 
-<file path=ppt/slides/slide15.xml><?xml version="1.0" encoding="utf-8"?>
+<file path=ppt/slides/slide17.xml><?xml version="1.0" encoding="utf-8"?>
 <p:sld xmlns:a="http://schemas.openxmlformats.org/drawingml/2006/main" xmlns:r="http://schemas.openxmlformats.org/officeDocument/2006/relationships" xmlns:p="http://schemas.openxmlformats.org/presentationml/2006/main">
   <p:cSld>
     <p:spTree>
@@ -13315,7 +13703,7 @@
 </p:sld>
 </file>
 
-<file path=ppt/slides/slide16.xml><?xml version="1.0" encoding="utf-8"?>
+<file path=ppt/slides/slide18.xml><?xml version="1.0" encoding="utf-8"?>
 <p:sld xmlns:a="http://schemas.openxmlformats.org/drawingml/2006/main" xmlns:r="http://schemas.openxmlformats.org/officeDocument/2006/relationships" xmlns:p="http://schemas.openxmlformats.org/presentationml/2006/main">
   <p:cSld>
     <p:spTree>
@@ -13403,7 +13791,7 @@
 </p:sld>
 </file>
 
-<file path=ppt/slides/slide17.xml><?xml version="1.0" encoding="utf-8"?>
+<file path=ppt/slides/slide19.xml><?xml version="1.0" encoding="utf-8"?>
 <p:sld xmlns:a="http://schemas.openxmlformats.org/drawingml/2006/main" xmlns:r="http://schemas.openxmlformats.org/officeDocument/2006/relationships" xmlns:p="http://schemas.openxmlformats.org/presentationml/2006/main">
   <p:cSld>
     <p:spTree>
@@ -14062,178 +14450,6 @@
 </p:sld>
 </file>
 
-<file path=ppt/slides/slide18.xml><?xml version="1.0" encoding="utf-8"?>
-<p:sld xmlns:a="http://schemas.openxmlformats.org/drawingml/2006/main" xmlns:r="http://schemas.openxmlformats.org/officeDocument/2006/relationships" xmlns:p="http://schemas.openxmlformats.org/presentationml/2006/main">
-  <p:cSld>
-    <p:spTree>
-      <p:nvGrpSpPr>
-        <p:cNvPr id="1" name=""/>
-        <p:cNvGrpSpPr/>
-        <p:nvPr/>
-      </p:nvGrpSpPr>
-      <p:grpSpPr>
-        <a:xfrm>
-          <a:off x="0" y="0"/>
-          <a:ext cx="0" cy="0"/>
-          <a:chOff x="0" y="0"/>
-          <a:chExt cx="0" cy="0"/>
-        </a:xfrm>
-      </p:grpSpPr>
-      <p:sp>
-        <p:nvSpPr>
-          <p:cNvPr id="2" name="Title 1"/>
-          <p:cNvSpPr>
-            <a:spLocks noGrp="1"/>
-          </p:cNvSpPr>
-          <p:nvPr>
-            <p:ph type="title"/>
-          </p:nvPr>
-        </p:nvSpPr>
-        <p:spPr/>
-        <p:txBody>
-          <a:bodyPr/>
-          <a:lstStyle/>
-          <a:p>
-            <a:r>
-              <a:rPr lang="en-US" dirty="0"/>
-              <a:t>When are two records about the same entity?</a:t>
-            </a:r>
-          </a:p>
-        </p:txBody>
-      </p:sp>
-      <p:sp>
-        <p:nvSpPr>
-          <p:cNvPr id="3" name="Content Placeholder 2"/>
-          <p:cNvSpPr>
-            <a:spLocks noGrp="1"/>
-          </p:cNvSpPr>
-          <p:nvPr>
-            <p:ph type="body" idx="1"/>
-          </p:nvPr>
-        </p:nvSpPr>
-        <p:spPr/>
-        <p:txBody>
-          <a:bodyPr/>
-          <a:lstStyle/>
-          <a:p>
-            <a:r>
-              <a:rPr lang="en-US" dirty="0"/>
-              <a:t>Examples of possible similarity metrics</a:t>
-            </a:r>
-          </a:p>
-          <a:p>
-            <a:pPr lvl="1"/>
-            <a:r>
-              <a:rPr lang="en-US" dirty="0"/>
-              <a:t>Edit distance</a:t>
-            </a:r>
-          </a:p>
-          <a:p>
-            <a:pPr lvl="1"/>
-            <a:r>
-              <a:rPr lang="en-US" dirty="0" err="1"/>
-              <a:t>Soundex</a:t>
-            </a:r>
-            <a:endParaRPr lang="en-US" dirty="0"/>
-          </a:p>
-          <a:p>
-            <a:endParaRPr lang="en-US" dirty="0"/>
-          </a:p>
-        </p:txBody>
-      </p:sp>
-    </p:spTree>
-    <p:extLst>
-      <p:ext uri="{BB962C8B-B14F-4D97-AF65-F5344CB8AC3E}">
-        <p14:creationId xmlns:p14="http://schemas.microsoft.com/office/powerpoint/2010/main" val="32033496"/>
-      </p:ext>
-    </p:extLst>
-  </p:cSld>
-  <p:clrMapOvr>
-    <a:masterClrMapping/>
-  </p:clrMapOvr>
-</p:sld>
-</file>
-
-<file path=ppt/slides/slide19.xml><?xml version="1.0" encoding="utf-8"?>
-<p:sld xmlns:a="http://schemas.openxmlformats.org/drawingml/2006/main" xmlns:r="http://schemas.openxmlformats.org/officeDocument/2006/relationships" xmlns:p="http://schemas.openxmlformats.org/presentationml/2006/main">
-  <p:cSld>
-    <p:spTree>
-      <p:nvGrpSpPr>
-        <p:cNvPr id="1" name=""/>
-        <p:cNvGrpSpPr/>
-        <p:nvPr/>
-      </p:nvGrpSpPr>
-      <p:grpSpPr>
-        <a:xfrm>
-          <a:off x="0" y="0"/>
-          <a:ext cx="0" cy="0"/>
-          <a:chOff x="0" y="0"/>
-          <a:chExt cx="0" cy="0"/>
-        </a:xfrm>
-      </p:grpSpPr>
-      <p:sp>
-        <p:nvSpPr>
-          <p:cNvPr id="2" name="Title 1"/>
-          <p:cNvSpPr>
-            <a:spLocks noGrp="1"/>
-          </p:cNvSpPr>
-          <p:nvPr>
-            <p:ph type="title"/>
-          </p:nvPr>
-        </p:nvSpPr>
-        <p:spPr/>
-        <p:txBody>
-          <a:bodyPr/>
-          <a:lstStyle/>
-          <a:p>
-            <a:r>
-              <a:rPr lang="en-US" dirty="0"/>
-              <a:t>“Fuzzy” Matching System	</a:t>
-            </a:r>
-          </a:p>
-        </p:txBody>
-      </p:sp>
-      <p:sp>
-        <p:nvSpPr>
-          <p:cNvPr id="3" name="Content Placeholder 2"/>
-          <p:cNvSpPr>
-            <a:spLocks noGrp="1"/>
-          </p:cNvSpPr>
-          <p:nvPr>
-            <p:ph type="body" idx="1"/>
-          </p:nvPr>
-        </p:nvSpPr>
-        <p:spPr/>
-        <p:txBody>
-          <a:bodyPr/>
-          <a:lstStyle/>
-          <a:p>
-            <a:r>
-              <a:rPr lang="en-US" dirty="0"/>
-              <a:t>Apply set of cascading rules</a:t>
-            </a:r>
-          </a:p>
-          <a:p>
-            <a:r>
-              <a:rPr lang="en-US" dirty="0"/>
-              <a:t>Assign confidence score based on which rules fire</a:t>
-            </a:r>
-          </a:p>
-        </p:txBody>
-      </p:sp>
-    </p:spTree>
-    <p:extLst>
-      <p:ext uri="{BB962C8B-B14F-4D97-AF65-F5344CB8AC3E}">
-        <p14:creationId xmlns:p14="http://schemas.microsoft.com/office/powerpoint/2010/main" val="2363932908"/>
-      </p:ext>
-    </p:extLst>
-  </p:cSld>
-  <p:clrMapOvr>
-    <a:masterClrMapping/>
-  </p:clrMapOvr>
-</p:sld>
-</file>
-
 <file path=ppt/slides/slide2.xml><?xml version="1.0" encoding="utf-8"?>
 <p:sld xmlns:a="http://schemas.openxmlformats.org/drawingml/2006/main" xmlns:r="http://schemas.openxmlformats.org/officeDocument/2006/relationships" xmlns:p="http://schemas.openxmlformats.org/presentationml/2006/main">
   <p:cSld>
@@ -14382,9 +14598,9 @@
       </p:grpSpPr>
       <p:sp>
         <p:nvSpPr>
-          <p:cNvPr id="35842" name="Rectangle 2"/>
+          <p:cNvPr id="2" name="Title 1"/>
           <p:cNvSpPr>
-            <a:spLocks noGrp="1" noChangeArrowheads="1"/>
+            <a:spLocks noGrp="1"/>
           </p:cNvSpPr>
           <p:nvPr>
             <p:ph type="title"/>
@@ -14396,17 +14612,17 @@
           <a:lstStyle/>
           <a:p>
             <a:r>
-              <a:rPr lang="en-US" altLang="en-US" dirty="0"/>
-              <a:t>How do we not compare every pair?</a:t>
+              <a:rPr lang="en-US" dirty="0"/>
+              <a:t>When are two records about the same entity?</a:t>
             </a:r>
           </a:p>
         </p:txBody>
       </p:sp>
       <p:sp>
         <p:nvSpPr>
-          <p:cNvPr id="35843" name="Rectangle 3"/>
+          <p:cNvPr id="3" name="Content Placeholder 2"/>
           <p:cNvSpPr>
-            <a:spLocks noGrp="1" noChangeArrowheads="1"/>
+            <a:spLocks noGrp="1"/>
           </p:cNvSpPr>
           <p:nvPr>
             <p:ph type="body" idx="1"/>
@@ -14417,125 +14633,35 @@
           <a:bodyPr/>
           <a:lstStyle/>
           <a:p>
-            <a:pPr>
-              <a:lnSpc>
-                <a:spcPct val="90000"/>
-              </a:lnSpc>
-            </a:pPr>
             <a:r>
-              <a:rPr lang="en-US" altLang="en-US" sz="2800" dirty="0"/>
-              <a:t>How do we avoid looking at |A| * |B| pairs?</a:t>
+              <a:rPr lang="en-US" dirty="0"/>
+              <a:t>Examples of possible similarity metrics</a:t>
             </a:r>
           </a:p>
           <a:p>
-            <a:pPr>
-              <a:lnSpc>
-                <a:spcPct val="90000"/>
-              </a:lnSpc>
-            </a:pPr>
+            <a:pPr lvl="1"/>
             <a:r>
-              <a:rPr lang="en-US" altLang="en-US" sz="2800" i="1" dirty="0"/>
-              <a:t>Blocking: </a:t>
+              <a:rPr lang="en-US" dirty="0"/>
+              <a:t>Edit distance</a:t>
             </a:r>
+          </a:p>
+          <a:p>
+            <a:pPr lvl="1"/>
             <a:r>
-              <a:rPr lang="en-US" altLang="en-US" sz="2800" dirty="0"/>
-              <a:t>choose a smaller set of pairs that will contain all or most matches.  </a:t>
-            </a:r>
-          </a:p>
-          <a:p>
-            <a:pPr lvl="1">
-              <a:lnSpc>
-                <a:spcPct val="90000"/>
-              </a:lnSpc>
-            </a:pPr>
-            <a:r>
-              <a:rPr lang="en-US" altLang="en-US" sz="2400" dirty="0"/>
-              <a:t>Simple blocking:  compare all pairs that “hash” to the same value (e.g., same </a:t>
-            </a:r>
-            <a:r>
-              <a:rPr lang="en-US" altLang="en-US" sz="2400" dirty="0" err="1"/>
+              <a:rPr lang="en-US" dirty="0" err="1"/>
               <a:t>Soundex</a:t>
             </a:r>
-            <a:r>
-              <a:rPr lang="en-US" altLang="en-US" sz="2400" dirty="0"/>
-              <a:t> code for last name, same birth year)</a:t>
-            </a:r>
-          </a:p>
-          <a:p>
-            <a:pPr lvl="1">
-              <a:lnSpc>
-                <a:spcPct val="90000"/>
-              </a:lnSpc>
-            </a:pPr>
-            <a:r>
-              <a:rPr lang="en-US" altLang="en-US" sz="2400" dirty="0"/>
-              <a:t>Extensions (to increase </a:t>
-            </a:r>
-            <a:r>
-              <a:rPr lang="en-US" altLang="en-US" sz="2400" i="1" dirty="0"/>
-              <a:t>recall </a:t>
-            </a:r>
-            <a:r>
-              <a:rPr lang="en-US" altLang="en-US" sz="2400" dirty="0"/>
-              <a:t>of set of pairs):</a:t>
-            </a:r>
-          </a:p>
-          <a:p>
-            <a:pPr lvl="2">
-              <a:lnSpc>
-                <a:spcPct val="90000"/>
-              </a:lnSpc>
-            </a:pPr>
-            <a:r>
-              <a:rPr lang="en-US" altLang="en-US" sz="2000" dirty="0"/>
-              <a:t>Block on </a:t>
-            </a:r>
-            <a:r>
-              <a:rPr lang="en-US" altLang="en-US" sz="2000" i="1" dirty="0"/>
-              <a:t>multiple</a:t>
-            </a:r>
-            <a:r>
-              <a:rPr lang="en-US" altLang="en-US" sz="2000" dirty="0"/>
-              <a:t> attributes (</a:t>
-            </a:r>
-            <a:r>
-              <a:rPr lang="en-US" altLang="en-US" sz="2000" dirty="0" err="1"/>
-              <a:t>soundex</a:t>
-            </a:r>
-            <a:r>
-              <a:rPr lang="en-US" altLang="en-US" sz="2000" dirty="0"/>
-              <a:t>, zip code) and take union of all pairs found.</a:t>
-            </a:r>
-          </a:p>
-          <a:p>
-            <a:pPr lvl="2">
-              <a:lnSpc>
-                <a:spcPct val="90000"/>
-              </a:lnSpc>
-            </a:pPr>
-            <a:r>
-              <a:rPr lang="en-US" altLang="en-US" sz="2000" i="1" dirty="0"/>
-              <a:t>Windowing:</a:t>
-            </a:r>
-            <a:r>
-              <a:rPr lang="en-US" altLang="en-US" sz="2000" dirty="0"/>
-              <a:t> Pick (numerically or lexically) </a:t>
-            </a:r>
-            <a:r>
-              <a:rPr lang="en-US" altLang="en-US" sz="2000" i="1" dirty="0"/>
-              <a:t>ordered</a:t>
-            </a:r>
-            <a:r>
-              <a:rPr lang="en-US" altLang="en-US" sz="2000" dirty="0"/>
-              <a:t> attributes and sort (e.g., sort on last name).  The pick all pairs that appear “near” each other in the sorted order.</a:t>
-            </a:r>
+            <a:endParaRPr lang="en-US" dirty="0"/>
+          </a:p>
+          <a:p>
+            <a:endParaRPr lang="en-US" dirty="0"/>
           </a:p>
         </p:txBody>
       </p:sp>
     </p:spTree>
     <p:extLst>
       <p:ext uri="{BB962C8B-B14F-4D97-AF65-F5344CB8AC3E}">
-        <p14:creationId xmlns:p14="http://schemas.microsoft.com/office/powerpoint/2010/main" val="3772462634"/>
+        <p14:creationId xmlns:p14="http://schemas.microsoft.com/office/powerpoint/2010/main" val="32033496"/>
       </p:ext>
     </p:extLst>
   </p:cSld>
@@ -14579,6 +14705,268 @@
           <a:p>
             <a:r>
               <a:rPr lang="en-US" dirty="0"/>
+              <a:t>“Fuzzy” Matching System	</a:t>
+            </a:r>
+          </a:p>
+        </p:txBody>
+      </p:sp>
+      <p:sp>
+        <p:nvSpPr>
+          <p:cNvPr id="3" name="Content Placeholder 2"/>
+          <p:cNvSpPr>
+            <a:spLocks noGrp="1"/>
+          </p:cNvSpPr>
+          <p:nvPr>
+            <p:ph type="body" idx="1"/>
+          </p:nvPr>
+        </p:nvSpPr>
+        <p:spPr/>
+        <p:txBody>
+          <a:bodyPr/>
+          <a:lstStyle/>
+          <a:p>
+            <a:r>
+              <a:rPr lang="en-US" dirty="0"/>
+              <a:t>Apply set of cascading rules</a:t>
+            </a:r>
+          </a:p>
+          <a:p>
+            <a:r>
+              <a:rPr lang="en-US" dirty="0"/>
+              <a:t>Assign confidence score based on which rules fire</a:t>
+            </a:r>
+          </a:p>
+        </p:txBody>
+      </p:sp>
+    </p:spTree>
+    <p:extLst>
+      <p:ext uri="{BB962C8B-B14F-4D97-AF65-F5344CB8AC3E}">
+        <p14:creationId xmlns:p14="http://schemas.microsoft.com/office/powerpoint/2010/main" val="2363932908"/>
+      </p:ext>
+    </p:extLst>
+  </p:cSld>
+  <p:clrMapOvr>
+    <a:masterClrMapping/>
+  </p:clrMapOvr>
+</p:sld>
+</file>
+
+<file path=ppt/slides/slide22.xml><?xml version="1.0" encoding="utf-8"?>
+<p:sld xmlns:a="http://schemas.openxmlformats.org/drawingml/2006/main" xmlns:r="http://schemas.openxmlformats.org/officeDocument/2006/relationships" xmlns:p="http://schemas.openxmlformats.org/presentationml/2006/main">
+  <p:cSld>
+    <p:spTree>
+      <p:nvGrpSpPr>
+        <p:cNvPr id="1" name=""/>
+        <p:cNvGrpSpPr/>
+        <p:nvPr/>
+      </p:nvGrpSpPr>
+      <p:grpSpPr>
+        <a:xfrm>
+          <a:off x="0" y="0"/>
+          <a:ext cx="0" cy="0"/>
+          <a:chOff x="0" y="0"/>
+          <a:chExt cx="0" cy="0"/>
+        </a:xfrm>
+      </p:grpSpPr>
+      <p:sp>
+        <p:nvSpPr>
+          <p:cNvPr id="35842" name="Rectangle 2"/>
+          <p:cNvSpPr>
+            <a:spLocks noGrp="1" noChangeArrowheads="1"/>
+          </p:cNvSpPr>
+          <p:nvPr>
+            <p:ph type="title"/>
+          </p:nvPr>
+        </p:nvSpPr>
+        <p:spPr/>
+        <p:txBody>
+          <a:bodyPr/>
+          <a:lstStyle/>
+          <a:p>
+            <a:r>
+              <a:rPr lang="en-US" altLang="en-US" dirty="0"/>
+              <a:t>How do we not compare every pair?</a:t>
+            </a:r>
+          </a:p>
+        </p:txBody>
+      </p:sp>
+      <p:sp>
+        <p:nvSpPr>
+          <p:cNvPr id="35843" name="Rectangle 3"/>
+          <p:cNvSpPr>
+            <a:spLocks noGrp="1" noChangeArrowheads="1"/>
+          </p:cNvSpPr>
+          <p:nvPr>
+            <p:ph type="body" idx="1"/>
+          </p:nvPr>
+        </p:nvSpPr>
+        <p:spPr/>
+        <p:txBody>
+          <a:bodyPr/>
+          <a:lstStyle/>
+          <a:p>
+            <a:pPr>
+              <a:lnSpc>
+                <a:spcPct val="90000"/>
+              </a:lnSpc>
+            </a:pPr>
+            <a:r>
+              <a:rPr lang="en-US" altLang="en-US" sz="2800" dirty="0"/>
+              <a:t>How do we avoid looking at |A| * |B| pairs?</a:t>
+            </a:r>
+          </a:p>
+          <a:p>
+            <a:pPr>
+              <a:lnSpc>
+                <a:spcPct val="90000"/>
+              </a:lnSpc>
+            </a:pPr>
+            <a:r>
+              <a:rPr lang="en-US" altLang="en-US" sz="2800" i="1" dirty="0"/>
+              <a:t>Blocking: </a:t>
+            </a:r>
+            <a:r>
+              <a:rPr lang="en-US" altLang="en-US" sz="2800" dirty="0"/>
+              <a:t>choose a smaller set of pairs that will contain all or most matches.  </a:t>
+            </a:r>
+          </a:p>
+          <a:p>
+            <a:pPr lvl="1">
+              <a:lnSpc>
+                <a:spcPct val="90000"/>
+              </a:lnSpc>
+            </a:pPr>
+            <a:r>
+              <a:rPr lang="en-US" altLang="en-US" sz="2400" dirty="0"/>
+              <a:t>Simple blocking:  compare all pairs that “hash” to the same value (e.g., same </a:t>
+            </a:r>
+            <a:r>
+              <a:rPr lang="en-US" altLang="en-US" sz="2400" dirty="0" err="1"/>
+              <a:t>Soundex</a:t>
+            </a:r>
+            <a:r>
+              <a:rPr lang="en-US" altLang="en-US" sz="2400" dirty="0"/>
+              <a:t> code for last name, same birth year)</a:t>
+            </a:r>
+          </a:p>
+          <a:p>
+            <a:pPr lvl="1">
+              <a:lnSpc>
+                <a:spcPct val="90000"/>
+              </a:lnSpc>
+            </a:pPr>
+            <a:r>
+              <a:rPr lang="en-US" altLang="en-US" sz="2400" dirty="0"/>
+              <a:t>Extensions (to increase </a:t>
+            </a:r>
+            <a:r>
+              <a:rPr lang="en-US" altLang="en-US" sz="2400" i="1" dirty="0"/>
+              <a:t>recall </a:t>
+            </a:r>
+            <a:r>
+              <a:rPr lang="en-US" altLang="en-US" sz="2400" dirty="0"/>
+              <a:t>of set of pairs):</a:t>
+            </a:r>
+          </a:p>
+          <a:p>
+            <a:pPr lvl="2">
+              <a:lnSpc>
+                <a:spcPct val="90000"/>
+              </a:lnSpc>
+            </a:pPr>
+            <a:r>
+              <a:rPr lang="en-US" altLang="en-US" sz="2000" dirty="0"/>
+              <a:t>Block on </a:t>
+            </a:r>
+            <a:r>
+              <a:rPr lang="en-US" altLang="en-US" sz="2000" i="1" dirty="0"/>
+              <a:t>multiple</a:t>
+            </a:r>
+            <a:r>
+              <a:rPr lang="en-US" altLang="en-US" sz="2000" dirty="0"/>
+              <a:t> attributes (</a:t>
+            </a:r>
+            <a:r>
+              <a:rPr lang="en-US" altLang="en-US" sz="2000" dirty="0" err="1"/>
+              <a:t>soundex</a:t>
+            </a:r>
+            <a:r>
+              <a:rPr lang="en-US" altLang="en-US" sz="2000" dirty="0"/>
+              <a:t>, zip code) and take union of all pairs found.</a:t>
+            </a:r>
+          </a:p>
+          <a:p>
+            <a:pPr lvl="2">
+              <a:lnSpc>
+                <a:spcPct val="90000"/>
+              </a:lnSpc>
+            </a:pPr>
+            <a:r>
+              <a:rPr lang="en-US" altLang="en-US" sz="2000" i="1" dirty="0"/>
+              <a:t>Windowing:</a:t>
+            </a:r>
+            <a:r>
+              <a:rPr lang="en-US" altLang="en-US" sz="2000" dirty="0"/>
+              <a:t> Pick (numerically or lexically) </a:t>
+            </a:r>
+            <a:r>
+              <a:rPr lang="en-US" altLang="en-US" sz="2000" i="1" dirty="0"/>
+              <a:t>ordered</a:t>
+            </a:r>
+            <a:r>
+              <a:rPr lang="en-US" altLang="en-US" sz="2000" dirty="0"/>
+              <a:t> attributes and sort (e.g., sort on last name).  The pick all pairs that appear “near” each other in the sorted order.</a:t>
+            </a:r>
+          </a:p>
+        </p:txBody>
+      </p:sp>
+    </p:spTree>
+    <p:extLst>
+      <p:ext uri="{BB962C8B-B14F-4D97-AF65-F5344CB8AC3E}">
+        <p14:creationId xmlns:p14="http://schemas.microsoft.com/office/powerpoint/2010/main" val="3772462634"/>
+      </p:ext>
+    </p:extLst>
+  </p:cSld>
+  <p:clrMapOvr>
+    <a:masterClrMapping/>
+  </p:clrMapOvr>
+</p:sld>
+</file>
+
+<file path=ppt/slides/slide23.xml><?xml version="1.0" encoding="utf-8"?>
+<p:sld xmlns:a="http://schemas.openxmlformats.org/drawingml/2006/main" xmlns:r="http://schemas.openxmlformats.org/officeDocument/2006/relationships" xmlns:p="http://schemas.openxmlformats.org/presentationml/2006/main">
+  <p:cSld>
+    <p:spTree>
+      <p:nvGrpSpPr>
+        <p:cNvPr id="1" name=""/>
+        <p:cNvGrpSpPr/>
+        <p:nvPr/>
+      </p:nvGrpSpPr>
+      <p:grpSpPr>
+        <a:xfrm>
+          <a:off x="0" y="0"/>
+          <a:ext cx="0" cy="0"/>
+          <a:chOff x="0" y="0"/>
+          <a:chExt cx="0" cy="0"/>
+        </a:xfrm>
+      </p:grpSpPr>
+      <p:sp>
+        <p:nvSpPr>
+          <p:cNvPr id="2" name="Title 1"/>
+          <p:cNvSpPr>
+            <a:spLocks noGrp="1"/>
+          </p:cNvSpPr>
+          <p:nvPr>
+            <p:ph type="title"/>
+          </p:nvPr>
+        </p:nvSpPr>
+        <p:spPr/>
+        <p:txBody>
+          <a:bodyPr/>
+          <a:lstStyle/>
+          <a:p>
+            <a:r>
+              <a:rPr lang="en-US" dirty="0"/>
               <a:t>Machine Learning based Record Linkage</a:t>
             </a:r>
           </a:p>
@@ -14680,7 +15068,7 @@
 </p:sld>
 </file>
 
-<file path=ppt/slides/slide22.xml><?xml version="1.0" encoding="utf-8"?>
+<file path=ppt/slides/slide24.xml><?xml version="1.0" encoding="utf-8"?>
 <p:sld xmlns:a="http://schemas.openxmlformats.org/drawingml/2006/main" xmlns:r="http://schemas.openxmlformats.org/officeDocument/2006/relationships" xmlns:p="http://schemas.openxmlformats.org/presentationml/2006/main">
   <p:cSld>
     <p:spTree>
@@ -14775,7 +15163,7 @@
 </p:sld>
 </file>
 
-<file path=ppt/slides/slide23.xml><?xml version="1.0" encoding="utf-8"?>
+<file path=ppt/slides/slide25.xml><?xml version="1.0" encoding="utf-8"?>
 <p:sld xmlns:a="http://schemas.openxmlformats.org/drawingml/2006/main" xmlns:r="http://schemas.openxmlformats.org/officeDocument/2006/relationships" xmlns:p="http://schemas.openxmlformats.org/presentationml/2006/main">
   <p:cSld>
     <p:spTree>
@@ -14877,7 +15265,7 @@
 </p:sld>
 </file>
 
-<file path=ppt/slides/slide24.xml><?xml version="1.0" encoding="utf-8"?>
+<file path=ppt/slides/slide26.xml><?xml version="1.0" encoding="utf-8"?>
 <p:sld xmlns:a="http://schemas.openxmlformats.org/drawingml/2006/main" xmlns:r="http://schemas.openxmlformats.org/officeDocument/2006/relationships" xmlns:p="http://schemas.openxmlformats.org/presentationml/2006/main">
   <p:cSld>
     <p:spTree>
@@ -14979,7 +15367,7 @@
 </p:sld>
 </file>
 
-<file path=ppt/slides/slide25.xml><?xml version="1.0" encoding="utf-8"?>
+<file path=ppt/slides/slide27.xml><?xml version="1.0" encoding="utf-8"?>
 <p:sld xmlns:a="http://schemas.openxmlformats.org/drawingml/2006/main" xmlns:r="http://schemas.openxmlformats.org/officeDocument/2006/relationships" xmlns:p="http://schemas.openxmlformats.org/presentationml/2006/main">
   <p:cSld>
     <p:spTree>
@@ -15964,8 +16352,16 @@
 </file>
 
 <file path=ppt/slides/slide9.xml><?xml version="1.0" encoding="utf-8"?>
-<p:sld xmlns:a="http://schemas.openxmlformats.org/drawingml/2006/main" xmlns:r="http://schemas.openxmlformats.org/officeDocument/2006/relationships" xmlns:p="http://schemas.openxmlformats.org/presentationml/2006/main">
+<p:sld xmlns:a="http://schemas.openxmlformats.org/drawingml/2006/main" xmlns:r="http://schemas.openxmlformats.org/officeDocument/2006/relationships" xmlns:p="http://schemas.openxmlformats.org/presentationml/2006/main" showMasterSp="0">
   <p:cSld>
+    <p:bg>
+      <p:bgPr>
+        <a:solidFill>
+          <a:srgbClr val="FFFFFF"/>
+        </a:solidFill>
+        <a:effectLst/>
+      </p:bgPr>
+    </p:bg>
     <p:spTree>
       <p:nvGrpSpPr>
         <p:cNvPr id="1" name=""/>
@@ -15982,287 +16378,424 @@
       </p:grpSpPr>
       <p:sp>
         <p:nvSpPr>
-          <p:cNvPr id="2" name="Title 1">
+          <p:cNvPr id="2" name="Rectangle 1">
             <a:extLst>
               <a:ext uri="{FF2B5EF4-FFF2-40B4-BE49-F238E27FC236}">
-                <a16:creationId xmlns:a16="http://schemas.microsoft.com/office/drawing/2014/main" id="{976F140B-CCBA-6544-AE2A-A3E88E046C57}"/>
+                <a16:creationId xmlns:a16="http://schemas.microsoft.com/office/drawing/2014/main" id="{541E1250-A521-FA05-EDC7-76CC3AB11856}"/>
               </a:ext>
             </a:extLst>
           </p:cNvPr>
-          <p:cNvSpPr>
-            <a:spLocks noGrp="1"/>
-          </p:cNvSpPr>
+          <p:cNvSpPr/>
           <p:nvPr>
-            <p:ph type="title"/>
+            <p:custDataLst>
+              <p:tags r:id="rId2"/>
+            </p:custDataLst>
           </p:nvPr>
         </p:nvSpPr>
-        <p:spPr/>
+        <p:spPr>
+          <a:xfrm>
+            <a:off x="444693" y="1742703"/>
+            <a:ext cx="2371696" cy="2371696"/>
+          </a:xfrm>
+          <a:prstGeom prst="rect">
+            <a:avLst/>
+          </a:prstGeom>
+          <a:blipFill>
+            <a:blip r:embed="rId5">
+              <a:extLst>
+                <a:ext uri="{96DAC541-7B7A-43D3-8B79-37D633B846F1}">
+                  <asvg:svgBlip xmlns:asvg="http://schemas.microsoft.com/office/drawing/2016/SVG/main" r:embed="rId6"/>
+                </a:ext>
+              </a:extLst>
+            </a:blip>
+            <a:stretch>
+              <a:fillRect/>
+            </a:stretch>
+          </a:blipFill>
+          <a:ln>
+            <a:solidFill>
+              <a:srgbClr val="FFFFFF"/>
+            </a:solidFill>
+          </a:ln>
+        </p:spPr>
+        <p:style>
+          <a:lnRef idx="2">
+            <a:schemeClr val="accent1">
+              <a:shade val="15000"/>
+            </a:schemeClr>
+          </a:lnRef>
+          <a:fillRef idx="1">
+            <a:schemeClr val="accent1"/>
+          </a:fillRef>
+          <a:effectRef idx="0">
+            <a:schemeClr val="accent1"/>
+          </a:effectRef>
+          <a:fontRef idx="minor">
+            <a:schemeClr val="lt1"/>
+          </a:fontRef>
+        </p:style>
         <p:txBody>
-          <a:bodyPr/>
+          <a:bodyPr rtlCol="0" anchor="ctr"/>
           <a:lstStyle/>
           <a:p>
-            <a:r>
-              <a:rPr lang="en-US" dirty="0"/>
-              <a:t>Data Storage</a:t>
-            </a:r>
+            <a:pPr algn="ctr"/>
+            <a:endParaRPr lang="en-US"/>
           </a:p>
         </p:txBody>
       </p:sp>
       <p:sp>
         <p:nvSpPr>
-          <p:cNvPr id="3" name="Text Placeholder 2">
+          <p:cNvPr id="3" name="Rectangle 2">
             <a:extLst>
               <a:ext uri="{FF2B5EF4-FFF2-40B4-BE49-F238E27FC236}">
-                <a16:creationId xmlns:a16="http://schemas.microsoft.com/office/drawing/2014/main" id="{88BFB7A9-1DE4-3B44-ACD9-B7066AE5097C}"/>
+                <a16:creationId xmlns:a16="http://schemas.microsoft.com/office/drawing/2014/main" id="{F99F6EE6-CB6B-7C33-D07D-C42C9391D4D7}"/>
               </a:ext>
             </a:extLst>
           </p:cNvPr>
-          <p:cNvSpPr>
-            <a:spLocks noGrp="1"/>
-          </p:cNvSpPr>
+          <p:cNvSpPr/>
           <p:nvPr>
-            <p:ph type="body" idx="1"/>
+            <p:custDataLst>
+              <p:tags r:id="rId3"/>
+            </p:custDataLst>
           </p:nvPr>
         </p:nvSpPr>
-        <p:spPr/>
+        <p:spPr>
+          <a:xfrm>
+            <a:off x="3112851" y="1000897"/>
+            <a:ext cx="8486226" cy="3855308"/>
+          </a:xfrm>
+          <a:prstGeom prst="rect">
+            <a:avLst/>
+          </a:prstGeom>
+          <a:noFill/>
+          <a:ln w="25400" cap="flat" cmpd="sng" algn="ctr">
+            <a:solidFill>
+              <a:srgbClr val="FFFFFF"/>
+            </a:solidFill>
+            <a:prstDash val="solid"/>
+          </a:ln>
+          <a:effectLst/>
+          <a:extLst>
+            <a:ext uri="{909E8E84-426E-40DD-AFC4-6F175D3DCCD1}">
+              <a14:hiddenFill xmlns:a14="http://schemas.microsoft.com/office/drawing/2010/main">
+                <a:solidFill>
+                  <a:schemeClr val="accent1"/>
+                </a:solidFill>
+              </a14:hiddenFill>
+            </a:ext>
+          </a:extLst>
+        </p:spPr>
+        <p:style>
+          <a:lnRef idx="2">
+            <a:schemeClr val="accent1">
+              <a:shade val="15000"/>
+            </a:schemeClr>
+          </a:lnRef>
+          <a:fillRef idx="1">
+            <a:schemeClr val="accent1"/>
+          </a:fillRef>
+          <a:effectRef idx="0">
+            <a:schemeClr val="accent1"/>
+          </a:effectRef>
+          <a:fontRef idx="minor">
+            <a:schemeClr val="lt1"/>
+          </a:fontRef>
+        </p:style>
         <p:txBody>
-          <a:bodyPr/>
+          <a:bodyPr rtlCol="0" anchor="ctr"/>
           <a:lstStyle/>
           <a:p>
             <a:r>
-              <a:rPr lang="en-US" dirty="0"/>
-              <a:t>Use Databases whenever possible</a:t>
-            </a:r>
-          </a:p>
-          <a:p>
-            <a:pPr lvl="1"/>
-            <a:r>
-              <a:rPr lang="en-US" dirty="0"/>
-              <a:t>Types of databases</a:t>
-            </a:r>
-          </a:p>
-          <a:p>
-            <a:pPr lvl="1"/>
-            <a:endParaRPr lang="en-US" dirty="0"/>
-          </a:p>
-          <a:p>
-            <a:r>
-              <a:rPr lang="en-US" dirty="0"/>
-              <a:t>Deidentification when dealing with confidential/sensitive identifiable data</a:t>
-            </a:r>
-          </a:p>
-          <a:p>
-            <a:pPr lvl="1"/>
-            <a:r>
-              <a:rPr lang="en-US" dirty="0"/>
-              <a:t>hashing</a:t>
+              <a:rPr lang="en-US" sz="4000" b="1">
+                <a:solidFill>
+                  <a:srgbClr val="000000"/>
+                </a:solidFill>
+              </a:rPr>
+              <a:t>What has your experience with databases?</a:t>
             </a:r>
           </a:p>
         </p:txBody>
       </p:sp>
+      <p:sp>
+        <p:nvSpPr>
+          <p:cNvPr id="4" name="Rectangle 3">
+            <a:extLst>
+              <a:ext uri="{FF2B5EF4-FFF2-40B4-BE49-F238E27FC236}">
+                <a16:creationId xmlns:a16="http://schemas.microsoft.com/office/drawing/2014/main" id="{1882A259-8004-66DA-0458-4118EB46A3AD}"/>
+              </a:ext>
+            </a:extLst>
+          </p:cNvPr>
+          <p:cNvSpPr/>
+          <p:nvPr/>
+        </p:nvSpPr>
+        <p:spPr>
+          <a:xfrm>
+            <a:off x="0" y="5820032"/>
+            <a:ext cx="12192001" cy="1037968"/>
+          </a:xfrm>
+          <a:prstGeom prst="rect">
+            <a:avLst/>
+          </a:prstGeom>
+          <a:solidFill>
+            <a:srgbClr val="198038"/>
+          </a:solidFill>
+          <a:ln w="25400" cap="flat" cmpd="sng" algn="ctr">
+            <a:noFill/>
+            <a:prstDash val="solid"/>
+          </a:ln>
+          <a:effectLst/>
+          <a:extLst>
+            <a:ext uri="{91240B29-F687-4F45-9708-019B960494DF}">
+              <a14:hiddenLine xmlns:a14="http://schemas.microsoft.com/office/drawing/2010/main" w="25400" cap="flat" cmpd="sng" algn="ctr">
+                <a:solidFill>
+                  <a:schemeClr val="accent1">
+                    <a:shade val="15000"/>
+                  </a:schemeClr>
+                </a:solidFill>
+                <a:prstDash val="solid"/>
+              </a14:hiddenLine>
+            </a:ext>
+          </a:extLst>
+        </p:spPr>
+        <p:style>
+          <a:lnRef idx="2">
+            <a:schemeClr val="accent1">
+              <a:shade val="15000"/>
+            </a:schemeClr>
+          </a:lnRef>
+          <a:fillRef idx="1">
+            <a:schemeClr val="accent1"/>
+          </a:fillRef>
+          <a:effectRef idx="0">
+            <a:schemeClr val="accent1"/>
+          </a:effectRef>
+          <a:fontRef idx="minor">
+            <a:schemeClr val="lt1"/>
+          </a:fontRef>
+        </p:style>
+        <p:txBody>
+          <a:bodyPr lIns="741155" tIns="259492" rIns="1852888" bIns="203886" rtlCol="0" anchor="ctr">
+            <a:normAutofit fontScale="85000" lnSpcReduction="10000"/>
+          </a:bodyPr>
+          <a:lstStyle/>
+          <a:p>
+            <a:r>
+              <a:rPr lang="en-US" sz="2600">
+                <a:solidFill>
+                  <a:srgbClr val="FFFFFF"/>
+                </a:solidFill>
+              </a:rPr>
+              <a:t>The </a:t>
+            </a:r>
+            <a:r>
+              <a:rPr lang="en-US" sz="2600">
+                <a:solidFill>
+                  <a:srgbClr val="FFFFFF"/>
+                </a:solidFill>
+                <a:hlinkClick r:id="rId7">
+                  <a:extLst>
+                    <a:ext uri="{A12FA001-AC4F-418D-AE19-62706E023703}">
+                      <ahyp:hlinkClr xmlns:ahyp="http://schemas.microsoft.com/office/drawing/2018/hyperlinkcolor" val="tx"/>
+                    </a:ext>
+                  </a:extLst>
+                </a:hlinkClick>
+              </a:rPr>
+              <a:t>Slido app</a:t>
+            </a:r>
+            <a:r>
+              <a:rPr lang="en-US" sz="2600">
+                <a:solidFill>
+                  <a:srgbClr val="FFFFFF"/>
+                </a:solidFill>
+              </a:rPr>
+              <a:t> must be installed on every computer you’re presenting from</a:t>
+            </a:r>
+          </a:p>
+        </p:txBody>
+      </p:sp>
+      <p:pic>
+        <p:nvPicPr>
+          <p:cNvPr id="6" name="Graphic 5">
+            <a:extLst>
+              <a:ext uri="{FF2B5EF4-FFF2-40B4-BE49-F238E27FC236}">
+                <a16:creationId xmlns:a16="http://schemas.microsoft.com/office/drawing/2014/main" id="{45C0B002-5A6C-2DD8-5E43-3755284C4EED}"/>
+              </a:ext>
+            </a:extLst>
+          </p:cNvPr>
+          <p:cNvPicPr>
+            <a:picLocks/>
+          </p:cNvPicPr>
+          <p:nvPr/>
+        </p:nvPicPr>
+        <p:blipFill>
+          <a:blip r:embed="rId8">
+            <a:extLst>
+              <a:ext uri="{96DAC541-7B7A-43D3-8B79-37D633B846F1}">
+                <asvg:svgBlip xmlns:asvg="http://schemas.microsoft.com/office/drawing/2016/SVG/main" r:embed="rId9"/>
+              </a:ext>
+            </a:extLst>
+          </a:blip>
+          <a:stretch>
+            <a:fillRect/>
+          </a:stretch>
+        </p:blipFill>
+        <p:spPr>
+          <a:xfrm>
+            <a:off x="296462" y="6190785"/>
+            <a:ext cx="296462" cy="296462"/>
+          </a:xfrm>
+          <a:prstGeom prst="rect">
+            <a:avLst/>
+          </a:prstGeom>
+        </p:spPr>
+      </p:pic>
+      <p:sp>
+        <p:nvSpPr>
+          <p:cNvPr id="7" name="Trapezoid 6">
+            <a:extLst>
+              <a:ext uri="{FF2B5EF4-FFF2-40B4-BE49-F238E27FC236}">
+                <a16:creationId xmlns:a16="http://schemas.microsoft.com/office/drawing/2014/main" id="{802D2D64-D131-22C5-315F-B69805CED7C4}"/>
+              </a:ext>
+            </a:extLst>
+          </p:cNvPr>
+          <p:cNvSpPr/>
+          <p:nvPr/>
+        </p:nvSpPr>
+        <p:spPr>
+          <a:xfrm rot="2700000">
+            <a:off x="9620371" y="514924"/>
+            <a:ext cx="3335198" cy="778213"/>
+          </a:xfrm>
+          <a:prstGeom prst="trapezoid">
+            <a:avLst>
+              <a:gd name="adj" fmla="val 100000"/>
+            </a:avLst>
+          </a:prstGeom>
+          <a:solidFill>
+            <a:srgbClr val="EDFAF2"/>
+          </a:solidFill>
+          <a:ln w="25400" cap="flat" cmpd="sng" algn="ctr">
+            <a:noFill/>
+            <a:prstDash val="solid"/>
+          </a:ln>
+          <a:effectLst/>
+          <a:extLst>
+            <a:ext uri="{91240B29-F687-4F45-9708-019B960494DF}">
+              <a14:hiddenLine xmlns:a14="http://schemas.microsoft.com/office/drawing/2010/main" w="25400" cap="flat" cmpd="sng" algn="ctr">
+                <a:solidFill>
+                  <a:schemeClr val="accent1">
+                    <a:shade val="15000"/>
+                  </a:schemeClr>
+                </a:solidFill>
+                <a:prstDash val="solid"/>
+              </a14:hiddenLine>
+            </a:ext>
+          </a:extLst>
+        </p:spPr>
+        <p:style>
+          <a:lnRef idx="2">
+            <a:schemeClr val="accent1">
+              <a:shade val="15000"/>
+            </a:schemeClr>
+          </a:lnRef>
+          <a:fillRef idx="1">
+            <a:schemeClr val="accent1"/>
+          </a:fillRef>
+          <a:effectRef idx="0">
+            <a:schemeClr val="accent1"/>
+          </a:effectRef>
+          <a:fontRef idx="minor">
+            <a:schemeClr val="lt1"/>
+          </a:fontRef>
+        </p:style>
+        <p:txBody>
+          <a:bodyPr tIns="0" bIns="0" rtlCol="0" anchor="t">
+            <a:normAutofit fontScale="70000" lnSpcReduction="20000"/>
+          </a:bodyPr>
+          <a:lstStyle/>
+          <a:p>
+            <a:pPr algn="ctr"/>
+            <a:r>
+              <a:rPr lang="en-US" sz="2600" b="1">
+                <a:solidFill>
+                  <a:srgbClr val="198038"/>
+                </a:solidFill>
+              </a:rPr>
+              <a:t>Do not edit
+</a:t>
+            </a:r>
+            <a:r>
+              <a:rPr lang="en-US" sz="2200">
+                <a:solidFill>
+                  <a:srgbClr val="198038"/>
+                </a:solidFill>
+                <a:hlinkClick r:id="rId10">
+                  <a:extLst>
+                    <a:ext uri="{A12FA001-AC4F-418D-AE19-62706E023703}">
+                      <ahyp:hlinkClr xmlns:ahyp="http://schemas.microsoft.com/office/drawing/2018/hyperlinkcolor" val="tx"/>
+                    </a:ext>
+                  </a:extLst>
+                </a:hlinkClick>
+              </a:rPr>
+              <a:t>How to change the design</a:t>
+            </a:r>
+            <a:endParaRPr lang="en-US" sz="2200">
+              <a:solidFill>
+                <a:srgbClr val="198038"/>
+              </a:solidFill>
+            </a:endParaRPr>
+          </a:p>
+        </p:txBody>
+      </p:sp>
+      <p:pic>
+        <p:nvPicPr>
+          <p:cNvPr id="9" name="Graphic 8">
+            <a:extLst>
+              <a:ext uri="{FF2B5EF4-FFF2-40B4-BE49-F238E27FC236}">
+                <a16:creationId xmlns:a16="http://schemas.microsoft.com/office/drawing/2014/main" id="{308A427A-545D-8BB9-61D9-A1466893ED08}"/>
+              </a:ext>
+            </a:extLst>
+          </p:cNvPr>
+          <p:cNvPicPr>
+            <a:picLocks/>
+          </p:cNvPicPr>
+          <p:nvPr/>
+        </p:nvPicPr>
+        <p:blipFill>
+          <a:blip r:embed="rId11">
+            <a:extLst>
+              <a:ext uri="{96DAC541-7B7A-43D3-8B79-37D633B846F1}">
+                <asvg:svgBlip xmlns:asvg="http://schemas.microsoft.com/office/drawing/2016/SVG/main" r:embed="rId12"/>
+              </a:ext>
+            </a:extLst>
+          </a:blip>
+          <a:stretch>
+            <a:fillRect/>
+          </a:stretch>
+        </p:blipFill>
+        <p:spPr>
+          <a:xfrm>
+            <a:off x="10746748" y="6153727"/>
+            <a:ext cx="1111733" cy="370578"/>
+          </a:xfrm>
+          <a:prstGeom prst="rect">
+            <a:avLst/>
+          </a:prstGeom>
+        </p:spPr>
+      </p:pic>
     </p:spTree>
+    <p:custDataLst>
+      <p:tags r:id="rId1"/>
+    </p:custDataLst>
     <p:extLst>
       <p:ext uri="{BB962C8B-B14F-4D97-AF65-F5344CB8AC3E}">
-        <p14:creationId xmlns:p14="http://schemas.microsoft.com/office/powerpoint/2010/main" val="1278687259"/>
+        <p14:creationId xmlns:p14="http://schemas.microsoft.com/office/powerpoint/2010/main" val="684484876"/>
       </p:ext>
     </p:extLst>
   </p:cSld>
   <p:clrMapOvr>
     <a:masterClrMapping/>
   </p:clrMapOvr>
-  <p:timing>
-    <p:tnLst>
-      <p:par>
-        <p:cTn id="1" dur="indefinite" restart="never" nodeType="tmRoot">
-          <p:childTnLst>
-            <p:seq concurrent="1" nextAc="seek">
-              <p:cTn id="2" dur="indefinite" nodeType="mainSeq">
-                <p:childTnLst>
-                  <p:par>
-                    <p:cTn id="3" fill="hold">
-                      <p:stCondLst>
-                        <p:cond delay="indefinite"/>
-                      </p:stCondLst>
-                      <p:childTnLst>
-                        <p:par>
-                          <p:cTn id="4" fill="hold">
-                            <p:stCondLst>
-                              <p:cond delay="0"/>
-                            </p:stCondLst>
-                            <p:childTnLst>
-                              <p:par>
-                                <p:cTn id="5" presetID="1" presetClass="entr" presetSubtype="0" fill="hold" grpId="0" nodeType="clickEffect">
-                                  <p:stCondLst>
-                                    <p:cond delay="0"/>
-                                  </p:stCondLst>
-                                  <p:childTnLst>
-                                    <p:set>
-                                      <p:cBhvr>
-                                        <p:cTn id="6" dur="1" fill="hold">
-                                          <p:stCondLst>
-                                            <p:cond delay="0"/>
-                                          </p:stCondLst>
-                                        </p:cTn>
-                                        <p:tgtEl>
-                                          <p:spTgt spid="3">
-                                            <p:txEl>
-                                              <p:pRg st="0" end="0"/>
-                                            </p:txEl>
-                                          </p:spTgt>
-                                        </p:tgtEl>
-                                        <p:attrNameLst>
-                                          <p:attrName>style.visibility</p:attrName>
-                                        </p:attrNameLst>
-                                      </p:cBhvr>
-                                      <p:to>
-                                        <p:strVal val="visible"/>
-                                      </p:to>
-                                    </p:set>
-                                  </p:childTnLst>
-                                </p:cTn>
-                              </p:par>
-                              <p:par>
-                                <p:cTn id="7" presetID="1" presetClass="entr" presetSubtype="0" fill="hold" grpId="0" nodeType="withEffect">
-                                  <p:stCondLst>
-                                    <p:cond delay="0"/>
-                                  </p:stCondLst>
-                                  <p:childTnLst>
-                                    <p:set>
-                                      <p:cBhvr>
-                                        <p:cTn id="8" dur="1" fill="hold">
-                                          <p:stCondLst>
-                                            <p:cond delay="0"/>
-                                          </p:stCondLst>
-                                        </p:cTn>
-                                        <p:tgtEl>
-                                          <p:spTgt spid="3">
-                                            <p:txEl>
-                                              <p:pRg st="1" end="1"/>
-                                            </p:txEl>
-                                          </p:spTgt>
-                                        </p:tgtEl>
-                                        <p:attrNameLst>
-                                          <p:attrName>style.visibility</p:attrName>
-                                        </p:attrNameLst>
-                                      </p:cBhvr>
-                                      <p:to>
-                                        <p:strVal val="visible"/>
-                                      </p:to>
-                                    </p:set>
-                                  </p:childTnLst>
-                                </p:cTn>
-                              </p:par>
-                            </p:childTnLst>
-                          </p:cTn>
-                        </p:par>
-                      </p:childTnLst>
-                    </p:cTn>
-                  </p:par>
-                  <p:par>
-                    <p:cTn id="9" fill="hold">
-                      <p:stCondLst>
-                        <p:cond delay="indefinite"/>
-                      </p:stCondLst>
-                      <p:childTnLst>
-                        <p:par>
-                          <p:cTn id="10" fill="hold">
-                            <p:stCondLst>
-                              <p:cond delay="0"/>
-                            </p:stCondLst>
-                            <p:childTnLst>
-                              <p:par>
-                                <p:cTn id="11" presetID="1" presetClass="entr" presetSubtype="0" fill="hold" grpId="0" nodeType="clickEffect">
-                                  <p:stCondLst>
-                                    <p:cond delay="0"/>
-                                  </p:stCondLst>
-                                  <p:childTnLst>
-                                    <p:set>
-                                      <p:cBhvr>
-                                        <p:cTn id="12" dur="1" fill="hold">
-                                          <p:stCondLst>
-                                            <p:cond delay="0"/>
-                                          </p:stCondLst>
-                                        </p:cTn>
-                                        <p:tgtEl>
-                                          <p:spTgt spid="3">
-                                            <p:txEl>
-                                              <p:pRg st="3" end="3"/>
-                                            </p:txEl>
-                                          </p:spTgt>
-                                        </p:tgtEl>
-                                        <p:attrNameLst>
-                                          <p:attrName>style.visibility</p:attrName>
-                                        </p:attrNameLst>
-                                      </p:cBhvr>
-                                      <p:to>
-                                        <p:strVal val="visible"/>
-                                      </p:to>
-                                    </p:set>
-                                  </p:childTnLst>
-                                </p:cTn>
-                              </p:par>
-                              <p:par>
-                                <p:cTn id="13" presetID="1" presetClass="entr" presetSubtype="0" fill="hold" grpId="0" nodeType="withEffect">
-                                  <p:stCondLst>
-                                    <p:cond delay="0"/>
-                                  </p:stCondLst>
-                                  <p:childTnLst>
-                                    <p:set>
-                                      <p:cBhvr>
-                                        <p:cTn id="14" dur="1" fill="hold">
-                                          <p:stCondLst>
-                                            <p:cond delay="0"/>
-                                          </p:stCondLst>
-                                        </p:cTn>
-                                        <p:tgtEl>
-                                          <p:spTgt spid="3">
-                                            <p:txEl>
-                                              <p:pRg st="4" end="4"/>
-                                            </p:txEl>
-                                          </p:spTgt>
-                                        </p:tgtEl>
-                                        <p:attrNameLst>
-                                          <p:attrName>style.visibility</p:attrName>
-                                        </p:attrNameLst>
-                                      </p:cBhvr>
-                                      <p:to>
-                                        <p:strVal val="visible"/>
-                                      </p:to>
-                                    </p:set>
-                                  </p:childTnLst>
-                                </p:cTn>
-                              </p:par>
-                            </p:childTnLst>
-                          </p:cTn>
-                        </p:par>
-                      </p:childTnLst>
-                    </p:cTn>
-                  </p:par>
-                </p:childTnLst>
-              </p:cTn>
-              <p:prevCondLst>
-                <p:cond evt="onPrev" delay="0">
-                  <p:tgtEl>
-                    <p:sldTgt/>
-                  </p:tgtEl>
-                </p:cond>
-              </p:prevCondLst>
-              <p:nextCondLst>
-                <p:cond evt="onNext" delay="0">
-                  <p:tgtEl>
-                    <p:sldTgt/>
-                  </p:tgtEl>
-                </p:cond>
-              </p:nextCondLst>
-            </p:seq>
-          </p:childTnLst>
-        </p:cTn>
-      </p:par>
-    </p:tnLst>
-    <p:bldLst>
-      <p:bldP spid="3" grpId="0" build="p"/>
-    </p:bldLst>
-  </p:timing>
 </p:sld>
 </file>
 
@@ -16278,8 +16811,8 @@
 <file path=ppt/tags/tag2.xml><?xml version="1.0" encoding="utf-8"?>
 <p:tagLst xmlns:a="http://schemas.openxmlformats.org/drawingml/2006/main" xmlns:r="http://schemas.openxmlformats.org/officeDocument/2006/relationships" xmlns:p="http://schemas.openxmlformats.org/presentationml/2006/main">
   <p:tag name="SLIDO_TYPE" val="SlidoPoll"/>
-  <p:tag name="SLIDO_POLL_UUID" val="cc6ad4e3-ae10-4be2-b854-927465caf366"/>
-  <p:tag name="SLIDO_TIMELINE" val="W3sicG9sbFF1ZXN0aW9uVXVpZCI6ImU2MTFlYzQzLTBlOGUtNDQ4OS04YTY5LTBiNDNhNDZmM2I3OSIsInNob3dSZXN1bHRzIjpmYWxzZX0seyJwb2xsUXVlc3Rpb25VdWlkIjoiZTYxMWVjNDMtMGU4ZS00NDg5LThhNjktMGI0M2E0NmYzYjc5Iiwic2hvd1Jlc3VsdHMiOnRydWV9XQ=="/>
+  <p:tag name="SLIDO_POLL_UUID" val="c8dbb9c6-5700-484e-81ed-37c5e2b60a9a"/>
+  <p:tag name="SLIDO_TIMELINE" val="W3sic2hvd1Jlc3VsdHMiOnRydWUsInBvbGxRdWVzdGlvblV1aWQiOiIwNzRiNmNlNi1lZWNjLTRlZWQtOGQwMy05MWMzMDg0ZWY1M2IifV0="/>
 </p:tagLst>
 </file>
 
@@ -16291,6 +16824,27 @@
 </file>
 
 <file path=ppt/tags/tag4.xml><?xml version="1.0" encoding="utf-8"?>
+<p:tagLst xmlns:a="http://schemas.openxmlformats.org/drawingml/2006/main" xmlns:r="http://schemas.openxmlformats.org/officeDocument/2006/relationships" xmlns:p="http://schemas.openxmlformats.org/presentationml/2006/main">
+  <p:tag name="SLIDO_ELEMENT" val="title"/>
+</p:tagLst>
+</file>
+
+<file path=ppt/tags/tag5.xml><?xml version="1.0" encoding="utf-8"?>
+<p:tagLst xmlns:a="http://schemas.openxmlformats.org/drawingml/2006/main" xmlns:r="http://schemas.openxmlformats.org/officeDocument/2006/relationships" xmlns:p="http://schemas.openxmlformats.org/presentationml/2006/main">
+  <p:tag name="SLIDO_TYPE" val="SlidoPoll"/>
+  <p:tag name="SLIDO_POLL_UUID" val="cc6ad4e3-ae10-4be2-b854-927465caf366"/>
+  <p:tag name="SLIDO_TIMELINE" val="W3sicG9sbFF1ZXN0aW9uVXVpZCI6ImU2MTFlYzQzLTBlOGUtNDQ4OS04YTY5LTBiNDNhNDZmM2I3OSIsInNob3dSZXN1bHRzIjpmYWxzZX0seyJwb2xsUXVlc3Rpb25VdWlkIjoiZTYxMWVjNDMtMGU4ZS00NDg5LThhNjktMGI0M2E0NmYzYjc5Iiwic2hvd1Jlc3VsdHMiOnRydWV9XQ=="/>
+</p:tagLst>
+</file>
+
+<file path=ppt/tags/tag6.xml><?xml version="1.0" encoding="utf-8"?>
+<p:tagLst xmlns:a="http://schemas.openxmlformats.org/drawingml/2006/main" xmlns:r="http://schemas.openxmlformats.org/officeDocument/2006/relationships" xmlns:p="http://schemas.openxmlformats.org/presentationml/2006/main">
+  <p:tag name="SLIDO_ELEMENT" val="interaction_image"/>
+  <p:tag name="INTERACTION_TYPE" val="MultipleChoice"/>
+</p:tagLst>
+</file>
+
+<file path=ppt/tags/tag7.xml><?xml version="1.0" encoding="utf-8"?>
 <p:tagLst xmlns:a="http://schemas.openxmlformats.org/drawingml/2006/main" xmlns:r="http://schemas.openxmlformats.org/officeDocument/2006/relationships" xmlns:p="http://schemas.openxmlformats.org/presentationml/2006/main">
   <p:tag name="SLIDO_ELEMENT" val="title"/>
 </p:tagLst>

--- a/Lectures/Lecture3-Data.pptx
+++ b/Lectures/Lecture3-Data.pptx
@@ -5,7 +5,7 @@
     <p:sldMasterId id="2147483648" r:id="rId1"/>
   </p:sldMasterIdLst>
   <p:notesMasterIdLst>
-    <p:notesMasterId r:id="rId29"/>
+    <p:notesMasterId r:id="rId42"/>
   </p:notesMasterIdLst>
   <p:sldIdLst>
     <p:sldId id="256" r:id="rId2"/>
@@ -14,32 +14,45 @@
     <p:sldId id="299" r:id="rId5"/>
     <p:sldId id="301" r:id="rId6"/>
     <p:sldId id="295" r:id="rId7"/>
-    <p:sldId id="282" r:id="rId8"/>
-    <p:sldId id="285" r:id="rId9"/>
-    <p:sldId id="307" r:id="rId10"/>
-    <p:sldId id="283" r:id="rId11"/>
-    <p:sldId id="260" r:id="rId12"/>
-    <p:sldId id="308" r:id="rId13"/>
-    <p:sldId id="304" r:id="rId14"/>
-    <p:sldId id="303" r:id="rId15"/>
-    <p:sldId id="261" r:id="rId16"/>
-    <p:sldId id="306" r:id="rId17"/>
-    <p:sldId id="287" r:id="rId18"/>
-    <p:sldId id="262" r:id="rId19"/>
-    <p:sldId id="288" r:id="rId20"/>
-    <p:sldId id="289" r:id="rId21"/>
-    <p:sldId id="290" r:id="rId22"/>
-    <p:sldId id="280" r:id="rId23"/>
-    <p:sldId id="291" r:id="rId24"/>
-    <p:sldId id="293" r:id="rId25"/>
-    <p:sldId id="296" r:id="rId26"/>
-    <p:sldId id="302" r:id="rId27"/>
-    <p:sldId id="305" r:id="rId28"/>
+    <p:sldId id="309" r:id="rId8"/>
+    <p:sldId id="307" r:id="rId9"/>
+    <p:sldId id="325" r:id="rId10"/>
+    <p:sldId id="310" r:id="rId11"/>
+    <p:sldId id="292" r:id="rId12"/>
+    <p:sldId id="311" r:id="rId13"/>
+    <p:sldId id="294" r:id="rId14"/>
+    <p:sldId id="312" r:id="rId15"/>
+    <p:sldId id="313" r:id="rId16"/>
+    <p:sldId id="314" r:id="rId17"/>
+    <p:sldId id="315" r:id="rId18"/>
+    <p:sldId id="316" r:id="rId19"/>
+    <p:sldId id="317" r:id="rId20"/>
+    <p:sldId id="323" r:id="rId21"/>
+    <p:sldId id="324" r:id="rId22"/>
+    <p:sldId id="283" r:id="rId23"/>
+    <p:sldId id="260" r:id="rId24"/>
+    <p:sldId id="308" r:id="rId25"/>
+    <p:sldId id="304" r:id="rId26"/>
+    <p:sldId id="303" r:id="rId27"/>
+    <p:sldId id="261" r:id="rId28"/>
+    <p:sldId id="306" r:id="rId29"/>
+    <p:sldId id="287" r:id="rId30"/>
+    <p:sldId id="262" r:id="rId31"/>
+    <p:sldId id="288" r:id="rId32"/>
+    <p:sldId id="289" r:id="rId33"/>
+    <p:sldId id="290" r:id="rId34"/>
+    <p:sldId id="280" r:id="rId35"/>
+    <p:sldId id="291" r:id="rId36"/>
+    <p:sldId id="293" r:id="rId37"/>
+    <p:sldId id="296" r:id="rId38"/>
+    <p:sldId id="302" r:id="rId39"/>
+    <p:sldId id="326" r:id="rId40"/>
+    <p:sldId id="305" r:id="rId41"/>
   </p:sldIdLst>
   <p:sldSz cx="12192000" cy="6858000"/>
   <p:notesSz cx="6858000" cy="9144000"/>
   <p:custDataLst>
-    <p:tags r:id="rId30"/>
+    <p:tags r:id="rId43"/>
   </p:custDataLst>
   <p:defaultTextStyle>
     <a:defPPr marR="0" lvl="0" algn="l" rtl="0">
@@ -275,7 +288,7 @@
       <p15:sldGuideLst xmlns:p15="http://schemas.microsoft.com/office/powerpoint/2012/main"/>
     </p:ext>
     <p:ext uri="http://customooxmlschemas.google.com/">
-      <go:slidesCustomData xmlns:go="http://customooxmlschemas.google.com/" xmlns:p15="http://schemas.microsoft.com/office/powerpoint/2012/main" xmlns:p14="http://schemas.microsoft.com/office/powerpoint/2010/main" xmlns:com="http://schemas.openxmlformats.org/drawingml/2006/compatibility" xmlns:pvml="urn:schemas-microsoft-com:office:powerpoint" xmlns:v="urn:schemas-microsoft-com:vml" xmlns:o="urn:schemas-microsoft-com:office:office" xmlns:dgm="http://schemas.openxmlformats.org/drawingml/2006/diagram" xmlns:c="http://schemas.openxmlformats.org/drawingml/2006/chart" xmlns:mv="urn:schemas-microsoft-com:mac:vml" xmlns:mc="http://schemas.openxmlformats.org/markup-compatibility/2006" xmlns="" r:id="rId33" roundtripDataSignature="AMtx7mjFyVUGRZWio+dc9dxzYsimUxNJbg=="/>
+      <go:slidesCustomData xmlns:go="http://customooxmlschemas.google.com/" xmlns:p15="http://schemas.microsoft.com/office/powerpoint/2012/main" xmlns:p14="http://schemas.microsoft.com/office/powerpoint/2010/main" xmlns:com="http://schemas.openxmlformats.org/drawingml/2006/compatibility" xmlns:pvml="urn:schemas-microsoft-com:office:powerpoint" xmlns:v="urn:schemas-microsoft-com:vml" xmlns:o="urn:schemas-microsoft-com:office:office" xmlns:dgm="http://schemas.openxmlformats.org/drawingml/2006/diagram" xmlns:c="http://schemas.openxmlformats.org/drawingml/2006/chart" xmlns:mv="urn:schemas-microsoft-com:mac:vml" xmlns:mc="http://schemas.openxmlformats.org/markup-compatibility/2006" xmlns="" r:id="rId44" roundtripDataSignature="AMtx7mjFyVUGRZWio+dc9dxzYsimUxNJbg=="/>
     </p:ext>
   </p:extLst>
 </p:presentation>
@@ -6583,6 +6596,302 @@
 </p:notes>
 </file>
 
+<file path=ppt/notesSlides/notesSlide10.xml><?xml version="1.0" encoding="utf-8"?>
+<p:notes xmlns:a="http://schemas.openxmlformats.org/drawingml/2006/main" xmlns:r="http://schemas.openxmlformats.org/officeDocument/2006/relationships" xmlns:p="http://schemas.openxmlformats.org/presentationml/2006/main">
+  <p:cSld>
+    <p:spTree>
+      <p:nvGrpSpPr>
+        <p:cNvPr id="1" name=""/>
+        <p:cNvGrpSpPr/>
+        <p:nvPr/>
+      </p:nvGrpSpPr>
+      <p:grpSpPr>
+        <a:xfrm>
+          <a:off x="0" y="0"/>
+          <a:ext cx="0" cy="0"/>
+          <a:chOff x="0" y="0"/>
+          <a:chExt cx="0" cy="0"/>
+        </a:xfrm>
+      </p:grpSpPr>
+      <p:sp>
+        <p:nvSpPr>
+          <p:cNvPr id="2" name="Slide Image Placeholder 1"/>
+          <p:cNvSpPr>
+            <a:spLocks noGrp="1" noRot="1" noChangeAspect="1"/>
+          </p:cNvSpPr>
+          <p:nvPr>
+            <p:ph type="sldImg"/>
+          </p:nvPr>
+        </p:nvSpPr>
+        <p:spPr/>
+      </p:sp>
+      <p:sp>
+        <p:nvSpPr>
+          <p:cNvPr id="3" name="Notes Placeholder 2"/>
+          <p:cNvSpPr>
+            <a:spLocks noGrp="1"/>
+          </p:cNvSpPr>
+          <p:nvPr>
+            <p:ph type="body" idx="1"/>
+          </p:nvPr>
+        </p:nvSpPr>
+        <p:spPr/>
+        <p:txBody>
+          <a:bodyPr/>
+          <a:lstStyle/>
+          <a:p>
+            <a:r>
+              <a:rPr lang="en-US" dirty="0"/>
+              <a:t>New data collection for causa </a:t>
+            </a:r>
+            <a:r>
+              <a:rPr lang="en-US" dirty="0" err="1"/>
+              <a:t>leffects</a:t>
+            </a:r>
+            <a:r>
+              <a:rPr lang="en-US" dirty="0"/>
+              <a:t>?</a:t>
+            </a:r>
+          </a:p>
+        </p:txBody>
+      </p:sp>
+      <p:sp>
+        <p:nvSpPr>
+          <p:cNvPr id="4" name="Slide Number Placeholder 3"/>
+          <p:cNvSpPr>
+            <a:spLocks noGrp="1"/>
+          </p:cNvSpPr>
+          <p:nvPr>
+            <p:ph type="sldNum" idx="12"/>
+          </p:nvPr>
+        </p:nvSpPr>
+        <p:spPr/>
+        <p:txBody>
+          <a:bodyPr/>
+          <a:lstStyle/>
+          <a:p>
+            <a:pPr marL="0" marR="0" lvl="0" indent="0" algn="r" rtl="0">
+              <a:spcBef>
+                <a:spcPts val="0"/>
+              </a:spcBef>
+              <a:spcAft>
+                <a:spcPts val="0"/>
+              </a:spcAft>
+              <a:buNone/>
+            </a:pPr>
+            <a:fld id="{00000000-1234-1234-1234-123412341234}" type="slidenum">
+              <a:rPr lang="en-US" sz="1200" b="0" i="0" u="none" strike="noStrike" cap="none" smtClean="0">
+                <a:solidFill>
+                  <a:schemeClr val="dk1"/>
+                </a:solidFill>
+                <a:latin typeface="Calibri"/>
+                <a:ea typeface="Calibri"/>
+                <a:cs typeface="Calibri"/>
+                <a:sym typeface="Calibri"/>
+              </a:rPr>
+              <a:t>19</a:t>
+            </a:fld>
+            <a:endParaRPr lang="en-US" sz="1200" b="0" i="0" u="none" strike="noStrike" cap="none">
+              <a:solidFill>
+                <a:schemeClr val="dk1"/>
+              </a:solidFill>
+              <a:latin typeface="Calibri"/>
+              <a:ea typeface="Calibri"/>
+              <a:cs typeface="Calibri"/>
+              <a:sym typeface="Calibri"/>
+            </a:endParaRPr>
+          </a:p>
+        </p:txBody>
+      </p:sp>
+    </p:spTree>
+    <p:extLst>
+      <p:ext uri="{BB962C8B-B14F-4D97-AF65-F5344CB8AC3E}">
+        <p14:creationId xmlns:p14="http://schemas.microsoft.com/office/powerpoint/2010/main" val="3665120991"/>
+      </p:ext>
+    </p:extLst>
+  </p:cSld>
+  <p:clrMapOvr>
+    <a:masterClrMapping/>
+  </p:clrMapOvr>
+</p:notes>
+</file>
+
+<file path=ppt/notesSlides/notesSlide11.xml><?xml version="1.0" encoding="utf-8"?>
+<p:notes xmlns:a="http://schemas.openxmlformats.org/drawingml/2006/main" xmlns:r="http://schemas.openxmlformats.org/officeDocument/2006/relationships" xmlns:p="http://schemas.openxmlformats.org/presentationml/2006/main" showMasterSp="0" showMasterPhAnim="0">
+  <p:cSld>
+    <p:spTree>
+      <p:nvGrpSpPr>
+        <p:cNvPr id="1" name="Shape 581"/>
+        <p:cNvGrpSpPr/>
+        <p:nvPr/>
+      </p:nvGrpSpPr>
+      <p:grpSpPr>
+        <a:xfrm>
+          <a:off x="0" y="0"/>
+          <a:ext cx="0" cy="0"/>
+          <a:chOff x="0" y="0"/>
+          <a:chExt cx="0" cy="0"/>
+        </a:xfrm>
+      </p:grpSpPr>
+      <p:sp>
+        <p:nvSpPr>
+          <p:cNvPr id="582" name="Google Shape;582;g32d3355825c_1_46:notes"/>
+          <p:cNvSpPr>
+            <a:spLocks noGrp="1" noRot="1" noChangeAspect="1"/>
+          </p:cNvSpPr>
+          <p:nvPr>
+            <p:ph type="sldImg" idx="2"/>
+          </p:nvPr>
+        </p:nvSpPr>
+        <p:spPr>
+          <a:xfrm>
+            <a:off x="381000" y="685800"/>
+            <a:ext cx="6096000" cy="3429000"/>
+          </a:xfrm>
+          <a:custGeom>
+            <a:avLst/>
+            <a:gdLst/>
+            <a:ahLst/>
+            <a:cxnLst/>
+            <a:rect l="l" t="t" r="r" b="b"/>
+            <a:pathLst>
+              <a:path w="120000" h="120000" extrusionOk="0">
+                <a:moveTo>
+                  <a:pt x="0" y="0"/>
+                </a:moveTo>
+                <a:lnTo>
+                  <a:pt x="120000" y="0"/>
+                </a:lnTo>
+                <a:lnTo>
+                  <a:pt x="120000" y="120000"/>
+                </a:lnTo>
+                <a:lnTo>
+                  <a:pt x="0" y="120000"/>
+                </a:lnTo>
+                <a:close/>
+              </a:path>
+            </a:pathLst>
+          </a:custGeom>
+          <a:noFill/>
+          <a:ln w="12700" cap="flat" cmpd="sng">
+            <a:solidFill>
+              <a:srgbClr val="000000"/>
+            </a:solidFill>
+            <a:prstDash val="solid"/>
+            <a:round/>
+            <a:headEnd type="none" w="sm" len="sm"/>
+            <a:tailEnd type="none" w="sm" len="sm"/>
+          </a:ln>
+        </p:spPr>
+      </p:sp>
+      <p:sp>
+        <p:nvSpPr>
+          <p:cNvPr id="583" name="Google Shape;583;g32d3355825c_1_46:notes"/>
+          <p:cNvSpPr txBox="1">
+            <a:spLocks noGrp="1"/>
+          </p:cNvSpPr>
+          <p:nvPr>
+            <p:ph type="body" idx="1"/>
+          </p:nvPr>
+        </p:nvSpPr>
+        <p:spPr>
+          <a:xfrm>
+            <a:off x="685800" y="4343400"/>
+            <a:ext cx="5486400" cy="4114800"/>
+          </a:xfrm>
+          <a:prstGeom prst="rect">
+            <a:avLst/>
+          </a:prstGeom>
+          <a:noFill/>
+          <a:ln>
+            <a:noFill/>
+          </a:ln>
+        </p:spPr>
+        <p:txBody>
+          <a:bodyPr spcFirstLastPara="1" wrap="square" lIns="91425" tIns="45700" rIns="91425" bIns="45700" anchor="t" anchorCtr="0">
+            <a:noAutofit/>
+          </a:bodyPr>
+          <a:lstStyle/>
+          <a:p>
+            <a:pPr marL="0" lvl="0" indent="0" algn="l" rtl="0">
+              <a:lnSpc>
+                <a:spcPct val="100000"/>
+              </a:lnSpc>
+              <a:spcBef>
+                <a:spcPts val="360"/>
+              </a:spcBef>
+              <a:spcAft>
+                <a:spcPts val="0"/>
+              </a:spcAft>
+              <a:buSzPts val="1400"/>
+              <a:buNone/>
+            </a:pPr>
+            <a:endParaRPr/>
+          </a:p>
+        </p:txBody>
+      </p:sp>
+      <p:sp>
+        <p:nvSpPr>
+          <p:cNvPr id="584" name="Google Shape;584;g32d3355825c_1_46:notes"/>
+          <p:cNvSpPr txBox="1">
+            <a:spLocks noGrp="1"/>
+          </p:cNvSpPr>
+          <p:nvPr>
+            <p:ph type="sldNum" idx="12"/>
+          </p:nvPr>
+        </p:nvSpPr>
+        <p:spPr>
+          <a:xfrm>
+            <a:off x="3884613" y="8685213"/>
+            <a:ext cx="2971800" cy="457200"/>
+          </a:xfrm>
+          <a:prstGeom prst="rect">
+            <a:avLst/>
+          </a:prstGeom>
+          <a:noFill/>
+          <a:ln>
+            <a:noFill/>
+          </a:ln>
+        </p:spPr>
+        <p:txBody>
+          <a:bodyPr spcFirstLastPara="1" wrap="square" lIns="91425" tIns="45700" rIns="91425" bIns="45700" anchor="b" anchorCtr="0">
+            <a:noAutofit/>
+          </a:bodyPr>
+          <a:lstStyle/>
+          <a:p>
+            <a:pPr marL="0" lvl="0" indent="0" algn="r" rtl="0">
+              <a:lnSpc>
+                <a:spcPct val="100000"/>
+              </a:lnSpc>
+              <a:spcBef>
+                <a:spcPts val="0"/>
+              </a:spcBef>
+              <a:spcAft>
+                <a:spcPts val="0"/>
+              </a:spcAft>
+              <a:buClr>
+                <a:srgbClr val="000000"/>
+              </a:buClr>
+              <a:buSzPts val="1200"/>
+              <a:buFont typeface="Arial"/>
+              <a:buNone/>
+            </a:pPr>
+            <a:fld id="{00000000-1234-1234-1234-123412341234}" type="slidenum">
+              <a:rPr lang="en-US"/>
+              <a:t>20</a:t>
+            </a:fld>
+            <a:endParaRPr/>
+          </a:p>
+        </p:txBody>
+      </p:sp>
+    </p:spTree>
+  </p:cSld>
+  <p:clrMapOvr>
+    <a:masterClrMapping/>
+  </p:clrMapOvr>
+</p:notes>
+</file>
+
 <file path=ppt/notesSlides/notesSlide2.xml><?xml version="1.0" encoding="utf-8"?>
 <p:notes xmlns:a="http://schemas.openxmlformats.org/drawingml/2006/main" xmlns:r="http://schemas.openxmlformats.org/officeDocument/2006/relationships" xmlns:p="http://schemas.openxmlformats.org/presentationml/2006/main" showMasterSp="0" showMasterPhAnim="0">
   <p:cSld>
@@ -6687,6 +6996,1356 @@
 </p:notes>
 </file>
 
+<file path=ppt/notesSlides/notesSlide3.xml><?xml version="1.0" encoding="utf-8"?>
+<p:notes xmlns:a="http://schemas.openxmlformats.org/drawingml/2006/main" xmlns:r="http://schemas.openxmlformats.org/officeDocument/2006/relationships" xmlns:p="http://schemas.openxmlformats.org/presentationml/2006/main" showMasterSp="0" showMasterPhAnim="0">
+  <p:cSld>
+    <p:spTree>
+      <p:nvGrpSpPr>
+        <p:cNvPr id="1" name="Shape 498"/>
+        <p:cNvGrpSpPr/>
+        <p:nvPr/>
+      </p:nvGrpSpPr>
+      <p:grpSpPr>
+        <a:xfrm>
+          <a:off x="0" y="0"/>
+          <a:ext cx="0" cy="0"/>
+          <a:chOff x="0" y="0"/>
+          <a:chExt cx="0" cy="0"/>
+        </a:xfrm>
+      </p:grpSpPr>
+      <p:sp>
+        <p:nvSpPr>
+          <p:cNvPr id="499" name="Google Shape;499;g32cbaf05b3f_0_70:notes"/>
+          <p:cNvSpPr>
+            <a:spLocks noGrp="1" noRot="1" noChangeAspect="1"/>
+          </p:cNvSpPr>
+          <p:nvPr>
+            <p:ph type="sldImg" idx="2"/>
+          </p:nvPr>
+        </p:nvSpPr>
+        <p:spPr>
+          <a:xfrm>
+            <a:off x="381000" y="685800"/>
+            <a:ext cx="6096000" cy="3429000"/>
+          </a:xfrm>
+          <a:custGeom>
+            <a:avLst/>
+            <a:gdLst/>
+            <a:ahLst/>
+            <a:cxnLst/>
+            <a:rect l="l" t="t" r="r" b="b"/>
+            <a:pathLst>
+              <a:path w="120000" h="120000" extrusionOk="0">
+                <a:moveTo>
+                  <a:pt x="0" y="0"/>
+                </a:moveTo>
+                <a:lnTo>
+                  <a:pt x="120000" y="0"/>
+                </a:lnTo>
+                <a:lnTo>
+                  <a:pt x="120000" y="120000"/>
+                </a:lnTo>
+                <a:lnTo>
+                  <a:pt x="0" y="120000"/>
+                </a:lnTo>
+                <a:close/>
+              </a:path>
+            </a:pathLst>
+          </a:custGeom>
+          <a:noFill/>
+          <a:ln w="12700" cap="flat" cmpd="sng">
+            <a:solidFill>
+              <a:srgbClr val="000000"/>
+            </a:solidFill>
+            <a:prstDash val="solid"/>
+            <a:round/>
+            <a:headEnd type="none" w="sm" len="sm"/>
+            <a:tailEnd type="none" w="sm" len="sm"/>
+          </a:ln>
+        </p:spPr>
+      </p:sp>
+      <p:sp>
+        <p:nvSpPr>
+          <p:cNvPr id="500" name="Google Shape;500;g32cbaf05b3f_0_70:notes"/>
+          <p:cNvSpPr txBox="1">
+            <a:spLocks noGrp="1"/>
+          </p:cNvSpPr>
+          <p:nvPr>
+            <p:ph type="body" idx="1"/>
+          </p:nvPr>
+        </p:nvSpPr>
+        <p:spPr>
+          <a:xfrm>
+            <a:off x="685800" y="4343400"/>
+            <a:ext cx="5486400" cy="4114800"/>
+          </a:xfrm>
+          <a:prstGeom prst="rect">
+            <a:avLst/>
+          </a:prstGeom>
+          <a:noFill/>
+          <a:ln>
+            <a:noFill/>
+          </a:ln>
+        </p:spPr>
+        <p:txBody>
+          <a:bodyPr spcFirstLastPara="1" wrap="square" lIns="91425" tIns="45700" rIns="91425" bIns="45700" anchor="t" anchorCtr="0">
+            <a:noAutofit/>
+          </a:bodyPr>
+          <a:lstStyle/>
+          <a:p>
+            <a:pPr marL="0" lvl="0" indent="0" algn="l" rtl="0">
+              <a:lnSpc>
+                <a:spcPct val="100000"/>
+              </a:lnSpc>
+              <a:spcBef>
+                <a:spcPts val="360"/>
+              </a:spcBef>
+              <a:spcAft>
+                <a:spcPts val="0"/>
+              </a:spcAft>
+              <a:buSzPts val="1400"/>
+              <a:buNone/>
+            </a:pPr>
+            <a:endParaRPr/>
+          </a:p>
+        </p:txBody>
+      </p:sp>
+      <p:sp>
+        <p:nvSpPr>
+          <p:cNvPr id="501" name="Google Shape;501;g32cbaf05b3f_0_70:notes"/>
+          <p:cNvSpPr txBox="1">
+            <a:spLocks noGrp="1"/>
+          </p:cNvSpPr>
+          <p:nvPr>
+            <p:ph type="sldNum" idx="12"/>
+          </p:nvPr>
+        </p:nvSpPr>
+        <p:spPr>
+          <a:xfrm>
+            <a:off x="3884613" y="8685213"/>
+            <a:ext cx="2971800" cy="457200"/>
+          </a:xfrm>
+          <a:prstGeom prst="rect">
+            <a:avLst/>
+          </a:prstGeom>
+          <a:noFill/>
+          <a:ln>
+            <a:noFill/>
+          </a:ln>
+        </p:spPr>
+        <p:txBody>
+          <a:bodyPr spcFirstLastPara="1" wrap="square" lIns="91425" tIns="45700" rIns="91425" bIns="45700" anchor="b" anchorCtr="0">
+            <a:noAutofit/>
+          </a:bodyPr>
+          <a:lstStyle/>
+          <a:p>
+            <a:pPr marL="0" lvl="0" indent="0" algn="r" rtl="0">
+              <a:lnSpc>
+                <a:spcPct val="100000"/>
+              </a:lnSpc>
+              <a:spcBef>
+                <a:spcPts val="0"/>
+              </a:spcBef>
+              <a:spcAft>
+                <a:spcPts val="0"/>
+              </a:spcAft>
+              <a:buClr>
+                <a:srgbClr val="000000"/>
+              </a:buClr>
+              <a:buSzPts val="1200"/>
+              <a:buFont typeface="Arial"/>
+              <a:buNone/>
+            </a:pPr>
+            <a:fld id="{00000000-1234-1234-1234-123412341234}" type="slidenum">
+              <a:rPr lang="en-US"/>
+              <a:t>7</a:t>
+            </a:fld>
+            <a:endParaRPr/>
+          </a:p>
+        </p:txBody>
+      </p:sp>
+    </p:spTree>
+  </p:cSld>
+  <p:clrMapOvr>
+    <a:masterClrMapping/>
+  </p:clrMapOvr>
+</p:notes>
+</file>
+
+<file path=ppt/notesSlides/notesSlide4.xml><?xml version="1.0" encoding="utf-8"?>
+<p:notes xmlns:a="http://schemas.openxmlformats.org/drawingml/2006/main" xmlns:r="http://schemas.openxmlformats.org/officeDocument/2006/relationships" xmlns:p="http://schemas.openxmlformats.org/presentationml/2006/main" showMasterSp="0" showMasterPhAnim="0">
+  <p:cSld>
+    <p:spTree>
+      <p:nvGrpSpPr>
+        <p:cNvPr id="1" name="Shape 498">
+          <a:extLst>
+            <a:ext uri="{FF2B5EF4-FFF2-40B4-BE49-F238E27FC236}">
+              <a16:creationId xmlns:a16="http://schemas.microsoft.com/office/drawing/2014/main" id="{71D8EA42-F480-3D7A-5E2E-764D285455B1}"/>
+            </a:ext>
+          </a:extLst>
+        </p:cNvPr>
+        <p:cNvGrpSpPr/>
+        <p:nvPr/>
+      </p:nvGrpSpPr>
+      <p:grpSpPr>
+        <a:xfrm>
+          <a:off x="0" y="0"/>
+          <a:ext cx="0" cy="0"/>
+          <a:chOff x="0" y="0"/>
+          <a:chExt cx="0" cy="0"/>
+        </a:xfrm>
+      </p:grpSpPr>
+      <p:sp>
+        <p:nvSpPr>
+          <p:cNvPr id="499" name="Google Shape;499;g32cbaf05b3f_0_70:notes">
+            <a:extLst>
+              <a:ext uri="{FF2B5EF4-FFF2-40B4-BE49-F238E27FC236}">
+                <a16:creationId xmlns:a16="http://schemas.microsoft.com/office/drawing/2014/main" id="{247124CE-C8D5-4ADB-5C2B-DEBE4BE35569}"/>
+              </a:ext>
+            </a:extLst>
+          </p:cNvPr>
+          <p:cNvSpPr>
+            <a:spLocks noGrp="1" noRot="1" noChangeAspect="1"/>
+          </p:cNvSpPr>
+          <p:nvPr>
+            <p:ph type="sldImg" idx="2"/>
+          </p:nvPr>
+        </p:nvSpPr>
+        <p:spPr>
+          <a:xfrm>
+            <a:off x="381000" y="685800"/>
+            <a:ext cx="6096000" cy="3429000"/>
+          </a:xfrm>
+          <a:custGeom>
+            <a:avLst/>
+            <a:gdLst/>
+            <a:ahLst/>
+            <a:cxnLst/>
+            <a:rect l="l" t="t" r="r" b="b"/>
+            <a:pathLst>
+              <a:path w="120000" h="120000" extrusionOk="0">
+                <a:moveTo>
+                  <a:pt x="0" y="0"/>
+                </a:moveTo>
+                <a:lnTo>
+                  <a:pt x="120000" y="0"/>
+                </a:lnTo>
+                <a:lnTo>
+                  <a:pt x="120000" y="120000"/>
+                </a:lnTo>
+                <a:lnTo>
+                  <a:pt x="0" y="120000"/>
+                </a:lnTo>
+                <a:close/>
+              </a:path>
+            </a:pathLst>
+          </a:custGeom>
+          <a:noFill/>
+          <a:ln w="12700" cap="flat" cmpd="sng">
+            <a:solidFill>
+              <a:srgbClr val="000000"/>
+            </a:solidFill>
+            <a:prstDash val="solid"/>
+            <a:round/>
+            <a:headEnd type="none" w="sm" len="sm"/>
+            <a:tailEnd type="none" w="sm" len="sm"/>
+          </a:ln>
+        </p:spPr>
+      </p:sp>
+      <p:sp>
+        <p:nvSpPr>
+          <p:cNvPr id="500" name="Google Shape;500;g32cbaf05b3f_0_70:notes">
+            <a:extLst>
+              <a:ext uri="{FF2B5EF4-FFF2-40B4-BE49-F238E27FC236}">
+                <a16:creationId xmlns:a16="http://schemas.microsoft.com/office/drawing/2014/main" id="{D97A67A3-5058-63A9-C39F-74A0E7ABB377}"/>
+              </a:ext>
+            </a:extLst>
+          </p:cNvPr>
+          <p:cNvSpPr txBox="1">
+            <a:spLocks noGrp="1"/>
+          </p:cNvSpPr>
+          <p:nvPr>
+            <p:ph type="body" idx="1"/>
+          </p:nvPr>
+        </p:nvSpPr>
+        <p:spPr>
+          <a:xfrm>
+            <a:off x="685800" y="4343400"/>
+            <a:ext cx="5486400" cy="4114800"/>
+          </a:xfrm>
+          <a:prstGeom prst="rect">
+            <a:avLst/>
+          </a:prstGeom>
+          <a:noFill/>
+          <a:ln>
+            <a:noFill/>
+          </a:ln>
+        </p:spPr>
+        <p:txBody>
+          <a:bodyPr spcFirstLastPara="1" wrap="square" lIns="91425" tIns="45700" rIns="91425" bIns="45700" anchor="t" anchorCtr="0">
+            <a:noAutofit/>
+          </a:bodyPr>
+          <a:lstStyle/>
+          <a:p>
+            <a:pPr marL="0" lvl="0" indent="0" algn="l" rtl="0">
+              <a:lnSpc>
+                <a:spcPct val="100000"/>
+              </a:lnSpc>
+              <a:spcBef>
+                <a:spcPts val="360"/>
+              </a:spcBef>
+              <a:spcAft>
+                <a:spcPts val="0"/>
+              </a:spcAft>
+              <a:buSzPts val="1400"/>
+              <a:buNone/>
+            </a:pPr>
+            <a:endParaRPr/>
+          </a:p>
+        </p:txBody>
+      </p:sp>
+      <p:sp>
+        <p:nvSpPr>
+          <p:cNvPr id="501" name="Google Shape;501;g32cbaf05b3f_0_70:notes">
+            <a:extLst>
+              <a:ext uri="{FF2B5EF4-FFF2-40B4-BE49-F238E27FC236}">
+                <a16:creationId xmlns:a16="http://schemas.microsoft.com/office/drawing/2014/main" id="{8C9BAEBB-9138-1C8E-21E6-373F50BA59E9}"/>
+              </a:ext>
+            </a:extLst>
+          </p:cNvPr>
+          <p:cNvSpPr txBox="1">
+            <a:spLocks noGrp="1"/>
+          </p:cNvSpPr>
+          <p:nvPr>
+            <p:ph type="sldNum" idx="12"/>
+          </p:nvPr>
+        </p:nvSpPr>
+        <p:spPr>
+          <a:xfrm>
+            <a:off x="3884613" y="8685213"/>
+            <a:ext cx="2971800" cy="457200"/>
+          </a:xfrm>
+          <a:prstGeom prst="rect">
+            <a:avLst/>
+          </a:prstGeom>
+          <a:noFill/>
+          <a:ln>
+            <a:noFill/>
+          </a:ln>
+        </p:spPr>
+        <p:txBody>
+          <a:bodyPr spcFirstLastPara="1" wrap="square" lIns="91425" tIns="45700" rIns="91425" bIns="45700" anchor="b" anchorCtr="0">
+            <a:noAutofit/>
+          </a:bodyPr>
+          <a:lstStyle/>
+          <a:p>
+            <a:pPr marL="0" lvl="0" indent="0" algn="r" rtl="0">
+              <a:lnSpc>
+                <a:spcPct val="100000"/>
+              </a:lnSpc>
+              <a:spcBef>
+                <a:spcPts val="0"/>
+              </a:spcBef>
+              <a:spcAft>
+                <a:spcPts val="0"/>
+              </a:spcAft>
+              <a:buClr>
+                <a:srgbClr val="000000"/>
+              </a:buClr>
+              <a:buSzPts val="1200"/>
+              <a:buFont typeface="Arial"/>
+              <a:buNone/>
+            </a:pPr>
+            <a:fld id="{00000000-1234-1234-1234-123412341234}" type="slidenum">
+              <a:rPr lang="en-US"/>
+              <a:t>9</a:t>
+            </a:fld>
+            <a:endParaRPr/>
+          </a:p>
+        </p:txBody>
+      </p:sp>
+    </p:spTree>
+    <p:extLst>
+      <p:ext uri="{BB962C8B-B14F-4D97-AF65-F5344CB8AC3E}">
+        <p14:creationId xmlns:p14="http://schemas.microsoft.com/office/powerpoint/2010/main" val="842474360"/>
+      </p:ext>
+    </p:extLst>
+  </p:cSld>
+  <p:clrMapOvr>
+    <a:masterClrMapping/>
+  </p:clrMapOvr>
+</p:notes>
+</file>
+
+<file path=ppt/notesSlides/notesSlide5.xml><?xml version="1.0" encoding="utf-8"?>
+<p:notes xmlns:a="http://schemas.openxmlformats.org/drawingml/2006/main" xmlns:r="http://schemas.openxmlformats.org/officeDocument/2006/relationships" xmlns:p="http://schemas.openxmlformats.org/presentationml/2006/main" showMasterSp="0" showMasterPhAnim="0">
+  <p:cSld>
+    <p:spTree>
+      <p:nvGrpSpPr>
+        <p:cNvPr id="1" name="Shape 506"/>
+        <p:cNvGrpSpPr/>
+        <p:nvPr/>
+      </p:nvGrpSpPr>
+      <p:grpSpPr>
+        <a:xfrm>
+          <a:off x="0" y="0"/>
+          <a:ext cx="0" cy="0"/>
+          <a:chOff x="0" y="0"/>
+          <a:chExt cx="0" cy="0"/>
+        </a:xfrm>
+      </p:grpSpPr>
+      <p:sp>
+        <p:nvSpPr>
+          <p:cNvPr id="507" name="Google Shape;507;g32cbaf05b3f_0_56:notes"/>
+          <p:cNvSpPr>
+            <a:spLocks noGrp="1" noRot="1" noChangeAspect="1"/>
+          </p:cNvSpPr>
+          <p:nvPr>
+            <p:ph type="sldImg" idx="2"/>
+          </p:nvPr>
+        </p:nvSpPr>
+        <p:spPr>
+          <a:xfrm>
+            <a:off x="381000" y="685800"/>
+            <a:ext cx="6096000" cy="3429000"/>
+          </a:xfrm>
+          <a:custGeom>
+            <a:avLst/>
+            <a:gdLst/>
+            <a:ahLst/>
+            <a:cxnLst/>
+            <a:rect l="l" t="t" r="r" b="b"/>
+            <a:pathLst>
+              <a:path w="120000" h="120000" extrusionOk="0">
+                <a:moveTo>
+                  <a:pt x="0" y="0"/>
+                </a:moveTo>
+                <a:lnTo>
+                  <a:pt x="120000" y="0"/>
+                </a:lnTo>
+                <a:lnTo>
+                  <a:pt x="120000" y="120000"/>
+                </a:lnTo>
+                <a:lnTo>
+                  <a:pt x="0" y="120000"/>
+                </a:lnTo>
+                <a:close/>
+              </a:path>
+            </a:pathLst>
+          </a:custGeom>
+          <a:noFill/>
+          <a:ln w="12700" cap="flat" cmpd="sng">
+            <a:solidFill>
+              <a:srgbClr val="000000"/>
+            </a:solidFill>
+            <a:prstDash val="solid"/>
+            <a:round/>
+            <a:headEnd type="none" w="sm" len="sm"/>
+            <a:tailEnd type="none" w="sm" len="sm"/>
+          </a:ln>
+        </p:spPr>
+      </p:sp>
+      <p:sp>
+        <p:nvSpPr>
+          <p:cNvPr id="508" name="Google Shape;508;g32cbaf05b3f_0_56:notes"/>
+          <p:cNvSpPr txBox="1">
+            <a:spLocks noGrp="1"/>
+          </p:cNvSpPr>
+          <p:nvPr>
+            <p:ph type="body" idx="1"/>
+          </p:nvPr>
+        </p:nvSpPr>
+        <p:spPr>
+          <a:xfrm>
+            <a:off x="685800" y="4343400"/>
+            <a:ext cx="5486400" cy="4114800"/>
+          </a:xfrm>
+          <a:prstGeom prst="rect">
+            <a:avLst/>
+          </a:prstGeom>
+          <a:noFill/>
+          <a:ln>
+            <a:noFill/>
+          </a:ln>
+        </p:spPr>
+        <p:txBody>
+          <a:bodyPr spcFirstLastPara="1" wrap="square" lIns="91425" tIns="45700" rIns="91425" bIns="45700" anchor="t" anchorCtr="0">
+            <a:noAutofit/>
+          </a:bodyPr>
+          <a:lstStyle/>
+          <a:p>
+            <a:pPr marL="0" lvl="0" indent="0" algn="l" rtl="0">
+              <a:lnSpc>
+                <a:spcPct val="100000"/>
+              </a:lnSpc>
+              <a:spcBef>
+                <a:spcPts val="360"/>
+              </a:spcBef>
+              <a:spcAft>
+                <a:spcPts val="0"/>
+              </a:spcAft>
+              <a:buSzPts val="1400"/>
+              <a:buNone/>
+            </a:pPr>
+            <a:r>
+              <a:rPr lang="en-US"/>
+              <a:t>Types of data:</a:t>
+            </a:r>
+            <a:endParaRPr/>
+          </a:p>
+          <a:p>
+            <a:pPr marL="457200" lvl="0" indent="-317500" algn="l" rtl="0">
+              <a:lnSpc>
+                <a:spcPct val="100000"/>
+              </a:lnSpc>
+              <a:spcBef>
+                <a:spcPts val="360"/>
+              </a:spcBef>
+              <a:spcAft>
+                <a:spcPts val="0"/>
+              </a:spcAft>
+              <a:buSzPts val="1400"/>
+              <a:buChar char="●"/>
+            </a:pPr>
+            <a:r>
+              <a:rPr lang="en-US"/>
+              <a:t>Program Level</a:t>
+            </a:r>
+            <a:endParaRPr/>
+          </a:p>
+          <a:p>
+            <a:pPr marL="457200" lvl="0" indent="-317500" algn="l" rtl="0">
+              <a:lnSpc>
+                <a:spcPct val="100000"/>
+              </a:lnSpc>
+              <a:spcBef>
+                <a:spcPts val="0"/>
+              </a:spcBef>
+              <a:spcAft>
+                <a:spcPts val="0"/>
+              </a:spcAft>
+              <a:buSzPts val="1400"/>
+              <a:buChar char="●"/>
+            </a:pPr>
+            <a:r>
+              <a:rPr lang="en-US"/>
+              <a:t>Transactional</a:t>
+            </a:r>
+            <a:endParaRPr/>
+          </a:p>
+          <a:p>
+            <a:pPr marL="457200" lvl="0" indent="-317500" algn="l" rtl="0">
+              <a:lnSpc>
+                <a:spcPct val="100000"/>
+              </a:lnSpc>
+              <a:spcBef>
+                <a:spcPts val="0"/>
+              </a:spcBef>
+              <a:spcAft>
+                <a:spcPts val="0"/>
+              </a:spcAft>
+              <a:buSzPts val="1400"/>
+              <a:buChar char="●"/>
+            </a:pPr>
+            <a:r>
+              <a:rPr lang="en-US"/>
+              <a:t>Spatial</a:t>
+            </a:r>
+            <a:endParaRPr/>
+          </a:p>
+          <a:p>
+            <a:pPr marL="457200" lvl="0" indent="-317500" algn="l" rtl="0">
+              <a:lnSpc>
+                <a:spcPct val="100000"/>
+              </a:lnSpc>
+              <a:spcBef>
+                <a:spcPts val="0"/>
+              </a:spcBef>
+              <a:spcAft>
+                <a:spcPts val="0"/>
+              </a:spcAft>
+              <a:buSzPts val="1400"/>
+              <a:buChar char="●"/>
+            </a:pPr>
+            <a:r>
+              <a:rPr lang="en-US"/>
+              <a:t>Text</a:t>
+            </a:r>
+            <a:endParaRPr/>
+          </a:p>
+          <a:p>
+            <a:pPr marL="457200" lvl="0" indent="-317500" algn="l" rtl="0">
+              <a:lnSpc>
+                <a:spcPct val="100000"/>
+              </a:lnSpc>
+              <a:spcBef>
+                <a:spcPts val="0"/>
+              </a:spcBef>
+              <a:spcAft>
+                <a:spcPts val="0"/>
+              </a:spcAft>
+              <a:buSzPts val="1400"/>
+              <a:buChar char="●"/>
+            </a:pPr>
+            <a:r>
+              <a:rPr lang="en-US"/>
+              <a:t>Images/Audio/Video</a:t>
+            </a:r>
+            <a:endParaRPr/>
+          </a:p>
+          <a:p>
+            <a:pPr marL="0" lvl="0" indent="0" algn="l" rtl="0">
+              <a:lnSpc>
+                <a:spcPct val="100000"/>
+              </a:lnSpc>
+              <a:spcBef>
+                <a:spcPts val="360"/>
+              </a:spcBef>
+              <a:spcAft>
+                <a:spcPts val="0"/>
+              </a:spcAft>
+              <a:buSzPts val="1400"/>
+              <a:buNone/>
+            </a:pPr>
+            <a:endParaRPr/>
+          </a:p>
+        </p:txBody>
+      </p:sp>
+      <p:sp>
+        <p:nvSpPr>
+          <p:cNvPr id="509" name="Google Shape;509;g32cbaf05b3f_0_56:notes"/>
+          <p:cNvSpPr txBox="1">
+            <a:spLocks noGrp="1"/>
+          </p:cNvSpPr>
+          <p:nvPr>
+            <p:ph type="sldNum" idx="12"/>
+          </p:nvPr>
+        </p:nvSpPr>
+        <p:spPr>
+          <a:xfrm>
+            <a:off x="3884613" y="8685213"/>
+            <a:ext cx="2971800" cy="457200"/>
+          </a:xfrm>
+          <a:prstGeom prst="rect">
+            <a:avLst/>
+          </a:prstGeom>
+          <a:noFill/>
+          <a:ln>
+            <a:noFill/>
+          </a:ln>
+        </p:spPr>
+        <p:txBody>
+          <a:bodyPr spcFirstLastPara="1" wrap="square" lIns="91425" tIns="45700" rIns="91425" bIns="45700" anchor="b" anchorCtr="0">
+            <a:noAutofit/>
+          </a:bodyPr>
+          <a:lstStyle/>
+          <a:p>
+            <a:pPr marL="0" lvl="0" indent="0" algn="r" rtl="0">
+              <a:lnSpc>
+                <a:spcPct val="100000"/>
+              </a:lnSpc>
+              <a:spcBef>
+                <a:spcPts val="0"/>
+              </a:spcBef>
+              <a:spcAft>
+                <a:spcPts val="0"/>
+              </a:spcAft>
+              <a:buClr>
+                <a:srgbClr val="000000"/>
+              </a:buClr>
+              <a:buSzPts val="1200"/>
+              <a:buFont typeface="Arial"/>
+              <a:buNone/>
+            </a:pPr>
+            <a:fld id="{00000000-1234-1234-1234-123412341234}" type="slidenum">
+              <a:rPr lang="en-US"/>
+              <a:t>10</a:t>
+            </a:fld>
+            <a:endParaRPr/>
+          </a:p>
+        </p:txBody>
+      </p:sp>
+    </p:spTree>
+  </p:cSld>
+  <p:clrMapOvr>
+    <a:masterClrMapping/>
+  </p:clrMapOvr>
+</p:notes>
+</file>
+
+<file path=ppt/notesSlides/notesSlide6.xml><?xml version="1.0" encoding="utf-8"?>
+<p:notes xmlns:a="http://schemas.openxmlformats.org/drawingml/2006/main" xmlns:r="http://schemas.openxmlformats.org/officeDocument/2006/relationships" xmlns:p="http://schemas.openxmlformats.org/presentationml/2006/main" showMasterSp="0" showMasterPhAnim="0">
+  <p:cSld>
+    <p:spTree>
+      <p:nvGrpSpPr>
+        <p:cNvPr id="1" name="Shape 520"/>
+        <p:cNvGrpSpPr/>
+        <p:nvPr/>
+      </p:nvGrpSpPr>
+      <p:grpSpPr>
+        <a:xfrm>
+          <a:off x="0" y="0"/>
+          <a:ext cx="0" cy="0"/>
+          <a:chOff x="0" y="0"/>
+          <a:chExt cx="0" cy="0"/>
+        </a:xfrm>
+      </p:grpSpPr>
+      <p:sp>
+        <p:nvSpPr>
+          <p:cNvPr id="521" name="Google Shape;521;g32f73e32acf_0_0:notes"/>
+          <p:cNvSpPr>
+            <a:spLocks noGrp="1" noRot="1" noChangeAspect="1"/>
+          </p:cNvSpPr>
+          <p:nvPr>
+            <p:ph type="sldImg" idx="2"/>
+          </p:nvPr>
+        </p:nvSpPr>
+        <p:spPr>
+          <a:xfrm>
+            <a:off x="381000" y="685800"/>
+            <a:ext cx="6096000" cy="3429000"/>
+          </a:xfrm>
+          <a:custGeom>
+            <a:avLst/>
+            <a:gdLst/>
+            <a:ahLst/>
+            <a:cxnLst/>
+            <a:rect l="l" t="t" r="r" b="b"/>
+            <a:pathLst>
+              <a:path w="120000" h="120000" extrusionOk="0">
+                <a:moveTo>
+                  <a:pt x="0" y="0"/>
+                </a:moveTo>
+                <a:lnTo>
+                  <a:pt x="120000" y="0"/>
+                </a:lnTo>
+                <a:lnTo>
+                  <a:pt x="120000" y="120000"/>
+                </a:lnTo>
+                <a:lnTo>
+                  <a:pt x="0" y="120000"/>
+                </a:lnTo>
+                <a:close/>
+              </a:path>
+            </a:pathLst>
+          </a:custGeom>
+          <a:noFill/>
+          <a:ln w="12700" cap="flat" cmpd="sng">
+            <a:solidFill>
+              <a:srgbClr val="000000"/>
+            </a:solidFill>
+            <a:prstDash val="solid"/>
+            <a:round/>
+            <a:headEnd type="none" w="sm" len="sm"/>
+            <a:tailEnd type="none" w="sm" len="sm"/>
+          </a:ln>
+        </p:spPr>
+      </p:sp>
+      <p:sp>
+        <p:nvSpPr>
+          <p:cNvPr id="522" name="Google Shape;522;g32f73e32acf_0_0:notes"/>
+          <p:cNvSpPr txBox="1">
+            <a:spLocks noGrp="1"/>
+          </p:cNvSpPr>
+          <p:nvPr>
+            <p:ph type="body" idx="1"/>
+          </p:nvPr>
+        </p:nvSpPr>
+        <p:spPr>
+          <a:xfrm>
+            <a:off x="685800" y="4343400"/>
+            <a:ext cx="5486400" cy="4114800"/>
+          </a:xfrm>
+          <a:prstGeom prst="rect">
+            <a:avLst/>
+          </a:prstGeom>
+          <a:noFill/>
+          <a:ln>
+            <a:noFill/>
+          </a:ln>
+        </p:spPr>
+        <p:txBody>
+          <a:bodyPr spcFirstLastPara="1" wrap="square" lIns="91425" tIns="45700" rIns="91425" bIns="45700" anchor="t" anchorCtr="0">
+            <a:noAutofit/>
+          </a:bodyPr>
+          <a:lstStyle/>
+          <a:p>
+            <a:pPr marL="0" lvl="0" indent="0" algn="l" rtl="0">
+              <a:lnSpc>
+                <a:spcPct val="100000"/>
+              </a:lnSpc>
+              <a:spcBef>
+                <a:spcPts val="360"/>
+              </a:spcBef>
+              <a:spcAft>
+                <a:spcPts val="0"/>
+              </a:spcAft>
+              <a:buSzPts val="1400"/>
+              <a:buNone/>
+            </a:pPr>
+            <a:endParaRPr/>
+          </a:p>
+        </p:txBody>
+      </p:sp>
+      <p:sp>
+        <p:nvSpPr>
+          <p:cNvPr id="523" name="Google Shape;523;g32f73e32acf_0_0:notes"/>
+          <p:cNvSpPr txBox="1">
+            <a:spLocks noGrp="1"/>
+          </p:cNvSpPr>
+          <p:nvPr>
+            <p:ph type="sldNum" idx="12"/>
+          </p:nvPr>
+        </p:nvSpPr>
+        <p:spPr>
+          <a:xfrm>
+            <a:off x="3884613" y="8685213"/>
+            <a:ext cx="2971800" cy="457200"/>
+          </a:xfrm>
+          <a:prstGeom prst="rect">
+            <a:avLst/>
+          </a:prstGeom>
+          <a:noFill/>
+          <a:ln>
+            <a:noFill/>
+          </a:ln>
+        </p:spPr>
+        <p:txBody>
+          <a:bodyPr spcFirstLastPara="1" wrap="square" lIns="91425" tIns="45700" rIns="91425" bIns="45700" anchor="b" anchorCtr="0">
+            <a:noAutofit/>
+          </a:bodyPr>
+          <a:lstStyle/>
+          <a:p>
+            <a:pPr marL="0" lvl="0" indent="0" algn="r" rtl="0">
+              <a:lnSpc>
+                <a:spcPct val="100000"/>
+              </a:lnSpc>
+              <a:spcBef>
+                <a:spcPts val="0"/>
+              </a:spcBef>
+              <a:spcAft>
+                <a:spcPts val="0"/>
+              </a:spcAft>
+              <a:buClr>
+                <a:srgbClr val="000000"/>
+              </a:buClr>
+              <a:buSzPts val="1200"/>
+              <a:buFont typeface="Arial"/>
+              <a:buNone/>
+            </a:pPr>
+            <a:fld id="{00000000-1234-1234-1234-123412341234}" type="slidenum">
+              <a:rPr lang="en-US"/>
+              <a:t>11</a:t>
+            </a:fld>
+            <a:endParaRPr/>
+          </a:p>
+        </p:txBody>
+      </p:sp>
+    </p:spTree>
+  </p:cSld>
+  <p:clrMapOvr>
+    <a:masterClrMapping/>
+  </p:clrMapOvr>
+</p:notes>
+</file>
+
+<file path=ppt/notesSlides/notesSlide7.xml><?xml version="1.0" encoding="utf-8"?>
+<p:notes xmlns:a="http://schemas.openxmlformats.org/drawingml/2006/main" xmlns:r="http://schemas.openxmlformats.org/officeDocument/2006/relationships" xmlns:p="http://schemas.openxmlformats.org/presentationml/2006/main" showMasterSp="0" showMasterPhAnim="0">
+  <p:cSld>
+    <p:spTree>
+      <p:nvGrpSpPr>
+        <p:cNvPr id="1" name="Shape 530"/>
+        <p:cNvGrpSpPr/>
+        <p:nvPr/>
+      </p:nvGrpSpPr>
+      <p:grpSpPr>
+        <a:xfrm>
+          <a:off x="0" y="0"/>
+          <a:ext cx="0" cy="0"/>
+          <a:chOff x="0" y="0"/>
+          <a:chExt cx="0" cy="0"/>
+        </a:xfrm>
+      </p:grpSpPr>
+      <p:sp>
+        <p:nvSpPr>
+          <p:cNvPr id="531" name="Google Shape;531;g32d3355825c_1_0:notes"/>
+          <p:cNvSpPr>
+            <a:spLocks noGrp="1" noRot="1" noChangeAspect="1"/>
+          </p:cNvSpPr>
+          <p:nvPr>
+            <p:ph type="sldImg" idx="2"/>
+          </p:nvPr>
+        </p:nvSpPr>
+        <p:spPr>
+          <a:xfrm>
+            <a:off x="381000" y="685800"/>
+            <a:ext cx="6096000" cy="3429000"/>
+          </a:xfrm>
+          <a:custGeom>
+            <a:avLst/>
+            <a:gdLst/>
+            <a:ahLst/>
+            <a:cxnLst/>
+            <a:rect l="l" t="t" r="r" b="b"/>
+            <a:pathLst>
+              <a:path w="120000" h="120000" extrusionOk="0">
+                <a:moveTo>
+                  <a:pt x="0" y="0"/>
+                </a:moveTo>
+                <a:lnTo>
+                  <a:pt x="120000" y="0"/>
+                </a:lnTo>
+                <a:lnTo>
+                  <a:pt x="120000" y="120000"/>
+                </a:lnTo>
+                <a:lnTo>
+                  <a:pt x="0" y="120000"/>
+                </a:lnTo>
+                <a:close/>
+              </a:path>
+            </a:pathLst>
+          </a:custGeom>
+          <a:noFill/>
+          <a:ln w="12700" cap="flat" cmpd="sng">
+            <a:solidFill>
+              <a:srgbClr val="000000"/>
+            </a:solidFill>
+            <a:prstDash val="solid"/>
+            <a:round/>
+            <a:headEnd type="none" w="sm" len="sm"/>
+            <a:tailEnd type="none" w="sm" len="sm"/>
+          </a:ln>
+        </p:spPr>
+      </p:sp>
+      <p:sp>
+        <p:nvSpPr>
+          <p:cNvPr id="532" name="Google Shape;532;g32d3355825c_1_0:notes"/>
+          <p:cNvSpPr txBox="1">
+            <a:spLocks noGrp="1"/>
+          </p:cNvSpPr>
+          <p:nvPr>
+            <p:ph type="body" idx="1"/>
+          </p:nvPr>
+        </p:nvSpPr>
+        <p:spPr>
+          <a:xfrm>
+            <a:off x="685800" y="4343400"/>
+            <a:ext cx="5486400" cy="4114800"/>
+          </a:xfrm>
+          <a:prstGeom prst="rect">
+            <a:avLst/>
+          </a:prstGeom>
+          <a:noFill/>
+          <a:ln>
+            <a:noFill/>
+          </a:ln>
+        </p:spPr>
+        <p:txBody>
+          <a:bodyPr spcFirstLastPara="1" wrap="square" lIns="91425" tIns="45700" rIns="91425" bIns="45700" anchor="t" anchorCtr="0">
+            <a:noAutofit/>
+          </a:bodyPr>
+          <a:lstStyle/>
+          <a:p>
+            <a:pPr marL="0" lvl="0" indent="0" algn="l" rtl="0">
+              <a:lnSpc>
+                <a:spcPct val="100000"/>
+              </a:lnSpc>
+              <a:spcBef>
+                <a:spcPts val="360"/>
+              </a:spcBef>
+              <a:spcAft>
+                <a:spcPts val="0"/>
+              </a:spcAft>
+              <a:buSzPts val="1400"/>
+              <a:buNone/>
+            </a:pPr>
+            <a:r>
+              <a:rPr lang="en-US"/>
+              <a:t>Data is never perfect –  is it useful enough to improve over status quo?</a:t>
+            </a:r>
+            <a:endParaRPr/>
+          </a:p>
+          <a:p>
+            <a:pPr marL="0" lvl="0" indent="0" algn="l" rtl="0">
+              <a:lnSpc>
+                <a:spcPct val="100000"/>
+              </a:lnSpc>
+              <a:spcBef>
+                <a:spcPts val="360"/>
+              </a:spcBef>
+              <a:spcAft>
+                <a:spcPts val="0"/>
+              </a:spcAft>
+              <a:buSzPts val="1400"/>
+              <a:buNone/>
+            </a:pPr>
+            <a:r>
+              <a:rPr lang="en-US"/>
+              <a:t>Can you augment with external data? Public data? Partner with other organizations that have supplementary data?</a:t>
+            </a:r>
+            <a:endParaRPr/>
+          </a:p>
+        </p:txBody>
+      </p:sp>
+      <p:sp>
+        <p:nvSpPr>
+          <p:cNvPr id="533" name="Google Shape;533;g32d3355825c_1_0:notes"/>
+          <p:cNvSpPr txBox="1">
+            <a:spLocks noGrp="1"/>
+          </p:cNvSpPr>
+          <p:nvPr>
+            <p:ph type="sldNum" idx="12"/>
+          </p:nvPr>
+        </p:nvSpPr>
+        <p:spPr>
+          <a:xfrm>
+            <a:off x="3884613" y="8685213"/>
+            <a:ext cx="2971800" cy="457200"/>
+          </a:xfrm>
+          <a:prstGeom prst="rect">
+            <a:avLst/>
+          </a:prstGeom>
+          <a:noFill/>
+          <a:ln>
+            <a:noFill/>
+          </a:ln>
+        </p:spPr>
+        <p:txBody>
+          <a:bodyPr spcFirstLastPara="1" wrap="square" lIns="91425" tIns="45700" rIns="91425" bIns="45700" anchor="b" anchorCtr="0">
+            <a:noAutofit/>
+          </a:bodyPr>
+          <a:lstStyle/>
+          <a:p>
+            <a:pPr marL="0" lvl="0" indent="0" algn="r" rtl="0">
+              <a:lnSpc>
+                <a:spcPct val="100000"/>
+              </a:lnSpc>
+              <a:spcBef>
+                <a:spcPts val="0"/>
+              </a:spcBef>
+              <a:spcAft>
+                <a:spcPts val="0"/>
+              </a:spcAft>
+              <a:buClr>
+                <a:srgbClr val="000000"/>
+              </a:buClr>
+              <a:buSzPts val="1200"/>
+              <a:buFont typeface="Arial"/>
+              <a:buNone/>
+            </a:pPr>
+            <a:fld id="{00000000-1234-1234-1234-123412341234}" type="slidenum">
+              <a:rPr lang="en-US"/>
+              <a:t>12</a:t>
+            </a:fld>
+            <a:endParaRPr/>
+          </a:p>
+        </p:txBody>
+      </p:sp>
+    </p:spTree>
+  </p:cSld>
+  <p:clrMapOvr>
+    <a:masterClrMapping/>
+  </p:clrMapOvr>
+</p:notes>
+</file>
+
+<file path=ppt/notesSlides/notesSlide8.xml><?xml version="1.0" encoding="utf-8"?>
+<p:notes xmlns:a="http://schemas.openxmlformats.org/drawingml/2006/main" xmlns:r="http://schemas.openxmlformats.org/officeDocument/2006/relationships" xmlns:p="http://schemas.openxmlformats.org/presentationml/2006/main" showMasterSp="0" showMasterPhAnim="0">
+  <p:cSld>
+    <p:spTree>
+      <p:nvGrpSpPr>
+        <p:cNvPr id="1" name="Shape 537"/>
+        <p:cNvGrpSpPr/>
+        <p:nvPr/>
+      </p:nvGrpSpPr>
+      <p:grpSpPr>
+        <a:xfrm>
+          <a:off x="0" y="0"/>
+          <a:ext cx="0" cy="0"/>
+          <a:chOff x="0" y="0"/>
+          <a:chExt cx="0" cy="0"/>
+        </a:xfrm>
+      </p:grpSpPr>
+      <p:sp>
+        <p:nvSpPr>
+          <p:cNvPr id="538" name="Google Shape;538;g32d3355825c_1_12:notes"/>
+          <p:cNvSpPr>
+            <a:spLocks noGrp="1" noRot="1" noChangeAspect="1"/>
+          </p:cNvSpPr>
+          <p:nvPr>
+            <p:ph type="sldImg" idx="2"/>
+          </p:nvPr>
+        </p:nvSpPr>
+        <p:spPr>
+          <a:xfrm>
+            <a:off x="381000" y="685800"/>
+            <a:ext cx="6096000" cy="3429000"/>
+          </a:xfrm>
+          <a:custGeom>
+            <a:avLst/>
+            <a:gdLst/>
+            <a:ahLst/>
+            <a:cxnLst/>
+            <a:rect l="l" t="t" r="r" b="b"/>
+            <a:pathLst>
+              <a:path w="120000" h="120000" extrusionOk="0">
+                <a:moveTo>
+                  <a:pt x="0" y="0"/>
+                </a:moveTo>
+                <a:lnTo>
+                  <a:pt x="120000" y="0"/>
+                </a:lnTo>
+                <a:lnTo>
+                  <a:pt x="120000" y="120000"/>
+                </a:lnTo>
+                <a:lnTo>
+                  <a:pt x="0" y="120000"/>
+                </a:lnTo>
+                <a:close/>
+              </a:path>
+            </a:pathLst>
+          </a:custGeom>
+          <a:noFill/>
+          <a:ln w="12700" cap="flat" cmpd="sng">
+            <a:solidFill>
+              <a:srgbClr val="000000"/>
+            </a:solidFill>
+            <a:prstDash val="solid"/>
+            <a:round/>
+            <a:headEnd type="none" w="sm" len="sm"/>
+            <a:tailEnd type="none" w="sm" len="sm"/>
+          </a:ln>
+        </p:spPr>
+      </p:sp>
+      <p:sp>
+        <p:nvSpPr>
+          <p:cNvPr id="539" name="Google Shape;539;g32d3355825c_1_12:notes"/>
+          <p:cNvSpPr txBox="1">
+            <a:spLocks noGrp="1"/>
+          </p:cNvSpPr>
+          <p:nvPr>
+            <p:ph type="body" idx="1"/>
+          </p:nvPr>
+        </p:nvSpPr>
+        <p:spPr>
+          <a:xfrm>
+            <a:off x="685800" y="4343400"/>
+            <a:ext cx="5486400" cy="4114800"/>
+          </a:xfrm>
+          <a:prstGeom prst="rect">
+            <a:avLst/>
+          </a:prstGeom>
+          <a:noFill/>
+          <a:ln>
+            <a:noFill/>
+          </a:ln>
+        </p:spPr>
+        <p:txBody>
+          <a:bodyPr spcFirstLastPara="1" wrap="square" lIns="91425" tIns="45700" rIns="91425" bIns="45700" anchor="t" anchorCtr="0">
+            <a:noAutofit/>
+          </a:bodyPr>
+          <a:lstStyle/>
+          <a:p>
+            <a:pPr marL="0" lvl="0" indent="0" algn="l" rtl="0">
+              <a:lnSpc>
+                <a:spcPct val="100000"/>
+              </a:lnSpc>
+              <a:spcBef>
+                <a:spcPts val="360"/>
+              </a:spcBef>
+              <a:spcAft>
+                <a:spcPts val="0"/>
+              </a:spcAft>
+              <a:buSzPts val="1400"/>
+              <a:buNone/>
+            </a:pPr>
+            <a:endParaRPr/>
+          </a:p>
+        </p:txBody>
+      </p:sp>
+      <p:sp>
+        <p:nvSpPr>
+          <p:cNvPr id="540" name="Google Shape;540;g32d3355825c_1_12:notes"/>
+          <p:cNvSpPr txBox="1">
+            <a:spLocks noGrp="1"/>
+          </p:cNvSpPr>
+          <p:nvPr>
+            <p:ph type="sldNum" idx="12"/>
+          </p:nvPr>
+        </p:nvSpPr>
+        <p:spPr>
+          <a:xfrm>
+            <a:off x="3884613" y="8685213"/>
+            <a:ext cx="2971800" cy="457200"/>
+          </a:xfrm>
+          <a:prstGeom prst="rect">
+            <a:avLst/>
+          </a:prstGeom>
+          <a:noFill/>
+          <a:ln>
+            <a:noFill/>
+          </a:ln>
+        </p:spPr>
+        <p:txBody>
+          <a:bodyPr spcFirstLastPara="1" wrap="square" lIns="91425" tIns="45700" rIns="91425" bIns="45700" anchor="b" anchorCtr="0">
+            <a:noAutofit/>
+          </a:bodyPr>
+          <a:lstStyle/>
+          <a:p>
+            <a:pPr marL="0" lvl="0" indent="0" algn="r" rtl="0">
+              <a:lnSpc>
+                <a:spcPct val="100000"/>
+              </a:lnSpc>
+              <a:spcBef>
+                <a:spcPts val="0"/>
+              </a:spcBef>
+              <a:spcAft>
+                <a:spcPts val="0"/>
+              </a:spcAft>
+              <a:buClr>
+                <a:srgbClr val="000000"/>
+              </a:buClr>
+              <a:buSzPts val="1200"/>
+              <a:buFont typeface="Arial"/>
+              <a:buNone/>
+            </a:pPr>
+            <a:fld id="{00000000-1234-1234-1234-123412341234}" type="slidenum">
+              <a:rPr lang="en-US"/>
+              <a:t>13</a:t>
+            </a:fld>
+            <a:endParaRPr/>
+          </a:p>
+        </p:txBody>
+      </p:sp>
+    </p:spTree>
+  </p:cSld>
+  <p:clrMapOvr>
+    <a:masterClrMapping/>
+  </p:clrMapOvr>
+</p:notes>
+</file>
+
+<file path=ppt/notesSlides/notesSlide9.xml><?xml version="1.0" encoding="utf-8"?>
+<p:notes xmlns:a="http://schemas.openxmlformats.org/drawingml/2006/main" xmlns:r="http://schemas.openxmlformats.org/officeDocument/2006/relationships" xmlns:p="http://schemas.openxmlformats.org/presentationml/2006/main">
+  <p:cSld>
+    <p:spTree>
+      <p:nvGrpSpPr>
+        <p:cNvPr id="1" name=""/>
+        <p:cNvGrpSpPr/>
+        <p:nvPr/>
+      </p:nvGrpSpPr>
+      <p:grpSpPr>
+        <a:xfrm>
+          <a:off x="0" y="0"/>
+          <a:ext cx="0" cy="0"/>
+          <a:chOff x="0" y="0"/>
+          <a:chExt cx="0" cy="0"/>
+        </a:xfrm>
+      </p:grpSpPr>
+      <p:sp>
+        <p:nvSpPr>
+          <p:cNvPr id="2" name="Slide Image Placeholder 1"/>
+          <p:cNvSpPr>
+            <a:spLocks noGrp="1" noRot="1" noChangeAspect="1"/>
+          </p:cNvSpPr>
+          <p:nvPr>
+            <p:ph type="sldImg"/>
+          </p:nvPr>
+        </p:nvSpPr>
+        <p:spPr/>
+      </p:sp>
+      <p:sp>
+        <p:nvSpPr>
+          <p:cNvPr id="3" name="Notes Placeholder 2"/>
+          <p:cNvSpPr>
+            <a:spLocks noGrp="1"/>
+          </p:cNvSpPr>
+          <p:nvPr>
+            <p:ph type="body" idx="1"/>
+          </p:nvPr>
+        </p:nvSpPr>
+        <p:spPr/>
+        <p:txBody>
+          <a:bodyPr/>
+          <a:lstStyle/>
+          <a:p>
+            <a:r>
+              <a:rPr lang="en-US" dirty="0"/>
+              <a:t>Police data</a:t>
+            </a:r>
+          </a:p>
+          <a:p>
+            <a:r>
+              <a:rPr lang="en-US" dirty="0"/>
+              <a:t>School data</a:t>
+            </a:r>
+          </a:p>
+          <a:p>
+            <a:endParaRPr lang="en-US" dirty="0"/>
+          </a:p>
+        </p:txBody>
+      </p:sp>
+      <p:sp>
+        <p:nvSpPr>
+          <p:cNvPr id="4" name="Slide Number Placeholder 3"/>
+          <p:cNvSpPr>
+            <a:spLocks noGrp="1"/>
+          </p:cNvSpPr>
+          <p:nvPr>
+            <p:ph type="sldNum" idx="12"/>
+          </p:nvPr>
+        </p:nvSpPr>
+        <p:spPr/>
+        <p:txBody>
+          <a:bodyPr/>
+          <a:lstStyle/>
+          <a:p>
+            <a:pPr marL="0" marR="0" lvl="0" indent="0" algn="r" rtl="0">
+              <a:spcBef>
+                <a:spcPts val="0"/>
+              </a:spcBef>
+              <a:spcAft>
+                <a:spcPts val="0"/>
+              </a:spcAft>
+              <a:buNone/>
+            </a:pPr>
+            <a:fld id="{00000000-1234-1234-1234-123412341234}" type="slidenum">
+              <a:rPr lang="en-US" sz="1200" b="0" i="0" u="none" strike="noStrike" cap="none" smtClean="0">
+                <a:solidFill>
+                  <a:schemeClr val="dk1"/>
+                </a:solidFill>
+                <a:latin typeface="Calibri"/>
+                <a:ea typeface="Calibri"/>
+                <a:cs typeface="Calibri"/>
+                <a:sym typeface="Calibri"/>
+              </a:rPr>
+              <a:t>16</a:t>
+            </a:fld>
+            <a:endParaRPr lang="en-US" sz="1200" b="0" i="0" u="none" strike="noStrike" cap="none">
+              <a:solidFill>
+                <a:schemeClr val="dk1"/>
+              </a:solidFill>
+              <a:latin typeface="Calibri"/>
+              <a:ea typeface="Calibri"/>
+              <a:cs typeface="Calibri"/>
+              <a:sym typeface="Calibri"/>
+            </a:endParaRPr>
+          </a:p>
+        </p:txBody>
+      </p:sp>
+    </p:spTree>
+    <p:extLst>
+      <p:ext uri="{BB962C8B-B14F-4D97-AF65-F5344CB8AC3E}">
+        <p14:creationId xmlns:p14="http://schemas.microsoft.com/office/powerpoint/2010/main" val="551343960"/>
+      </p:ext>
+    </p:extLst>
+  </p:cSld>
+  <p:clrMapOvr>
+    <a:masterClrMapping/>
+  </p:clrMapOvr>
+</p:notes>
+</file>
+
 <file path=ppt/slideLayouts/slideLayout1.xml><?xml version="1.0" encoding="utf-8"?>
 <p:sldLayout xmlns:a="http://schemas.openxmlformats.org/drawingml/2006/main" xmlns:r="http://schemas.openxmlformats.org/officeDocument/2006/relationships" xmlns:p="http://schemas.openxmlformats.org/presentationml/2006/main" matchingName="Title slide" type="title">
   <p:cSld name="TITLE">
@@ -7862,6 +9521,204 @@
         </p:txBody>
       </p:sp>
     </p:spTree>
+  </p:cSld>
+  <p:clrMapOvr>
+    <a:masterClrMapping/>
+  </p:clrMapOvr>
+</p:sldLayout>
+</file>
+
+<file path=ppt/slideLayouts/slideLayout13.xml><?xml version="1.0" encoding="utf-8"?>
+<p:sldLayout xmlns:a="http://schemas.openxmlformats.org/drawingml/2006/main" xmlns:r="http://schemas.openxmlformats.org/officeDocument/2006/relationships" xmlns:p="http://schemas.openxmlformats.org/presentationml/2006/main" matchingName="Title Slide">
+  <p:cSld name="1_Title Slide">
+    <p:bg>
+      <p:bgPr>
+        <a:solidFill>
+          <a:schemeClr val="lt1"/>
+        </a:solidFill>
+        <a:effectLst/>
+      </p:bgPr>
+    </p:bg>
+    <p:spTree>
+      <p:nvGrpSpPr>
+        <p:cNvPr id="1" name="Shape 15"/>
+        <p:cNvGrpSpPr/>
+        <p:nvPr/>
+      </p:nvGrpSpPr>
+      <p:grpSpPr>
+        <a:xfrm>
+          <a:off x="0" y="0"/>
+          <a:ext cx="0" cy="0"/>
+          <a:chOff x="0" y="0"/>
+          <a:chExt cx="0" cy="0"/>
+        </a:xfrm>
+      </p:grpSpPr>
+      <p:sp>
+        <p:nvSpPr>
+          <p:cNvPr id="16" name="Google Shape;16;p62"/>
+          <p:cNvSpPr txBox="1">
+            <a:spLocks noGrp="1"/>
+          </p:cNvSpPr>
+          <p:nvPr>
+            <p:ph type="ctrTitle"/>
+          </p:nvPr>
+        </p:nvSpPr>
+        <p:spPr>
+          <a:xfrm>
+            <a:off x="914400" y="1851287"/>
+            <a:ext cx="10363200" cy="1470025"/>
+          </a:xfrm>
+          <a:prstGeom prst="rect">
+            <a:avLst/>
+          </a:prstGeom>
+          <a:noFill/>
+          <a:ln>
+            <a:noFill/>
+          </a:ln>
+        </p:spPr>
+        <p:txBody>
+          <a:bodyPr spcFirstLastPara="1" wrap="square" lIns="91425" tIns="45700" rIns="91425" bIns="45700" anchor="ctr" anchorCtr="0">
+            <a:noAutofit/>
+          </a:bodyPr>
+          <a:lstStyle>
+            <a:lvl1pPr lvl="0" algn="ctr">
+              <a:lnSpc>
+                <a:spcPct val="100000"/>
+              </a:lnSpc>
+              <a:spcBef>
+                <a:spcPts val="0"/>
+              </a:spcBef>
+              <a:spcAft>
+                <a:spcPts val="0"/>
+              </a:spcAft>
+              <a:buSzPts val="1400"/>
+              <a:buNone/>
+              <a:defRPr/>
+            </a:lvl1pPr>
+            <a:lvl2pPr lvl="1" algn="ctr">
+              <a:lnSpc>
+                <a:spcPct val="100000"/>
+              </a:lnSpc>
+              <a:spcBef>
+                <a:spcPts val="0"/>
+              </a:spcBef>
+              <a:spcAft>
+                <a:spcPts val="0"/>
+              </a:spcAft>
+              <a:buSzPts val="1400"/>
+              <a:buNone/>
+              <a:defRPr/>
+            </a:lvl2pPr>
+            <a:lvl3pPr lvl="2" algn="ctr">
+              <a:lnSpc>
+                <a:spcPct val="100000"/>
+              </a:lnSpc>
+              <a:spcBef>
+                <a:spcPts val="0"/>
+              </a:spcBef>
+              <a:spcAft>
+                <a:spcPts val="0"/>
+              </a:spcAft>
+              <a:buSzPts val="1400"/>
+              <a:buNone/>
+              <a:defRPr/>
+            </a:lvl3pPr>
+            <a:lvl4pPr lvl="3" algn="ctr">
+              <a:lnSpc>
+                <a:spcPct val="100000"/>
+              </a:lnSpc>
+              <a:spcBef>
+                <a:spcPts val="0"/>
+              </a:spcBef>
+              <a:spcAft>
+                <a:spcPts val="0"/>
+              </a:spcAft>
+              <a:buSzPts val="1400"/>
+              <a:buNone/>
+              <a:defRPr/>
+            </a:lvl4pPr>
+            <a:lvl5pPr lvl="4" algn="ctr">
+              <a:lnSpc>
+                <a:spcPct val="100000"/>
+              </a:lnSpc>
+              <a:spcBef>
+                <a:spcPts val="0"/>
+              </a:spcBef>
+              <a:spcAft>
+                <a:spcPts val="0"/>
+              </a:spcAft>
+              <a:buSzPts val="1400"/>
+              <a:buNone/>
+              <a:defRPr/>
+            </a:lvl5pPr>
+            <a:lvl6pPr lvl="5" algn="ctr">
+              <a:lnSpc>
+                <a:spcPct val="100000"/>
+              </a:lnSpc>
+              <a:spcBef>
+                <a:spcPts val="0"/>
+              </a:spcBef>
+              <a:spcAft>
+                <a:spcPts val="0"/>
+              </a:spcAft>
+              <a:buSzPts val="1400"/>
+              <a:buNone/>
+              <a:defRPr/>
+            </a:lvl6pPr>
+            <a:lvl7pPr lvl="6" algn="ctr">
+              <a:lnSpc>
+                <a:spcPct val="100000"/>
+              </a:lnSpc>
+              <a:spcBef>
+                <a:spcPts val="0"/>
+              </a:spcBef>
+              <a:spcAft>
+                <a:spcPts val="0"/>
+              </a:spcAft>
+              <a:buSzPts val="1400"/>
+              <a:buNone/>
+              <a:defRPr/>
+            </a:lvl7pPr>
+            <a:lvl8pPr lvl="7" algn="ctr">
+              <a:lnSpc>
+                <a:spcPct val="100000"/>
+              </a:lnSpc>
+              <a:spcBef>
+                <a:spcPts val="0"/>
+              </a:spcBef>
+              <a:spcAft>
+                <a:spcPts val="0"/>
+              </a:spcAft>
+              <a:buSzPts val="1400"/>
+              <a:buNone/>
+              <a:defRPr/>
+            </a:lvl8pPr>
+            <a:lvl9pPr lvl="8" algn="ctr">
+              <a:lnSpc>
+                <a:spcPct val="100000"/>
+              </a:lnSpc>
+              <a:spcBef>
+                <a:spcPts val="0"/>
+              </a:spcBef>
+              <a:spcAft>
+                <a:spcPts val="0"/>
+              </a:spcAft>
+              <a:buSzPts val="1400"/>
+              <a:buNone/>
+              <a:defRPr/>
+            </a:lvl9pPr>
+          </a:lstStyle>
+          <a:p>
+            <a:endParaRPr/>
+          </a:p>
+        </p:txBody>
+      </p:sp>
+    </p:spTree>
+    <p:extLst>
+      <p:ext uri="{BB962C8B-B14F-4D97-AF65-F5344CB8AC3E}">
+        <p14:creationId xmlns:p14="http://schemas.microsoft.com/office/powerpoint/2010/main" val="2036666490"/>
+      </p:ext>
+    </p:extLst>
   </p:cSld>
   <p:clrMapOvr>
     <a:masterClrMapping/>
@@ -11349,6 +13206,7 @@
     <p:sldLayoutId id="2147483659" r:id="rId10"/>
     <p:sldLayoutId id="2147483660" r:id="rId11"/>
     <p:sldLayoutId id="2147483661" r:id="rId12"/>
+    <p:sldLayoutId id="2147483662" r:id="rId13"/>
   </p:sldLayoutIdLst>
   <p:hf sldNum="0" hdr="0" ftr="0" dt="0"/>
   <p:txStyles>
@@ -12201,6 +14059,2826 @@
   <p:cSld>
     <p:spTree>
       <p:nvGrpSpPr>
+        <p:cNvPr id="1" name="Shape 510"/>
+        <p:cNvGrpSpPr/>
+        <p:nvPr/>
+      </p:nvGrpSpPr>
+      <p:grpSpPr>
+        <a:xfrm>
+          <a:off x="0" y="0"/>
+          <a:ext cx="0" cy="0"/>
+          <a:chOff x="0" y="0"/>
+          <a:chExt cx="0" cy="0"/>
+        </a:xfrm>
+      </p:grpSpPr>
+      <p:sp>
+        <p:nvSpPr>
+          <p:cNvPr id="511" name="Google Shape;511;g32cbaf05b3f_0_56"/>
+          <p:cNvSpPr/>
+          <p:nvPr/>
+        </p:nvSpPr>
+        <p:spPr>
+          <a:xfrm>
+            <a:off x="6950000" y="1656800"/>
+            <a:ext cx="4826400" cy="3620000"/>
+          </a:xfrm>
+          <a:prstGeom prst="roundRect">
+            <a:avLst>
+              <a:gd name="adj" fmla="val 6971"/>
+            </a:avLst>
+          </a:prstGeom>
+          <a:solidFill>
+            <a:srgbClr val="FFFFFF"/>
+          </a:solidFill>
+          <a:ln w="28575" cap="flat" cmpd="sng">
+            <a:solidFill>
+              <a:schemeClr val="dk2"/>
+            </a:solidFill>
+            <a:prstDash val="solid"/>
+            <a:round/>
+            <a:headEnd type="none" w="sm" len="sm"/>
+            <a:tailEnd type="none" w="sm" len="sm"/>
+          </a:ln>
+        </p:spPr>
+        <p:txBody>
+          <a:bodyPr spcFirstLastPara="1" wrap="square" lIns="585133" tIns="585133" rIns="585133" bIns="585133" anchor="ctr" anchorCtr="0">
+            <a:noAutofit/>
+          </a:bodyPr>
+          <a:lstStyle/>
+          <a:p>
+            <a:pPr algn="ctr">
+              <a:buSzPts val="6700"/>
+            </a:pPr>
+            <a:endParaRPr sz="8933">
+              <a:solidFill>
+                <a:schemeClr val="dk2"/>
+              </a:solidFill>
+              <a:latin typeface="Calibri"/>
+              <a:ea typeface="Calibri"/>
+              <a:cs typeface="Calibri"/>
+              <a:sym typeface="Calibri"/>
+            </a:endParaRPr>
+          </a:p>
+        </p:txBody>
+      </p:sp>
+      <p:sp>
+        <p:nvSpPr>
+          <p:cNvPr id="512" name="Google Shape;512;g32cbaf05b3f_0_56"/>
+          <p:cNvSpPr txBox="1">
+            <a:spLocks noGrp="1"/>
+          </p:cNvSpPr>
+          <p:nvPr>
+            <p:ph type="title"/>
+          </p:nvPr>
+        </p:nvSpPr>
+        <p:spPr>
+          <a:xfrm>
+            <a:off x="415600" y="86563"/>
+            <a:ext cx="11360800" cy="763600"/>
+          </a:xfrm>
+          <a:prstGeom prst="rect">
+            <a:avLst/>
+          </a:prstGeom>
+          <a:noFill/>
+          <a:ln>
+            <a:noFill/>
+          </a:ln>
+        </p:spPr>
+        <p:txBody>
+          <a:bodyPr spcFirstLastPara="1" wrap="square" lIns="162533" tIns="162533" rIns="162533" bIns="162533" anchor="t" anchorCtr="0">
+            <a:noAutofit/>
+          </a:bodyPr>
+          <a:lstStyle/>
+          <a:p>
+            <a:pPr algn="ctr"/>
+            <a:r>
+              <a:rPr lang="en-US"/>
+              <a:t>What data do you have?</a:t>
+            </a:r>
+            <a:endParaRPr/>
+          </a:p>
+        </p:txBody>
+      </p:sp>
+      <p:sp>
+        <p:nvSpPr>
+          <p:cNvPr id="513" name="Google Shape;513;g32cbaf05b3f_0_56"/>
+          <p:cNvSpPr txBox="1">
+            <a:spLocks noGrp="1"/>
+          </p:cNvSpPr>
+          <p:nvPr>
+            <p:ph type="body" idx="1"/>
+          </p:nvPr>
+        </p:nvSpPr>
+        <p:spPr>
+          <a:xfrm>
+            <a:off x="1158300" y="1789800"/>
+            <a:ext cx="5350400" cy="3354000"/>
+          </a:xfrm>
+          <a:prstGeom prst="rect">
+            <a:avLst/>
+          </a:prstGeom>
+          <a:noFill/>
+          <a:ln>
+            <a:noFill/>
+          </a:ln>
+        </p:spPr>
+        <p:txBody>
+          <a:bodyPr spcFirstLastPara="1" wrap="square" lIns="162533" tIns="162533" rIns="162533" bIns="162533" anchor="t" anchorCtr="0">
+            <a:noAutofit/>
+          </a:bodyPr>
+          <a:lstStyle/>
+          <a:p>
+            <a:pPr marL="0" indent="0">
+              <a:lnSpc>
+                <a:spcPct val="100000"/>
+              </a:lnSpc>
+              <a:buNone/>
+            </a:pPr>
+            <a:r>
+              <a:rPr lang="en-US" dirty="0">
+                <a:solidFill>
+                  <a:schemeClr val="dk1"/>
+                </a:solidFill>
+              </a:rPr>
+              <a:t>How far back does historical data go?</a:t>
+            </a:r>
+            <a:endParaRPr dirty="0">
+              <a:solidFill>
+                <a:schemeClr val="dk1"/>
+              </a:solidFill>
+            </a:endParaRPr>
+          </a:p>
+          <a:p>
+            <a:pPr marL="0" indent="0">
+              <a:lnSpc>
+                <a:spcPct val="100000"/>
+              </a:lnSpc>
+              <a:buNone/>
+            </a:pPr>
+            <a:endParaRPr dirty="0">
+              <a:solidFill>
+                <a:schemeClr val="dk1"/>
+              </a:solidFill>
+            </a:endParaRPr>
+          </a:p>
+          <a:p>
+            <a:pPr marL="0" indent="0">
+              <a:lnSpc>
+                <a:spcPct val="100000"/>
+              </a:lnSpc>
+              <a:buNone/>
+            </a:pPr>
+            <a:endParaRPr dirty="0">
+              <a:solidFill>
+                <a:schemeClr val="dk1"/>
+              </a:solidFill>
+            </a:endParaRPr>
+          </a:p>
+          <a:p>
+            <a:pPr marL="0" indent="0">
+              <a:lnSpc>
+                <a:spcPct val="100000"/>
+              </a:lnSpc>
+              <a:buNone/>
+            </a:pPr>
+            <a:r>
+              <a:rPr lang="en-US" dirty="0">
+                <a:solidFill>
+                  <a:schemeClr val="dk1"/>
+                </a:solidFill>
+              </a:rPr>
+              <a:t>What is the granularity of the data?</a:t>
+            </a:r>
+            <a:endParaRPr dirty="0">
+              <a:solidFill>
+                <a:schemeClr val="dk1"/>
+              </a:solidFill>
+            </a:endParaRPr>
+          </a:p>
+          <a:p>
+            <a:pPr marL="0" indent="0">
+              <a:lnSpc>
+                <a:spcPct val="100000"/>
+              </a:lnSpc>
+              <a:buNone/>
+            </a:pPr>
+            <a:endParaRPr dirty="0">
+              <a:solidFill>
+                <a:schemeClr val="dk1"/>
+              </a:solidFill>
+            </a:endParaRPr>
+          </a:p>
+          <a:p>
+            <a:pPr marL="0" indent="0">
+              <a:lnSpc>
+                <a:spcPct val="100000"/>
+              </a:lnSpc>
+              <a:buNone/>
+            </a:pPr>
+            <a:endParaRPr dirty="0">
+              <a:solidFill>
+                <a:schemeClr val="dk1"/>
+              </a:solidFill>
+            </a:endParaRPr>
+          </a:p>
+          <a:p>
+            <a:pPr marL="0" indent="0">
+              <a:lnSpc>
+                <a:spcPct val="100000"/>
+              </a:lnSpc>
+              <a:buNone/>
+            </a:pPr>
+            <a:r>
+              <a:rPr lang="en-US" dirty="0">
+                <a:solidFill>
+                  <a:schemeClr val="dk1"/>
+                </a:solidFill>
+              </a:rPr>
+              <a:t>How is the data collected and updated? </a:t>
+            </a:r>
+            <a:br>
+              <a:rPr lang="en-US" dirty="0">
+                <a:solidFill>
+                  <a:schemeClr val="dk1"/>
+                </a:solidFill>
+              </a:rPr>
+            </a:br>
+            <a:r>
+              <a:rPr lang="en-US" dirty="0">
+                <a:solidFill>
+                  <a:schemeClr val="dk1"/>
+                </a:solidFill>
+              </a:rPr>
+              <a:t>With what frequency?</a:t>
+            </a:r>
+            <a:endParaRPr dirty="0">
+              <a:solidFill>
+                <a:schemeClr val="dk1"/>
+              </a:solidFill>
+            </a:endParaRPr>
+          </a:p>
+        </p:txBody>
+      </p:sp>
+      <p:sp>
+        <p:nvSpPr>
+          <p:cNvPr id="514" name="Google Shape;514;g32cbaf05b3f_0_56"/>
+          <p:cNvSpPr txBox="1"/>
+          <p:nvPr/>
+        </p:nvSpPr>
+        <p:spPr>
+          <a:xfrm>
+            <a:off x="9115370" y="3026779"/>
+            <a:ext cx="1371294" cy="2015896"/>
+          </a:xfrm>
+          <a:prstGeom prst="rect">
+            <a:avLst/>
+          </a:prstGeom>
+          <a:noFill/>
+          <a:ln>
+            <a:noFill/>
+          </a:ln>
+        </p:spPr>
+        <p:txBody>
+          <a:bodyPr spcFirstLastPara="1" wrap="square" lIns="121900" tIns="121900" rIns="121900" bIns="121900" anchor="t" anchorCtr="0">
+            <a:spAutoFit/>
+          </a:bodyPr>
+          <a:lstStyle/>
+          <a:p>
+            <a:pPr>
+              <a:buSzPts val="1200"/>
+            </a:pPr>
+            <a:r>
+              <a:rPr lang="en-US" sz="11500" dirty="0">
+                <a:solidFill>
+                  <a:schemeClr val="dk2"/>
+                </a:solidFill>
+                <a:latin typeface="Lato"/>
+                <a:ea typeface="Lato"/>
+                <a:cs typeface="Lato"/>
+                <a:sym typeface="Lato"/>
+              </a:rPr>
+              <a:t>?</a:t>
+            </a:r>
+            <a:endParaRPr sz="9600" dirty="0">
+              <a:solidFill>
+                <a:schemeClr val="dk2"/>
+              </a:solidFill>
+              <a:latin typeface="Lato"/>
+              <a:ea typeface="Lato"/>
+              <a:cs typeface="Lato"/>
+              <a:sym typeface="Lato"/>
+            </a:endParaRPr>
+          </a:p>
+        </p:txBody>
+      </p:sp>
+      <p:sp>
+        <p:nvSpPr>
+          <p:cNvPr id="515" name="Google Shape;515;g32cbaf05b3f_0_56"/>
+          <p:cNvSpPr txBox="1"/>
+          <p:nvPr/>
+        </p:nvSpPr>
+        <p:spPr>
+          <a:xfrm>
+            <a:off x="7668835" y="2263179"/>
+            <a:ext cx="3414487" cy="763600"/>
+          </a:xfrm>
+          <a:prstGeom prst="rect">
+            <a:avLst/>
+          </a:prstGeom>
+          <a:solidFill>
+            <a:schemeClr val="lt1"/>
+          </a:solidFill>
+          <a:ln>
+            <a:noFill/>
+          </a:ln>
+        </p:spPr>
+        <p:txBody>
+          <a:bodyPr spcFirstLastPara="1" wrap="square" lIns="0" tIns="0" rIns="0" bIns="0" anchor="t" anchorCtr="0">
+            <a:noAutofit/>
+          </a:bodyPr>
+          <a:lstStyle/>
+          <a:p>
+            <a:pPr algn="ctr">
+              <a:buSzPts val="1700"/>
+            </a:pPr>
+            <a:r>
+              <a:rPr lang="en-US" sz="2400" b="1" dirty="0" err="1">
+                <a:solidFill>
+                  <a:schemeClr val="dk2"/>
+                </a:solidFill>
+                <a:latin typeface="Lato"/>
+                <a:ea typeface="Lato"/>
+                <a:cs typeface="Lato"/>
+                <a:sym typeface="Lato"/>
+              </a:rPr>
+              <a:t>Donorschoose</a:t>
+            </a:r>
+            <a:endParaRPr sz="2400" b="1" dirty="0">
+              <a:solidFill>
+                <a:schemeClr val="dk2"/>
+              </a:solidFill>
+              <a:latin typeface="Lato"/>
+              <a:ea typeface="Lato"/>
+              <a:cs typeface="Lato"/>
+              <a:sym typeface="Lato"/>
+            </a:endParaRPr>
+          </a:p>
+        </p:txBody>
+      </p:sp>
+      <p:pic>
+        <p:nvPicPr>
+          <p:cNvPr id="516" name="Google Shape;516;g32cbaf05b3f_0_56"/>
+          <p:cNvPicPr preferRelativeResize="0"/>
+          <p:nvPr/>
+        </p:nvPicPr>
+        <p:blipFill rotWithShape="1">
+          <a:blip r:embed="rId3">
+            <a:alphaModFix/>
+          </a:blip>
+          <a:srcRect/>
+          <a:stretch/>
+        </p:blipFill>
+        <p:spPr>
+          <a:xfrm>
+            <a:off x="415600" y="1839367"/>
+            <a:ext cx="654400" cy="654400"/>
+          </a:xfrm>
+          <a:prstGeom prst="rect">
+            <a:avLst/>
+          </a:prstGeom>
+          <a:noFill/>
+          <a:ln>
+            <a:noFill/>
+          </a:ln>
+        </p:spPr>
+      </p:pic>
+      <p:pic>
+        <p:nvPicPr>
+          <p:cNvPr id="517" name="Google Shape;517;g32cbaf05b3f_0_56"/>
+          <p:cNvPicPr preferRelativeResize="0"/>
+          <p:nvPr/>
+        </p:nvPicPr>
+        <p:blipFill rotWithShape="1">
+          <a:blip r:embed="rId4">
+            <a:alphaModFix/>
+          </a:blip>
+          <a:srcRect/>
+          <a:stretch/>
+        </p:blipFill>
+        <p:spPr>
+          <a:xfrm>
+            <a:off x="415600" y="4161032"/>
+            <a:ext cx="654400" cy="654400"/>
+          </a:xfrm>
+          <a:prstGeom prst="rect">
+            <a:avLst/>
+          </a:prstGeom>
+          <a:noFill/>
+          <a:ln>
+            <a:noFill/>
+          </a:ln>
+        </p:spPr>
+      </p:pic>
+      <p:pic>
+        <p:nvPicPr>
+          <p:cNvPr id="518" name="Google Shape;518;g32cbaf05b3f_0_56"/>
+          <p:cNvPicPr preferRelativeResize="0"/>
+          <p:nvPr/>
+        </p:nvPicPr>
+        <p:blipFill rotWithShape="1">
+          <a:blip r:embed="rId5">
+            <a:alphaModFix/>
+          </a:blip>
+          <a:srcRect/>
+          <a:stretch/>
+        </p:blipFill>
+        <p:spPr>
+          <a:xfrm>
+            <a:off x="415600" y="2949399"/>
+            <a:ext cx="654400" cy="654400"/>
+          </a:xfrm>
+          <a:prstGeom prst="rect">
+            <a:avLst/>
+          </a:prstGeom>
+          <a:noFill/>
+          <a:ln>
+            <a:noFill/>
+          </a:ln>
+        </p:spPr>
+      </p:pic>
+    </p:spTree>
+  </p:cSld>
+  <p:clrMapOvr>
+    <a:masterClrMapping/>
+  </p:clrMapOvr>
+  <p:timing>
+    <p:tnLst>
+      <p:par>
+        <p:cTn id="1" dur="indefinite" restart="never" nodeType="tmRoot">
+          <p:childTnLst>
+            <p:seq concurrent="1" nextAc="seek">
+              <p:cTn id="2" dur="indefinite" nodeType="mainSeq">
+                <p:childTnLst>
+                  <p:par>
+                    <p:cTn id="3" fill="hold">
+                      <p:stCondLst>
+                        <p:cond delay="indefinite"/>
+                      </p:stCondLst>
+                      <p:childTnLst>
+                        <p:par>
+                          <p:cTn id="4" fill="hold">
+                            <p:stCondLst>
+                              <p:cond delay="0"/>
+                            </p:stCondLst>
+                            <p:childTnLst>
+                              <p:par>
+                                <p:cTn id="5" presetID="1" presetClass="entr" presetSubtype="0" fill="hold" nodeType="clickEffect">
+                                  <p:stCondLst>
+                                    <p:cond delay="0"/>
+                                  </p:stCondLst>
+                                  <p:childTnLst>
+                                    <p:set>
+                                      <p:cBhvr>
+                                        <p:cTn id="6" dur="1" fill="hold">
+                                          <p:stCondLst>
+                                            <p:cond delay="0"/>
+                                          </p:stCondLst>
+                                        </p:cTn>
+                                        <p:tgtEl>
+                                          <p:spTgt spid="514"/>
+                                        </p:tgtEl>
+                                        <p:attrNameLst>
+                                          <p:attrName>style.visibility</p:attrName>
+                                        </p:attrNameLst>
+                                      </p:cBhvr>
+                                      <p:to>
+                                        <p:strVal val="visible"/>
+                                      </p:to>
+                                    </p:set>
+                                  </p:childTnLst>
+                                </p:cTn>
+                              </p:par>
+                              <p:par>
+                                <p:cTn id="7" presetID="1" presetClass="entr" presetSubtype="0" fill="hold" nodeType="withEffect">
+                                  <p:stCondLst>
+                                    <p:cond delay="0"/>
+                                  </p:stCondLst>
+                                  <p:childTnLst>
+                                    <p:set>
+                                      <p:cBhvr>
+                                        <p:cTn id="8" dur="1" fill="hold">
+                                          <p:stCondLst>
+                                            <p:cond delay="0"/>
+                                          </p:stCondLst>
+                                        </p:cTn>
+                                        <p:tgtEl>
+                                          <p:spTgt spid="515"/>
+                                        </p:tgtEl>
+                                        <p:attrNameLst>
+                                          <p:attrName>style.visibility</p:attrName>
+                                        </p:attrNameLst>
+                                      </p:cBhvr>
+                                      <p:to>
+                                        <p:strVal val="visible"/>
+                                      </p:to>
+                                    </p:set>
+                                  </p:childTnLst>
+                                </p:cTn>
+                              </p:par>
+                              <p:par>
+                                <p:cTn id="9" presetID="1" presetClass="entr" presetSubtype="0" fill="hold" nodeType="withEffect">
+                                  <p:stCondLst>
+                                    <p:cond delay="0"/>
+                                  </p:stCondLst>
+                                  <p:childTnLst>
+                                    <p:set>
+                                      <p:cBhvr>
+                                        <p:cTn id="10" dur="1" fill="hold">
+                                          <p:stCondLst>
+                                            <p:cond delay="0"/>
+                                          </p:stCondLst>
+                                        </p:cTn>
+                                        <p:tgtEl>
+                                          <p:spTgt spid="511"/>
+                                        </p:tgtEl>
+                                        <p:attrNameLst>
+                                          <p:attrName>style.visibility</p:attrName>
+                                        </p:attrNameLst>
+                                      </p:cBhvr>
+                                      <p:to>
+                                        <p:strVal val="visible"/>
+                                      </p:to>
+                                    </p:set>
+                                  </p:childTnLst>
+                                </p:cTn>
+                              </p:par>
+                            </p:childTnLst>
+                          </p:cTn>
+                        </p:par>
+                      </p:childTnLst>
+                    </p:cTn>
+                  </p:par>
+                </p:childTnLst>
+              </p:cTn>
+              <p:prevCondLst>
+                <p:cond evt="onPrev" delay="0">
+                  <p:tgtEl>
+                    <p:sldTgt/>
+                  </p:tgtEl>
+                </p:cond>
+              </p:prevCondLst>
+              <p:nextCondLst>
+                <p:cond evt="onNext" delay="0">
+                  <p:tgtEl>
+                    <p:sldTgt/>
+                  </p:tgtEl>
+                </p:cond>
+              </p:nextCondLst>
+            </p:seq>
+          </p:childTnLst>
+        </p:cTn>
+      </p:par>
+    </p:tnLst>
+  </p:timing>
+</p:sld>
+</file>
+
+<file path=ppt/slides/slide11.xml><?xml version="1.0" encoding="utf-8"?>
+<p:sld xmlns:a="http://schemas.openxmlformats.org/drawingml/2006/main" xmlns:r="http://schemas.openxmlformats.org/officeDocument/2006/relationships" xmlns:p="http://schemas.openxmlformats.org/presentationml/2006/main">
+  <p:cSld>
+    <p:spTree>
+      <p:nvGrpSpPr>
+        <p:cNvPr id="1" name="Shape 524"/>
+        <p:cNvGrpSpPr/>
+        <p:nvPr/>
+      </p:nvGrpSpPr>
+      <p:grpSpPr>
+        <a:xfrm>
+          <a:off x="0" y="0"/>
+          <a:ext cx="0" cy="0"/>
+          <a:chOff x="0" y="0"/>
+          <a:chExt cx="0" cy="0"/>
+        </a:xfrm>
+      </p:grpSpPr>
+      <p:sp>
+        <p:nvSpPr>
+          <p:cNvPr id="525" name="Google Shape;525;g32f73e32acf_0_0"/>
+          <p:cNvSpPr txBox="1"/>
+          <p:nvPr/>
+        </p:nvSpPr>
+        <p:spPr>
+          <a:xfrm>
+            <a:off x="1553617" y="1958000"/>
+            <a:ext cx="4490400" cy="2942000"/>
+          </a:xfrm>
+          <a:prstGeom prst="rect">
+            <a:avLst/>
+          </a:prstGeom>
+          <a:noFill/>
+          <a:ln>
+            <a:noFill/>
+          </a:ln>
+        </p:spPr>
+        <p:txBody>
+          <a:bodyPr spcFirstLastPara="1" wrap="square" lIns="121900" tIns="121900" rIns="121900" bIns="121900" anchor="t" anchorCtr="0">
+            <a:noAutofit/>
+          </a:bodyPr>
+          <a:lstStyle/>
+          <a:p>
+            <a:pPr>
+              <a:buSzPts val="2100"/>
+            </a:pPr>
+            <a:r>
+              <a:rPr lang="en-US" sz="2800" b="1" dirty="0">
+                <a:solidFill>
+                  <a:schemeClr val="dk1"/>
+                </a:solidFill>
+                <a:latin typeface="Calibri"/>
+                <a:ea typeface="Calibri"/>
+                <a:cs typeface="Calibri"/>
+                <a:sym typeface="Calibri"/>
+              </a:rPr>
+              <a:t>Data to inform and measure progress on Goals</a:t>
+            </a:r>
+            <a:endParaRPr sz="2800" b="1" dirty="0">
+              <a:solidFill>
+                <a:schemeClr val="dk1"/>
+              </a:solidFill>
+              <a:latin typeface="Calibri"/>
+              <a:ea typeface="Calibri"/>
+              <a:cs typeface="Calibri"/>
+              <a:sym typeface="Calibri"/>
+            </a:endParaRPr>
+          </a:p>
+          <a:p>
+            <a:pPr>
+              <a:spcBef>
+                <a:spcPts val="1333"/>
+              </a:spcBef>
+              <a:buSzPts val="1800"/>
+            </a:pPr>
+            <a:r>
+              <a:rPr lang="en-US" sz="2400" dirty="0">
+                <a:solidFill>
+                  <a:schemeClr val="dk1"/>
+                </a:solidFill>
+                <a:latin typeface="Calibri"/>
+                <a:ea typeface="Calibri"/>
+                <a:cs typeface="Calibri"/>
+                <a:sym typeface="Calibri"/>
+              </a:rPr>
+              <a:t>Sufficient reliable historical data</a:t>
+            </a:r>
+            <a:endParaRPr sz="2400" dirty="0">
+              <a:solidFill>
+                <a:schemeClr val="dk1"/>
+              </a:solidFill>
+              <a:latin typeface="Calibri"/>
+              <a:ea typeface="Calibri"/>
+              <a:cs typeface="Calibri"/>
+              <a:sym typeface="Calibri"/>
+            </a:endParaRPr>
+          </a:p>
+          <a:p>
+            <a:pPr>
+              <a:spcBef>
+                <a:spcPts val="1333"/>
+              </a:spcBef>
+              <a:buSzPts val="1800"/>
+            </a:pPr>
+            <a:r>
+              <a:rPr lang="en-US" sz="2400" dirty="0">
+                <a:solidFill>
+                  <a:schemeClr val="dk1"/>
+                </a:solidFill>
+                <a:latin typeface="Calibri"/>
+                <a:ea typeface="Calibri"/>
+                <a:cs typeface="Calibri"/>
+                <a:sym typeface="Calibri"/>
+              </a:rPr>
+              <a:t>Captures relevant outcomes</a:t>
+            </a:r>
+            <a:endParaRPr sz="2400" dirty="0">
+              <a:solidFill>
+                <a:schemeClr val="dk1"/>
+              </a:solidFill>
+              <a:latin typeface="Calibri"/>
+              <a:ea typeface="Calibri"/>
+              <a:cs typeface="Calibri"/>
+              <a:sym typeface="Calibri"/>
+            </a:endParaRPr>
+          </a:p>
+          <a:p>
+            <a:pPr>
+              <a:spcBef>
+                <a:spcPts val="1333"/>
+              </a:spcBef>
+              <a:spcAft>
+                <a:spcPts val="1333"/>
+              </a:spcAft>
+              <a:buSzPts val="1800"/>
+            </a:pPr>
+            <a:r>
+              <a:rPr lang="en-US" sz="2400" dirty="0">
+                <a:solidFill>
+                  <a:schemeClr val="dk1"/>
+                </a:solidFill>
+                <a:latin typeface="Calibri"/>
+                <a:ea typeface="Calibri"/>
+                <a:cs typeface="Calibri"/>
+                <a:sym typeface="Calibri"/>
+              </a:rPr>
+              <a:t>Identifies the cohort</a:t>
+            </a:r>
+            <a:endParaRPr sz="2400" dirty="0">
+              <a:solidFill>
+                <a:schemeClr val="dk1"/>
+              </a:solidFill>
+              <a:latin typeface="Calibri"/>
+              <a:ea typeface="Calibri"/>
+              <a:cs typeface="Calibri"/>
+              <a:sym typeface="Calibri"/>
+            </a:endParaRPr>
+          </a:p>
+        </p:txBody>
+      </p:sp>
+      <p:sp>
+        <p:nvSpPr>
+          <p:cNvPr id="526" name="Google Shape;526;g32f73e32acf_0_0"/>
+          <p:cNvSpPr txBox="1">
+            <a:spLocks noGrp="1"/>
+          </p:cNvSpPr>
+          <p:nvPr>
+            <p:ph type="title"/>
+          </p:nvPr>
+        </p:nvSpPr>
+        <p:spPr>
+          <a:xfrm>
+            <a:off x="415600" y="86563"/>
+            <a:ext cx="11360800" cy="763600"/>
+          </a:xfrm>
+          <a:prstGeom prst="rect">
+            <a:avLst/>
+          </a:prstGeom>
+          <a:noFill/>
+          <a:ln>
+            <a:noFill/>
+          </a:ln>
+        </p:spPr>
+        <p:txBody>
+          <a:bodyPr spcFirstLastPara="1" wrap="square" lIns="162533" tIns="162533" rIns="162533" bIns="162533" anchor="t" anchorCtr="0">
+            <a:noAutofit/>
+          </a:bodyPr>
+          <a:lstStyle/>
+          <a:p>
+            <a:pPr algn="ctr"/>
+            <a:r>
+              <a:rPr lang="en-US"/>
+              <a:t>What data do you need?</a:t>
+            </a:r>
+            <a:endParaRPr/>
+          </a:p>
+        </p:txBody>
+      </p:sp>
+      <p:pic>
+        <p:nvPicPr>
+          <p:cNvPr id="527" name="Google Shape;527;g32f73e32acf_0_0"/>
+          <p:cNvPicPr preferRelativeResize="0"/>
+          <p:nvPr/>
+        </p:nvPicPr>
+        <p:blipFill rotWithShape="1">
+          <a:blip r:embed="rId3">
+            <a:alphaModFix/>
+          </a:blip>
+          <a:srcRect/>
+          <a:stretch/>
+        </p:blipFill>
+        <p:spPr>
+          <a:xfrm>
+            <a:off x="369718" y="2087601"/>
+            <a:ext cx="1080833" cy="1080833"/>
+          </a:xfrm>
+          <a:prstGeom prst="rect">
+            <a:avLst/>
+          </a:prstGeom>
+          <a:noFill/>
+          <a:ln>
+            <a:noFill/>
+          </a:ln>
+        </p:spPr>
+      </p:pic>
+      <p:sp>
+        <p:nvSpPr>
+          <p:cNvPr id="528" name="Google Shape;528;g32f73e32acf_0_0"/>
+          <p:cNvSpPr txBox="1"/>
+          <p:nvPr/>
+        </p:nvSpPr>
+        <p:spPr>
+          <a:xfrm>
+            <a:off x="7609884" y="1958000"/>
+            <a:ext cx="4212400" cy="2942000"/>
+          </a:xfrm>
+          <a:prstGeom prst="rect">
+            <a:avLst/>
+          </a:prstGeom>
+          <a:noFill/>
+          <a:ln>
+            <a:noFill/>
+          </a:ln>
+        </p:spPr>
+        <p:txBody>
+          <a:bodyPr spcFirstLastPara="1" wrap="square" lIns="121900" tIns="121900" rIns="121900" bIns="121900" anchor="t" anchorCtr="0">
+            <a:noAutofit/>
+          </a:bodyPr>
+          <a:lstStyle/>
+          <a:p>
+            <a:pPr>
+              <a:buSzPts val="2100"/>
+            </a:pPr>
+            <a:r>
+              <a:rPr lang="en-US" sz="2800" b="1">
+                <a:solidFill>
+                  <a:schemeClr val="dk1"/>
+                </a:solidFill>
+                <a:latin typeface="Calibri"/>
+                <a:ea typeface="Calibri"/>
+                <a:cs typeface="Calibri"/>
+                <a:sym typeface="Calibri"/>
+              </a:rPr>
+              <a:t>Data to inform Actions</a:t>
+            </a:r>
+            <a:endParaRPr sz="2800" b="1">
+              <a:solidFill>
+                <a:schemeClr val="dk1"/>
+              </a:solidFill>
+              <a:latin typeface="Calibri"/>
+              <a:ea typeface="Calibri"/>
+              <a:cs typeface="Calibri"/>
+              <a:sym typeface="Calibri"/>
+            </a:endParaRPr>
+          </a:p>
+          <a:p>
+            <a:pPr>
+              <a:spcBef>
+                <a:spcPts val="1333"/>
+              </a:spcBef>
+              <a:buSzPts val="1800"/>
+            </a:pPr>
+            <a:r>
+              <a:rPr lang="en-US" sz="2400">
+                <a:solidFill>
+                  <a:schemeClr val="dk1"/>
+                </a:solidFill>
+                <a:latin typeface="Calibri"/>
+                <a:ea typeface="Calibri"/>
+                <a:cs typeface="Calibri"/>
+                <a:sym typeface="Calibri"/>
+              </a:rPr>
+              <a:t>Refreshed at least as frequently as the action is taken</a:t>
+            </a:r>
+            <a:endParaRPr sz="2400">
+              <a:solidFill>
+                <a:schemeClr val="dk1"/>
+              </a:solidFill>
+              <a:latin typeface="Calibri"/>
+              <a:ea typeface="Calibri"/>
+              <a:cs typeface="Calibri"/>
+              <a:sym typeface="Calibri"/>
+            </a:endParaRPr>
+          </a:p>
+          <a:p>
+            <a:pPr>
+              <a:spcBef>
+                <a:spcPts val="1333"/>
+              </a:spcBef>
+              <a:buSzPts val="1800"/>
+            </a:pPr>
+            <a:r>
+              <a:rPr lang="en-US" sz="2400">
+                <a:solidFill>
+                  <a:schemeClr val="dk1"/>
+                </a:solidFill>
+                <a:latin typeface="Calibri"/>
+                <a:ea typeface="Calibri"/>
+                <a:cs typeface="Calibri"/>
+                <a:sym typeface="Calibri"/>
+              </a:rPr>
+              <a:t>Covers the same granularity as the proposed action</a:t>
+            </a:r>
+            <a:endParaRPr sz="2400">
+              <a:solidFill>
+                <a:schemeClr val="dk1"/>
+              </a:solidFill>
+              <a:latin typeface="Calibri"/>
+              <a:ea typeface="Calibri"/>
+              <a:cs typeface="Calibri"/>
+              <a:sym typeface="Calibri"/>
+            </a:endParaRPr>
+          </a:p>
+          <a:p>
+            <a:pPr>
+              <a:spcBef>
+                <a:spcPts val="1333"/>
+              </a:spcBef>
+              <a:spcAft>
+                <a:spcPts val="1333"/>
+              </a:spcAft>
+              <a:buSzPts val="1800"/>
+            </a:pPr>
+            <a:endParaRPr sz="2400">
+              <a:solidFill>
+                <a:schemeClr val="dk1"/>
+              </a:solidFill>
+              <a:latin typeface="Calibri"/>
+              <a:ea typeface="Calibri"/>
+              <a:cs typeface="Calibri"/>
+              <a:sym typeface="Calibri"/>
+            </a:endParaRPr>
+          </a:p>
+        </p:txBody>
+      </p:sp>
+      <p:pic>
+        <p:nvPicPr>
+          <p:cNvPr id="529" name="Google Shape;529;g32f73e32acf_0_0"/>
+          <p:cNvPicPr preferRelativeResize="0"/>
+          <p:nvPr/>
+        </p:nvPicPr>
+        <p:blipFill rotWithShape="1">
+          <a:blip r:embed="rId4">
+            <a:alphaModFix/>
+          </a:blip>
+          <a:srcRect/>
+          <a:stretch/>
+        </p:blipFill>
+        <p:spPr>
+          <a:xfrm>
+            <a:off x="6286450" y="2087567"/>
+            <a:ext cx="1080833" cy="1080891"/>
+          </a:xfrm>
+          <a:prstGeom prst="rect">
+            <a:avLst/>
+          </a:prstGeom>
+          <a:noFill/>
+          <a:ln>
+            <a:noFill/>
+          </a:ln>
+        </p:spPr>
+      </p:pic>
+    </p:spTree>
+  </p:cSld>
+  <p:clrMapOvr>
+    <a:masterClrMapping/>
+  </p:clrMapOvr>
+</p:sld>
+</file>
+
+<file path=ppt/slides/slide12.xml><?xml version="1.0" encoding="utf-8"?>
+<p:sld xmlns:a="http://schemas.openxmlformats.org/drawingml/2006/main" xmlns:r="http://schemas.openxmlformats.org/officeDocument/2006/relationships" xmlns:p="http://schemas.openxmlformats.org/presentationml/2006/main">
+  <p:cSld>
+    <p:spTree>
+      <p:nvGrpSpPr>
+        <p:cNvPr id="1" name="Shape 534"/>
+        <p:cNvGrpSpPr/>
+        <p:nvPr/>
+      </p:nvGrpSpPr>
+      <p:grpSpPr>
+        <a:xfrm>
+          <a:off x="0" y="0"/>
+          <a:ext cx="0" cy="0"/>
+          <a:chOff x="0" y="0"/>
+          <a:chExt cx="0" cy="0"/>
+        </a:xfrm>
+      </p:grpSpPr>
+      <p:sp>
+        <p:nvSpPr>
+          <p:cNvPr id="535" name="Google Shape;535;g32d3355825c_1_0"/>
+          <p:cNvSpPr txBox="1">
+            <a:spLocks noGrp="1"/>
+          </p:cNvSpPr>
+          <p:nvPr>
+            <p:ph type="title"/>
+          </p:nvPr>
+        </p:nvSpPr>
+        <p:spPr>
+          <a:xfrm>
+            <a:off x="415600" y="86563"/>
+            <a:ext cx="11360800" cy="763600"/>
+          </a:xfrm>
+          <a:prstGeom prst="rect">
+            <a:avLst/>
+          </a:prstGeom>
+          <a:noFill/>
+          <a:ln>
+            <a:noFill/>
+          </a:ln>
+        </p:spPr>
+        <p:txBody>
+          <a:bodyPr spcFirstLastPara="1" wrap="square" lIns="162533" tIns="162533" rIns="162533" bIns="162533" anchor="t" anchorCtr="0">
+            <a:noAutofit/>
+          </a:bodyPr>
+          <a:lstStyle/>
+          <a:p>
+            <a:pPr algn="ctr"/>
+            <a:r>
+              <a:rPr lang="en-US"/>
+              <a:t>Identifying Data Gaps and Readiness</a:t>
+            </a:r>
+            <a:endParaRPr/>
+          </a:p>
+        </p:txBody>
+      </p:sp>
+      <p:sp>
+        <p:nvSpPr>
+          <p:cNvPr id="536" name="Google Shape;536;g32d3355825c_1_0"/>
+          <p:cNvSpPr txBox="1">
+            <a:spLocks noGrp="1"/>
+          </p:cNvSpPr>
+          <p:nvPr>
+            <p:ph type="body" idx="1"/>
+          </p:nvPr>
+        </p:nvSpPr>
+        <p:spPr>
+          <a:xfrm>
+            <a:off x="415600" y="1536633"/>
+            <a:ext cx="11360800" cy="4555200"/>
+          </a:xfrm>
+          <a:prstGeom prst="rect">
+            <a:avLst/>
+          </a:prstGeom>
+          <a:noFill/>
+          <a:ln>
+            <a:noFill/>
+          </a:ln>
+        </p:spPr>
+        <p:txBody>
+          <a:bodyPr spcFirstLastPara="1" wrap="square" lIns="162533" tIns="162533" rIns="162533" bIns="162533" anchor="t" anchorCtr="0">
+            <a:noAutofit/>
+          </a:bodyPr>
+          <a:lstStyle/>
+          <a:p>
+            <a:pPr marL="0" indent="0">
+              <a:lnSpc>
+                <a:spcPct val="100000"/>
+              </a:lnSpc>
+              <a:buNone/>
+            </a:pPr>
+            <a:r>
+              <a:rPr lang="en-US" dirty="0"/>
+              <a:t>Do we have enough to move forward, or do we need to focus on getting additional data? </a:t>
+            </a:r>
+            <a:endParaRPr dirty="0"/>
+          </a:p>
+          <a:p>
+            <a:pPr marL="0" indent="0">
+              <a:lnSpc>
+                <a:spcPct val="150000"/>
+              </a:lnSpc>
+              <a:buNone/>
+            </a:pPr>
+            <a:endParaRPr dirty="0"/>
+          </a:p>
+          <a:p>
+            <a:pPr marL="609585" indent="-507987">
+              <a:lnSpc>
+                <a:spcPct val="150000"/>
+              </a:lnSpc>
+              <a:buChar char="-"/>
+            </a:pPr>
+            <a:r>
+              <a:rPr lang="en-US" dirty="0"/>
+              <a:t>Do we have enough historical data?</a:t>
+            </a:r>
+            <a:endParaRPr dirty="0"/>
+          </a:p>
+          <a:p>
+            <a:pPr marL="609585" indent="-507987">
+              <a:lnSpc>
+                <a:spcPct val="150000"/>
+              </a:lnSpc>
+              <a:buChar char="-"/>
+            </a:pPr>
+            <a:r>
+              <a:rPr lang="en-US" dirty="0"/>
+              <a:t>Is it reliable going back?</a:t>
+            </a:r>
+            <a:endParaRPr dirty="0"/>
+          </a:p>
+          <a:p>
+            <a:pPr marL="609585" indent="-507987">
+              <a:lnSpc>
+                <a:spcPct val="150000"/>
+              </a:lnSpc>
+              <a:buChar char="-"/>
+            </a:pPr>
+            <a:r>
+              <a:rPr lang="en-US" dirty="0"/>
+              <a:t>Is it at the right level of granularity to inform the actions?</a:t>
+            </a:r>
+            <a:endParaRPr dirty="0"/>
+          </a:p>
+          <a:p>
+            <a:pPr marL="609585" indent="-507987">
+              <a:lnSpc>
+                <a:spcPct val="150000"/>
+              </a:lnSpc>
+              <a:buChar char="-"/>
+            </a:pPr>
+            <a:r>
+              <a:rPr lang="en-US" dirty="0"/>
+              <a:t>Are different pieces of data linkable? unique identifiers for people, places, etc.</a:t>
+            </a:r>
+            <a:endParaRPr dirty="0"/>
+          </a:p>
+          <a:p>
+            <a:pPr marL="609585" indent="-507987">
+              <a:lnSpc>
+                <a:spcPct val="150000"/>
+              </a:lnSpc>
+              <a:buChar char="-"/>
+            </a:pPr>
+            <a:r>
+              <a:rPr lang="en-US" dirty="0"/>
+              <a:t>Do we have the right data to measure outcomes (based on the goals)?</a:t>
+            </a:r>
+            <a:endParaRPr dirty="0"/>
+          </a:p>
+        </p:txBody>
+      </p:sp>
+    </p:spTree>
+  </p:cSld>
+  <p:clrMapOvr>
+    <a:masterClrMapping/>
+  </p:clrMapOvr>
+</p:sld>
+</file>
+
+<file path=ppt/slides/slide13.xml><?xml version="1.0" encoding="utf-8"?>
+<p:sld xmlns:a="http://schemas.openxmlformats.org/drawingml/2006/main" xmlns:r="http://schemas.openxmlformats.org/officeDocument/2006/relationships" xmlns:p="http://schemas.openxmlformats.org/presentationml/2006/main">
+  <p:cSld>
+    <p:spTree>
+      <p:nvGrpSpPr>
+        <p:cNvPr id="1" name="Shape 541"/>
+        <p:cNvGrpSpPr/>
+        <p:nvPr/>
+      </p:nvGrpSpPr>
+      <p:grpSpPr>
+        <a:xfrm>
+          <a:off x="0" y="0"/>
+          <a:ext cx="0" cy="0"/>
+          <a:chOff x="0" y="0"/>
+          <a:chExt cx="0" cy="0"/>
+        </a:xfrm>
+      </p:grpSpPr>
+      <p:sp>
+        <p:nvSpPr>
+          <p:cNvPr id="542" name="Google Shape;542;g32d3355825c_1_12"/>
+          <p:cNvSpPr txBox="1">
+            <a:spLocks noGrp="1"/>
+          </p:cNvSpPr>
+          <p:nvPr>
+            <p:ph type="title"/>
+          </p:nvPr>
+        </p:nvSpPr>
+        <p:spPr>
+          <a:xfrm>
+            <a:off x="415600" y="86563"/>
+            <a:ext cx="11360800" cy="763600"/>
+          </a:xfrm>
+          <a:prstGeom prst="rect">
+            <a:avLst/>
+          </a:prstGeom>
+          <a:noFill/>
+          <a:ln>
+            <a:noFill/>
+          </a:ln>
+        </p:spPr>
+        <p:txBody>
+          <a:bodyPr spcFirstLastPara="1" wrap="square" lIns="162533" tIns="162533" rIns="162533" bIns="162533" anchor="t" anchorCtr="0">
+            <a:noAutofit/>
+          </a:bodyPr>
+          <a:lstStyle/>
+          <a:p>
+            <a:pPr algn="ctr"/>
+            <a:r>
+              <a:rPr lang="en-US" dirty="0"/>
+              <a:t>Example: preventing water main breaks in Syracuse</a:t>
+            </a:r>
+            <a:endParaRPr dirty="0"/>
+          </a:p>
+        </p:txBody>
+      </p:sp>
+      <p:sp>
+        <p:nvSpPr>
+          <p:cNvPr id="543" name="Google Shape;543;g32d3355825c_1_12"/>
+          <p:cNvSpPr txBox="1">
+            <a:spLocks noGrp="1"/>
+          </p:cNvSpPr>
+          <p:nvPr>
+            <p:ph type="body" idx="1"/>
+          </p:nvPr>
+        </p:nvSpPr>
+        <p:spPr>
+          <a:xfrm>
+            <a:off x="415600" y="1536633"/>
+            <a:ext cx="5314000" cy="4555200"/>
+          </a:xfrm>
+          <a:prstGeom prst="rect">
+            <a:avLst/>
+          </a:prstGeom>
+          <a:noFill/>
+          <a:ln>
+            <a:noFill/>
+          </a:ln>
+        </p:spPr>
+        <p:txBody>
+          <a:bodyPr spcFirstLastPara="1" wrap="square" lIns="162533" tIns="162533" rIns="162533" bIns="162533" anchor="t" anchorCtr="0">
+            <a:noAutofit/>
+          </a:bodyPr>
+          <a:lstStyle/>
+          <a:p>
+            <a:pPr marL="0" indent="0">
+              <a:lnSpc>
+                <a:spcPct val="100000"/>
+              </a:lnSpc>
+              <a:buNone/>
+            </a:pPr>
+            <a:r>
+              <a:rPr lang="en-US" dirty="0"/>
+              <a:t>Key information about pipe age, diameter, and material was only available in 100-year-old handwritten notebooks of installation diagrams</a:t>
+            </a:r>
+            <a:endParaRPr dirty="0"/>
+          </a:p>
+          <a:p>
+            <a:pPr marL="0" indent="0">
+              <a:lnSpc>
+                <a:spcPct val="100000"/>
+              </a:lnSpc>
+              <a:buNone/>
+            </a:pPr>
+            <a:endParaRPr dirty="0"/>
+          </a:p>
+          <a:p>
+            <a:pPr marL="0" indent="0">
+              <a:lnSpc>
+                <a:spcPct val="100000"/>
+              </a:lnSpc>
+              <a:buNone/>
+            </a:pPr>
+            <a:r>
+              <a:rPr lang="en-US" dirty="0"/>
+              <a:t>Digitizing these records enabled to more accurately predict whether a water main would break </a:t>
+            </a:r>
+          </a:p>
+          <a:p>
+            <a:pPr marL="0" indent="0">
+              <a:lnSpc>
+                <a:spcPct val="100000"/>
+              </a:lnSpc>
+              <a:buNone/>
+            </a:pPr>
+            <a:endParaRPr lang="en-US" dirty="0"/>
+          </a:p>
+          <a:p>
+            <a:pPr marL="0" indent="0">
+              <a:lnSpc>
+                <a:spcPct val="100000"/>
+              </a:lnSpc>
+              <a:buNone/>
+            </a:pPr>
+            <a:endParaRPr lang="en-US" dirty="0"/>
+          </a:p>
+          <a:p>
+            <a:pPr marL="0" indent="0">
+              <a:lnSpc>
+                <a:spcPct val="100000"/>
+              </a:lnSpc>
+              <a:buNone/>
+            </a:pPr>
+            <a:endParaRPr lang="en-US" dirty="0"/>
+          </a:p>
+        </p:txBody>
+      </p:sp>
+      <p:pic>
+        <p:nvPicPr>
+          <p:cNvPr id="544" name="Google Shape;544;g32d3355825c_1_12"/>
+          <p:cNvPicPr preferRelativeResize="0"/>
+          <p:nvPr/>
+        </p:nvPicPr>
+        <p:blipFill rotWithShape="1">
+          <a:blip r:embed="rId3">
+            <a:alphaModFix/>
+          </a:blip>
+          <a:srcRect/>
+          <a:stretch/>
+        </p:blipFill>
+        <p:spPr>
+          <a:xfrm>
+            <a:off x="5729500" y="1536633"/>
+            <a:ext cx="6046896" cy="4555200"/>
+          </a:xfrm>
+          <a:prstGeom prst="rect">
+            <a:avLst/>
+          </a:prstGeom>
+          <a:noFill/>
+          <a:ln>
+            <a:noFill/>
+          </a:ln>
+        </p:spPr>
+      </p:pic>
+      <p:sp>
+        <p:nvSpPr>
+          <p:cNvPr id="3" name="TextBox 2">
+            <a:extLst>
+              <a:ext uri="{FF2B5EF4-FFF2-40B4-BE49-F238E27FC236}">
+                <a16:creationId xmlns:a16="http://schemas.microsoft.com/office/drawing/2014/main" id="{FD2D08B9-AEED-6138-8613-7E878355D922}"/>
+              </a:ext>
+            </a:extLst>
+          </p:cNvPr>
+          <p:cNvSpPr txBox="1"/>
+          <p:nvPr/>
+        </p:nvSpPr>
+        <p:spPr>
+          <a:xfrm>
+            <a:off x="2772174" y="6255083"/>
+            <a:ext cx="7196072" cy="523220"/>
+          </a:xfrm>
+          <a:prstGeom prst="rect">
+            <a:avLst/>
+          </a:prstGeom>
+          <a:noFill/>
+        </p:spPr>
+        <p:txBody>
+          <a:bodyPr wrap="square">
+            <a:spAutoFit/>
+          </a:bodyPr>
+          <a:lstStyle/>
+          <a:p>
+            <a:pPr marL="0" indent="0">
+              <a:lnSpc>
+                <a:spcPct val="100000"/>
+              </a:lnSpc>
+              <a:buNone/>
+            </a:pPr>
+            <a:r>
+              <a:rPr lang="en-US" sz="2800" dirty="0"/>
+              <a:t>ML is often used to create “structured data”</a:t>
+            </a:r>
+          </a:p>
+        </p:txBody>
+      </p:sp>
+    </p:spTree>
+  </p:cSld>
+  <p:clrMapOvr>
+    <a:masterClrMapping/>
+  </p:clrMapOvr>
+</p:sld>
+</file>
+
+<file path=ppt/slides/slide14.xml><?xml version="1.0" encoding="utf-8"?>
+<p:sld xmlns:a="http://schemas.openxmlformats.org/drawingml/2006/main" xmlns:r="http://schemas.openxmlformats.org/officeDocument/2006/relationships" xmlns:p="http://schemas.openxmlformats.org/presentationml/2006/main">
+  <p:cSld>
+    <p:spTree>
+      <p:nvGrpSpPr>
+        <p:cNvPr id="1" name=""/>
+        <p:cNvGrpSpPr/>
+        <p:nvPr/>
+      </p:nvGrpSpPr>
+      <p:grpSpPr>
+        <a:xfrm>
+          <a:off x="0" y="0"/>
+          <a:ext cx="0" cy="0"/>
+          <a:chOff x="0" y="0"/>
+          <a:chExt cx="0" cy="0"/>
+        </a:xfrm>
+      </p:grpSpPr>
+      <p:sp>
+        <p:nvSpPr>
+          <p:cNvPr id="2" name="Title 1">
+            <a:extLst>
+              <a:ext uri="{FF2B5EF4-FFF2-40B4-BE49-F238E27FC236}">
+                <a16:creationId xmlns:a16="http://schemas.microsoft.com/office/drawing/2014/main" id="{21359BA9-BA2B-D148-89DA-A99081B1FF81}"/>
+              </a:ext>
+            </a:extLst>
+          </p:cNvPr>
+          <p:cNvSpPr>
+            <a:spLocks noGrp="1"/>
+          </p:cNvSpPr>
+          <p:nvPr>
+            <p:ph type="title"/>
+          </p:nvPr>
+        </p:nvSpPr>
+        <p:spPr>
+          <a:xfrm>
+            <a:off x="415600" y="384417"/>
+            <a:ext cx="11360700" cy="763500"/>
+          </a:xfrm>
+        </p:spPr>
+        <p:txBody>
+          <a:bodyPr/>
+          <a:lstStyle/>
+          <a:p>
+            <a:r>
+              <a:rPr lang="en-US" sz="3200" dirty="0"/>
+              <a:t>Challenges with getting (access), storing, and linking data</a:t>
+            </a:r>
+          </a:p>
+        </p:txBody>
+      </p:sp>
+      <p:sp>
+        <p:nvSpPr>
+          <p:cNvPr id="3" name="Text Placeholder 2">
+            <a:extLst>
+              <a:ext uri="{FF2B5EF4-FFF2-40B4-BE49-F238E27FC236}">
+                <a16:creationId xmlns:a16="http://schemas.microsoft.com/office/drawing/2014/main" id="{DDA03E0F-5F3D-5B4D-8232-BF72B84A198E}"/>
+              </a:ext>
+            </a:extLst>
+          </p:cNvPr>
+          <p:cNvSpPr>
+            <a:spLocks noGrp="1"/>
+          </p:cNvSpPr>
+          <p:nvPr>
+            <p:ph type="body" idx="1"/>
+          </p:nvPr>
+        </p:nvSpPr>
+        <p:spPr/>
+        <p:txBody>
+          <a:bodyPr/>
+          <a:lstStyle/>
+          <a:p>
+            <a:r>
+              <a:rPr lang="en-US" dirty="0"/>
+              <a:t>Political</a:t>
+            </a:r>
+          </a:p>
+          <a:p>
+            <a:r>
+              <a:rPr lang="en-US" dirty="0"/>
+              <a:t>Internal Awareness</a:t>
+            </a:r>
+          </a:p>
+          <a:p>
+            <a:r>
+              <a:rPr lang="en-US" dirty="0"/>
+              <a:t>Legal and/or Contractual</a:t>
+            </a:r>
+          </a:p>
+          <a:p>
+            <a:r>
+              <a:rPr lang="en-US" dirty="0"/>
+              <a:t>Ethical</a:t>
+            </a:r>
+          </a:p>
+          <a:p>
+            <a:r>
+              <a:rPr lang="en-US" dirty="0"/>
+              <a:t>Technical</a:t>
+            </a:r>
+          </a:p>
+          <a:p>
+            <a:endParaRPr lang="en-US" dirty="0"/>
+          </a:p>
+        </p:txBody>
+      </p:sp>
+    </p:spTree>
+    <p:extLst>
+      <p:ext uri="{BB962C8B-B14F-4D97-AF65-F5344CB8AC3E}">
+        <p14:creationId xmlns:p14="http://schemas.microsoft.com/office/powerpoint/2010/main" val="851346626"/>
+      </p:ext>
+    </p:extLst>
+  </p:cSld>
+  <p:clrMapOvr>
+    <a:masterClrMapping/>
+  </p:clrMapOvr>
+</p:sld>
+</file>
+
+<file path=ppt/slides/slide15.xml><?xml version="1.0" encoding="utf-8"?>
+<p:sld xmlns:a="http://schemas.openxmlformats.org/drawingml/2006/main" xmlns:r="http://schemas.openxmlformats.org/officeDocument/2006/relationships" xmlns:p="http://schemas.openxmlformats.org/presentationml/2006/main">
+  <p:cSld>
+    <p:spTree>
+      <p:nvGrpSpPr>
+        <p:cNvPr id="1" name=""/>
+        <p:cNvGrpSpPr/>
+        <p:nvPr/>
+      </p:nvGrpSpPr>
+      <p:grpSpPr>
+        <a:xfrm>
+          <a:off x="0" y="0"/>
+          <a:ext cx="0" cy="0"/>
+          <a:chOff x="0" y="0"/>
+          <a:chExt cx="0" cy="0"/>
+        </a:xfrm>
+      </p:grpSpPr>
+      <p:sp>
+        <p:nvSpPr>
+          <p:cNvPr id="2" name="Title 1">
+            <a:extLst>
+              <a:ext uri="{FF2B5EF4-FFF2-40B4-BE49-F238E27FC236}">
+                <a16:creationId xmlns:a16="http://schemas.microsoft.com/office/drawing/2014/main" id="{CE46E641-F79B-6F49-B8EF-A4D6E70FF61F}"/>
+              </a:ext>
+            </a:extLst>
+          </p:cNvPr>
+          <p:cNvSpPr>
+            <a:spLocks noGrp="1"/>
+          </p:cNvSpPr>
+          <p:nvPr>
+            <p:ph type="title"/>
+          </p:nvPr>
+        </p:nvSpPr>
+        <p:spPr/>
+        <p:txBody>
+          <a:bodyPr/>
+          <a:lstStyle/>
+          <a:p>
+            <a:r>
+              <a:rPr lang="en-US" dirty="0"/>
+              <a:t>Scenarios</a:t>
+            </a:r>
+          </a:p>
+        </p:txBody>
+      </p:sp>
+      <p:sp>
+        <p:nvSpPr>
+          <p:cNvPr id="3" name="Text Placeholder 2">
+            <a:extLst>
+              <a:ext uri="{FF2B5EF4-FFF2-40B4-BE49-F238E27FC236}">
+                <a16:creationId xmlns:a16="http://schemas.microsoft.com/office/drawing/2014/main" id="{109530BD-D523-581E-F9C9-8075A2275413}"/>
+              </a:ext>
+            </a:extLst>
+          </p:cNvPr>
+          <p:cNvSpPr>
+            <a:spLocks noGrp="1"/>
+          </p:cNvSpPr>
+          <p:nvPr>
+            <p:ph type="body" idx="1"/>
+          </p:nvPr>
+        </p:nvSpPr>
+        <p:spPr/>
+        <p:txBody>
+          <a:bodyPr/>
+          <a:lstStyle/>
+          <a:p>
+            <a:r>
+              <a:rPr lang="en-US" dirty="0"/>
+              <a:t>Internal to an organization</a:t>
+            </a:r>
+          </a:p>
+          <a:p>
+            <a:r>
+              <a:rPr lang="en-US" dirty="0"/>
+              <a:t>Partnering with external organization – researcher, consultant, etc.</a:t>
+            </a:r>
+          </a:p>
+        </p:txBody>
+      </p:sp>
+    </p:spTree>
+    <p:extLst>
+      <p:ext uri="{BB962C8B-B14F-4D97-AF65-F5344CB8AC3E}">
+        <p14:creationId xmlns:p14="http://schemas.microsoft.com/office/powerpoint/2010/main" val="3974381565"/>
+      </p:ext>
+    </p:extLst>
+  </p:cSld>
+  <p:clrMapOvr>
+    <a:masterClrMapping/>
+  </p:clrMapOvr>
+</p:sld>
+</file>
+
+<file path=ppt/slides/slide16.xml><?xml version="1.0" encoding="utf-8"?>
+<p:sld xmlns:a="http://schemas.openxmlformats.org/drawingml/2006/main" xmlns:r="http://schemas.openxmlformats.org/officeDocument/2006/relationships" xmlns:p="http://schemas.openxmlformats.org/presentationml/2006/main">
+  <p:cSld>
+    <p:spTree>
+      <p:nvGrpSpPr>
+        <p:cNvPr id="1" name=""/>
+        <p:cNvGrpSpPr/>
+        <p:nvPr/>
+      </p:nvGrpSpPr>
+      <p:grpSpPr>
+        <a:xfrm>
+          <a:off x="0" y="0"/>
+          <a:ext cx="0" cy="0"/>
+          <a:chOff x="0" y="0"/>
+          <a:chExt cx="0" cy="0"/>
+        </a:xfrm>
+      </p:grpSpPr>
+      <p:sp>
+        <p:nvSpPr>
+          <p:cNvPr id="2" name="Title 1">
+            <a:extLst>
+              <a:ext uri="{FF2B5EF4-FFF2-40B4-BE49-F238E27FC236}">
+                <a16:creationId xmlns:a16="http://schemas.microsoft.com/office/drawing/2014/main" id="{979BFBA3-9597-C18F-DC54-EA1CD2F2D248}"/>
+              </a:ext>
+            </a:extLst>
+          </p:cNvPr>
+          <p:cNvSpPr>
+            <a:spLocks noGrp="1"/>
+          </p:cNvSpPr>
+          <p:nvPr>
+            <p:ph type="title"/>
+          </p:nvPr>
+        </p:nvSpPr>
+        <p:spPr/>
+        <p:txBody>
+          <a:bodyPr/>
+          <a:lstStyle/>
+          <a:p>
+            <a:r>
+              <a:rPr lang="en-US" dirty="0"/>
+              <a:t>Political Challenges</a:t>
+            </a:r>
+          </a:p>
+        </p:txBody>
+      </p:sp>
+      <p:sp>
+        <p:nvSpPr>
+          <p:cNvPr id="3" name="Text Placeholder 2">
+            <a:extLst>
+              <a:ext uri="{FF2B5EF4-FFF2-40B4-BE49-F238E27FC236}">
+                <a16:creationId xmlns:a16="http://schemas.microsoft.com/office/drawing/2014/main" id="{C6BF3655-4FBB-7724-83F4-8175A4967B32}"/>
+              </a:ext>
+            </a:extLst>
+          </p:cNvPr>
+          <p:cNvSpPr>
+            <a:spLocks noGrp="1"/>
+          </p:cNvSpPr>
+          <p:nvPr>
+            <p:ph type="body" idx="1"/>
+          </p:nvPr>
+        </p:nvSpPr>
+        <p:spPr/>
+        <p:txBody>
+          <a:bodyPr/>
+          <a:lstStyle/>
+          <a:p>
+            <a:r>
+              <a:rPr lang="en-US" dirty="0"/>
+              <a:t>Understanding the stakeholders and value for them</a:t>
+            </a:r>
+          </a:p>
+          <a:p>
+            <a:r>
+              <a:rPr lang="en-US" dirty="0"/>
+              <a:t>May lead to getting subsets</a:t>
+            </a:r>
+          </a:p>
+          <a:p>
+            <a:endParaRPr lang="en-US" dirty="0"/>
+          </a:p>
+        </p:txBody>
+      </p:sp>
+    </p:spTree>
+    <p:extLst>
+      <p:ext uri="{BB962C8B-B14F-4D97-AF65-F5344CB8AC3E}">
+        <p14:creationId xmlns:p14="http://schemas.microsoft.com/office/powerpoint/2010/main" val="2201292742"/>
+      </p:ext>
+    </p:extLst>
+  </p:cSld>
+  <p:clrMapOvr>
+    <a:masterClrMapping/>
+  </p:clrMapOvr>
+</p:sld>
+</file>
+
+<file path=ppt/slides/slide17.xml><?xml version="1.0" encoding="utf-8"?>
+<p:sld xmlns:a="http://schemas.openxmlformats.org/drawingml/2006/main" xmlns:r="http://schemas.openxmlformats.org/officeDocument/2006/relationships" xmlns:p="http://schemas.openxmlformats.org/presentationml/2006/main">
+  <p:cSld>
+    <p:spTree>
+      <p:nvGrpSpPr>
+        <p:cNvPr id="1" name=""/>
+        <p:cNvGrpSpPr/>
+        <p:nvPr/>
+      </p:nvGrpSpPr>
+      <p:grpSpPr>
+        <a:xfrm>
+          <a:off x="0" y="0"/>
+          <a:ext cx="0" cy="0"/>
+          <a:chOff x="0" y="0"/>
+          <a:chExt cx="0" cy="0"/>
+        </a:xfrm>
+      </p:grpSpPr>
+      <p:sp>
+        <p:nvSpPr>
+          <p:cNvPr id="2" name="Title 1">
+            <a:extLst>
+              <a:ext uri="{FF2B5EF4-FFF2-40B4-BE49-F238E27FC236}">
+                <a16:creationId xmlns:a16="http://schemas.microsoft.com/office/drawing/2014/main" id="{5B1598E1-2970-A57B-2054-6EA7A1C0E11F}"/>
+              </a:ext>
+            </a:extLst>
+          </p:cNvPr>
+          <p:cNvSpPr>
+            <a:spLocks noGrp="1"/>
+          </p:cNvSpPr>
+          <p:nvPr>
+            <p:ph type="title"/>
+          </p:nvPr>
+        </p:nvSpPr>
+        <p:spPr/>
+        <p:txBody>
+          <a:bodyPr/>
+          <a:lstStyle/>
+          <a:p>
+            <a:r>
+              <a:rPr lang="en-US" dirty="0"/>
+              <a:t>Internal Awareness Challenges</a:t>
+            </a:r>
+          </a:p>
+        </p:txBody>
+      </p:sp>
+      <p:sp>
+        <p:nvSpPr>
+          <p:cNvPr id="3" name="Text Placeholder 2">
+            <a:extLst>
+              <a:ext uri="{FF2B5EF4-FFF2-40B4-BE49-F238E27FC236}">
+                <a16:creationId xmlns:a16="http://schemas.microsoft.com/office/drawing/2014/main" id="{14772AD7-6DC2-FD80-5F57-21B4BAF586E7}"/>
+              </a:ext>
+            </a:extLst>
+          </p:cNvPr>
+          <p:cNvSpPr>
+            <a:spLocks noGrp="1"/>
+          </p:cNvSpPr>
+          <p:nvPr>
+            <p:ph type="body" idx="1"/>
+          </p:nvPr>
+        </p:nvSpPr>
+        <p:spPr/>
+        <p:txBody>
+          <a:bodyPr/>
+          <a:lstStyle/>
+          <a:p>
+            <a:r>
+              <a:rPr lang="en-US" dirty="0"/>
+              <a:t>Most organizations don’t know what data they have internally</a:t>
+            </a:r>
+          </a:p>
+          <a:p>
+            <a:endParaRPr lang="en-US" dirty="0"/>
+          </a:p>
+          <a:p>
+            <a:endParaRPr lang="en-US" dirty="0"/>
+          </a:p>
+        </p:txBody>
+      </p:sp>
+    </p:spTree>
+    <p:extLst>
+      <p:ext uri="{BB962C8B-B14F-4D97-AF65-F5344CB8AC3E}">
+        <p14:creationId xmlns:p14="http://schemas.microsoft.com/office/powerpoint/2010/main" val="1271599474"/>
+      </p:ext>
+    </p:extLst>
+  </p:cSld>
+  <p:clrMapOvr>
+    <a:masterClrMapping/>
+  </p:clrMapOvr>
+</p:sld>
+</file>
+
+<file path=ppt/slides/slide18.xml><?xml version="1.0" encoding="utf-8"?>
+<p:sld xmlns:a="http://schemas.openxmlformats.org/drawingml/2006/main" xmlns:r="http://schemas.openxmlformats.org/officeDocument/2006/relationships" xmlns:p="http://schemas.openxmlformats.org/presentationml/2006/main">
+  <p:cSld>
+    <p:spTree>
+      <p:nvGrpSpPr>
+        <p:cNvPr id="1" name="">
+          <a:extLst>
+            <a:ext uri="{FF2B5EF4-FFF2-40B4-BE49-F238E27FC236}">
+              <a16:creationId xmlns:a16="http://schemas.microsoft.com/office/drawing/2014/main" id="{F07A3CC1-DE63-065D-AF01-A8EB353830BE}"/>
+            </a:ext>
+          </a:extLst>
+        </p:cNvPr>
+        <p:cNvGrpSpPr/>
+        <p:nvPr/>
+      </p:nvGrpSpPr>
+      <p:grpSpPr>
+        <a:xfrm>
+          <a:off x="0" y="0"/>
+          <a:ext cx="0" cy="0"/>
+          <a:chOff x="0" y="0"/>
+          <a:chExt cx="0" cy="0"/>
+        </a:xfrm>
+      </p:grpSpPr>
+      <p:sp>
+        <p:nvSpPr>
+          <p:cNvPr id="2" name="Title 1">
+            <a:extLst>
+              <a:ext uri="{FF2B5EF4-FFF2-40B4-BE49-F238E27FC236}">
+                <a16:creationId xmlns:a16="http://schemas.microsoft.com/office/drawing/2014/main" id="{1FB791D1-FA47-7731-53F8-3CB7C6B1952D}"/>
+              </a:ext>
+            </a:extLst>
+          </p:cNvPr>
+          <p:cNvSpPr>
+            <a:spLocks noGrp="1"/>
+          </p:cNvSpPr>
+          <p:nvPr>
+            <p:ph type="title"/>
+          </p:nvPr>
+        </p:nvSpPr>
+        <p:spPr/>
+        <p:txBody>
+          <a:bodyPr/>
+          <a:lstStyle/>
+          <a:p>
+            <a:r>
+              <a:rPr lang="en-US" dirty="0"/>
+              <a:t>Legal and Contractual Challenges</a:t>
+            </a:r>
+          </a:p>
+        </p:txBody>
+      </p:sp>
+      <p:sp>
+        <p:nvSpPr>
+          <p:cNvPr id="3" name="Text Placeholder 2">
+            <a:extLst>
+              <a:ext uri="{FF2B5EF4-FFF2-40B4-BE49-F238E27FC236}">
+                <a16:creationId xmlns:a16="http://schemas.microsoft.com/office/drawing/2014/main" id="{ABFA8EA6-7587-5A19-15B8-477D5DF5DD63}"/>
+              </a:ext>
+            </a:extLst>
+          </p:cNvPr>
+          <p:cNvSpPr>
+            <a:spLocks noGrp="1"/>
+          </p:cNvSpPr>
+          <p:nvPr>
+            <p:ph type="body" idx="1"/>
+          </p:nvPr>
+        </p:nvSpPr>
+        <p:spPr/>
+        <p:txBody>
+          <a:bodyPr/>
+          <a:lstStyle/>
+          <a:p>
+            <a:r>
+              <a:rPr lang="en-US" dirty="0"/>
+              <a:t>Some of the issues will be legitimate, but some will be excuses and lack of awareness</a:t>
+            </a:r>
+          </a:p>
+          <a:p>
+            <a:endParaRPr lang="en-US" dirty="0"/>
+          </a:p>
+          <a:p>
+            <a:r>
+              <a:rPr lang="en-US" dirty="0"/>
+              <a:t>Be aware of all the legal acronyms</a:t>
+            </a:r>
+          </a:p>
+          <a:p>
+            <a:endParaRPr lang="en-US" dirty="0"/>
+          </a:p>
+          <a:p>
+            <a:endParaRPr lang="en-US" dirty="0"/>
+          </a:p>
+        </p:txBody>
+      </p:sp>
+      <p:sp>
+        <p:nvSpPr>
+          <p:cNvPr id="4" name="Rectangle 3">
+            <a:extLst>
+              <a:ext uri="{FF2B5EF4-FFF2-40B4-BE49-F238E27FC236}">
+                <a16:creationId xmlns:a16="http://schemas.microsoft.com/office/drawing/2014/main" id="{12A2C67A-1D1F-FE5A-12D8-3E984D91493F}"/>
+              </a:ext>
+            </a:extLst>
+          </p:cNvPr>
+          <p:cNvSpPr/>
+          <p:nvPr/>
+        </p:nvSpPr>
+        <p:spPr>
+          <a:xfrm>
+            <a:off x="1778135" y="4182677"/>
+            <a:ext cx="2339102" cy="923330"/>
+          </a:xfrm>
+          <a:prstGeom prst="rect">
+            <a:avLst/>
+          </a:prstGeom>
+          <a:noFill/>
+        </p:spPr>
+        <p:txBody>
+          <a:bodyPr wrap="none" lIns="91440" tIns="45720" rIns="91440" bIns="45720">
+            <a:spAutoFit/>
+          </a:bodyPr>
+          <a:lstStyle/>
+          <a:p>
+            <a:pPr algn="ctr"/>
+            <a:r>
+              <a:rPr lang="en-US" sz="5400" b="1" cap="none" spc="0" dirty="0">
+                <a:ln w="12700" cmpd="sng">
+                  <a:solidFill>
+                    <a:schemeClr val="accent4"/>
+                  </a:solidFill>
+                  <a:prstDash val="solid"/>
+                </a:ln>
+                <a:gradFill>
+                  <a:gsLst>
+                    <a:gs pos="0">
+                      <a:schemeClr val="accent4"/>
+                    </a:gs>
+                    <a:gs pos="4000">
+                      <a:schemeClr val="accent4">
+                        <a:lumMod val="60000"/>
+                        <a:lumOff val="40000"/>
+                      </a:schemeClr>
+                    </a:gs>
+                    <a:gs pos="87000">
+                      <a:schemeClr val="accent4">
+                        <a:lumMod val="20000"/>
+                        <a:lumOff val="80000"/>
+                      </a:schemeClr>
+                    </a:gs>
+                  </a:gsLst>
+                  <a:lin ang="5400000"/>
+                </a:gradFill>
+                <a:effectLst/>
+              </a:rPr>
+              <a:t>HIPAA</a:t>
+            </a:r>
+          </a:p>
+        </p:txBody>
+      </p:sp>
+      <p:sp>
+        <p:nvSpPr>
+          <p:cNvPr id="5" name="Rectangle 4">
+            <a:extLst>
+              <a:ext uri="{FF2B5EF4-FFF2-40B4-BE49-F238E27FC236}">
+                <a16:creationId xmlns:a16="http://schemas.microsoft.com/office/drawing/2014/main" id="{B31B295D-4ACD-7F5B-DEFD-6B9C9D4BC848}"/>
+              </a:ext>
+            </a:extLst>
+          </p:cNvPr>
+          <p:cNvSpPr/>
+          <p:nvPr/>
+        </p:nvSpPr>
+        <p:spPr>
+          <a:xfrm>
+            <a:off x="4329457" y="3721012"/>
+            <a:ext cx="2300630" cy="923330"/>
+          </a:xfrm>
+          <a:prstGeom prst="rect">
+            <a:avLst/>
+          </a:prstGeom>
+          <a:noFill/>
+        </p:spPr>
+        <p:txBody>
+          <a:bodyPr wrap="none" lIns="91440" tIns="45720" rIns="91440" bIns="45720">
+            <a:spAutoFit/>
+          </a:bodyPr>
+          <a:lstStyle/>
+          <a:p>
+            <a:pPr algn="ctr"/>
+            <a:r>
+              <a:rPr lang="en-US" sz="5400" b="1" cap="none" spc="0" dirty="0">
+                <a:ln w="12700" cmpd="sng">
+                  <a:solidFill>
+                    <a:schemeClr val="accent4"/>
+                  </a:solidFill>
+                  <a:prstDash val="solid"/>
+                </a:ln>
+                <a:gradFill>
+                  <a:gsLst>
+                    <a:gs pos="0">
+                      <a:schemeClr val="accent4"/>
+                    </a:gs>
+                    <a:gs pos="4000">
+                      <a:schemeClr val="accent4">
+                        <a:lumMod val="60000"/>
+                        <a:lumOff val="40000"/>
+                      </a:schemeClr>
+                    </a:gs>
+                    <a:gs pos="87000">
+                      <a:schemeClr val="accent4">
+                        <a:lumMod val="20000"/>
+                        <a:lumOff val="80000"/>
+                      </a:schemeClr>
+                    </a:gs>
+                  </a:gsLst>
+                  <a:lin ang="5400000"/>
+                </a:gradFill>
+                <a:effectLst/>
+              </a:rPr>
+              <a:t>HIPPA</a:t>
+            </a:r>
+          </a:p>
+        </p:txBody>
+      </p:sp>
+      <p:sp>
+        <p:nvSpPr>
+          <p:cNvPr id="6" name="Rectangle 5">
+            <a:extLst>
+              <a:ext uri="{FF2B5EF4-FFF2-40B4-BE49-F238E27FC236}">
+                <a16:creationId xmlns:a16="http://schemas.microsoft.com/office/drawing/2014/main" id="{DFCA2DB1-B349-3813-E147-086F8925BAB6}"/>
+              </a:ext>
+            </a:extLst>
+          </p:cNvPr>
+          <p:cNvSpPr/>
+          <p:nvPr/>
+        </p:nvSpPr>
+        <p:spPr>
+          <a:xfrm>
+            <a:off x="4327155" y="5106007"/>
+            <a:ext cx="2800768" cy="923330"/>
+          </a:xfrm>
+          <a:prstGeom prst="rect">
+            <a:avLst/>
+          </a:prstGeom>
+          <a:noFill/>
+        </p:spPr>
+        <p:txBody>
+          <a:bodyPr wrap="none" lIns="91440" tIns="45720" rIns="91440" bIns="45720">
+            <a:spAutoFit/>
+          </a:bodyPr>
+          <a:lstStyle/>
+          <a:p>
+            <a:pPr algn="ctr"/>
+            <a:r>
+              <a:rPr lang="en-US" sz="5400" b="1" cap="none" spc="0" dirty="0">
+                <a:ln w="12700" cmpd="sng">
+                  <a:solidFill>
+                    <a:schemeClr val="accent4"/>
+                  </a:solidFill>
+                  <a:prstDash val="solid"/>
+                </a:ln>
+                <a:gradFill>
+                  <a:gsLst>
+                    <a:gs pos="0">
+                      <a:schemeClr val="accent4"/>
+                    </a:gs>
+                    <a:gs pos="4000">
+                      <a:schemeClr val="accent4">
+                        <a:lumMod val="60000"/>
+                        <a:lumOff val="40000"/>
+                      </a:schemeClr>
+                    </a:gs>
+                    <a:gs pos="87000">
+                      <a:schemeClr val="accent4">
+                        <a:lumMod val="20000"/>
+                        <a:lumOff val="80000"/>
+                      </a:schemeClr>
+                    </a:gs>
+                  </a:gsLst>
+                  <a:lin ang="5400000"/>
+                </a:gradFill>
+                <a:effectLst/>
+              </a:rPr>
+              <a:t>HIPPAA</a:t>
+            </a:r>
+          </a:p>
+        </p:txBody>
+      </p:sp>
+      <p:sp>
+        <p:nvSpPr>
+          <p:cNvPr id="8" name="Rectangle 7">
+            <a:extLst>
+              <a:ext uri="{FF2B5EF4-FFF2-40B4-BE49-F238E27FC236}">
+                <a16:creationId xmlns:a16="http://schemas.microsoft.com/office/drawing/2014/main" id="{6D66BEEB-8386-44D1-BAD4-2266011E26D4}"/>
+              </a:ext>
+            </a:extLst>
+          </p:cNvPr>
+          <p:cNvSpPr/>
+          <p:nvPr/>
+        </p:nvSpPr>
+        <p:spPr>
+          <a:xfrm>
+            <a:off x="7784250" y="3658516"/>
+            <a:ext cx="2531462" cy="923330"/>
+          </a:xfrm>
+          <a:prstGeom prst="rect">
+            <a:avLst/>
+          </a:prstGeom>
+          <a:noFill/>
+        </p:spPr>
+        <p:txBody>
+          <a:bodyPr wrap="none" lIns="91440" tIns="45720" rIns="91440" bIns="45720">
+            <a:spAutoFit/>
+          </a:bodyPr>
+          <a:lstStyle/>
+          <a:p>
+            <a:pPr algn="ctr"/>
+            <a:r>
+              <a:rPr lang="en-US" sz="5400" b="1" cap="none" spc="0" dirty="0">
+                <a:ln w="9525">
+                  <a:solidFill>
+                    <a:schemeClr val="bg1"/>
+                  </a:solidFill>
+                  <a:prstDash val="solid"/>
+                </a:ln>
+                <a:solidFill>
+                  <a:schemeClr val="accent5"/>
+                </a:solidFill>
+                <a:effectLst>
+                  <a:outerShdw blurRad="12700" dist="38100" dir="2700000" algn="tl" rotWithShape="0">
+                    <a:schemeClr val="accent5">
+                      <a:lumMod val="60000"/>
+                      <a:lumOff val="40000"/>
+                    </a:schemeClr>
+                  </a:outerShdw>
+                </a:effectLst>
+              </a:rPr>
+              <a:t>FERPA</a:t>
+            </a:r>
+          </a:p>
+        </p:txBody>
+      </p:sp>
+      <p:sp>
+        <p:nvSpPr>
+          <p:cNvPr id="9" name="Rectangle 8">
+            <a:extLst>
+              <a:ext uri="{FF2B5EF4-FFF2-40B4-BE49-F238E27FC236}">
+                <a16:creationId xmlns:a16="http://schemas.microsoft.com/office/drawing/2014/main" id="{54A67A49-90C1-89B0-7DBD-C4670C308A8A}"/>
+              </a:ext>
+            </a:extLst>
+          </p:cNvPr>
+          <p:cNvSpPr/>
+          <p:nvPr/>
+        </p:nvSpPr>
+        <p:spPr>
+          <a:xfrm>
+            <a:off x="1149024" y="5348269"/>
+            <a:ext cx="2185215" cy="923330"/>
+          </a:xfrm>
+          <a:prstGeom prst="rect">
+            <a:avLst/>
+          </a:prstGeom>
+          <a:noFill/>
+        </p:spPr>
+        <p:txBody>
+          <a:bodyPr wrap="none" lIns="91440" tIns="45720" rIns="91440" bIns="45720">
+            <a:spAutoFit/>
+            <a:scene3d>
+              <a:camera prst="orthographicFront"/>
+              <a:lightRig rig="harsh" dir="t"/>
+            </a:scene3d>
+            <a:sp3d extrusionH="57150" prstMaterial="matte">
+              <a:bevelT w="63500" h="12700" prst="angle"/>
+              <a:contourClr>
+                <a:schemeClr val="bg1">
+                  <a:lumMod val="65000"/>
+                </a:schemeClr>
+              </a:contourClr>
+            </a:sp3d>
+          </a:bodyPr>
+          <a:lstStyle/>
+          <a:p>
+            <a:pPr algn="ctr"/>
+            <a:r>
+              <a:rPr lang="en-US" sz="5400" b="1" cap="none" spc="0" dirty="0">
+                <a:ln/>
+                <a:solidFill>
+                  <a:schemeClr val="accent3"/>
+                </a:solidFill>
+                <a:effectLst/>
+              </a:rPr>
+              <a:t>GDPR</a:t>
+            </a:r>
+          </a:p>
+        </p:txBody>
+      </p:sp>
+    </p:spTree>
+    <p:extLst>
+      <p:ext uri="{BB962C8B-B14F-4D97-AF65-F5344CB8AC3E}">
+        <p14:creationId xmlns:p14="http://schemas.microsoft.com/office/powerpoint/2010/main" val="3956826161"/>
+      </p:ext>
+    </p:extLst>
+  </p:cSld>
+  <p:clrMapOvr>
+    <a:masterClrMapping/>
+  </p:clrMapOvr>
+</p:sld>
+</file>
+
+<file path=ppt/slides/slide19.xml><?xml version="1.0" encoding="utf-8"?>
+<p:sld xmlns:a="http://schemas.openxmlformats.org/drawingml/2006/main" xmlns:r="http://schemas.openxmlformats.org/officeDocument/2006/relationships" xmlns:p="http://schemas.openxmlformats.org/presentationml/2006/main">
+  <p:cSld>
+    <p:spTree>
+      <p:nvGrpSpPr>
+        <p:cNvPr id="1" name=""/>
+        <p:cNvGrpSpPr/>
+        <p:nvPr/>
+      </p:nvGrpSpPr>
+      <p:grpSpPr>
+        <a:xfrm>
+          <a:off x="0" y="0"/>
+          <a:ext cx="0" cy="0"/>
+          <a:chOff x="0" y="0"/>
+          <a:chExt cx="0" cy="0"/>
+        </a:xfrm>
+      </p:grpSpPr>
+      <p:sp>
+        <p:nvSpPr>
+          <p:cNvPr id="2" name="Title 1">
+            <a:extLst>
+              <a:ext uri="{FF2B5EF4-FFF2-40B4-BE49-F238E27FC236}">
+                <a16:creationId xmlns:a16="http://schemas.microsoft.com/office/drawing/2014/main" id="{C8E60A25-02BD-674B-9661-DF031B0CB52C}"/>
+              </a:ext>
+            </a:extLst>
+          </p:cNvPr>
+          <p:cNvSpPr>
+            <a:spLocks noGrp="1"/>
+          </p:cNvSpPr>
+          <p:nvPr>
+            <p:ph type="title"/>
+          </p:nvPr>
+        </p:nvSpPr>
+        <p:spPr/>
+        <p:txBody>
+          <a:bodyPr/>
+          <a:lstStyle/>
+          <a:p>
+            <a:r>
+              <a:rPr lang="en-US" dirty="0"/>
+              <a:t>Technical challenges (in data acquisition/access)</a:t>
+            </a:r>
+          </a:p>
+        </p:txBody>
+      </p:sp>
+      <p:sp>
+        <p:nvSpPr>
+          <p:cNvPr id="3" name="Text Placeholder 2">
+            <a:extLst>
+              <a:ext uri="{FF2B5EF4-FFF2-40B4-BE49-F238E27FC236}">
+                <a16:creationId xmlns:a16="http://schemas.microsoft.com/office/drawing/2014/main" id="{B47464FC-F480-BD4E-8C73-EA0095EB65C0}"/>
+              </a:ext>
+            </a:extLst>
+          </p:cNvPr>
+          <p:cNvSpPr>
+            <a:spLocks noGrp="1"/>
+          </p:cNvSpPr>
+          <p:nvPr>
+            <p:ph type="body" idx="1"/>
+          </p:nvPr>
+        </p:nvSpPr>
+        <p:spPr/>
+        <p:txBody>
+          <a:bodyPr/>
+          <a:lstStyle/>
+          <a:p>
+            <a:r>
+              <a:rPr lang="en-US" dirty="0"/>
+              <a:t>How should you get data?</a:t>
+            </a:r>
+          </a:p>
+          <a:p>
+            <a:pPr lvl="1">
+              <a:spcBef>
+                <a:spcPts val="0"/>
+              </a:spcBef>
+            </a:pPr>
+            <a:r>
+              <a:rPr lang="en-US" dirty="0"/>
+              <a:t>API access</a:t>
+            </a:r>
+          </a:p>
+          <a:p>
+            <a:pPr lvl="1">
+              <a:spcBef>
+                <a:spcPts val="0"/>
+              </a:spcBef>
+            </a:pPr>
+            <a:r>
+              <a:rPr lang="en-US" dirty="0"/>
+              <a:t>Flat files</a:t>
+            </a:r>
+          </a:p>
+          <a:p>
+            <a:pPr lvl="1">
+              <a:spcBef>
+                <a:spcPts val="0"/>
+              </a:spcBef>
+            </a:pPr>
+            <a:r>
+              <a:rPr lang="en-US" dirty="0"/>
+              <a:t>Database dumps</a:t>
+            </a:r>
+          </a:p>
+          <a:p>
+            <a:pPr lvl="1">
+              <a:spcBef>
+                <a:spcPts val="0"/>
+              </a:spcBef>
+            </a:pPr>
+            <a:endParaRPr lang="en-US" dirty="0"/>
+          </a:p>
+          <a:p>
+            <a:r>
+              <a:rPr lang="en-US" dirty="0"/>
+              <a:t>How much should it be processed before you get it to use in downstream ML tasks?</a:t>
+            </a:r>
+          </a:p>
+          <a:p>
+            <a:endParaRPr lang="en-US" dirty="0"/>
+          </a:p>
+          <a:p>
+            <a:r>
+              <a:rPr lang="en-US" dirty="0"/>
+              <a:t>How do you build a repeatable data acquisition pipeline? Where do you start?</a:t>
+            </a:r>
+          </a:p>
+          <a:p>
+            <a:endParaRPr lang="en-US" dirty="0"/>
+          </a:p>
+          <a:p>
+            <a:r>
+              <a:rPr lang="en-US" dirty="0"/>
+              <a:t>When do you collect new data?</a:t>
+            </a:r>
+          </a:p>
+          <a:p>
+            <a:pPr marL="565150" lvl="1" indent="0">
+              <a:spcBef>
+                <a:spcPts val="0"/>
+              </a:spcBef>
+              <a:buNone/>
+            </a:pPr>
+            <a:endParaRPr lang="en-US" dirty="0"/>
+          </a:p>
+        </p:txBody>
+      </p:sp>
+    </p:spTree>
+    <p:extLst>
+      <p:ext uri="{BB962C8B-B14F-4D97-AF65-F5344CB8AC3E}">
+        <p14:creationId xmlns:p14="http://schemas.microsoft.com/office/powerpoint/2010/main" val="3716585973"/>
+      </p:ext>
+    </p:extLst>
+  </p:cSld>
+  <p:clrMapOvr>
+    <a:masterClrMapping/>
+  </p:clrMapOvr>
+</p:sld>
+</file>
+
+<file path=ppt/slides/slide2.xml><?xml version="1.0" encoding="utf-8"?>
+<p:sld xmlns:a="http://schemas.openxmlformats.org/drawingml/2006/main" xmlns:r="http://schemas.openxmlformats.org/officeDocument/2006/relationships" xmlns:p="http://schemas.openxmlformats.org/presentationml/2006/main">
+  <p:cSld>
+    <p:spTree>
+      <p:nvGrpSpPr>
+        <p:cNvPr id="1" name=""/>
+        <p:cNvGrpSpPr/>
+        <p:nvPr/>
+      </p:nvGrpSpPr>
+      <p:grpSpPr>
+        <a:xfrm>
+          <a:off x="0" y="0"/>
+          <a:ext cx="0" cy="0"/>
+          <a:chOff x="0" y="0"/>
+          <a:chExt cx="0" cy="0"/>
+        </a:xfrm>
+      </p:grpSpPr>
+      <p:sp>
+        <p:nvSpPr>
+          <p:cNvPr id="3" name="Title 2">
+            <a:extLst>
+              <a:ext uri="{FF2B5EF4-FFF2-40B4-BE49-F238E27FC236}">
+                <a16:creationId xmlns:a16="http://schemas.microsoft.com/office/drawing/2014/main" id="{9323871C-7CA8-1448-8FFC-1AE6E1838941}"/>
+              </a:ext>
+            </a:extLst>
+          </p:cNvPr>
+          <p:cNvSpPr>
+            <a:spLocks noGrp="1"/>
+          </p:cNvSpPr>
+          <p:nvPr>
+            <p:ph type="title"/>
+          </p:nvPr>
+        </p:nvSpPr>
+        <p:spPr/>
+        <p:txBody>
+          <a:bodyPr/>
+          <a:lstStyle/>
+          <a:p>
+            <a:r>
+              <a:rPr lang="en-US" dirty="0"/>
+              <a:t>Things to remember</a:t>
+            </a:r>
+          </a:p>
+        </p:txBody>
+      </p:sp>
+      <p:sp>
+        <p:nvSpPr>
+          <p:cNvPr id="4" name="Text Placeholder 3">
+            <a:extLst>
+              <a:ext uri="{FF2B5EF4-FFF2-40B4-BE49-F238E27FC236}">
+                <a16:creationId xmlns:a16="http://schemas.microsoft.com/office/drawing/2014/main" id="{5E600BA7-FA45-884F-9820-9E5F2CB7AA48}"/>
+              </a:ext>
+            </a:extLst>
+          </p:cNvPr>
+          <p:cNvSpPr>
+            <a:spLocks noGrp="1"/>
+          </p:cNvSpPr>
+          <p:nvPr>
+            <p:ph type="body" idx="1"/>
+          </p:nvPr>
+        </p:nvSpPr>
+        <p:spPr/>
+        <p:txBody>
+          <a:bodyPr/>
+          <a:lstStyle/>
+          <a:p>
+            <a:r>
+              <a:rPr lang="en-US" b="1" dirty="0"/>
+              <a:t>Make sure and check that you can access your project repo today and </a:t>
+            </a:r>
+            <a:r>
+              <a:rPr lang="en-US" b="1" dirty="0">
+                <a:hlinkClick r:id="rId2"/>
+              </a:rPr>
+              <a:t>download the data</a:t>
+            </a:r>
+            <a:endParaRPr lang="en-US" b="1" dirty="0"/>
+          </a:p>
+          <a:p>
+            <a:endParaRPr lang="en-US" dirty="0"/>
+          </a:p>
+          <a:p>
+            <a:pPr marL="565150" lvl="1" indent="0">
+              <a:buNone/>
+            </a:pPr>
+            <a:endParaRPr lang="en-US" dirty="0"/>
+          </a:p>
+          <a:p>
+            <a:r>
+              <a:rPr lang="en-US" dirty="0"/>
+              <a:t>What’s coming next week:</a:t>
+            </a:r>
+          </a:p>
+          <a:p>
+            <a:pPr lvl="1"/>
+            <a:r>
+              <a:rPr lang="en-US" dirty="0"/>
+              <a:t>Data Exploration Assignment and Presentation</a:t>
+            </a:r>
+          </a:p>
+          <a:p>
+            <a:pPr lvl="1">
+              <a:lnSpc>
+                <a:spcPct val="100000"/>
+              </a:lnSpc>
+              <a:spcBef>
+                <a:spcPts val="500"/>
+              </a:spcBef>
+            </a:pPr>
+            <a:r>
+              <a:rPr lang="en-US" dirty="0"/>
+              <a:t>Formulation and Baselines: Readings (Obermeyer et al; Passi &amp; Barocas)</a:t>
+            </a:r>
+          </a:p>
+        </p:txBody>
+      </p:sp>
+    </p:spTree>
+    <p:extLst>
+      <p:ext uri="{BB962C8B-B14F-4D97-AF65-F5344CB8AC3E}">
+        <p14:creationId xmlns:p14="http://schemas.microsoft.com/office/powerpoint/2010/main" val="1285932549"/>
+      </p:ext>
+    </p:extLst>
+  </p:cSld>
+  <p:clrMapOvr>
+    <a:masterClrMapping/>
+  </p:clrMapOvr>
+</p:sld>
+</file>
+
+<file path=ppt/slides/slide20.xml><?xml version="1.0" encoding="utf-8"?>
+<p:sld xmlns:a="http://schemas.openxmlformats.org/drawingml/2006/main" xmlns:r="http://schemas.openxmlformats.org/officeDocument/2006/relationships" xmlns:p="http://schemas.openxmlformats.org/presentationml/2006/main">
+  <p:cSld>
+    <p:spTree>
+      <p:nvGrpSpPr>
+        <p:cNvPr id="1" name="Shape 585"/>
+        <p:cNvGrpSpPr/>
+        <p:nvPr/>
+      </p:nvGrpSpPr>
+      <p:grpSpPr>
+        <a:xfrm>
+          <a:off x="0" y="0"/>
+          <a:ext cx="0" cy="0"/>
+          <a:chOff x="0" y="0"/>
+          <a:chExt cx="0" cy="0"/>
+        </a:xfrm>
+      </p:grpSpPr>
+      <p:sp>
+        <p:nvSpPr>
+          <p:cNvPr id="586" name="Google Shape;586;g32d3355825c_1_46"/>
+          <p:cNvSpPr txBox="1">
+            <a:spLocks noGrp="1"/>
+          </p:cNvSpPr>
+          <p:nvPr>
+            <p:ph type="title"/>
+          </p:nvPr>
+        </p:nvSpPr>
+        <p:spPr>
+          <a:xfrm>
+            <a:off x="415600" y="86563"/>
+            <a:ext cx="11360800" cy="763600"/>
+          </a:xfrm>
+          <a:prstGeom prst="rect">
+            <a:avLst/>
+          </a:prstGeom>
+          <a:noFill/>
+          <a:ln>
+            <a:noFill/>
+          </a:ln>
+        </p:spPr>
+        <p:txBody>
+          <a:bodyPr spcFirstLastPara="1" wrap="square" lIns="162533" tIns="162533" rIns="162533" bIns="162533" anchor="t" anchorCtr="0">
+            <a:noAutofit/>
+          </a:bodyPr>
+          <a:lstStyle/>
+          <a:p>
+            <a:pPr algn="ctr"/>
+            <a:r>
+              <a:rPr lang="en-US"/>
+              <a:t>Ethical issues to consider</a:t>
+            </a:r>
+            <a:endParaRPr/>
+          </a:p>
+        </p:txBody>
+      </p:sp>
+      <p:sp>
+        <p:nvSpPr>
+          <p:cNvPr id="587" name="Google Shape;587;g32d3355825c_1_46"/>
+          <p:cNvSpPr txBox="1">
+            <a:spLocks noGrp="1"/>
+          </p:cNvSpPr>
+          <p:nvPr>
+            <p:ph type="body" idx="1"/>
+          </p:nvPr>
+        </p:nvSpPr>
+        <p:spPr>
+          <a:xfrm>
+            <a:off x="962300" y="1638233"/>
+            <a:ext cx="10756000" cy="4555200"/>
+          </a:xfrm>
+          <a:prstGeom prst="rect">
+            <a:avLst/>
+          </a:prstGeom>
+          <a:noFill/>
+          <a:ln>
+            <a:noFill/>
+          </a:ln>
+        </p:spPr>
+        <p:txBody>
+          <a:bodyPr spcFirstLastPara="1" wrap="square" lIns="162533" tIns="162533" rIns="162533" bIns="162533" anchor="t" anchorCtr="0">
+            <a:noAutofit/>
+          </a:bodyPr>
+          <a:lstStyle/>
+          <a:p>
+            <a:pPr marL="0" indent="0">
+              <a:lnSpc>
+                <a:spcPct val="100000"/>
+              </a:lnSpc>
+              <a:buNone/>
+            </a:pPr>
+            <a:r>
+              <a:rPr lang="en-US" b="1" dirty="0"/>
+              <a:t>Data Privacy:</a:t>
+            </a:r>
+            <a:r>
+              <a:rPr lang="en-US" dirty="0"/>
+              <a:t> What legal and security requirements govern how this data is used? What additional ethical considerations apply? </a:t>
+            </a:r>
+            <a:endParaRPr dirty="0"/>
+          </a:p>
+          <a:p>
+            <a:pPr marL="0" indent="0">
+              <a:lnSpc>
+                <a:spcPct val="100000"/>
+              </a:lnSpc>
+              <a:buNone/>
+            </a:pPr>
+            <a:endParaRPr dirty="0"/>
+          </a:p>
+          <a:p>
+            <a:pPr marL="0" indent="0">
+              <a:lnSpc>
+                <a:spcPct val="100000"/>
+              </a:lnSpc>
+              <a:buNone/>
+            </a:pPr>
+            <a:r>
+              <a:rPr lang="en-US" b="1" dirty="0"/>
+              <a:t>Data ownership and transparency: </a:t>
+            </a:r>
+            <a:r>
+              <a:rPr lang="en-US" dirty="0"/>
+              <a:t>Are the people whose data it is (and is about) aware that their data is being used and how it affects them? What does consent look like?</a:t>
+            </a:r>
+            <a:endParaRPr dirty="0"/>
+          </a:p>
+          <a:p>
+            <a:pPr marL="0" indent="0">
+              <a:lnSpc>
+                <a:spcPct val="100000"/>
+              </a:lnSpc>
+              <a:buNone/>
+            </a:pPr>
+            <a:endParaRPr dirty="0"/>
+          </a:p>
+          <a:p>
+            <a:pPr marL="0" indent="0">
+              <a:lnSpc>
+                <a:spcPct val="100000"/>
+              </a:lnSpc>
+              <a:buNone/>
+            </a:pPr>
+            <a:r>
+              <a:rPr lang="en-US" b="1" dirty="0"/>
+              <a:t>Bias, equity, and fairness: </a:t>
+            </a:r>
+            <a:r>
+              <a:rPr lang="en-US" dirty="0"/>
+              <a:t>Are there biases in the data sources? Is the data equally accurate and available about everyone? </a:t>
+            </a:r>
+            <a:endParaRPr dirty="0"/>
+          </a:p>
+        </p:txBody>
+      </p:sp>
+      <p:pic>
+        <p:nvPicPr>
+          <p:cNvPr id="588" name="Google Shape;588;g32d3355825c_1_46"/>
+          <p:cNvPicPr preferRelativeResize="0"/>
+          <p:nvPr/>
+        </p:nvPicPr>
+        <p:blipFill rotWithShape="1">
+          <a:blip r:embed="rId3">
+            <a:alphaModFix/>
+          </a:blip>
+          <a:srcRect/>
+          <a:stretch/>
+        </p:blipFill>
+        <p:spPr>
+          <a:xfrm>
+            <a:off x="198700" y="1694967"/>
+            <a:ext cx="763600" cy="763600"/>
+          </a:xfrm>
+          <a:prstGeom prst="rect">
+            <a:avLst/>
+          </a:prstGeom>
+          <a:noFill/>
+          <a:ln>
+            <a:noFill/>
+          </a:ln>
+        </p:spPr>
+      </p:pic>
+      <p:pic>
+        <p:nvPicPr>
+          <p:cNvPr id="589" name="Google Shape;589;g32d3355825c_1_46"/>
+          <p:cNvPicPr preferRelativeResize="0"/>
+          <p:nvPr/>
+        </p:nvPicPr>
+        <p:blipFill rotWithShape="1">
+          <a:blip r:embed="rId4">
+            <a:alphaModFix/>
+          </a:blip>
+          <a:srcRect/>
+          <a:stretch/>
+        </p:blipFill>
+        <p:spPr>
+          <a:xfrm>
+            <a:off x="198700" y="3905600"/>
+            <a:ext cx="763600" cy="763600"/>
+          </a:xfrm>
+          <a:prstGeom prst="rect">
+            <a:avLst/>
+          </a:prstGeom>
+          <a:noFill/>
+          <a:ln>
+            <a:noFill/>
+          </a:ln>
+        </p:spPr>
+      </p:pic>
+      <p:pic>
+        <p:nvPicPr>
+          <p:cNvPr id="590" name="Google Shape;590;g32d3355825c_1_46"/>
+          <p:cNvPicPr preferRelativeResize="0"/>
+          <p:nvPr/>
+        </p:nvPicPr>
+        <p:blipFill rotWithShape="1">
+          <a:blip r:embed="rId5">
+            <a:alphaModFix/>
+          </a:blip>
+          <a:srcRect/>
+          <a:stretch/>
+        </p:blipFill>
+        <p:spPr>
+          <a:xfrm>
+            <a:off x="198700" y="2800276"/>
+            <a:ext cx="763600" cy="763600"/>
+          </a:xfrm>
+          <a:prstGeom prst="rect">
+            <a:avLst/>
+          </a:prstGeom>
+          <a:noFill/>
+          <a:ln>
+            <a:noFill/>
+          </a:ln>
+        </p:spPr>
+      </p:pic>
+    </p:spTree>
+  </p:cSld>
+  <p:clrMapOvr>
+    <a:masterClrMapping/>
+  </p:clrMapOvr>
+</p:sld>
+</file>
+
+<file path=ppt/slides/slide21.xml><?xml version="1.0" encoding="utf-8"?>
+<p:sld xmlns:a="http://schemas.openxmlformats.org/drawingml/2006/main" xmlns:r="http://schemas.openxmlformats.org/officeDocument/2006/relationships" xmlns:p="http://schemas.openxmlformats.org/presentationml/2006/main">
+  <p:cSld>
+    <p:spTree>
+      <p:nvGrpSpPr>
+        <p:cNvPr id="1" name=""/>
+        <p:cNvGrpSpPr/>
+        <p:nvPr/>
+      </p:nvGrpSpPr>
+      <p:grpSpPr>
+        <a:xfrm>
+          <a:off x="0" y="0"/>
+          <a:ext cx="0" cy="0"/>
+          <a:chOff x="0" y="0"/>
+          <a:chExt cx="0" cy="0"/>
+        </a:xfrm>
+      </p:grpSpPr>
+      <p:sp>
+        <p:nvSpPr>
+          <p:cNvPr id="2" name="Title 1">
+            <a:extLst>
+              <a:ext uri="{FF2B5EF4-FFF2-40B4-BE49-F238E27FC236}">
+                <a16:creationId xmlns:a16="http://schemas.microsoft.com/office/drawing/2014/main" id="{E3B51200-11ED-A162-EC48-70434E8AFA4F}"/>
+              </a:ext>
+            </a:extLst>
+          </p:cNvPr>
+          <p:cNvSpPr>
+            <a:spLocks noGrp="1"/>
+          </p:cNvSpPr>
+          <p:nvPr>
+            <p:ph type="title"/>
+          </p:nvPr>
+        </p:nvSpPr>
+        <p:spPr/>
+        <p:txBody>
+          <a:bodyPr/>
+          <a:lstStyle/>
+          <a:p>
+            <a:r>
+              <a:rPr lang="en-US" dirty="0"/>
+              <a:t>Data Maturity Assessment</a:t>
+            </a:r>
+          </a:p>
+        </p:txBody>
+      </p:sp>
+      <p:sp>
+        <p:nvSpPr>
+          <p:cNvPr id="3" name="Text Placeholder 2">
+            <a:extLst>
+              <a:ext uri="{FF2B5EF4-FFF2-40B4-BE49-F238E27FC236}">
+                <a16:creationId xmlns:a16="http://schemas.microsoft.com/office/drawing/2014/main" id="{925CD924-C85A-4FC2-55CF-F8F9ED770FDE}"/>
+              </a:ext>
+            </a:extLst>
+          </p:cNvPr>
+          <p:cNvSpPr>
+            <a:spLocks noGrp="1"/>
+          </p:cNvSpPr>
+          <p:nvPr>
+            <p:ph type="body" idx="1"/>
+          </p:nvPr>
+        </p:nvSpPr>
+        <p:spPr/>
+        <p:txBody>
+          <a:bodyPr/>
+          <a:lstStyle/>
+          <a:p>
+            <a:pPr marL="76200" indent="0">
+              <a:buNone/>
+            </a:pPr>
+            <a:r>
+              <a:rPr lang="en-US" dirty="0">
+                <a:hlinkClick r:id="rId2"/>
+              </a:rPr>
+              <a:t>Link</a:t>
+            </a:r>
+            <a:endParaRPr lang="en-US" dirty="0"/>
+          </a:p>
+          <a:p>
+            <a:pPr marL="76200" indent="0">
+              <a:buNone/>
+            </a:pPr>
+            <a:endParaRPr lang="en-US" dirty="0"/>
+          </a:p>
+          <a:p>
+            <a:pPr marL="76200" indent="0">
+              <a:buNone/>
+            </a:pPr>
+            <a:endParaRPr lang="en-US" dirty="0"/>
+          </a:p>
+        </p:txBody>
+      </p:sp>
+    </p:spTree>
+    <p:extLst>
+      <p:ext uri="{BB962C8B-B14F-4D97-AF65-F5344CB8AC3E}">
+        <p14:creationId xmlns:p14="http://schemas.microsoft.com/office/powerpoint/2010/main" val="1513330045"/>
+      </p:ext>
+    </p:extLst>
+  </p:cSld>
+  <p:clrMapOvr>
+    <a:masterClrMapping/>
+  </p:clrMapOvr>
+</p:sld>
+</file>
+
+<file path=ppt/slides/slide22.xml><?xml version="1.0" encoding="utf-8"?>
+<p:sld xmlns:a="http://schemas.openxmlformats.org/drawingml/2006/main" xmlns:r="http://schemas.openxmlformats.org/officeDocument/2006/relationships" xmlns:p="http://schemas.openxmlformats.org/presentationml/2006/main">
+  <p:cSld>
+    <p:spTree>
+      <p:nvGrpSpPr>
         <p:cNvPr id="1" name=""/>
         <p:cNvGrpSpPr/>
         <p:nvPr/>
@@ -12499,7 +17177,7 @@
 </p:sld>
 </file>
 
-<file path=ppt/slides/slide11.xml><?xml version="1.0" encoding="utf-8"?>
+<file path=ppt/slides/slide23.xml><?xml version="1.0" encoding="utf-8"?>
 <p:sld xmlns:a="http://schemas.openxmlformats.org/drawingml/2006/main" xmlns:r="http://schemas.openxmlformats.org/officeDocument/2006/relationships" xmlns:p="http://schemas.openxmlformats.org/presentationml/2006/main">
   <p:cSld>
     <p:spTree>
@@ -12619,7 +17297,7 @@
 </p:sld>
 </file>
 
-<file path=ppt/slides/slide12.xml><?xml version="1.0" encoding="utf-8"?>
+<file path=ppt/slides/slide24.xml><?xml version="1.0" encoding="utf-8"?>
 <p:sld xmlns:a="http://schemas.openxmlformats.org/drawingml/2006/main" xmlns:r="http://schemas.openxmlformats.org/officeDocument/2006/relationships" xmlns:p="http://schemas.openxmlformats.org/presentationml/2006/main">
   <p:cSld>
     <p:spTree>
@@ -12702,7 +17380,7 @@
 </p:sld>
 </file>
 
-<file path=ppt/slides/slide13.xml><?xml version="1.0" encoding="utf-8"?>
+<file path=ppt/slides/slide25.xml><?xml version="1.0" encoding="utf-8"?>
 <p:sld xmlns:a="http://schemas.openxmlformats.org/drawingml/2006/main" xmlns:r="http://schemas.openxmlformats.org/officeDocument/2006/relationships" xmlns:p="http://schemas.openxmlformats.org/presentationml/2006/main" showMasterSp="0">
   <p:cSld>
     <p:bg>
@@ -13227,7 +17905,7 @@
 </p:sld>
 </file>
 
-<file path=ppt/slides/slide14.xml><?xml version="1.0" encoding="utf-8"?>
+<file path=ppt/slides/slide26.xml><?xml version="1.0" encoding="utf-8"?>
 <p:sld xmlns:a="http://schemas.openxmlformats.org/drawingml/2006/main" xmlns:r="http://schemas.openxmlformats.org/officeDocument/2006/relationships" xmlns:p="http://schemas.openxmlformats.org/presentationml/2006/main" show="0">
   <p:cSld>
     <p:spTree>
@@ -13349,7 +18027,7 @@
 </p:sld>
 </file>
 
-<file path=ppt/slides/slide15.xml><?xml version="1.0" encoding="utf-8"?>
+<file path=ppt/slides/slide27.xml><?xml version="1.0" encoding="utf-8"?>
 <p:sld xmlns:a="http://schemas.openxmlformats.org/drawingml/2006/main" xmlns:r="http://schemas.openxmlformats.org/officeDocument/2006/relationships" xmlns:p="http://schemas.openxmlformats.org/presentationml/2006/main">
   <p:cSld>
     <p:spTree>
@@ -13483,7 +18161,7 @@
 </p:sld>
 </file>
 
-<file path=ppt/slides/slide16.xml><?xml version="1.0" encoding="utf-8"?>
+<file path=ppt/slides/slide28.xml><?xml version="1.0" encoding="utf-8"?>
 <p:sld xmlns:a="http://schemas.openxmlformats.org/drawingml/2006/main" xmlns:r="http://schemas.openxmlformats.org/officeDocument/2006/relationships" xmlns:p="http://schemas.openxmlformats.org/presentationml/2006/main">
   <p:cSld>
     <p:spTree>
@@ -13566,7 +18244,7 @@
 </p:sld>
 </file>
 
-<file path=ppt/slides/slide17.xml><?xml version="1.0" encoding="utf-8"?>
+<file path=ppt/slides/slide29.xml><?xml version="1.0" encoding="utf-8"?>
 <p:sld xmlns:a="http://schemas.openxmlformats.org/drawingml/2006/main" xmlns:r="http://schemas.openxmlformats.org/officeDocument/2006/relationships" xmlns:p="http://schemas.openxmlformats.org/presentationml/2006/main">
   <p:cSld>
     <p:spTree>
@@ -13703,7 +18381,188 @@
 </p:sld>
 </file>
 
-<file path=ppt/slides/slide18.xml><?xml version="1.0" encoding="utf-8"?>
+<file path=ppt/slides/slide3.xml><?xml version="1.0" encoding="utf-8"?>
+<p:sld xmlns:a="http://schemas.openxmlformats.org/drawingml/2006/main" xmlns:r="http://schemas.openxmlformats.org/officeDocument/2006/relationships" xmlns:p="http://schemas.openxmlformats.org/presentationml/2006/main">
+  <p:cSld>
+    <p:spTree>
+      <p:nvGrpSpPr>
+        <p:cNvPr id="1" name="Shape 163"/>
+        <p:cNvGrpSpPr/>
+        <p:nvPr/>
+      </p:nvGrpSpPr>
+      <p:grpSpPr>
+        <a:xfrm>
+          <a:off x="0" y="0"/>
+          <a:ext cx="0" cy="0"/>
+          <a:chOff x="0" y="0"/>
+          <a:chExt cx="0" cy="0"/>
+        </a:xfrm>
+      </p:grpSpPr>
+      <p:sp>
+        <p:nvSpPr>
+          <p:cNvPr id="164" name="Google Shape;164;p27"/>
+          <p:cNvSpPr txBox="1">
+            <a:spLocks noGrp="1"/>
+          </p:cNvSpPr>
+          <p:nvPr>
+            <p:ph type="title"/>
+          </p:nvPr>
+        </p:nvSpPr>
+        <p:spPr>
+          <a:xfrm>
+            <a:off x="415600" y="593367"/>
+            <a:ext cx="11360800" cy="763600"/>
+          </a:xfrm>
+          <a:prstGeom prst="rect">
+            <a:avLst/>
+          </a:prstGeom>
+        </p:spPr>
+        <p:txBody>
+          <a:bodyPr spcFirstLastPara="1" wrap="square" lIns="121900" tIns="121900" rIns="121900" bIns="121900" anchor="t" anchorCtr="0">
+            <a:noAutofit/>
+          </a:bodyPr>
+          <a:lstStyle/>
+          <a:p>
+            <a:r>
+              <a:rPr lang="en" dirty="0"/>
+              <a:t>Project</a:t>
+            </a:r>
+            <a:endParaRPr dirty="0"/>
+          </a:p>
+        </p:txBody>
+      </p:sp>
+      <p:sp>
+        <p:nvSpPr>
+          <p:cNvPr id="165" name="Google Shape;165;p27"/>
+          <p:cNvSpPr txBox="1">
+            <a:spLocks noGrp="1"/>
+          </p:cNvSpPr>
+          <p:nvPr>
+            <p:ph type="body" idx="1"/>
+          </p:nvPr>
+        </p:nvSpPr>
+        <p:spPr>
+          <a:xfrm>
+            <a:off x="415600" y="1536633"/>
+            <a:ext cx="11360800" cy="4555200"/>
+          </a:xfrm>
+          <a:prstGeom prst="rect">
+            <a:avLst/>
+          </a:prstGeom>
+        </p:spPr>
+        <p:txBody>
+          <a:bodyPr spcFirstLastPara="1" wrap="square" lIns="121900" tIns="121900" rIns="121900" bIns="121900" anchor="t" anchorCtr="0">
+            <a:noAutofit/>
+          </a:bodyPr>
+          <a:lstStyle/>
+          <a:p>
+            <a:pPr marL="169329" indent="0">
+              <a:lnSpc>
+                <a:spcPct val="146250"/>
+              </a:lnSpc>
+              <a:buClr>
+                <a:srgbClr val="444444"/>
+              </a:buClr>
+              <a:buSzPts val="1600"/>
+              <a:buNone/>
+            </a:pPr>
+            <a:endParaRPr dirty="0">
+              <a:solidFill>
+                <a:srgbClr val="222222"/>
+              </a:solidFill>
+              <a:highlight>
+                <a:srgbClr val="FFFFFF"/>
+              </a:highlight>
+            </a:endParaRPr>
+          </a:p>
+        </p:txBody>
+      </p:sp>
+      <p:pic>
+        <p:nvPicPr>
+          <p:cNvPr id="2" name="Picture 1">
+            <a:extLst>
+              <a:ext uri="{FF2B5EF4-FFF2-40B4-BE49-F238E27FC236}">
+                <a16:creationId xmlns:a16="http://schemas.microsoft.com/office/drawing/2014/main" id="{7754616C-B13B-734C-9D90-D3E25C1D842B}"/>
+              </a:ext>
+            </a:extLst>
+          </p:cNvPr>
+          <p:cNvPicPr>
+            <a:picLocks noChangeAspect="1"/>
+          </p:cNvPicPr>
+          <p:nvPr/>
+        </p:nvPicPr>
+        <p:blipFill>
+          <a:blip r:embed="rId3"/>
+          <a:stretch>
+            <a:fillRect/>
+          </a:stretch>
+        </p:blipFill>
+        <p:spPr>
+          <a:xfrm>
+            <a:off x="0" y="1356966"/>
+            <a:ext cx="12192000" cy="5501033"/>
+          </a:xfrm>
+          <a:prstGeom prst="rect">
+            <a:avLst/>
+          </a:prstGeom>
+        </p:spPr>
+      </p:pic>
+      <p:pic>
+        <p:nvPicPr>
+          <p:cNvPr id="1026" name="Picture 2" descr="DonorsChoose: Support a classroom. Build a future.">
+            <a:extLst>
+              <a:ext uri="{FF2B5EF4-FFF2-40B4-BE49-F238E27FC236}">
+                <a16:creationId xmlns:a16="http://schemas.microsoft.com/office/drawing/2014/main" id="{63585741-D5E1-0C49-9B35-C444E3CCF154}"/>
+              </a:ext>
+            </a:extLst>
+          </p:cNvPr>
+          <p:cNvPicPr>
+            <a:picLocks noChangeAspect="1" noChangeArrowheads="1"/>
+          </p:cNvPicPr>
+          <p:nvPr/>
+        </p:nvPicPr>
+        <p:blipFill>
+          <a:blip r:embed="rId4">
+            <a:extLst>
+              <a:ext uri="{28A0092B-C50C-407E-A947-70E740481C1C}">
+                <a14:useLocalDpi xmlns:a14="http://schemas.microsoft.com/office/drawing/2010/main" val="0"/>
+              </a:ext>
+            </a:extLst>
+          </a:blip>
+          <a:srcRect/>
+          <a:stretch>
+            <a:fillRect/>
+          </a:stretch>
+        </p:blipFill>
+        <p:spPr bwMode="auto">
+          <a:xfrm>
+            <a:off x="8871904" y="1378167"/>
+            <a:ext cx="3320097" cy="1743051"/>
+          </a:xfrm>
+          <a:prstGeom prst="rect">
+            <a:avLst/>
+          </a:prstGeom>
+          <a:noFill/>
+          <a:extLst>
+            <a:ext uri="{909E8E84-426E-40DD-AFC4-6F175D3DCCD1}">
+              <a14:hiddenFill xmlns:a14="http://schemas.microsoft.com/office/drawing/2010/main">
+                <a:solidFill>
+                  <a:srgbClr val="FFFFFF"/>
+                </a:solidFill>
+              </a14:hiddenFill>
+            </a:ext>
+          </a:extLst>
+        </p:spPr>
+      </p:pic>
+    </p:spTree>
+  </p:cSld>
+  <p:clrMapOvr>
+    <a:masterClrMapping/>
+  </p:clrMapOvr>
+</p:sld>
+</file>
+
+<file path=ppt/slides/slide30.xml><?xml version="1.0" encoding="utf-8"?>
 <p:sld xmlns:a="http://schemas.openxmlformats.org/drawingml/2006/main" xmlns:r="http://schemas.openxmlformats.org/officeDocument/2006/relationships" xmlns:p="http://schemas.openxmlformats.org/presentationml/2006/main">
   <p:cSld>
     <p:spTree>
@@ -13791,7 +18650,7 @@
 </p:sld>
 </file>
 
-<file path=ppt/slides/slide19.xml><?xml version="1.0" encoding="utf-8"?>
+<file path=ppt/slides/slide31.xml><?xml version="1.0" encoding="utf-8"?>
 <p:sld xmlns:a="http://schemas.openxmlformats.org/drawingml/2006/main" xmlns:r="http://schemas.openxmlformats.org/officeDocument/2006/relationships" xmlns:p="http://schemas.openxmlformats.org/presentationml/2006/main">
   <p:cSld>
     <p:spTree>
@@ -14450,136 +19309,7 @@
 </p:sld>
 </file>
 
-<file path=ppt/slides/slide2.xml><?xml version="1.0" encoding="utf-8"?>
-<p:sld xmlns:a="http://schemas.openxmlformats.org/drawingml/2006/main" xmlns:r="http://schemas.openxmlformats.org/officeDocument/2006/relationships" xmlns:p="http://schemas.openxmlformats.org/presentationml/2006/main">
-  <p:cSld>
-    <p:spTree>
-      <p:nvGrpSpPr>
-        <p:cNvPr id="1" name=""/>
-        <p:cNvGrpSpPr/>
-        <p:nvPr/>
-      </p:nvGrpSpPr>
-      <p:grpSpPr>
-        <a:xfrm>
-          <a:off x="0" y="0"/>
-          <a:ext cx="0" cy="0"/>
-          <a:chOff x="0" y="0"/>
-          <a:chExt cx="0" cy="0"/>
-        </a:xfrm>
-      </p:grpSpPr>
-      <p:sp>
-        <p:nvSpPr>
-          <p:cNvPr id="3" name="Title 2">
-            <a:extLst>
-              <a:ext uri="{FF2B5EF4-FFF2-40B4-BE49-F238E27FC236}">
-                <a16:creationId xmlns:a16="http://schemas.microsoft.com/office/drawing/2014/main" id="{9323871C-7CA8-1448-8FFC-1AE6E1838941}"/>
-              </a:ext>
-            </a:extLst>
-          </p:cNvPr>
-          <p:cNvSpPr>
-            <a:spLocks noGrp="1"/>
-          </p:cNvSpPr>
-          <p:nvPr>
-            <p:ph type="title"/>
-          </p:nvPr>
-        </p:nvSpPr>
-        <p:spPr/>
-        <p:txBody>
-          <a:bodyPr/>
-          <a:lstStyle/>
-          <a:p>
-            <a:r>
-              <a:rPr lang="en-US" dirty="0"/>
-              <a:t>Things to remember</a:t>
-            </a:r>
-          </a:p>
-        </p:txBody>
-      </p:sp>
-      <p:sp>
-        <p:nvSpPr>
-          <p:cNvPr id="4" name="Text Placeholder 3">
-            <a:extLst>
-              <a:ext uri="{FF2B5EF4-FFF2-40B4-BE49-F238E27FC236}">
-                <a16:creationId xmlns:a16="http://schemas.microsoft.com/office/drawing/2014/main" id="{5E600BA7-FA45-884F-9820-9E5F2CB7AA48}"/>
-              </a:ext>
-            </a:extLst>
-          </p:cNvPr>
-          <p:cNvSpPr>
-            <a:spLocks noGrp="1"/>
-          </p:cNvSpPr>
-          <p:nvPr>
-            <p:ph type="body" idx="1"/>
-          </p:nvPr>
-        </p:nvSpPr>
-        <p:spPr/>
-        <p:txBody>
-          <a:bodyPr/>
-          <a:lstStyle/>
-          <a:p>
-            <a:r>
-              <a:rPr lang="en-US" b="1" dirty="0"/>
-              <a:t>Make sure and check that you can access your project repo today and </a:t>
-            </a:r>
-            <a:r>
-              <a:rPr lang="en-US" b="1" dirty="0">
-                <a:hlinkClick r:id="rId2"/>
-              </a:rPr>
-              <a:t>download the data</a:t>
-            </a:r>
-            <a:endParaRPr lang="en-US" b="1" dirty="0"/>
-          </a:p>
-          <a:p>
-            <a:endParaRPr lang="en-US" dirty="0"/>
-          </a:p>
-          <a:p>
-            <a:pPr marL="565150" lvl="1" indent="0">
-              <a:buNone/>
-            </a:pPr>
-            <a:endParaRPr lang="en-US" dirty="0"/>
-          </a:p>
-          <a:p>
-            <a:r>
-              <a:rPr lang="en-US" dirty="0"/>
-              <a:t>What’s coming next week:</a:t>
-            </a:r>
-          </a:p>
-          <a:p>
-            <a:pPr lvl="1"/>
-            <a:r>
-              <a:rPr lang="en-US" dirty="0"/>
-              <a:t>Data Exploration Assignment and Presentation</a:t>
-            </a:r>
-          </a:p>
-          <a:p>
-            <a:pPr lvl="1">
-              <a:lnSpc>
-                <a:spcPct val="100000"/>
-              </a:lnSpc>
-              <a:spcBef>
-                <a:spcPts val="500"/>
-              </a:spcBef>
-            </a:pPr>
-            <a:r>
-              <a:rPr lang="en-US" dirty="0"/>
-              <a:t>Formulation and Baselines: Readings (Obermeyer et al; Passi &amp; Barocas)</a:t>
-            </a:r>
-          </a:p>
-        </p:txBody>
-      </p:sp>
-    </p:spTree>
-    <p:extLst>
-      <p:ext uri="{BB962C8B-B14F-4D97-AF65-F5344CB8AC3E}">
-        <p14:creationId xmlns:p14="http://schemas.microsoft.com/office/powerpoint/2010/main" val="1285932549"/>
-      </p:ext>
-    </p:extLst>
-  </p:cSld>
-  <p:clrMapOvr>
-    <a:masterClrMapping/>
-  </p:clrMapOvr>
-</p:sld>
-</file>
-
-<file path=ppt/slides/slide20.xml><?xml version="1.0" encoding="utf-8"?>
+<file path=ppt/slides/slide32.xml><?xml version="1.0" encoding="utf-8"?>
 <p:sld xmlns:a="http://schemas.openxmlformats.org/drawingml/2006/main" xmlns:r="http://schemas.openxmlformats.org/officeDocument/2006/relationships" xmlns:p="http://schemas.openxmlformats.org/presentationml/2006/main">
   <p:cSld>
     <p:spTree>
@@ -14671,7 +19401,7 @@
 </p:sld>
 </file>
 
-<file path=ppt/slides/slide21.xml><?xml version="1.0" encoding="utf-8"?>
+<file path=ppt/slides/slide33.xml><?xml version="1.0" encoding="utf-8"?>
 <p:sld xmlns:a="http://schemas.openxmlformats.org/drawingml/2006/main" xmlns:r="http://schemas.openxmlformats.org/officeDocument/2006/relationships" xmlns:p="http://schemas.openxmlformats.org/presentationml/2006/main">
   <p:cSld>
     <p:spTree>
@@ -14751,7 +19481,7 @@
 </p:sld>
 </file>
 
-<file path=ppt/slides/slide22.xml><?xml version="1.0" encoding="utf-8"?>
+<file path=ppt/slides/slide34.xml><?xml version="1.0" encoding="utf-8"?>
 <p:sld xmlns:a="http://schemas.openxmlformats.org/drawingml/2006/main" xmlns:r="http://schemas.openxmlformats.org/officeDocument/2006/relationships" xmlns:p="http://schemas.openxmlformats.org/presentationml/2006/main">
   <p:cSld>
     <p:spTree>
@@ -14933,7 +19663,7 @@
 </p:sld>
 </file>
 
-<file path=ppt/slides/slide23.xml><?xml version="1.0" encoding="utf-8"?>
+<file path=ppt/slides/slide35.xml><?xml version="1.0" encoding="utf-8"?>
 <p:sld xmlns:a="http://schemas.openxmlformats.org/drawingml/2006/main" xmlns:r="http://schemas.openxmlformats.org/officeDocument/2006/relationships" xmlns:p="http://schemas.openxmlformats.org/presentationml/2006/main">
   <p:cSld>
     <p:spTree>
@@ -15068,7 +19798,7 @@
 </p:sld>
 </file>
 
-<file path=ppt/slides/slide24.xml><?xml version="1.0" encoding="utf-8"?>
+<file path=ppt/slides/slide36.xml><?xml version="1.0" encoding="utf-8"?>
 <p:sld xmlns:a="http://schemas.openxmlformats.org/drawingml/2006/main" xmlns:r="http://schemas.openxmlformats.org/officeDocument/2006/relationships" xmlns:p="http://schemas.openxmlformats.org/presentationml/2006/main">
   <p:cSld>
     <p:spTree>
@@ -15163,7 +19893,7 @@
 </p:sld>
 </file>
 
-<file path=ppt/slides/slide25.xml><?xml version="1.0" encoding="utf-8"?>
+<file path=ppt/slides/slide37.xml><?xml version="1.0" encoding="utf-8"?>
 <p:sld xmlns:a="http://schemas.openxmlformats.org/drawingml/2006/main" xmlns:r="http://schemas.openxmlformats.org/officeDocument/2006/relationships" xmlns:p="http://schemas.openxmlformats.org/presentationml/2006/main">
   <p:cSld>
     <p:spTree>
@@ -15265,7 +19995,7 @@
 </p:sld>
 </file>
 
-<file path=ppt/slides/slide26.xml><?xml version="1.0" encoding="utf-8"?>
+<file path=ppt/slides/slide38.xml><?xml version="1.0" encoding="utf-8"?>
 <p:sld xmlns:a="http://schemas.openxmlformats.org/drawingml/2006/main" xmlns:r="http://schemas.openxmlformats.org/officeDocument/2006/relationships" xmlns:p="http://schemas.openxmlformats.org/presentationml/2006/main">
   <p:cSld>
     <p:spTree>
@@ -15367,7 +20097,266 @@
 </p:sld>
 </file>
 
-<file path=ppt/slides/slide27.xml><?xml version="1.0" encoding="utf-8"?>
+<file path=ppt/slides/slide39.xml><?xml version="1.0" encoding="utf-8"?>
+<p:sld xmlns:a="http://schemas.openxmlformats.org/drawingml/2006/main" xmlns:r="http://schemas.openxmlformats.org/officeDocument/2006/relationships" xmlns:p="http://schemas.openxmlformats.org/presentationml/2006/main">
+  <p:cSld>
+    <p:spTree>
+      <p:nvGrpSpPr>
+        <p:cNvPr id="1" name=""/>
+        <p:cNvGrpSpPr/>
+        <p:nvPr/>
+      </p:nvGrpSpPr>
+      <p:grpSpPr>
+        <a:xfrm>
+          <a:off x="0" y="0"/>
+          <a:ext cx="0" cy="0"/>
+          <a:chOff x="0" y="0"/>
+          <a:chExt cx="0" cy="0"/>
+        </a:xfrm>
+      </p:grpSpPr>
+      <p:sp>
+        <p:nvSpPr>
+          <p:cNvPr id="2" name="Title 1">
+            <a:extLst>
+              <a:ext uri="{FF2B5EF4-FFF2-40B4-BE49-F238E27FC236}">
+                <a16:creationId xmlns:a16="http://schemas.microsoft.com/office/drawing/2014/main" id="{BEFC7EB6-E3A6-F21F-0D18-5853E434A32C}"/>
+              </a:ext>
+            </a:extLst>
+          </p:cNvPr>
+          <p:cNvSpPr>
+            <a:spLocks noGrp="1"/>
+          </p:cNvSpPr>
+          <p:nvPr>
+            <p:ph type="title"/>
+          </p:nvPr>
+        </p:nvSpPr>
+        <p:spPr/>
+        <p:txBody>
+          <a:bodyPr/>
+          <a:lstStyle/>
+          <a:p>
+            <a:r>
+              <a:rPr lang="en-US" dirty="0"/>
+              <a:t>Implications for your project</a:t>
+            </a:r>
+          </a:p>
+        </p:txBody>
+      </p:sp>
+      <p:sp>
+        <p:nvSpPr>
+          <p:cNvPr id="3" name="Text Placeholder 2">
+            <a:extLst>
+              <a:ext uri="{FF2B5EF4-FFF2-40B4-BE49-F238E27FC236}">
+                <a16:creationId xmlns:a16="http://schemas.microsoft.com/office/drawing/2014/main" id="{F7A6A9A7-FDC5-5263-7786-D807574B598C}"/>
+              </a:ext>
+            </a:extLst>
+          </p:cNvPr>
+          <p:cNvSpPr>
+            <a:spLocks noGrp="1"/>
+          </p:cNvSpPr>
+          <p:nvPr>
+            <p:ph type="body" idx="1"/>
+          </p:nvPr>
+        </p:nvSpPr>
+        <p:spPr/>
+        <p:txBody>
+          <a:bodyPr/>
+          <a:lstStyle/>
+          <a:p>
+            <a:r>
+              <a:rPr lang="en-US" dirty="0"/>
+              <a:t>Do you have enough data?</a:t>
+            </a:r>
+          </a:p>
+          <a:p>
+            <a:endParaRPr lang="en-US" dirty="0"/>
+          </a:p>
+          <a:p>
+            <a:r>
+              <a:rPr lang="en-US" dirty="0"/>
+              <a:t>Do you need to get additional data?</a:t>
+            </a:r>
+          </a:p>
+          <a:p>
+            <a:endParaRPr lang="en-US" dirty="0"/>
+          </a:p>
+          <a:p>
+            <a:r>
+              <a:rPr lang="en-US" dirty="0"/>
+              <a:t>Which parts of the data should you prioritize looking at and understanding?</a:t>
+            </a:r>
+          </a:p>
+          <a:p>
+            <a:endParaRPr lang="en-US" dirty="0"/>
+          </a:p>
+          <a:p>
+            <a:r>
+              <a:rPr lang="en-US" dirty="0"/>
+              <a:t>What do you need to do now that will be harder to do later?</a:t>
+            </a:r>
+          </a:p>
+        </p:txBody>
+      </p:sp>
+    </p:spTree>
+    <p:extLst>
+      <p:ext uri="{BB962C8B-B14F-4D97-AF65-F5344CB8AC3E}">
+        <p14:creationId xmlns:p14="http://schemas.microsoft.com/office/powerpoint/2010/main" val="1857705847"/>
+      </p:ext>
+    </p:extLst>
+  </p:cSld>
+  <p:clrMapOvr>
+    <a:masterClrMapping/>
+  </p:clrMapOvr>
+</p:sld>
+</file>
+
+<file path=ppt/slides/slide4.xml><?xml version="1.0" encoding="utf-8"?>
+<p:sld xmlns:a="http://schemas.openxmlformats.org/drawingml/2006/main" xmlns:r="http://schemas.openxmlformats.org/officeDocument/2006/relationships" xmlns:p="http://schemas.openxmlformats.org/presentationml/2006/main">
+  <p:cSld>
+    <p:spTree>
+      <p:nvGrpSpPr>
+        <p:cNvPr id="1" name=""/>
+        <p:cNvGrpSpPr/>
+        <p:nvPr/>
+      </p:nvGrpSpPr>
+      <p:grpSpPr>
+        <a:xfrm>
+          <a:off x="0" y="0"/>
+          <a:ext cx="0" cy="0"/>
+          <a:chOff x="0" y="0"/>
+          <a:chExt cx="0" cy="0"/>
+        </a:xfrm>
+      </p:grpSpPr>
+      <p:sp>
+        <p:nvSpPr>
+          <p:cNvPr id="8194" name="Rectangle 2"/>
+          <p:cNvSpPr>
+            <a:spLocks noGrp="1" noChangeArrowheads="1"/>
+          </p:cNvSpPr>
+          <p:nvPr>
+            <p:ph type="title"/>
+          </p:nvPr>
+        </p:nvSpPr>
+        <p:spPr/>
+        <p:txBody>
+          <a:bodyPr/>
+          <a:lstStyle/>
+          <a:p>
+            <a:r>
+              <a:rPr lang="en-US" altLang="en-US" dirty="0"/>
+              <a:t> Working with Your Project Team</a:t>
+            </a:r>
+          </a:p>
+        </p:txBody>
+      </p:sp>
+      <p:sp>
+        <p:nvSpPr>
+          <p:cNvPr id="8195" name="Rectangle 3"/>
+          <p:cNvSpPr>
+            <a:spLocks noGrp="1" noChangeArrowheads="1"/>
+          </p:cNvSpPr>
+          <p:nvPr>
+            <p:ph type="body" idx="1"/>
+          </p:nvPr>
+        </p:nvSpPr>
+        <p:spPr/>
+        <p:txBody>
+          <a:bodyPr/>
+          <a:lstStyle/>
+          <a:p>
+            <a:pPr>
+              <a:lnSpc>
+                <a:spcPct val="150000"/>
+              </a:lnSpc>
+            </a:pPr>
+            <a:r>
+              <a:rPr lang="en-US" altLang="en-US" dirty="0"/>
+              <a:t>Spend some time up front figuring out how to work as a team and work styles</a:t>
+            </a:r>
+            <a:br>
+              <a:rPr lang="en-US" altLang="en-US" dirty="0"/>
+            </a:br>
+            <a:endParaRPr lang="en-US" altLang="en-US" dirty="0"/>
+          </a:p>
+          <a:p>
+            <a:pPr>
+              <a:lnSpc>
+                <a:spcPct val="150000"/>
+              </a:lnSpc>
+            </a:pPr>
+            <a:r>
+              <a:rPr lang="en-US" altLang="en-US" dirty="0"/>
+              <a:t>Everyone should participate in </a:t>
+            </a:r>
+            <a:r>
+              <a:rPr lang="en-US" altLang="en-US" b="1" dirty="0">
+                <a:solidFill>
+                  <a:srgbClr val="FF0000"/>
+                </a:solidFill>
+              </a:rPr>
+              <a:t>all</a:t>
+            </a:r>
+            <a:r>
+              <a:rPr lang="en-US" altLang="en-US" dirty="0"/>
+              <a:t> aspects of project</a:t>
+            </a:r>
+          </a:p>
+          <a:p>
+            <a:pPr lvl="1">
+              <a:lnSpc>
+                <a:spcPct val="100000"/>
+              </a:lnSpc>
+            </a:pPr>
+            <a:r>
+              <a:rPr lang="en-US" altLang="en-US" dirty="0"/>
+              <a:t>No individual should do the majority of the coding, report writing, etc.</a:t>
+            </a:r>
+            <a:br>
+              <a:rPr lang="en-US" altLang="en-US" dirty="0"/>
+            </a:br>
+            <a:br>
+              <a:rPr lang="en-US" altLang="en-US" dirty="0"/>
+            </a:br>
+            <a:endParaRPr lang="en-US" altLang="en-US" dirty="0"/>
+          </a:p>
+          <a:p>
+            <a:pPr>
+              <a:lnSpc>
+                <a:spcPct val="150000"/>
+              </a:lnSpc>
+            </a:pPr>
+            <a:r>
+              <a:rPr lang="en-US" altLang="en-US" dirty="0"/>
+              <a:t>However, you should divide up different pieces of the work</a:t>
+            </a:r>
+          </a:p>
+          <a:p>
+            <a:pPr lvl="1">
+              <a:lnSpc>
+                <a:spcPct val="100000"/>
+              </a:lnSpc>
+            </a:pPr>
+            <a:r>
+              <a:rPr lang="en-US" altLang="en-US" dirty="0"/>
+              <a:t>For instance, working on different parts of the pipeline code in parallel or splitting up sections of the report</a:t>
+            </a:r>
+          </a:p>
+        </p:txBody>
+      </p:sp>
+    </p:spTree>
+    <p:extLst>
+      <p:ext uri="{BB962C8B-B14F-4D97-AF65-F5344CB8AC3E}">
+        <p14:creationId xmlns:p14="http://schemas.microsoft.com/office/powerpoint/2010/main" val="3853540615"/>
+      </p:ext>
+    </p:extLst>
+  </p:cSld>
+  <p:clrMapOvr>
+    <a:masterClrMapping/>
+  </p:clrMapOvr>
+</p:sld>
+</file>
+
+<file path=ppt/slides/slide40.xml><?xml version="1.0" encoding="utf-8"?>
 <p:sld xmlns:a="http://schemas.openxmlformats.org/drawingml/2006/main" xmlns:r="http://schemas.openxmlformats.org/officeDocument/2006/relationships" xmlns:p="http://schemas.openxmlformats.org/presentationml/2006/main">
   <p:cSld>
     <p:spTree>
@@ -15493,333 +20482,6 @@
     <p:extLst>
       <p:ext uri="{BB962C8B-B14F-4D97-AF65-F5344CB8AC3E}">
         <p14:creationId xmlns:p14="http://schemas.microsoft.com/office/powerpoint/2010/main" val="93290584"/>
-      </p:ext>
-    </p:extLst>
-  </p:cSld>
-  <p:clrMapOvr>
-    <a:masterClrMapping/>
-  </p:clrMapOvr>
-</p:sld>
-</file>
-
-<file path=ppt/slides/slide3.xml><?xml version="1.0" encoding="utf-8"?>
-<p:sld xmlns:a="http://schemas.openxmlformats.org/drawingml/2006/main" xmlns:r="http://schemas.openxmlformats.org/officeDocument/2006/relationships" xmlns:p="http://schemas.openxmlformats.org/presentationml/2006/main">
-  <p:cSld>
-    <p:spTree>
-      <p:nvGrpSpPr>
-        <p:cNvPr id="1" name="Shape 163"/>
-        <p:cNvGrpSpPr/>
-        <p:nvPr/>
-      </p:nvGrpSpPr>
-      <p:grpSpPr>
-        <a:xfrm>
-          <a:off x="0" y="0"/>
-          <a:ext cx="0" cy="0"/>
-          <a:chOff x="0" y="0"/>
-          <a:chExt cx="0" cy="0"/>
-        </a:xfrm>
-      </p:grpSpPr>
-      <p:sp>
-        <p:nvSpPr>
-          <p:cNvPr id="164" name="Google Shape;164;p27"/>
-          <p:cNvSpPr txBox="1">
-            <a:spLocks noGrp="1"/>
-          </p:cNvSpPr>
-          <p:nvPr>
-            <p:ph type="title"/>
-          </p:nvPr>
-        </p:nvSpPr>
-        <p:spPr>
-          <a:xfrm>
-            <a:off x="415600" y="593367"/>
-            <a:ext cx="11360800" cy="763600"/>
-          </a:xfrm>
-          <a:prstGeom prst="rect">
-            <a:avLst/>
-          </a:prstGeom>
-        </p:spPr>
-        <p:txBody>
-          <a:bodyPr spcFirstLastPara="1" wrap="square" lIns="121900" tIns="121900" rIns="121900" bIns="121900" anchor="t" anchorCtr="0">
-            <a:noAutofit/>
-          </a:bodyPr>
-          <a:lstStyle/>
-          <a:p>
-            <a:r>
-              <a:rPr lang="en" dirty="0"/>
-              <a:t>Project</a:t>
-            </a:r>
-            <a:endParaRPr dirty="0"/>
-          </a:p>
-        </p:txBody>
-      </p:sp>
-      <p:sp>
-        <p:nvSpPr>
-          <p:cNvPr id="165" name="Google Shape;165;p27"/>
-          <p:cNvSpPr txBox="1">
-            <a:spLocks noGrp="1"/>
-          </p:cNvSpPr>
-          <p:nvPr>
-            <p:ph type="body" idx="1"/>
-          </p:nvPr>
-        </p:nvSpPr>
-        <p:spPr>
-          <a:xfrm>
-            <a:off x="415600" y="1536633"/>
-            <a:ext cx="11360800" cy="4555200"/>
-          </a:xfrm>
-          <a:prstGeom prst="rect">
-            <a:avLst/>
-          </a:prstGeom>
-        </p:spPr>
-        <p:txBody>
-          <a:bodyPr spcFirstLastPara="1" wrap="square" lIns="121900" tIns="121900" rIns="121900" bIns="121900" anchor="t" anchorCtr="0">
-            <a:noAutofit/>
-          </a:bodyPr>
-          <a:lstStyle/>
-          <a:p>
-            <a:pPr marL="169329" indent="0">
-              <a:lnSpc>
-                <a:spcPct val="146250"/>
-              </a:lnSpc>
-              <a:buClr>
-                <a:srgbClr val="444444"/>
-              </a:buClr>
-              <a:buSzPts val="1600"/>
-              <a:buNone/>
-            </a:pPr>
-            <a:endParaRPr dirty="0">
-              <a:solidFill>
-                <a:srgbClr val="222222"/>
-              </a:solidFill>
-              <a:highlight>
-                <a:srgbClr val="FFFFFF"/>
-              </a:highlight>
-            </a:endParaRPr>
-          </a:p>
-        </p:txBody>
-      </p:sp>
-      <p:pic>
-        <p:nvPicPr>
-          <p:cNvPr id="2" name="Picture 1">
-            <a:extLst>
-              <a:ext uri="{FF2B5EF4-FFF2-40B4-BE49-F238E27FC236}">
-                <a16:creationId xmlns:a16="http://schemas.microsoft.com/office/drawing/2014/main" id="{7754616C-B13B-734C-9D90-D3E25C1D842B}"/>
-              </a:ext>
-            </a:extLst>
-          </p:cNvPr>
-          <p:cNvPicPr>
-            <a:picLocks noChangeAspect="1"/>
-          </p:cNvPicPr>
-          <p:nvPr/>
-        </p:nvPicPr>
-        <p:blipFill>
-          <a:blip r:embed="rId3"/>
-          <a:stretch>
-            <a:fillRect/>
-          </a:stretch>
-        </p:blipFill>
-        <p:spPr>
-          <a:xfrm>
-            <a:off x="0" y="1356966"/>
-            <a:ext cx="12192000" cy="5501033"/>
-          </a:xfrm>
-          <a:prstGeom prst="rect">
-            <a:avLst/>
-          </a:prstGeom>
-        </p:spPr>
-      </p:pic>
-      <p:pic>
-        <p:nvPicPr>
-          <p:cNvPr id="1026" name="Picture 2" descr="DonorsChoose: Support a classroom. Build a future.">
-            <a:extLst>
-              <a:ext uri="{FF2B5EF4-FFF2-40B4-BE49-F238E27FC236}">
-                <a16:creationId xmlns:a16="http://schemas.microsoft.com/office/drawing/2014/main" id="{63585741-D5E1-0C49-9B35-C444E3CCF154}"/>
-              </a:ext>
-            </a:extLst>
-          </p:cNvPr>
-          <p:cNvPicPr>
-            <a:picLocks noChangeAspect="1" noChangeArrowheads="1"/>
-          </p:cNvPicPr>
-          <p:nvPr/>
-        </p:nvPicPr>
-        <p:blipFill>
-          <a:blip r:embed="rId4">
-            <a:extLst>
-              <a:ext uri="{28A0092B-C50C-407E-A947-70E740481C1C}">
-                <a14:useLocalDpi xmlns:a14="http://schemas.microsoft.com/office/drawing/2010/main" val="0"/>
-              </a:ext>
-            </a:extLst>
-          </a:blip>
-          <a:srcRect/>
-          <a:stretch>
-            <a:fillRect/>
-          </a:stretch>
-        </p:blipFill>
-        <p:spPr bwMode="auto">
-          <a:xfrm>
-            <a:off x="8871904" y="1378167"/>
-            <a:ext cx="3320097" cy="1743051"/>
-          </a:xfrm>
-          <a:prstGeom prst="rect">
-            <a:avLst/>
-          </a:prstGeom>
-          <a:noFill/>
-          <a:extLst>
-            <a:ext uri="{909E8E84-426E-40DD-AFC4-6F175D3DCCD1}">
-              <a14:hiddenFill xmlns:a14="http://schemas.microsoft.com/office/drawing/2010/main">
-                <a:solidFill>
-                  <a:srgbClr val="FFFFFF"/>
-                </a:solidFill>
-              </a14:hiddenFill>
-            </a:ext>
-          </a:extLst>
-        </p:spPr>
-      </p:pic>
-    </p:spTree>
-  </p:cSld>
-  <p:clrMapOvr>
-    <a:masterClrMapping/>
-  </p:clrMapOvr>
-</p:sld>
-</file>
-
-<file path=ppt/slides/slide4.xml><?xml version="1.0" encoding="utf-8"?>
-<p:sld xmlns:a="http://schemas.openxmlformats.org/drawingml/2006/main" xmlns:r="http://schemas.openxmlformats.org/officeDocument/2006/relationships" xmlns:p="http://schemas.openxmlformats.org/presentationml/2006/main">
-  <p:cSld>
-    <p:spTree>
-      <p:nvGrpSpPr>
-        <p:cNvPr id="1" name=""/>
-        <p:cNvGrpSpPr/>
-        <p:nvPr/>
-      </p:nvGrpSpPr>
-      <p:grpSpPr>
-        <a:xfrm>
-          <a:off x="0" y="0"/>
-          <a:ext cx="0" cy="0"/>
-          <a:chOff x="0" y="0"/>
-          <a:chExt cx="0" cy="0"/>
-        </a:xfrm>
-      </p:grpSpPr>
-      <p:sp>
-        <p:nvSpPr>
-          <p:cNvPr id="8194" name="Rectangle 2"/>
-          <p:cNvSpPr>
-            <a:spLocks noGrp="1" noChangeArrowheads="1"/>
-          </p:cNvSpPr>
-          <p:nvPr>
-            <p:ph type="title"/>
-          </p:nvPr>
-        </p:nvSpPr>
-        <p:spPr/>
-        <p:txBody>
-          <a:bodyPr/>
-          <a:lstStyle/>
-          <a:p>
-            <a:r>
-              <a:rPr lang="en-US" altLang="en-US" dirty="0"/>
-              <a:t> Working with Your Project Team</a:t>
-            </a:r>
-          </a:p>
-        </p:txBody>
-      </p:sp>
-      <p:sp>
-        <p:nvSpPr>
-          <p:cNvPr id="8195" name="Rectangle 3"/>
-          <p:cNvSpPr>
-            <a:spLocks noGrp="1" noChangeArrowheads="1"/>
-          </p:cNvSpPr>
-          <p:nvPr>
-            <p:ph type="body" idx="1"/>
-          </p:nvPr>
-        </p:nvSpPr>
-        <p:spPr/>
-        <p:txBody>
-          <a:bodyPr/>
-          <a:lstStyle/>
-          <a:p>
-            <a:pPr>
-              <a:lnSpc>
-                <a:spcPct val="150000"/>
-              </a:lnSpc>
-            </a:pPr>
-            <a:r>
-              <a:rPr lang="en-US" altLang="en-US" dirty="0"/>
-              <a:t>Spend some time up front figuring out how to work as a team and work styles</a:t>
-            </a:r>
-            <a:br>
-              <a:rPr lang="en-US" altLang="en-US" dirty="0"/>
-            </a:br>
-            <a:endParaRPr lang="en-US" altLang="en-US" dirty="0"/>
-          </a:p>
-          <a:p>
-            <a:pPr>
-              <a:lnSpc>
-                <a:spcPct val="150000"/>
-              </a:lnSpc>
-            </a:pPr>
-            <a:r>
-              <a:rPr lang="en-US" altLang="en-US" dirty="0"/>
-              <a:t>Everyone should participate in </a:t>
-            </a:r>
-            <a:r>
-              <a:rPr lang="en-US" altLang="en-US" b="1" dirty="0">
-                <a:solidFill>
-                  <a:srgbClr val="FF0000"/>
-                </a:solidFill>
-              </a:rPr>
-              <a:t>all</a:t>
-            </a:r>
-            <a:r>
-              <a:rPr lang="en-US" altLang="en-US" dirty="0"/>
-              <a:t> aspects of project</a:t>
-            </a:r>
-          </a:p>
-          <a:p>
-            <a:pPr lvl="1">
-              <a:lnSpc>
-                <a:spcPct val="100000"/>
-              </a:lnSpc>
-            </a:pPr>
-            <a:r>
-              <a:rPr lang="en-US" altLang="en-US" dirty="0"/>
-              <a:t>No individual should do the majority of the coding, report writing, etc.</a:t>
-            </a:r>
-            <a:br>
-              <a:rPr lang="en-US" altLang="en-US" dirty="0"/>
-            </a:br>
-            <a:br>
-              <a:rPr lang="en-US" altLang="en-US" dirty="0"/>
-            </a:br>
-            <a:endParaRPr lang="en-US" altLang="en-US" dirty="0"/>
-          </a:p>
-          <a:p>
-            <a:pPr>
-              <a:lnSpc>
-                <a:spcPct val="150000"/>
-              </a:lnSpc>
-            </a:pPr>
-            <a:r>
-              <a:rPr lang="en-US" altLang="en-US" dirty="0"/>
-              <a:t>However, you should divide up different pieces of the work</a:t>
-            </a:r>
-          </a:p>
-          <a:p>
-            <a:pPr lvl="1">
-              <a:lnSpc>
-                <a:spcPct val="100000"/>
-              </a:lnSpc>
-            </a:pPr>
-            <a:r>
-              <a:rPr lang="en-US" altLang="en-US" dirty="0"/>
-              <a:t>For instance, working on different parts of the pipeline code in parallel or splitting up sections of the report</a:t>
-            </a:r>
-          </a:p>
-        </p:txBody>
-      </p:sp>
-    </p:spTree>
-    <p:extLst>
-      <p:ext uri="{BB962C8B-B14F-4D97-AF65-F5344CB8AC3E}">
-        <p14:creationId xmlns:p14="http://schemas.microsoft.com/office/powerpoint/2010/main" val="3853540615"/>
       </p:ext>
     </p:extLst>
   </p:cSld>
@@ -16083,7 +20745,7 @@
   <p:cSld>
     <p:spTree>
       <p:nvGrpSpPr>
-        <p:cNvPr id="1" name=""/>
+        <p:cNvPr id="1" name="Shape 502"/>
         <p:cNvGrpSpPr/>
         <p:nvPr/>
       </p:nvGrpSpPr>
@@ -16097,261 +20759,340 @@
       </p:grpSpPr>
       <p:sp>
         <p:nvSpPr>
-          <p:cNvPr id="2" name="Title 1">
-            <a:extLst>
-              <a:ext uri="{FF2B5EF4-FFF2-40B4-BE49-F238E27FC236}">
-                <a16:creationId xmlns:a16="http://schemas.microsoft.com/office/drawing/2014/main" id="{21359BA9-BA2B-D148-89DA-A99081B1FF81}"/>
-              </a:ext>
-            </a:extLst>
-          </p:cNvPr>
-          <p:cNvSpPr>
-            <a:spLocks noGrp="1"/>
-          </p:cNvSpPr>
-          <p:nvPr>
-            <p:ph type="title"/>
-          </p:nvPr>
+          <p:cNvPr id="503" name="Google Shape;503;g32cbaf05b3f_0_70"/>
+          <p:cNvSpPr/>
+          <p:nvPr/>
         </p:nvSpPr>
-        <p:spPr/>
+        <p:spPr>
+          <a:xfrm>
+            <a:off x="458367" y="1125900"/>
+            <a:ext cx="3192400" cy="3911200"/>
+          </a:xfrm>
+          <a:prstGeom prst="rect">
+            <a:avLst/>
+          </a:prstGeom>
+          <a:solidFill>
+            <a:srgbClr val="FBF2C4"/>
+          </a:solidFill>
+          <a:ln w="9525" cap="flat" cmpd="sng">
+            <a:solidFill>
+              <a:schemeClr val="dk2"/>
+            </a:solidFill>
+            <a:prstDash val="solid"/>
+            <a:round/>
+            <a:headEnd type="none" w="sm" len="sm"/>
+            <a:tailEnd type="none" w="sm" len="sm"/>
+          </a:ln>
+        </p:spPr>
         <p:txBody>
-          <a:bodyPr/>
+          <a:bodyPr spcFirstLastPara="1" wrap="square" lIns="121900" tIns="121900" rIns="121900" bIns="121900" anchor="ctr" anchorCtr="0">
+            <a:noAutofit/>
+          </a:bodyPr>
           <a:lstStyle/>
           <a:p>
-            <a:r>
-              <a:rPr lang="en-US" dirty="0"/>
-              <a:t>Challenges</a:t>
-            </a:r>
+            <a:pPr algn="ctr">
+              <a:buSzPts val="2500"/>
+            </a:pPr>
+            <a:r>
+              <a:rPr lang="en-US" sz="3333">
+                <a:latin typeface="Calibri"/>
+                <a:ea typeface="Calibri"/>
+                <a:cs typeface="Calibri"/>
+                <a:sym typeface="Calibri"/>
+              </a:rPr>
+              <a:t>What data do we have access to?</a:t>
+            </a:r>
+            <a:endParaRPr sz="3333">
+              <a:latin typeface="Calibri"/>
+              <a:ea typeface="Calibri"/>
+              <a:cs typeface="Calibri"/>
+              <a:sym typeface="Calibri"/>
+            </a:endParaRPr>
           </a:p>
         </p:txBody>
       </p:sp>
       <p:sp>
         <p:nvSpPr>
-          <p:cNvPr id="3" name="Text Placeholder 2">
-            <a:extLst>
-              <a:ext uri="{FF2B5EF4-FFF2-40B4-BE49-F238E27FC236}">
-                <a16:creationId xmlns:a16="http://schemas.microsoft.com/office/drawing/2014/main" id="{DDA03E0F-5F3D-5B4D-8232-BF72B84A198E}"/>
-              </a:ext>
-            </a:extLst>
-          </p:cNvPr>
-          <p:cNvSpPr>
-            <a:spLocks noGrp="1"/>
-          </p:cNvSpPr>
-          <p:nvPr>
-            <p:ph type="body" idx="1"/>
-          </p:nvPr>
+          <p:cNvPr id="504" name="Google Shape;504;g32cbaf05b3f_0_70"/>
+          <p:cNvSpPr/>
+          <p:nvPr/>
         </p:nvSpPr>
-        <p:spPr/>
+        <p:spPr>
+          <a:xfrm>
+            <a:off x="8381367" y="1125900"/>
+            <a:ext cx="3192400" cy="3911200"/>
+          </a:xfrm>
+          <a:prstGeom prst="rect">
+            <a:avLst/>
+          </a:prstGeom>
+          <a:solidFill>
+            <a:srgbClr val="FCE5CD"/>
+          </a:solidFill>
+          <a:ln w="9525" cap="flat" cmpd="sng">
+            <a:solidFill>
+              <a:schemeClr val="dk2"/>
+            </a:solidFill>
+            <a:prstDash val="solid"/>
+            <a:round/>
+            <a:headEnd type="none" w="sm" len="sm"/>
+            <a:tailEnd type="none" w="sm" len="sm"/>
+          </a:ln>
+        </p:spPr>
         <p:txBody>
-          <a:bodyPr/>
+          <a:bodyPr spcFirstLastPara="1" wrap="square" lIns="121900" tIns="121900" rIns="121900" bIns="121900" anchor="ctr" anchorCtr="0">
+            <a:noAutofit/>
+          </a:bodyPr>
           <a:lstStyle/>
           <a:p>
-            <a:r>
-              <a:rPr lang="en-US" dirty="0"/>
-              <a:t>Political</a:t>
-            </a:r>
-          </a:p>
-          <a:p>
-            <a:r>
-              <a:rPr lang="en-US" dirty="0"/>
-              <a:t>Internal Awareness</a:t>
-            </a:r>
-          </a:p>
-          <a:p>
-            <a:r>
-              <a:rPr lang="en-US" dirty="0"/>
-              <a:t>Legal/Contractual</a:t>
-            </a:r>
-          </a:p>
-          <a:p>
-            <a:r>
-              <a:rPr lang="en-US" dirty="0"/>
-              <a:t>Ethical</a:t>
-            </a:r>
-          </a:p>
-          <a:p>
-            <a:r>
-              <a:rPr lang="en-US" dirty="0"/>
-              <a:t>Technical</a:t>
-            </a:r>
-          </a:p>
-          <a:p>
-            <a:endParaRPr lang="en-US" dirty="0"/>
+            <a:pPr algn="ctr">
+              <a:buSzPts val="2500"/>
+            </a:pPr>
+            <a:r>
+              <a:rPr lang="en-US" sz="3333">
+                <a:latin typeface="Calibri"/>
+                <a:ea typeface="Calibri"/>
+                <a:cs typeface="Calibri"/>
+                <a:sym typeface="Calibri"/>
+              </a:rPr>
+              <a:t>What data do we need?</a:t>
+            </a:r>
+            <a:endParaRPr sz="3333">
+              <a:latin typeface="Calibri"/>
+              <a:ea typeface="Calibri"/>
+              <a:cs typeface="Calibri"/>
+              <a:sym typeface="Calibri"/>
+            </a:endParaRPr>
+          </a:p>
+        </p:txBody>
+      </p:sp>
+      <p:sp>
+        <p:nvSpPr>
+          <p:cNvPr id="505" name="Google Shape;505;g32cbaf05b3f_0_70"/>
+          <p:cNvSpPr/>
+          <p:nvPr/>
+        </p:nvSpPr>
+        <p:spPr>
+          <a:xfrm>
+            <a:off x="4470667" y="1125900"/>
+            <a:ext cx="3192400" cy="3911200"/>
+          </a:xfrm>
+          <a:prstGeom prst="rect">
+            <a:avLst/>
+          </a:prstGeom>
+          <a:solidFill>
+            <a:srgbClr val="D0E0E3"/>
+          </a:solidFill>
+          <a:ln w="9525" cap="flat" cmpd="sng">
+            <a:solidFill>
+              <a:schemeClr val="dk2"/>
+            </a:solidFill>
+            <a:prstDash val="solid"/>
+            <a:round/>
+            <a:headEnd type="none" w="sm" len="sm"/>
+            <a:tailEnd type="none" w="sm" len="sm"/>
+          </a:ln>
+        </p:spPr>
+        <p:txBody>
+          <a:bodyPr spcFirstLastPara="1" wrap="square" lIns="121900" tIns="121900" rIns="121900" bIns="121900" anchor="ctr" anchorCtr="0">
+            <a:noAutofit/>
+          </a:bodyPr>
+          <a:lstStyle/>
+          <a:p>
+            <a:pPr algn="ctr">
+              <a:buSzPts val="2500"/>
+            </a:pPr>
+            <a:r>
+              <a:rPr lang="en-US" sz="3333">
+                <a:latin typeface="Calibri"/>
+                <a:ea typeface="Calibri"/>
+                <a:cs typeface="Calibri"/>
+                <a:sym typeface="Calibri"/>
+              </a:rPr>
+              <a:t>How do we identify and fill any gaps?</a:t>
+            </a:r>
+            <a:endParaRPr sz="3333">
+              <a:latin typeface="Calibri"/>
+              <a:ea typeface="Calibri"/>
+              <a:cs typeface="Calibri"/>
+              <a:sym typeface="Calibri"/>
+            </a:endParaRPr>
           </a:p>
         </p:txBody>
       </p:sp>
     </p:spTree>
-    <p:extLst>
-      <p:ext uri="{BB962C8B-B14F-4D97-AF65-F5344CB8AC3E}">
-        <p14:creationId xmlns:p14="http://schemas.microsoft.com/office/powerpoint/2010/main" val="1721185332"/>
-      </p:ext>
-    </p:extLst>
   </p:cSld>
   <p:clrMapOvr>
     <a:masterClrMapping/>
   </p:clrMapOvr>
+  <p:timing>
+    <p:tnLst>
+      <p:par>
+        <p:cTn id="1" dur="indefinite" restart="never" nodeType="tmRoot">
+          <p:childTnLst>
+            <p:seq concurrent="1" nextAc="seek">
+              <p:cTn id="2" dur="indefinite" nodeType="mainSeq">
+                <p:childTnLst>
+                  <p:par>
+                    <p:cTn id="3" fill="hold">
+                      <p:stCondLst>
+                        <p:cond delay="indefinite"/>
+                      </p:stCondLst>
+                      <p:childTnLst>
+                        <p:par>
+                          <p:cTn id="4" fill="hold">
+                            <p:stCondLst>
+                              <p:cond delay="0"/>
+                            </p:stCondLst>
+                            <p:childTnLst>
+                              <p:par>
+                                <p:cTn id="5" presetID="1" presetClass="entr" presetSubtype="0" fill="hold" nodeType="clickEffect">
+                                  <p:stCondLst>
+                                    <p:cond delay="0"/>
+                                  </p:stCondLst>
+                                  <p:childTnLst>
+                                    <p:set>
+                                      <p:cBhvr>
+                                        <p:cTn id="6" dur="1" fill="hold">
+                                          <p:stCondLst>
+                                            <p:cond delay="0"/>
+                                          </p:stCondLst>
+                                        </p:cTn>
+                                        <p:tgtEl>
+                                          <p:spTgt spid="503"/>
+                                        </p:tgtEl>
+                                        <p:attrNameLst>
+                                          <p:attrName>style.visibility</p:attrName>
+                                        </p:attrNameLst>
+                                      </p:cBhvr>
+                                      <p:to>
+                                        <p:strVal val="visible"/>
+                                      </p:to>
+                                    </p:set>
+                                  </p:childTnLst>
+                                </p:cTn>
+                              </p:par>
+                            </p:childTnLst>
+                          </p:cTn>
+                        </p:par>
+                      </p:childTnLst>
+                    </p:cTn>
+                  </p:par>
+                  <p:par>
+                    <p:cTn id="7" fill="hold">
+                      <p:stCondLst>
+                        <p:cond delay="indefinite"/>
+                      </p:stCondLst>
+                      <p:childTnLst>
+                        <p:par>
+                          <p:cTn id="8" fill="hold">
+                            <p:stCondLst>
+                              <p:cond delay="0"/>
+                            </p:stCondLst>
+                            <p:childTnLst>
+                              <p:par>
+                                <p:cTn id="9" presetID="1" presetClass="entr" presetSubtype="0" fill="hold" nodeType="clickEffect">
+                                  <p:stCondLst>
+                                    <p:cond delay="0"/>
+                                  </p:stCondLst>
+                                  <p:childTnLst>
+                                    <p:set>
+                                      <p:cBhvr>
+                                        <p:cTn id="10" dur="1" fill="hold">
+                                          <p:stCondLst>
+                                            <p:cond delay="0"/>
+                                          </p:stCondLst>
+                                        </p:cTn>
+                                        <p:tgtEl>
+                                          <p:spTgt spid="504"/>
+                                        </p:tgtEl>
+                                        <p:attrNameLst>
+                                          <p:attrName>style.visibility</p:attrName>
+                                        </p:attrNameLst>
+                                      </p:cBhvr>
+                                      <p:to>
+                                        <p:strVal val="visible"/>
+                                      </p:to>
+                                    </p:set>
+                                  </p:childTnLst>
+                                </p:cTn>
+                              </p:par>
+                            </p:childTnLst>
+                          </p:cTn>
+                        </p:par>
+                      </p:childTnLst>
+                    </p:cTn>
+                  </p:par>
+                  <p:par>
+                    <p:cTn id="11" fill="hold">
+                      <p:stCondLst>
+                        <p:cond delay="indefinite"/>
+                      </p:stCondLst>
+                      <p:childTnLst>
+                        <p:par>
+                          <p:cTn id="12" fill="hold">
+                            <p:stCondLst>
+                              <p:cond delay="0"/>
+                            </p:stCondLst>
+                            <p:childTnLst>
+                              <p:par>
+                                <p:cTn id="13" presetID="1" presetClass="entr" presetSubtype="0" fill="hold" nodeType="clickEffect">
+                                  <p:stCondLst>
+                                    <p:cond delay="0"/>
+                                  </p:stCondLst>
+                                  <p:childTnLst>
+                                    <p:set>
+                                      <p:cBhvr>
+                                        <p:cTn id="14" dur="1" fill="hold">
+                                          <p:stCondLst>
+                                            <p:cond delay="0"/>
+                                          </p:stCondLst>
+                                        </p:cTn>
+                                        <p:tgtEl>
+                                          <p:spTgt spid="505"/>
+                                        </p:tgtEl>
+                                        <p:attrNameLst>
+                                          <p:attrName>style.visibility</p:attrName>
+                                        </p:attrNameLst>
+                                      </p:cBhvr>
+                                      <p:to>
+                                        <p:strVal val="visible"/>
+                                      </p:to>
+                                    </p:set>
+                                  </p:childTnLst>
+                                </p:cTn>
+                              </p:par>
+                            </p:childTnLst>
+                          </p:cTn>
+                        </p:par>
+                      </p:childTnLst>
+                    </p:cTn>
+                  </p:par>
+                </p:childTnLst>
+              </p:cTn>
+              <p:prevCondLst>
+                <p:cond evt="onPrev" delay="0">
+                  <p:tgtEl>
+                    <p:sldTgt/>
+                  </p:tgtEl>
+                </p:cond>
+              </p:prevCondLst>
+              <p:nextCondLst>
+                <p:cond evt="onNext" delay="0">
+                  <p:tgtEl>
+                    <p:sldTgt/>
+                  </p:tgtEl>
+                </p:cond>
+              </p:nextCondLst>
+            </p:seq>
+          </p:childTnLst>
+        </p:cTn>
+      </p:par>
+    </p:tnLst>
+  </p:timing>
 </p:sld>
 </file>
 
 <file path=ppt/slides/slide8.xml><?xml version="1.0" encoding="utf-8"?>
-<p:sld xmlns:a="http://schemas.openxmlformats.org/drawingml/2006/main" xmlns:r="http://schemas.openxmlformats.org/officeDocument/2006/relationships" xmlns:p="http://schemas.openxmlformats.org/presentationml/2006/main">
-  <p:cSld>
-    <p:spTree>
-      <p:nvGrpSpPr>
-        <p:cNvPr id="1" name=""/>
-        <p:cNvGrpSpPr/>
-        <p:nvPr/>
-      </p:nvGrpSpPr>
-      <p:grpSpPr>
-        <a:xfrm>
-          <a:off x="0" y="0"/>
-          <a:ext cx="0" cy="0"/>
-          <a:chOff x="0" y="0"/>
-          <a:chExt cx="0" cy="0"/>
-        </a:xfrm>
-      </p:grpSpPr>
-      <p:sp>
-        <p:nvSpPr>
-          <p:cNvPr id="2" name="Title 1">
-            <a:extLst>
-              <a:ext uri="{FF2B5EF4-FFF2-40B4-BE49-F238E27FC236}">
-                <a16:creationId xmlns:a16="http://schemas.microsoft.com/office/drawing/2014/main" id="{C8E60A25-02BD-674B-9661-DF031B0CB52C}"/>
-              </a:ext>
-            </a:extLst>
-          </p:cNvPr>
-          <p:cNvSpPr>
-            <a:spLocks noGrp="1"/>
-          </p:cNvSpPr>
-          <p:nvPr>
-            <p:ph type="title"/>
-          </p:nvPr>
-        </p:nvSpPr>
-        <p:spPr/>
-        <p:txBody>
-          <a:bodyPr/>
-          <a:lstStyle/>
-          <a:p>
-            <a:r>
-              <a:rPr lang="en-US" dirty="0"/>
-              <a:t>Data Acquisition: Technical (challenges)</a:t>
-            </a:r>
-          </a:p>
-        </p:txBody>
-      </p:sp>
-      <p:sp>
-        <p:nvSpPr>
-          <p:cNvPr id="3" name="Text Placeholder 2">
-            <a:extLst>
-              <a:ext uri="{FF2B5EF4-FFF2-40B4-BE49-F238E27FC236}">
-                <a16:creationId xmlns:a16="http://schemas.microsoft.com/office/drawing/2014/main" id="{B47464FC-F480-BD4E-8C73-EA0095EB65C0}"/>
-              </a:ext>
-            </a:extLst>
-          </p:cNvPr>
-          <p:cNvSpPr>
-            <a:spLocks noGrp="1"/>
-          </p:cNvSpPr>
-          <p:nvPr>
-            <p:ph type="body" idx="1"/>
-          </p:nvPr>
-        </p:nvSpPr>
-        <p:spPr/>
-        <p:txBody>
-          <a:bodyPr/>
-          <a:lstStyle/>
-          <a:p>
-            <a:r>
-              <a:rPr lang="en-US" dirty="0"/>
-              <a:t>You rarely work with production data directly so how should you get data?</a:t>
-            </a:r>
-          </a:p>
-          <a:p>
-            <a:pPr lvl="1">
-              <a:spcBef>
-                <a:spcPts val="0"/>
-              </a:spcBef>
-            </a:pPr>
-            <a:r>
-              <a:rPr lang="en-US" dirty="0"/>
-              <a:t>API access</a:t>
-            </a:r>
-          </a:p>
-          <a:p>
-            <a:pPr lvl="1">
-              <a:spcBef>
-                <a:spcPts val="0"/>
-              </a:spcBef>
-            </a:pPr>
-            <a:r>
-              <a:rPr lang="en-US" dirty="0"/>
-              <a:t>Flat files</a:t>
-            </a:r>
-          </a:p>
-          <a:p>
-            <a:pPr lvl="1">
-              <a:spcBef>
-                <a:spcPts val="0"/>
-              </a:spcBef>
-            </a:pPr>
-            <a:r>
-              <a:rPr lang="en-US" dirty="0"/>
-              <a:t>Database dumps</a:t>
-            </a:r>
-          </a:p>
-          <a:p>
-            <a:pPr lvl="1">
-              <a:spcBef>
-                <a:spcPts val="0"/>
-              </a:spcBef>
-            </a:pPr>
-            <a:endParaRPr lang="en-US" dirty="0"/>
-          </a:p>
-          <a:p>
-            <a:r>
-              <a:rPr lang="en-US" dirty="0"/>
-              <a:t>How much should it be processed before you get it?</a:t>
-            </a:r>
-          </a:p>
-          <a:p>
-            <a:endParaRPr lang="en-US" dirty="0"/>
-          </a:p>
-          <a:p>
-            <a:r>
-              <a:rPr lang="en-US" dirty="0"/>
-              <a:t>How do you build a repeatable data acquisition pipeline?</a:t>
-            </a:r>
-          </a:p>
-          <a:p>
-            <a:endParaRPr lang="en-US" dirty="0"/>
-          </a:p>
-          <a:p>
-            <a:r>
-              <a:rPr lang="en-US" dirty="0"/>
-              <a:t>When do you collect new data?</a:t>
-            </a:r>
-          </a:p>
-          <a:p>
-            <a:pPr marL="565150" lvl="1" indent="0">
-              <a:spcBef>
-                <a:spcPts val="0"/>
-              </a:spcBef>
-              <a:buNone/>
-            </a:pPr>
-            <a:endParaRPr lang="en-US" dirty="0"/>
-          </a:p>
-        </p:txBody>
-      </p:sp>
-    </p:spTree>
-    <p:extLst>
-      <p:ext uri="{BB962C8B-B14F-4D97-AF65-F5344CB8AC3E}">
-        <p14:creationId xmlns:p14="http://schemas.microsoft.com/office/powerpoint/2010/main" val="4069897732"/>
-      </p:ext>
-    </p:extLst>
-  </p:cSld>
-  <p:clrMapOvr>
-    <a:masterClrMapping/>
-  </p:clrMapOvr>
-</p:sld>
-</file>
-
-<file path=ppt/slides/slide9.xml><?xml version="1.0" encoding="utf-8"?>
 <p:sld xmlns:a="http://schemas.openxmlformats.org/drawingml/2006/main" xmlns:r="http://schemas.openxmlformats.org/officeDocument/2006/relationships" xmlns:p="http://schemas.openxmlformats.org/presentationml/2006/main" showMasterSp="0">
   <p:cSld>
     <p:bg>
@@ -16790,6 +21531,222 @@
     <p:extLst>
       <p:ext uri="{BB962C8B-B14F-4D97-AF65-F5344CB8AC3E}">
         <p14:creationId xmlns:p14="http://schemas.microsoft.com/office/powerpoint/2010/main" val="684484876"/>
+      </p:ext>
+    </p:extLst>
+  </p:cSld>
+  <p:clrMapOvr>
+    <a:masterClrMapping/>
+  </p:clrMapOvr>
+</p:sld>
+</file>
+
+<file path=ppt/slides/slide9.xml><?xml version="1.0" encoding="utf-8"?>
+<p:sld xmlns:a="http://schemas.openxmlformats.org/drawingml/2006/main" xmlns:r="http://schemas.openxmlformats.org/officeDocument/2006/relationships" xmlns:p="http://schemas.openxmlformats.org/presentationml/2006/main">
+  <p:cSld>
+    <p:spTree>
+      <p:nvGrpSpPr>
+        <p:cNvPr id="1" name="Shape 502">
+          <a:extLst>
+            <a:ext uri="{FF2B5EF4-FFF2-40B4-BE49-F238E27FC236}">
+              <a16:creationId xmlns:a16="http://schemas.microsoft.com/office/drawing/2014/main" id="{3310D4BD-AE49-98DE-02EC-EEE2321E1E1F}"/>
+            </a:ext>
+          </a:extLst>
+        </p:cNvPr>
+        <p:cNvGrpSpPr/>
+        <p:nvPr/>
+      </p:nvGrpSpPr>
+      <p:grpSpPr>
+        <a:xfrm>
+          <a:off x="0" y="0"/>
+          <a:ext cx="0" cy="0"/>
+          <a:chOff x="0" y="0"/>
+          <a:chExt cx="0" cy="0"/>
+        </a:xfrm>
+      </p:grpSpPr>
+      <p:sp>
+        <p:nvSpPr>
+          <p:cNvPr id="503" name="Google Shape;503;g32cbaf05b3f_0_70">
+            <a:extLst>
+              <a:ext uri="{FF2B5EF4-FFF2-40B4-BE49-F238E27FC236}">
+                <a16:creationId xmlns:a16="http://schemas.microsoft.com/office/drawing/2014/main" id="{B402B65B-EA79-1808-CEAB-3448B41AD78E}"/>
+              </a:ext>
+            </a:extLst>
+          </p:cNvPr>
+          <p:cNvSpPr/>
+          <p:nvPr/>
+        </p:nvSpPr>
+        <p:spPr>
+          <a:xfrm>
+            <a:off x="458367" y="1125900"/>
+            <a:ext cx="3192400" cy="3911200"/>
+          </a:xfrm>
+          <a:prstGeom prst="rect">
+            <a:avLst/>
+          </a:prstGeom>
+          <a:solidFill>
+            <a:srgbClr val="FBF2C4"/>
+          </a:solidFill>
+          <a:ln w="9525" cap="flat" cmpd="sng">
+            <a:solidFill>
+              <a:schemeClr val="dk2"/>
+            </a:solidFill>
+            <a:prstDash val="solid"/>
+            <a:round/>
+            <a:headEnd type="none" w="sm" len="sm"/>
+            <a:tailEnd type="none" w="sm" len="sm"/>
+          </a:ln>
+        </p:spPr>
+        <p:txBody>
+          <a:bodyPr spcFirstLastPara="1" wrap="square" lIns="121900" tIns="121900" rIns="121900" bIns="121900" anchor="ctr" anchorCtr="0">
+            <a:noAutofit/>
+          </a:bodyPr>
+          <a:lstStyle/>
+          <a:p>
+            <a:pPr algn="ctr">
+              <a:buSzPts val="2500"/>
+            </a:pPr>
+            <a:r>
+              <a:rPr lang="en-US" sz="3333">
+                <a:latin typeface="Calibri"/>
+                <a:ea typeface="Calibri"/>
+                <a:cs typeface="Calibri"/>
+                <a:sym typeface="Calibri"/>
+              </a:rPr>
+              <a:t>What data do we have access to?</a:t>
+            </a:r>
+            <a:endParaRPr sz="3333">
+              <a:latin typeface="Calibri"/>
+              <a:ea typeface="Calibri"/>
+              <a:cs typeface="Calibri"/>
+              <a:sym typeface="Calibri"/>
+            </a:endParaRPr>
+          </a:p>
+        </p:txBody>
+      </p:sp>
+      <p:sp>
+        <p:nvSpPr>
+          <p:cNvPr id="504" name="Google Shape;504;g32cbaf05b3f_0_70">
+            <a:extLst>
+              <a:ext uri="{FF2B5EF4-FFF2-40B4-BE49-F238E27FC236}">
+                <a16:creationId xmlns:a16="http://schemas.microsoft.com/office/drawing/2014/main" id="{F9E1E0EA-0F4E-EBA2-9870-E8ADA1BD4915}"/>
+              </a:ext>
+            </a:extLst>
+          </p:cNvPr>
+          <p:cNvSpPr/>
+          <p:nvPr/>
+        </p:nvSpPr>
+        <p:spPr>
+          <a:xfrm>
+            <a:off x="8381367" y="1125900"/>
+            <a:ext cx="3192400" cy="3911200"/>
+          </a:xfrm>
+          <a:prstGeom prst="rect">
+            <a:avLst/>
+          </a:prstGeom>
+          <a:solidFill>
+            <a:srgbClr val="FCE5CD"/>
+          </a:solidFill>
+          <a:ln w="9525" cap="flat" cmpd="sng">
+            <a:solidFill>
+              <a:schemeClr val="dk2"/>
+            </a:solidFill>
+            <a:prstDash val="solid"/>
+            <a:round/>
+            <a:headEnd type="none" w="sm" len="sm"/>
+            <a:tailEnd type="none" w="sm" len="sm"/>
+          </a:ln>
+        </p:spPr>
+        <p:txBody>
+          <a:bodyPr spcFirstLastPara="1" wrap="square" lIns="121900" tIns="121900" rIns="121900" bIns="121900" anchor="ctr" anchorCtr="0">
+            <a:noAutofit/>
+          </a:bodyPr>
+          <a:lstStyle/>
+          <a:p>
+            <a:pPr algn="ctr">
+              <a:buSzPts val="2500"/>
+            </a:pPr>
+            <a:r>
+              <a:rPr lang="en-US" sz="3333">
+                <a:latin typeface="Calibri"/>
+                <a:ea typeface="Calibri"/>
+                <a:cs typeface="Calibri"/>
+                <a:sym typeface="Calibri"/>
+              </a:rPr>
+              <a:t>What data do we need?</a:t>
+            </a:r>
+            <a:endParaRPr sz="3333">
+              <a:latin typeface="Calibri"/>
+              <a:ea typeface="Calibri"/>
+              <a:cs typeface="Calibri"/>
+              <a:sym typeface="Calibri"/>
+            </a:endParaRPr>
+          </a:p>
+        </p:txBody>
+      </p:sp>
+      <p:sp>
+        <p:nvSpPr>
+          <p:cNvPr id="505" name="Google Shape;505;g32cbaf05b3f_0_70">
+            <a:extLst>
+              <a:ext uri="{FF2B5EF4-FFF2-40B4-BE49-F238E27FC236}">
+                <a16:creationId xmlns:a16="http://schemas.microsoft.com/office/drawing/2014/main" id="{DE55A1F6-FEB2-FC94-73F8-E6B608B3567B}"/>
+              </a:ext>
+            </a:extLst>
+          </p:cNvPr>
+          <p:cNvSpPr/>
+          <p:nvPr/>
+        </p:nvSpPr>
+        <p:spPr>
+          <a:xfrm>
+            <a:off x="4470667" y="1125900"/>
+            <a:ext cx="3192400" cy="3911200"/>
+          </a:xfrm>
+          <a:prstGeom prst="rect">
+            <a:avLst/>
+          </a:prstGeom>
+          <a:solidFill>
+            <a:srgbClr val="D0E0E3"/>
+          </a:solidFill>
+          <a:ln w="9525" cap="flat" cmpd="sng">
+            <a:solidFill>
+              <a:schemeClr val="dk2"/>
+            </a:solidFill>
+            <a:prstDash val="solid"/>
+            <a:round/>
+            <a:headEnd type="none" w="sm" len="sm"/>
+            <a:tailEnd type="none" w="sm" len="sm"/>
+          </a:ln>
+        </p:spPr>
+        <p:txBody>
+          <a:bodyPr spcFirstLastPara="1" wrap="square" lIns="121900" tIns="121900" rIns="121900" bIns="121900" anchor="ctr" anchorCtr="0">
+            <a:noAutofit/>
+          </a:bodyPr>
+          <a:lstStyle/>
+          <a:p>
+            <a:pPr algn="ctr">
+              <a:buSzPts val="2500"/>
+            </a:pPr>
+            <a:r>
+              <a:rPr lang="en-US" sz="3333">
+                <a:latin typeface="Calibri"/>
+                <a:ea typeface="Calibri"/>
+                <a:cs typeface="Calibri"/>
+                <a:sym typeface="Calibri"/>
+              </a:rPr>
+              <a:t>How do we identify and fill any gaps?</a:t>
+            </a:r>
+            <a:endParaRPr sz="3333">
+              <a:latin typeface="Calibri"/>
+              <a:ea typeface="Calibri"/>
+              <a:cs typeface="Calibri"/>
+              <a:sym typeface="Calibri"/>
+            </a:endParaRPr>
+          </a:p>
+        </p:txBody>
+      </p:sp>
+    </p:spTree>
+    <p:extLst>
+      <p:ext uri="{BB962C8B-B14F-4D97-AF65-F5344CB8AC3E}">
+        <p14:creationId xmlns:p14="http://schemas.microsoft.com/office/powerpoint/2010/main" val="2093788707"/>
       </p:ext>
     </p:extLst>
   </p:cSld>
